--- a/public/downloads/praesentation/M13.pptx
+++ b/public/downloads/praesentation/M13.pptx
@@ -22,6 +22,14 @@
     <p:sldId id="270" r:id="rId21"/>
     <p:sldId id="271" r:id="rId22"/>
     <p:sldId id="272" r:id="rId23"/>
+    <p:sldId id="273" r:id="rId24"/>
+    <p:sldId id="274" r:id="rId25"/>
+    <p:sldId id="275" r:id="rId26"/>
+    <p:sldId id="276" r:id="rId27"/>
+    <p:sldId id="277" r:id="rId28"/>
+    <p:sldId id="278" r:id="rId29"/>
+    <p:sldId id="279" r:id="rId30"/>
+    <p:sldId id="280" r:id="rId31"/>
   </p:sldIdLst>
   <p:sldSz cx="12188952" cy="6858000" type="screen4x3"/>
   <p:notesSz cx="6858000" cy="9144000"/>
@@ -3163,8 +3171,8 @@
         </p:nvSpPr>
         <p:spPr>
           <a:xfrm>
-            <a:off x="365760" y="365760"/>
-            <a:ext cx="11430000" cy="457200"/>
+            <a:off x="365760" y="320040"/>
+            <a:ext cx="11430000" cy="411480"/>
           </a:xfrm>
           <a:prstGeom prst="rect">
             <a:avLst/>
@@ -3179,13 +3187,13 @@
           <a:p>
             <a:pPr algn="l"/>
             <a:r>
-              <a:rPr sz="1100" b="0">
-                <a:solidFill>
-                  <a:srgbClr val="FFFFFF"/>
+              <a:rPr sz="1100" b="0" i="0">
+                <a:solidFill>
+                  <a:srgbClr val="BBCCEE"/>
                 </a:solidFill>
                 <a:latin typeface="Arial"/>
               </a:rPr>
-              <a:t>M13  ·  K-04 Vertrieb &amp; Ertragsoptimierung  ·  Berater  ·  90 Min.</a:t>
+              <a:t>M13  ·  K-04 Vertrieb &amp; Ertragsoptimierung  ·  Zielstufe: Berater  ·  90 Min.</a:t>
             </a:r>
           </a:p>
         </p:txBody>
@@ -3198,14 +3206,14 @@
         </p:nvSpPr>
         <p:spPr>
           <a:xfrm>
-            <a:off x="365760" y="868680"/>
-            <a:ext cx="7315200" cy="27432"/>
+            <a:off x="365760" y="804672"/>
+            <a:ext cx="8229600" cy="22860"/>
           </a:xfrm>
           <a:prstGeom prst="rect">
             <a:avLst/>
           </a:prstGeom>
           <a:solidFill>
-            <a:srgbClr val="FFFFFF"/>
+            <a:srgbClr val="335CC0"/>
           </a:solidFill>
           <a:ln>
             <a:noFill/>
@@ -3241,8 +3249,8 @@
         </p:nvSpPr>
         <p:spPr>
           <a:xfrm>
-            <a:off x="365760" y="1097280"/>
-            <a:ext cx="11430000" cy="2286000"/>
+            <a:off x="365760" y="1005840"/>
+            <a:ext cx="11430000" cy="2560320"/>
           </a:xfrm>
           <a:prstGeom prst="rect">
             <a:avLst/>
@@ -3257,7 +3265,7 @@
           <a:p>
             <a:pPr algn="l"/>
             <a:r>
-              <a:rPr sz="4000" b="1">
+              <a:rPr sz="4200" b="1" i="0">
                 <a:solidFill>
                   <a:srgbClr val="FFFFFF"/>
                 </a:solidFill>
@@ -3276,8 +3284,8 @@
         </p:nvSpPr>
         <p:spPr>
           <a:xfrm>
-            <a:off x="365760" y="3200400"/>
-            <a:ext cx="9144000" cy="914400"/>
+            <a:off x="365760" y="3383280"/>
+            <a:ext cx="10058400" cy="822960"/>
           </a:xfrm>
           <a:prstGeom prst="rect">
             <a:avLst/>
@@ -3292,7 +3300,7 @@
           <a:p>
             <a:pPr algn="l"/>
             <a:r>
-              <a:rPr sz="2000" b="0">
+              <a:rPr sz="2000" b="0" i="1">
                 <a:solidFill>
                   <a:srgbClr val="CCD6F0"/>
                 </a:solidFill>
@@ -3311,8 +3319,8 @@
         </p:nvSpPr>
         <p:spPr>
           <a:xfrm>
-            <a:off x="365760" y="6217920"/>
-            <a:ext cx="11430000" cy="457200"/>
+            <a:off x="365760" y="6309360"/>
+            <a:ext cx="11430000" cy="365760"/>
           </a:xfrm>
           <a:prstGeom prst="rect">
             <a:avLst/>
@@ -3327,9 +3335,9 @@
           <a:p>
             <a:pPr algn="l"/>
             <a:r>
-              <a:rPr sz="1000" b="0">
-                <a:solidFill>
-                  <a:srgbClr val="99AACC"/>
+              <a:rPr sz="900" b="0" i="0">
+                <a:solidFill>
+                  <a:srgbClr val="889ACC"/>
                 </a:solidFill>
                 <a:latin typeface="Arial"/>
               </a:rPr>
@@ -3352,7 +3360,7 @@
     <p:bg>
       <p:bgPr>
         <a:solidFill>
-          <a:srgbClr val="1A1A1A"/>
+          <a:srgbClr val="FFFFFF"/>
         </a:solidFill>
         <a:effectLst/>
       </p:bgPr>
@@ -3379,7 +3387,7 @@
             <a:avLst/>
           </a:prstGeom>
           <a:solidFill>
-            <a:srgbClr val="E05B00"/>
+            <a:srgbClr val="003DA5"/>
           </a:solidFill>
           <a:ln>
             <a:noFill/>
@@ -3415,8 +3423,8 @@
         </p:nvSpPr>
         <p:spPr>
           <a:xfrm>
-            <a:off x="365760" y="2286000"/>
-            <a:ext cx="11430000" cy="1828800"/>
+            <a:off x="228600" y="182880"/>
+            <a:ext cx="11430000" cy="320040"/>
           </a:xfrm>
           <a:prstGeom prst="rect">
             <a:avLst/>
@@ -3431,17 +3439,530 @@
           <a:p>
             <a:pPr algn="l"/>
             <a:r>
-              <a:rPr sz="3600" b="1">
-                <a:solidFill>
-                  <a:srgbClr val="FFFFFF"/>
+              <a:rPr sz="900" b="0" i="0">
+                <a:solidFill>
+                  <a:srgbClr val="556575"/>
                 </a:solidFill>
                 <a:latin typeface="Arial"/>
               </a:rPr>
-              <a:t>Schritt 3: Gespräch</a:t>
-            </a:r>
-          </a:p>
-        </p:txBody>
-      </p:sp>
+              <a:t>M13 · 4.2 Wallet-Share-Analyse: Wo liegt das Potenzial?</a:t>
+            </a:r>
+          </a:p>
+        </p:txBody>
+      </p:sp>
+      <p:sp>
+        <p:nvSpPr>
+          <p:cNvPr id="4" name="TextBox 3"/>
+          <p:cNvSpPr txBox="1"/>
+          <p:nvPr/>
+        </p:nvSpPr>
+        <p:spPr>
+          <a:xfrm>
+            <a:off x="365760" y="274320"/>
+            <a:ext cx="11430000" cy="777240"/>
+          </a:xfrm>
+          <a:prstGeom prst="rect">
+            <a:avLst/>
+          </a:prstGeom>
+          <a:noFill/>
+        </p:spPr>
+        <p:txBody>
+          <a:bodyPr wrap="square">
+            <a:spAutoFit/>
+          </a:bodyPr>
+          <a:lstStyle/>
+          <a:p>
+            <a:pPr algn="l"/>
+            <a:r>
+              <a:rPr sz="2200" b="1" i="0">
+                <a:solidFill>
+                  <a:srgbClr val="003DA5"/>
+                </a:solidFill>
+                <a:latin typeface="Arial"/>
+              </a:rPr>
+              <a:t>Potenzialanalyse in agree</a:t>
+            </a:r>
+          </a:p>
+        </p:txBody>
+      </p:sp>
+      <p:sp>
+        <p:nvSpPr>
+          <p:cNvPr id="5" name="Rectangle 4"/>
+          <p:cNvSpPr/>
+          <p:nvPr/>
+        </p:nvSpPr>
+        <p:spPr>
+          <a:xfrm>
+            <a:off x="365760" y="1005840"/>
+            <a:ext cx="11430000" cy="27432"/>
+          </a:xfrm>
+          <a:prstGeom prst="rect">
+            <a:avLst/>
+          </a:prstGeom>
+          <a:solidFill>
+            <a:srgbClr val="D1D5DB"/>
+          </a:solidFill>
+          <a:ln>
+            <a:noFill/>
+          </a:ln>
+        </p:spPr>
+        <p:style>
+          <a:lnRef idx="1">
+            <a:schemeClr val="accent1"/>
+          </a:lnRef>
+          <a:fillRef idx="3">
+            <a:schemeClr val="accent1"/>
+          </a:fillRef>
+          <a:effectRef idx="2">
+            <a:schemeClr val="accent1"/>
+          </a:effectRef>
+          <a:fontRef idx="minor">
+            <a:schemeClr val="lt1"/>
+          </a:fontRef>
+        </p:style>
+        <p:txBody>
+          <a:bodyPr rtlCol="0" anchor="ctr"/>
+          <a:lstStyle/>
+          <a:p>
+            <a:pPr algn="ctr"/>
+          </a:p>
+        </p:txBody>
+      </p:sp>
+      <p:graphicFrame>
+        <p:nvGraphicFramePr>
+          <p:cNvPr id="6" name="Table 5"/>
+          <p:cNvGraphicFramePr>
+            <a:graphicFrameLocks noGrp="1"/>
+          </p:cNvGraphicFramePr>
+          <p:nvPr/>
+        </p:nvGraphicFramePr>
+        <p:xfrm>
+          <a:off x="365760" y="1143000"/>
+          <a:ext cx="11430000" cy="2852928"/>
+        </p:xfrm>
+        <a:graphic>
+          <a:graphicData uri="http://schemas.openxmlformats.org/drawingml/2006/table">
+            <a:tbl>
+              <a:tblPr firstRow="1" bandRow="1">
+                <a:tableStyleId>{5C22544A-7EE6-4342-B048-85BDC9FD1C3A}</a:tableStyleId>
+              </a:tblPr>
+              <a:tblGrid>
+                <a:gridCol w="3810000"/>
+                <a:gridCol w="3810000"/>
+                <a:gridCol w="3810000"/>
+              </a:tblGrid>
+              <a:tr h="475488">
+                <a:tc>
+                  <a:txBody>
+                    <a:bodyPr wrap="square"/>
+                    <a:lstStyle/>
+                    <a:p>
+                      <a:r>
+                        <a:rPr sz="1100" b="1">
+                          <a:solidFill>
+                            <a:srgbClr val="FFFFFF"/>
+                          </a:solidFill>
+                          <a:latin typeface="Arial"/>
+                        </a:rPr>
+                        <a:t>Dimension</a:t>
+                      </a:r>
+                    </a:p>
+                  </a:txBody>
+                  <a:tcPr>
+                    <a:solidFill>
+                      <a:srgbClr val="003DA5"/>
+                    </a:solidFill>
+                  </a:tcPr>
+                </a:tc>
+                <a:tc>
+                  <a:txBody>
+                    <a:bodyPr wrap="square"/>
+                    <a:lstStyle/>
+                    <a:p>
+                      <a:r>
+                        <a:rPr sz="1100" b="1">
+                          <a:solidFill>
+                            <a:srgbClr val="FFFFFF"/>
+                          </a:solidFill>
+                          <a:latin typeface="Arial"/>
+                        </a:rPr>
+                        <a:t>Frage</a:t>
+                      </a:r>
+                    </a:p>
+                  </a:txBody>
+                  <a:tcPr>
+                    <a:solidFill>
+                      <a:srgbClr val="003DA5"/>
+                    </a:solidFill>
+                  </a:tcPr>
+                </a:tc>
+                <a:tc>
+                  <a:txBody>
+                    <a:bodyPr wrap="square"/>
+                    <a:lstStyle/>
+                    <a:p>
+                      <a:r>
+                        <a:rPr sz="1100" b="1">
+                          <a:solidFill>
+                            <a:srgbClr val="FFFFFF"/>
+                          </a:solidFill>
+                          <a:latin typeface="Arial"/>
+                        </a:rPr>
+                        <a:t>Datenquelle in agree</a:t>
+                      </a:r>
+                    </a:p>
+                  </a:txBody>
+                  <a:tcPr>
+                    <a:solidFill>
+                      <a:srgbClr val="003DA5"/>
+                    </a:solidFill>
+                  </a:tcPr>
+                </a:tc>
+              </a:tr>
+              <a:tr h="475488">
+                <a:tc>
+                  <a:txBody>
+                    <a:bodyPr wrap="square"/>
+                    <a:lstStyle/>
+                    <a:p>
+                      <a:r>
+                        <a:rPr sz="1100" b="0">
+                          <a:solidFill>
+                            <a:srgbClr val="1A1A1A"/>
+                          </a:solidFill>
+                          <a:latin typeface="Arial"/>
+                        </a:rPr>
+                        <a:t>Finanzierungsvolumen</a:t>
+                      </a:r>
+                    </a:p>
+                  </a:txBody>
+                  <a:tcPr>
+                    <a:solidFill>
+                      <a:srgbClr val="FFFFFF"/>
+                    </a:solidFill>
+                  </a:tcPr>
+                </a:tc>
+                <a:tc>
+                  <a:txBody>
+                    <a:bodyPr wrap="square"/>
+                    <a:lstStyle/>
+                    <a:p>
+                      <a:r>
+                        <a:rPr sz="1100" b="0">
+                          <a:solidFill>
+                            <a:srgbClr val="1A1A1A"/>
+                          </a:solidFill>
+                          <a:latin typeface="Arial"/>
+                        </a:rPr>
+                        <a:t>Welche Verbindlichkeiten hat der Kunde bei uns vs. geschätztes Gesamtvolumen?</a:t>
+                      </a:r>
+                    </a:p>
+                  </a:txBody>
+                  <a:tcPr>
+                    <a:solidFill>
+                      <a:srgbClr val="FFFFFF"/>
+                    </a:solidFill>
+                  </a:tcPr>
+                </a:tc>
+                <a:tc>
+                  <a:txBody>
+                    <a:bodyPr wrap="square"/>
+                    <a:lstStyle/>
+                    <a:p>
+                      <a:r>
+                        <a:rPr sz="1100" b="0">
+                          <a:solidFill>
+                            <a:srgbClr val="1A1A1A"/>
+                          </a:solidFill>
+                          <a:latin typeface="Arial"/>
+                        </a:rPr>
+                        <a:t>Kontostamm, Kreditakte</a:t>
+                      </a:r>
+                    </a:p>
+                  </a:txBody>
+                  <a:tcPr>
+                    <a:solidFill>
+                      <a:srgbClr val="FFFFFF"/>
+                    </a:solidFill>
+                  </a:tcPr>
+                </a:tc>
+              </a:tr>
+              <a:tr h="475488">
+                <a:tc>
+                  <a:txBody>
+                    <a:bodyPr wrap="square"/>
+                    <a:lstStyle/>
+                    <a:p>
+                      <a:r>
+                        <a:rPr sz="1100" b="0">
+                          <a:solidFill>
+                            <a:srgbClr val="1A1A1A"/>
+                          </a:solidFill>
+                          <a:latin typeface="Arial"/>
+                        </a:rPr>
+                        <a:t>Absicherung</a:t>
+                      </a:r>
+                    </a:p>
+                  </a:txBody>
+                  <a:tcPr>
+                    <a:solidFill>
+                      <a:srgbClr val="F4F6FA"/>
+                    </a:solidFill>
+                  </a:tcPr>
+                </a:tc>
+                <a:tc>
+                  <a:txBody>
+                    <a:bodyPr wrap="square"/>
+                    <a:lstStyle/>
+                    <a:p>
+                      <a:r>
+                        <a:rPr sz="1100" b="0">
+                          <a:solidFill>
+                            <a:srgbClr val="1A1A1A"/>
+                          </a:solidFill>
+                          <a:latin typeface="Arial"/>
+                        </a:rPr>
+                        <a:t>Welche R+V-Policen bestehen? Existieren Schutzlücken (Betriebsunterbrechung, D&amp;O)?</a:t>
+                      </a:r>
+                    </a:p>
+                  </a:txBody>
+                  <a:tcPr>
+                    <a:solidFill>
+                      <a:srgbClr val="F4F6FA"/>
+                    </a:solidFill>
+                  </a:tcPr>
+                </a:tc>
+                <a:tc>
+                  <a:txBody>
+                    <a:bodyPr wrap="square"/>
+                    <a:lstStyle/>
+                    <a:p>
+                      <a:r>
+                        <a:rPr sz="1100" b="0">
+                          <a:solidFill>
+                            <a:srgbClr val="1A1A1A"/>
+                          </a:solidFill>
+                          <a:latin typeface="Arial"/>
+                        </a:rPr>
+                        <a:t>Verbundpartner-Cockpit ⚠️ zeigt nur von uns vermittelte Verträge – Fremdbestände (z.B. Allianz, Zurich) müssen im Kundengespräch aktiv erfragt werden</a:t>
+                      </a:r>
+                    </a:p>
+                  </a:txBody>
+                  <a:tcPr>
+                    <a:solidFill>
+                      <a:srgbClr val="F4F6FA"/>
+                    </a:solidFill>
+                  </a:tcPr>
+                </a:tc>
+              </a:tr>
+              <a:tr h="475488">
+                <a:tc>
+                  <a:txBody>
+                    <a:bodyPr wrap="square"/>
+                    <a:lstStyle/>
+                    <a:p>
+                      <a:r>
+                        <a:rPr sz="1100" b="0">
+                          <a:solidFill>
+                            <a:srgbClr val="1A1A1A"/>
+                          </a:solidFill>
+                          <a:latin typeface="Arial"/>
+                        </a:rPr>
+                        <a:t>Zahlungsverkehr</a:t>
+                      </a:r>
+                    </a:p>
+                  </a:txBody>
+                  <a:tcPr>
+                    <a:solidFill>
+                      <a:srgbClr val="FFFFFF"/>
+                    </a:solidFill>
+                  </a:tcPr>
+                </a:tc>
+                <a:tc>
+                  <a:txBody>
+                    <a:bodyPr wrap="square"/>
+                    <a:lstStyle/>
+                    <a:p>
+                      <a:r>
+                        <a:rPr sz="1100" b="0">
+                          <a:solidFill>
+                            <a:srgbClr val="1A1A1A"/>
+                          </a:solidFill>
+                          <a:latin typeface="Arial"/>
+                        </a:rPr>
+                        <a:t>Abwickelt der Kunde alle Zahlungen über uns? Auslands-ZV?</a:t>
+                      </a:r>
+                    </a:p>
+                  </a:txBody>
+                  <a:tcPr>
+                    <a:solidFill>
+                      <a:srgbClr val="FFFFFF"/>
+                    </a:solidFill>
+                  </a:tcPr>
+                </a:tc>
+                <a:tc>
+                  <a:txBody>
+                    <a:bodyPr wrap="square"/>
+                    <a:lstStyle/>
+                    <a:p>
+                      <a:r>
+                        <a:rPr sz="1100" b="0">
+                          <a:solidFill>
+                            <a:srgbClr val="1A1A1A"/>
+                          </a:solidFill>
+                          <a:latin typeface="Arial"/>
+                        </a:rPr>
+                        <a:t>Kontoanalyse</a:t>
+                      </a:r>
+                    </a:p>
+                  </a:txBody>
+                  <a:tcPr>
+                    <a:solidFill>
+                      <a:srgbClr val="FFFFFF"/>
+                    </a:solidFill>
+                  </a:tcPr>
+                </a:tc>
+              </a:tr>
+              <a:tr h="475488">
+                <a:tc>
+                  <a:txBody>
+                    <a:bodyPr wrap="square"/>
+                    <a:lstStyle/>
+                    <a:p>
+                      <a:r>
+                        <a:rPr sz="1100" b="0">
+                          <a:solidFill>
+                            <a:srgbClr val="1A1A1A"/>
+                          </a:solidFill>
+                          <a:latin typeface="Arial"/>
+                        </a:rPr>
+                        <a:t>Kapitalanlage</a:t>
+                      </a:r>
+                    </a:p>
+                  </a:txBody>
+                  <a:tcPr>
+                    <a:solidFill>
+                      <a:srgbClr val="F4F6FA"/>
+                    </a:solidFill>
+                  </a:tcPr>
+                </a:tc>
+                <a:tc>
+                  <a:txBody>
+                    <a:bodyPr wrap="square"/>
+                    <a:lstStyle/>
+                    <a:p>
+                      <a:r>
+                        <a:rPr sz="1100" b="0">
+                          <a:solidFill>
+                            <a:srgbClr val="1A1A1A"/>
+                          </a:solidFill>
+                          <a:latin typeface="Arial"/>
+                        </a:rPr>
+                        <a:t>Gibt es Rücklagen? Wo liegen diese (eigene Bank / Wettbewerber)?</a:t>
+                      </a:r>
+                    </a:p>
+                  </a:txBody>
+                  <a:tcPr>
+                    <a:solidFill>
+                      <a:srgbClr val="F4F6FA"/>
+                    </a:solidFill>
+                  </a:tcPr>
+                </a:tc>
+                <a:tc>
+                  <a:txBody>
+                    <a:bodyPr wrap="square"/>
+                    <a:lstStyle/>
+                    <a:p>
+                      <a:r>
+                        <a:rPr sz="1100" b="0">
+                          <a:solidFill>
+                            <a:srgbClr val="1A1A1A"/>
+                          </a:solidFill>
+                          <a:latin typeface="Arial"/>
+                        </a:rPr>
+                        <a:t>Beratungsprotokoll</a:t>
+                      </a:r>
+                    </a:p>
+                  </a:txBody>
+                  <a:tcPr>
+                    <a:solidFill>
+                      <a:srgbClr val="F4F6FA"/>
+                    </a:solidFill>
+                  </a:tcPr>
+                </a:tc>
+              </a:tr>
+              <a:tr h="475488">
+                <a:tc>
+                  <a:txBody>
+                    <a:bodyPr wrap="square"/>
+                    <a:lstStyle/>
+                    <a:p>
+                      <a:r>
+                        <a:rPr sz="1100" b="0">
+                          <a:solidFill>
+                            <a:srgbClr val="1A1A1A"/>
+                          </a:solidFill>
+                          <a:latin typeface="Arial"/>
+                        </a:rPr>
+                        <a:t>Privat / Gesellschafter</a:t>
+                      </a:r>
+                    </a:p>
+                  </a:txBody>
+                  <a:tcPr>
+                    <a:solidFill>
+                      <a:srgbClr val="FFFFFF"/>
+                    </a:solidFill>
+                  </a:tcPr>
+                </a:tc>
+                <a:tc>
+                  <a:txBody>
+                    <a:bodyPr wrap="square"/>
+                    <a:lstStyle/>
+                    <a:p>
+                      <a:r>
+                        <a:rPr sz="1100" b="0">
+                          <a:solidFill>
+                            <a:srgbClr val="1A1A1A"/>
+                          </a:solidFill>
+                          <a:latin typeface="Arial"/>
+                        </a:rPr>
+                        <a:t>Führt der Unternehmer seine Privatkonten bei uns? Bausparen?</a:t>
+                      </a:r>
+                    </a:p>
+                  </a:txBody>
+                  <a:tcPr>
+                    <a:solidFill>
+                      <a:srgbClr val="FFFFFF"/>
+                    </a:solidFill>
+                  </a:tcPr>
+                </a:tc>
+                <a:tc>
+                  <a:txBody>
+                    <a:bodyPr wrap="square"/>
+                    <a:lstStyle/>
+                    <a:p>
+                      <a:r>
+                        <a:rPr sz="1100" b="0">
+                          <a:solidFill>
+                            <a:srgbClr val="1A1A1A"/>
+                          </a:solidFill>
+                          <a:latin typeface="Arial"/>
+                        </a:rPr>
+                        <a:t>Verknüpfte Privatkundendaten</a:t>
+                      </a:r>
+                    </a:p>
+                  </a:txBody>
+                  <a:tcPr>
+                    <a:solidFill>
+                      <a:srgbClr val="FFFFFF"/>
+                    </a:solidFill>
+                  </a:tcPr>
+                </a:tc>
+              </a:tr>
+            </a:tbl>
+          </a:graphicData>
+        </a:graphic>
+      </p:graphicFrame>
     </p:spTree>
   </p:cSld>
   <p:clrMapOvr>
@@ -3519,8 +4040,8 @@
         </p:nvSpPr>
         <p:spPr>
           <a:xfrm>
-            <a:off x="365760" y="2286000"/>
-            <a:ext cx="11430000" cy="1828800"/>
+            <a:off x="365760" y="2011680"/>
+            <a:ext cx="11430000" cy="2011680"/>
           </a:xfrm>
           <a:prstGeom prst="rect">
             <a:avLst/>
@@ -3535,13 +4056,13 @@
           <a:p>
             <a:pPr algn="l"/>
             <a:r>
-              <a:rPr sz="3600" b="1">
+              <a:rPr sz="3600" b="1" i="0">
                 <a:solidFill>
                   <a:srgbClr val="FFFFFF"/>
                 </a:solidFill>
                 <a:latin typeface="Arial"/>
               </a:rPr>
-              <a:t>Schritt 4: Dokumentation</a:t>
+              <a:t>Ereignisbasierte Cross-Selling-Anlässe</a:t>
             </a:r>
           </a:p>
         </p:txBody>
@@ -3560,7 +4081,7 @@
     <p:bg>
       <p:bgPr>
         <a:solidFill>
-          <a:srgbClr val="1A1A1A"/>
+          <a:srgbClr val="FFFFFF"/>
         </a:solidFill>
         <a:effectLst/>
       </p:bgPr>
@@ -3587,7 +4108,7 @@
             <a:avLst/>
           </a:prstGeom>
           <a:solidFill>
-            <a:srgbClr val="E05B00"/>
+            <a:srgbClr val="003DA5"/>
           </a:solidFill>
           <a:ln>
             <a:noFill/>
@@ -3623,8 +4144,8 @@
         </p:nvSpPr>
         <p:spPr>
           <a:xfrm>
-            <a:off x="365760" y="2286000"/>
-            <a:ext cx="11430000" cy="1828800"/>
+            <a:off x="228600" y="182880"/>
+            <a:ext cx="11430000" cy="320040"/>
           </a:xfrm>
           <a:prstGeom prst="rect">
             <a:avLst/>
@@ -3639,17 +4160,535 @@
           <a:p>
             <a:pPr algn="l"/>
             <a:r>
-              <a:rPr sz="3600" b="1">
-                <a:solidFill>
-                  <a:srgbClr val="FFFFFF"/>
+              <a:rPr sz="900" b="0" i="0">
+                <a:solidFill>
+                  <a:srgbClr val="556575"/>
                 </a:solidFill>
                 <a:latin typeface="Arial"/>
               </a:rPr>
-              <a:t>Arbeitsblatt A: Wallet-Share-Analyse</a:t>
-            </a:r>
-          </a:p>
-        </p:txBody>
-      </p:sp>
+              <a:t>M13 · 4.2 Wallet-Share-Analyse: Wo liegt das Potenzial?</a:t>
+            </a:r>
+          </a:p>
+        </p:txBody>
+      </p:sp>
+      <p:sp>
+        <p:nvSpPr>
+          <p:cNvPr id="4" name="TextBox 3"/>
+          <p:cNvSpPr txBox="1"/>
+          <p:nvPr/>
+        </p:nvSpPr>
+        <p:spPr>
+          <a:xfrm>
+            <a:off x="365760" y="274320"/>
+            <a:ext cx="11430000" cy="777240"/>
+          </a:xfrm>
+          <a:prstGeom prst="rect">
+            <a:avLst/>
+          </a:prstGeom>
+          <a:noFill/>
+        </p:spPr>
+        <p:txBody>
+          <a:bodyPr wrap="square">
+            <a:spAutoFit/>
+          </a:bodyPr>
+          <a:lstStyle/>
+          <a:p>
+            <a:pPr algn="l"/>
+            <a:r>
+              <a:rPr sz="2200" b="1" i="0">
+                <a:solidFill>
+                  <a:srgbClr val="003DA5"/>
+                </a:solidFill>
+                <a:latin typeface="Arial"/>
+              </a:rPr>
+              <a:t>Ereignisbasierte Cross-Selling-Anlässe</a:t>
+            </a:r>
+          </a:p>
+        </p:txBody>
+      </p:sp>
+      <p:sp>
+        <p:nvSpPr>
+          <p:cNvPr id="5" name="Rectangle 4"/>
+          <p:cNvSpPr/>
+          <p:nvPr/>
+        </p:nvSpPr>
+        <p:spPr>
+          <a:xfrm>
+            <a:off x="365760" y="1005840"/>
+            <a:ext cx="11430000" cy="27432"/>
+          </a:xfrm>
+          <a:prstGeom prst="rect">
+            <a:avLst/>
+          </a:prstGeom>
+          <a:solidFill>
+            <a:srgbClr val="D1D5DB"/>
+          </a:solidFill>
+          <a:ln>
+            <a:noFill/>
+          </a:ln>
+        </p:spPr>
+        <p:style>
+          <a:lnRef idx="1">
+            <a:schemeClr val="accent1"/>
+          </a:lnRef>
+          <a:fillRef idx="3">
+            <a:schemeClr val="accent1"/>
+          </a:fillRef>
+          <a:effectRef idx="2">
+            <a:schemeClr val="accent1"/>
+          </a:effectRef>
+          <a:fontRef idx="minor">
+            <a:schemeClr val="lt1"/>
+          </a:fontRef>
+        </p:style>
+        <p:txBody>
+          <a:bodyPr rtlCol="0" anchor="ctr"/>
+          <a:lstStyle/>
+          <a:p>
+            <a:pPr algn="ctr"/>
+          </a:p>
+        </p:txBody>
+      </p:sp>
+      <p:graphicFrame>
+        <p:nvGraphicFramePr>
+          <p:cNvPr id="6" name="Table 5"/>
+          <p:cNvGraphicFramePr>
+            <a:graphicFrameLocks noGrp="1"/>
+          </p:cNvGraphicFramePr>
+          <p:nvPr/>
+        </p:nvGraphicFramePr>
+        <p:xfrm>
+          <a:off x="365760" y="1143000"/>
+          <a:ext cx="11430000" cy="4279392"/>
+        </p:xfrm>
+        <a:graphic>
+          <a:graphicData uri="http://schemas.openxmlformats.org/drawingml/2006/table">
+            <a:tbl>
+              <a:tblPr firstRow="1" bandRow="1">
+                <a:tableStyleId>{5C22544A-7EE6-4342-B048-85BDC9FD1C3A}</a:tableStyleId>
+              </a:tblPr>
+              <a:tblGrid>
+                <a:gridCol w="5715000"/>
+                <a:gridCol w="5715000"/>
+              </a:tblGrid>
+              <a:tr h="475488">
+                <a:tc>
+                  <a:txBody>
+                    <a:bodyPr wrap="square"/>
+                    <a:lstStyle/>
+                    <a:p>
+                      <a:r>
+                        <a:rPr sz="1100" b="1">
+                          <a:solidFill>
+                            <a:srgbClr val="FFFFFF"/>
+                          </a:solidFill>
+                          <a:latin typeface="Arial"/>
+                        </a:rPr>
+                        <a:t>Ereignis</a:t>
+                      </a:r>
+                    </a:p>
+                  </a:txBody>
+                  <a:tcPr>
+                    <a:solidFill>
+                      <a:srgbClr val="003DA5"/>
+                    </a:solidFill>
+                  </a:tcPr>
+                </a:tc>
+                <a:tc>
+                  <a:txBody>
+                    <a:bodyPr wrap="square"/>
+                    <a:lstStyle/>
+                    <a:p>
+                      <a:r>
+                        <a:rPr sz="1100" b="1">
+                          <a:solidFill>
+                            <a:srgbClr val="FFFFFF"/>
+                          </a:solidFill>
+                          <a:latin typeface="Arial"/>
+                        </a:rPr>
+                        <a:t>Typisches Cross-Selling-Potenzial</a:t>
+                      </a:r>
+                    </a:p>
+                  </a:txBody>
+                  <a:tcPr>
+                    <a:solidFill>
+                      <a:srgbClr val="003DA5"/>
+                    </a:solidFill>
+                  </a:tcPr>
+                </a:tc>
+              </a:tr>
+              <a:tr h="475488">
+                <a:tc>
+                  <a:txBody>
+                    <a:bodyPr wrap="square"/>
+                    <a:lstStyle/>
+                    <a:p>
+                      <a:r>
+                        <a:rPr sz="1100" b="0">
+                          <a:solidFill>
+                            <a:srgbClr val="1A1A1A"/>
+                          </a:solidFill>
+                          <a:latin typeface="Arial"/>
+                        </a:rPr>
+                        <a:t>Kreditverlängerung / -aufstockung</a:t>
+                      </a:r>
+                    </a:p>
+                  </a:txBody>
+                  <a:tcPr>
+                    <a:solidFill>
+                      <a:srgbClr val="FFFFFF"/>
+                    </a:solidFill>
+                  </a:tcPr>
+                </a:tc>
+                <a:tc>
+                  <a:txBody>
+                    <a:bodyPr wrap="square"/>
+                    <a:lstStyle/>
+                    <a:p>
+                      <a:r>
+                        <a:rPr sz="1100" b="0">
+                          <a:solidFill>
+                            <a:srgbClr val="1A1A1A"/>
+                          </a:solidFill>
+                          <a:latin typeface="Arial"/>
+                        </a:rPr>
+                        <a:t>Absicherung Schlüsselperson, Zinssicherung (DZ BANK Swap)</a:t>
+                      </a:r>
+                    </a:p>
+                  </a:txBody>
+                  <a:tcPr>
+                    <a:solidFill>
+                      <a:srgbClr val="FFFFFF"/>
+                    </a:solidFill>
+                  </a:tcPr>
+                </a:tc>
+              </a:tr>
+              <a:tr h="475488">
+                <a:tc>
+                  <a:txBody>
+                    <a:bodyPr wrap="square"/>
+                    <a:lstStyle/>
+                    <a:p>
+                      <a:r>
+                        <a:rPr sz="1100" b="0">
+                          <a:solidFill>
+                            <a:srgbClr val="1A1A1A"/>
+                          </a:solidFill>
+                          <a:latin typeface="Arial"/>
+                        </a:rPr>
+                        <a:t>Investitionsvorhaben (neue Maschine, neues Gebäude)</a:t>
+                      </a:r>
+                    </a:p>
+                  </a:txBody>
+                  <a:tcPr>
+                    <a:solidFill>
+                      <a:srgbClr val="F4F6FA"/>
+                    </a:solidFill>
+                  </a:tcPr>
+                </a:tc>
+                <a:tc>
+                  <a:txBody>
+                    <a:bodyPr wrap="square"/>
+                    <a:lstStyle/>
+                    <a:p>
+                      <a:r>
+                        <a:rPr sz="1100" b="0">
+                          <a:solidFill>
+                            <a:srgbClr val="1A1A1A"/>
+                          </a:solidFill>
+                          <a:latin typeface="Arial"/>
+                        </a:rPr>
+                        <a:t>Fördermittel (KfW/L-Bank), MünchenerHyp bei Gewerbeimmobilie</a:t>
+                      </a:r>
+                    </a:p>
+                  </a:txBody>
+                  <a:tcPr>
+                    <a:solidFill>
+                      <a:srgbClr val="F4F6FA"/>
+                    </a:solidFill>
+                  </a:tcPr>
+                </a:tc>
+              </a:tr>
+              <a:tr h="475488">
+                <a:tc>
+                  <a:txBody>
+                    <a:bodyPr wrap="square"/>
+                    <a:lstStyle/>
+                    <a:p>
+                      <a:r>
+                        <a:rPr sz="1100" b="0">
+                          <a:solidFill>
+                            <a:srgbClr val="1A1A1A"/>
+                          </a:solidFill>
+                          <a:latin typeface="Arial"/>
+                        </a:rPr>
+                        <a:t>Gesellschafterwechsel / Nachfolge</a:t>
+                      </a:r>
+                    </a:p>
+                  </a:txBody>
+                  <a:tcPr>
+                    <a:solidFill>
+                      <a:srgbClr val="FFFFFF"/>
+                    </a:solidFill>
+                  </a:tcPr>
+                </a:tc>
+                <a:tc>
+                  <a:txBody>
+                    <a:bodyPr wrap="square"/>
+                    <a:lstStyle/>
+                    <a:p>
+                      <a:r>
+                        <a:rPr sz="1100" b="0">
+                          <a:solidFill>
+                            <a:srgbClr val="1A1A1A"/>
+                          </a:solidFill>
+                          <a:latin typeface="Arial"/>
+                        </a:rPr>
+                        <a:t>Gesellschaftervertrag, D&amp;O, bAV, steuerliche Optimierung</a:t>
+                      </a:r>
+                    </a:p>
+                  </a:txBody>
+                  <a:tcPr>
+                    <a:solidFill>
+                      <a:srgbClr val="FFFFFF"/>
+                    </a:solidFill>
+                  </a:tcPr>
+                </a:tc>
+              </a:tr>
+              <a:tr h="475488">
+                <a:tc>
+                  <a:txBody>
+                    <a:bodyPr wrap="square"/>
+                    <a:lstStyle/>
+                    <a:p>
+                      <a:r>
+                        <a:rPr sz="1100" b="0">
+                          <a:solidFill>
+                            <a:srgbClr val="1A1A1A"/>
+                          </a:solidFill>
+                          <a:latin typeface="Arial"/>
+                        </a:rPr>
+                        <a:t>Unternehmensnachfolge (MBO)</a:t>
+                      </a:r>
+                    </a:p>
+                  </a:txBody>
+                  <a:tcPr>
+                    <a:solidFill>
+                      <a:srgbClr val="F4F6FA"/>
+                    </a:solidFill>
+                  </a:tcPr>
+                </a:tc>
+                <a:tc>
+                  <a:txBody>
+                    <a:bodyPr wrap="square"/>
+                    <a:lstStyle/>
+                    <a:p>
+                      <a:r>
+                        <a:rPr sz="1100" b="0">
+                          <a:solidFill>
+                            <a:srgbClr val="1A1A1A"/>
+                          </a:solidFill>
+                          <a:latin typeface="Arial"/>
+                        </a:rPr>
+                        <a:t>DZ BANK Corporate Finance, Kaufpreisfinanzierung, Risikolebensversicherung</a:t>
+                      </a:r>
+                    </a:p>
+                  </a:txBody>
+                  <a:tcPr>
+                    <a:solidFill>
+                      <a:srgbClr val="F4F6FA"/>
+                    </a:solidFill>
+                  </a:tcPr>
+                </a:tc>
+              </a:tr>
+              <a:tr h="475488">
+                <a:tc>
+                  <a:txBody>
+                    <a:bodyPr wrap="square"/>
+                    <a:lstStyle/>
+                    <a:p>
+                      <a:r>
+                        <a:rPr sz="1100" b="0">
+                          <a:solidFill>
+                            <a:srgbClr val="1A1A1A"/>
+                          </a:solidFill>
+                          <a:latin typeface="Arial"/>
+                        </a:rPr>
+                        <a:t>Kontokorrentüberziehung</a:t>
+                      </a:r>
+                    </a:p>
+                  </a:txBody>
+                  <a:tcPr>
+                    <a:solidFill>
+                      <a:srgbClr val="FFFFFF"/>
+                    </a:solidFill>
+                  </a:tcPr>
+                </a:tc>
+                <a:tc>
+                  <a:txBody>
+                    <a:bodyPr wrap="square"/>
+                    <a:lstStyle/>
+                    <a:p>
+                      <a:r>
+                        <a:rPr sz="1100" b="0">
+                          <a:solidFill>
+                            <a:srgbClr val="1A1A1A"/>
+                          </a:solidFill>
+                          <a:latin typeface="Arial"/>
+                        </a:rPr>
+                        <a:t>Liquiditätspuffer prüfen, ggf. Betriebsmittellinie erhöhen; Absicherungscheck (Betriebsunterbrechung)</a:t>
+                      </a:r>
+                    </a:p>
+                  </a:txBody>
+                  <a:tcPr>
+                    <a:solidFill>
+                      <a:srgbClr val="FFFFFF"/>
+                    </a:solidFill>
+                  </a:tcPr>
+                </a:tc>
+              </a:tr>
+              <a:tr h="475488">
+                <a:tc>
+                  <a:txBody>
+                    <a:bodyPr wrap="square"/>
+                    <a:lstStyle/>
+                    <a:p>
+                      <a:r>
+                        <a:rPr sz="1100" b="0">
+                          <a:solidFill>
+                            <a:srgbClr val="1A1A1A"/>
+                          </a:solidFill>
+                          <a:latin typeface="Arial"/>
+                        </a:rPr>
+                        <a:t>Renteneintritt Gesellschafter</a:t>
+                      </a:r>
+                    </a:p>
+                  </a:txBody>
+                  <a:tcPr>
+                    <a:solidFill>
+                      <a:srgbClr val="F4F6FA"/>
+                    </a:solidFill>
+                  </a:tcPr>
+                </a:tc>
+                <a:tc>
+                  <a:txBody>
+                    <a:bodyPr wrap="square"/>
+                    <a:lstStyle/>
+                    <a:p>
+                      <a:r>
+                        <a:rPr sz="1100" b="0">
+                          <a:solidFill>
+                            <a:srgbClr val="1A1A1A"/>
+                          </a:solidFill>
+                          <a:latin typeface="Arial"/>
+                        </a:rPr>
+                        <a:t>Privatvorsorge Union Investment, Pensionsauszahlungsplanung R+V</a:t>
+                      </a:r>
+                    </a:p>
+                  </a:txBody>
+                  <a:tcPr>
+                    <a:solidFill>
+                      <a:srgbClr val="F4F6FA"/>
+                    </a:solidFill>
+                  </a:tcPr>
+                </a:tc>
+              </a:tr>
+              <a:tr h="475488">
+                <a:tc>
+                  <a:txBody>
+                    <a:bodyPr wrap="square"/>
+                    <a:lstStyle/>
+                    <a:p>
+                      <a:r>
+                        <a:rPr sz="1100" b="0">
+                          <a:solidFill>
+                            <a:srgbClr val="1A1A1A"/>
+                          </a:solidFill>
+                          <a:latin typeface="Arial"/>
+                        </a:rPr>
+                        <a:t>Firmenjubiläum / Jahresabschluss &gt; Plan</a:t>
+                      </a:r>
+                    </a:p>
+                  </a:txBody>
+                  <a:tcPr>
+                    <a:solidFill>
+                      <a:srgbClr val="FFFFFF"/>
+                    </a:solidFill>
+                  </a:tcPr>
+                </a:tc>
+                <a:tc>
+                  <a:txBody>
+                    <a:bodyPr wrap="square"/>
+                    <a:lstStyle/>
+                    <a:p>
+                      <a:r>
+                        <a:rPr sz="1100" b="0">
+                          <a:solidFill>
+                            <a:srgbClr val="1A1A1A"/>
+                          </a:solidFill>
+                          <a:latin typeface="Arial"/>
+                        </a:rPr>
+                        <a:t>Rücklagenanlage Union Investment, Mitarbeiterbindung (bAV)</a:t>
+                      </a:r>
+                    </a:p>
+                  </a:txBody>
+                  <a:tcPr>
+                    <a:solidFill>
+                      <a:srgbClr val="FFFFFF"/>
+                    </a:solidFill>
+                  </a:tcPr>
+                </a:tc>
+              </a:tr>
+              <a:tr h="475488">
+                <a:tc>
+                  <a:txBody>
+                    <a:bodyPr wrap="square"/>
+                    <a:lstStyle/>
+                    <a:p>
+                      <a:r>
+                        <a:rPr sz="1100" b="0">
+                          <a:solidFill>
+                            <a:srgbClr val="1A1A1A"/>
+                          </a:solidFill>
+                          <a:latin typeface="Arial"/>
+                        </a:rPr>
+                        <a:t>Auslandsgeschäft aufgebaut</a:t>
+                      </a:r>
+                    </a:p>
+                  </a:txBody>
+                  <a:tcPr>
+                    <a:solidFill>
+                      <a:srgbClr val="F4F6FA"/>
+                    </a:solidFill>
+                  </a:tcPr>
+                </a:tc>
+                <a:tc>
+                  <a:txBody>
+                    <a:bodyPr wrap="square"/>
+                    <a:lstStyle/>
+                    <a:p>
+                      <a:r>
+                        <a:rPr sz="1100" b="0">
+                          <a:solidFill>
+                            <a:srgbClr val="1A1A1A"/>
+                          </a:solidFill>
+                          <a:latin typeface="Arial"/>
+                        </a:rPr>
+                        <a:t>Auslands-ZV, Devisentermingeschäfte DZ BANK</a:t>
+                      </a:r>
+                    </a:p>
+                  </a:txBody>
+                  <a:tcPr>
+                    <a:solidFill>
+                      <a:srgbClr val="F4F6FA"/>
+                    </a:solidFill>
+                  </a:tcPr>
+                </a:tc>
+              </a:tr>
+            </a:tbl>
+          </a:graphicData>
+        </a:graphic>
+      </p:graphicFrame>
     </p:spTree>
   </p:cSld>
   <p:clrMapOvr>
@@ -3727,8 +4766,8 @@
         </p:nvSpPr>
         <p:spPr>
           <a:xfrm>
-            <a:off x="365760" y="2286000"/>
-            <a:ext cx="11430000" cy="1828800"/>
+            <a:off x="365760" y="2011680"/>
+            <a:ext cx="11430000" cy="2011680"/>
           </a:xfrm>
           <a:prstGeom prst="rect">
             <a:avLst/>
@@ -3743,13 +4782,13 @@
           <a:p>
             <a:pPr algn="l"/>
             <a:r>
-              <a:rPr sz="3600" b="1">
+              <a:rPr sz="3600" b="1" i="0">
                 <a:solidFill>
                   <a:srgbClr val="FFFFFF"/>
                 </a:solidFill>
                 <a:latin typeface="Arial"/>
               </a:rPr>
-              <a:t>Arbeitsblatt B: Cross-Selling-Gesprächsvorbereitung</a:t>
+              <a:t>Schritt 1: Analyse</a:t>
             </a:r>
           </a:p>
         </p:txBody>
@@ -3768,7 +4807,7 @@
     <p:bg>
       <p:bgPr>
         <a:solidFill>
-          <a:srgbClr val="1A1A1A"/>
+          <a:srgbClr val="FFFFFF"/>
         </a:solidFill>
         <a:effectLst/>
       </p:bgPr>
@@ -3795,7 +4834,7 @@
             <a:avLst/>
           </a:prstGeom>
           <a:solidFill>
-            <a:srgbClr val="E05B00"/>
+            <a:srgbClr val="003DA5"/>
           </a:solidFill>
           <a:ln>
             <a:noFill/>
@@ -3831,8 +4870,8 @@
         </p:nvSpPr>
         <p:spPr>
           <a:xfrm>
-            <a:off x="365760" y="2286000"/>
-            <a:ext cx="11430000" cy="1828800"/>
+            <a:off x="228600" y="182880"/>
+            <a:ext cx="11430000" cy="320040"/>
           </a:xfrm>
           <a:prstGeom prst="rect">
             <a:avLst/>
@@ -3847,13 +4886,216 @@
           <a:p>
             <a:pPr algn="l"/>
             <a:r>
-              <a:rPr sz="3600" b="1">
-                <a:solidFill>
-                  <a:srgbClr val="FFFFFF"/>
+              <a:rPr sz="900" b="0" i="0">
+                <a:solidFill>
+                  <a:srgbClr val="556575"/>
                 </a:solidFill>
                 <a:latin typeface="Arial"/>
               </a:rPr>
-              <a:t>Bankfachlich</a:t>
+              <a:t>M13 · 4.3 Der 4-Schritte-Cross-Selling-Prozess</a:t>
+            </a:r>
+          </a:p>
+        </p:txBody>
+      </p:sp>
+      <p:sp>
+        <p:nvSpPr>
+          <p:cNvPr id="4" name="TextBox 3"/>
+          <p:cNvSpPr txBox="1"/>
+          <p:nvPr/>
+        </p:nvSpPr>
+        <p:spPr>
+          <a:xfrm>
+            <a:off x="365760" y="274320"/>
+            <a:ext cx="11430000" cy="777240"/>
+          </a:xfrm>
+          <a:prstGeom prst="rect">
+            <a:avLst/>
+          </a:prstGeom>
+          <a:noFill/>
+        </p:spPr>
+        <p:txBody>
+          <a:bodyPr wrap="square">
+            <a:spAutoFit/>
+          </a:bodyPr>
+          <a:lstStyle/>
+          <a:p>
+            <a:pPr algn="l"/>
+            <a:r>
+              <a:rPr sz="2200" b="1" i="0">
+                <a:solidFill>
+                  <a:srgbClr val="003DA5"/>
+                </a:solidFill>
+                <a:latin typeface="Arial"/>
+              </a:rPr>
+              <a:t>Schritt 1: Analyse</a:t>
+            </a:r>
+          </a:p>
+        </p:txBody>
+      </p:sp>
+      <p:sp>
+        <p:nvSpPr>
+          <p:cNvPr id="5" name="Rectangle 4"/>
+          <p:cNvSpPr/>
+          <p:nvPr/>
+        </p:nvSpPr>
+        <p:spPr>
+          <a:xfrm>
+            <a:off x="365760" y="1005840"/>
+            <a:ext cx="11430000" cy="27432"/>
+          </a:xfrm>
+          <a:prstGeom prst="rect">
+            <a:avLst/>
+          </a:prstGeom>
+          <a:solidFill>
+            <a:srgbClr val="D1D5DB"/>
+          </a:solidFill>
+          <a:ln>
+            <a:noFill/>
+          </a:ln>
+        </p:spPr>
+        <p:style>
+          <a:lnRef idx="1">
+            <a:schemeClr val="accent1"/>
+          </a:lnRef>
+          <a:fillRef idx="3">
+            <a:schemeClr val="accent1"/>
+          </a:fillRef>
+          <a:effectRef idx="2">
+            <a:schemeClr val="accent1"/>
+          </a:effectRef>
+          <a:fontRef idx="minor">
+            <a:schemeClr val="lt1"/>
+          </a:fontRef>
+        </p:style>
+        <p:txBody>
+          <a:bodyPr rtlCol="0" anchor="ctr"/>
+          <a:lstStyle/>
+          <a:p>
+            <a:pPr algn="ctr"/>
+          </a:p>
+        </p:txBody>
+      </p:sp>
+      <p:sp>
+        <p:nvSpPr>
+          <p:cNvPr id="6" name="TextBox 5"/>
+          <p:cNvSpPr txBox="1"/>
+          <p:nvPr/>
+        </p:nvSpPr>
+        <p:spPr>
+          <a:xfrm>
+            <a:off x="365760" y="1143000"/>
+            <a:ext cx="11430000" cy="5212080"/>
+          </a:xfrm>
+          <a:prstGeom prst="rect">
+            <a:avLst/>
+          </a:prstGeom>
+          <a:noFill/>
+        </p:spPr>
+        <p:txBody>
+          <a:bodyPr wrap="square">
+            <a:spAutoFit/>
+          </a:bodyPr>
+          <a:lstStyle/>
+          <a:p>
+            <a:pPr>
+              <a:spcBef>
+                <a:spcPts val="500"/>
+              </a:spcBef>
+            </a:pPr>
+            <a:r>
+              <a:rPr sz="1500">
+                <a:solidFill>
+                  <a:srgbClr val="003DA5"/>
+                </a:solidFill>
+                <a:latin typeface="Arial"/>
+              </a:rPr>
+              <a:t>▪  </a:t>
+            </a:r>
+            <a:r>
+              <a:rPr sz="1700" b="1">
+                <a:solidFill>
+                  <a:srgbClr val="003DA5"/>
+                </a:solidFill>
+                <a:latin typeface="Arial"/>
+              </a:rPr>
+              <a:t>Wer?: </a:t>
+            </a:r>
+            <a:r>
+              <a:rPr sz="1700">
+                <a:solidFill>
+                  <a:srgbClr val="1A1A1A"/>
+                </a:solidFill>
+                <a:latin typeface="Arial"/>
+              </a:rPr>
+              <a:t>Welcher Kunde hat das größte unausgeschöpfte Potenzial?</a:t>
+            </a:r>
+          </a:p>
+          <a:p>
+            <a:pPr>
+              <a:spcBef>
+                <a:spcPts val="500"/>
+              </a:spcBef>
+            </a:pPr>
+            <a:r>
+              <a:rPr sz="1500">
+                <a:solidFill>
+                  <a:srgbClr val="003DA5"/>
+                </a:solidFill>
+                <a:latin typeface="Arial"/>
+              </a:rPr>
+              <a:t>▪  </a:t>
+            </a:r>
+            <a:r>
+              <a:rPr sz="1700" b="1">
+                <a:solidFill>
+                  <a:srgbClr val="003DA5"/>
+                </a:solidFill>
+                <a:latin typeface="Arial"/>
+              </a:rPr>
+              <a:t>Was?: </a:t>
+            </a:r>
+            <a:r>
+              <a:rPr sz="1700">
+                <a:solidFill>
+                  <a:srgbClr val="1A1A1A"/>
+                </a:solidFill>
+                <a:latin typeface="Arial"/>
+              </a:rPr>
+              <a:t>In welchem Bedarfsfeld liegt das Potenzial (Finanzierung, Absicherung, Anlage, ZV)?</a:t>
+            </a:r>
+          </a:p>
+          <a:p>
+            <a:pPr>
+              <a:spcBef>
+                <a:spcPts val="500"/>
+              </a:spcBef>
+            </a:pPr>
+            <a:r>
+              <a:rPr sz="1500">
+                <a:solidFill>
+                  <a:srgbClr val="003DA5"/>
+                </a:solidFill>
+                <a:latin typeface="Arial"/>
+              </a:rPr>
+              <a:t>▪  </a:t>
+            </a:r>
+            <a:r>
+              <a:rPr sz="1700" b="1">
+                <a:solidFill>
+                  <a:srgbClr val="003DA5"/>
+                </a:solidFill>
+                <a:latin typeface="Arial"/>
+              </a:rPr>
+              <a:t>Datenquellen: </a:t>
+            </a:r>
+            <a:r>
+              <a:rPr sz="1700">
+                <a:solidFill>
+                  <a:srgbClr val="1A1A1A"/>
+                </a:solidFill>
+                <a:latin typeface="Arial"/>
+              </a:rPr>
+              <a:t>agree CRM, Jahreskontospiegel, Kreditakten, Verbundpartner-Cockpit</a:t>
             </a:r>
           </a:p>
         </p:txBody>
@@ -3935,8 +5177,8 @@
         </p:nvSpPr>
         <p:spPr>
           <a:xfrm>
-            <a:off x="365760" y="2286000"/>
-            <a:ext cx="11430000" cy="1828800"/>
+            <a:off x="365760" y="2011680"/>
+            <a:ext cx="11430000" cy="2011680"/>
           </a:xfrm>
           <a:prstGeom prst="rect">
             <a:avLst/>
@@ -3951,13 +5193,13 @@
           <a:p>
             <a:pPr algn="l"/>
             <a:r>
-              <a:rPr sz="3600" b="1">
+              <a:rPr sz="3600" b="1" i="0">
                 <a:solidFill>
                   <a:srgbClr val="FFFFFF"/>
                 </a:solidFill>
                 <a:latin typeface="Arial"/>
               </a:rPr>
-              <a:t>Gesprächsführung</a:t>
+              <a:t>Schritt 2: Hypothese formulieren</a:t>
             </a:r>
           </a:p>
         </p:txBody>
@@ -3971,6 +5213,311 @@
 </file>
 
 <file path=ppt/slides/slide16.xml><?xml version="1.0" encoding="utf-8"?>
+<p:sld xmlns:a="http://schemas.openxmlformats.org/drawingml/2006/main" xmlns:p="http://schemas.openxmlformats.org/presentationml/2006/main" xmlns:r="http://schemas.openxmlformats.org/officeDocument/2006/relationships">
+  <p:cSld>
+    <p:bg>
+      <p:bgPr>
+        <a:solidFill>
+          <a:srgbClr val="FFFFFF"/>
+        </a:solidFill>
+        <a:effectLst/>
+      </p:bgPr>
+    </p:bg>
+    <p:spTree>
+      <p:nvGrpSpPr>
+        <p:cNvPr id="1" name=""/>
+        <p:cNvGrpSpPr/>
+        <p:nvPr/>
+      </p:nvGrpSpPr>
+      <p:grpSpPr/>
+      <p:sp>
+        <p:nvSpPr>
+          <p:cNvPr id="2" name="Rectangle 1"/>
+          <p:cNvSpPr/>
+          <p:nvPr/>
+        </p:nvSpPr>
+        <p:spPr>
+          <a:xfrm>
+            <a:off x="0" y="0"/>
+            <a:ext cx="73152" cy="6858000"/>
+          </a:xfrm>
+          <a:prstGeom prst="rect">
+            <a:avLst/>
+          </a:prstGeom>
+          <a:solidFill>
+            <a:srgbClr val="003DA5"/>
+          </a:solidFill>
+          <a:ln>
+            <a:noFill/>
+          </a:ln>
+        </p:spPr>
+        <p:style>
+          <a:lnRef idx="1">
+            <a:schemeClr val="accent1"/>
+          </a:lnRef>
+          <a:fillRef idx="3">
+            <a:schemeClr val="accent1"/>
+          </a:fillRef>
+          <a:effectRef idx="2">
+            <a:schemeClr val="accent1"/>
+          </a:effectRef>
+          <a:fontRef idx="minor">
+            <a:schemeClr val="lt1"/>
+          </a:fontRef>
+        </p:style>
+        <p:txBody>
+          <a:bodyPr rtlCol="0" anchor="ctr"/>
+          <a:lstStyle/>
+          <a:p>
+            <a:pPr algn="ctr"/>
+          </a:p>
+        </p:txBody>
+      </p:sp>
+      <p:sp>
+        <p:nvSpPr>
+          <p:cNvPr id="3" name="TextBox 2"/>
+          <p:cNvSpPr txBox="1"/>
+          <p:nvPr/>
+        </p:nvSpPr>
+        <p:spPr>
+          <a:xfrm>
+            <a:off x="228600" y="182880"/>
+            <a:ext cx="11430000" cy="320040"/>
+          </a:xfrm>
+          <a:prstGeom prst="rect">
+            <a:avLst/>
+          </a:prstGeom>
+          <a:noFill/>
+        </p:spPr>
+        <p:txBody>
+          <a:bodyPr wrap="square">
+            <a:spAutoFit/>
+          </a:bodyPr>
+          <a:lstStyle/>
+          <a:p>
+            <a:pPr algn="l"/>
+            <a:r>
+              <a:rPr sz="900" b="0" i="0">
+                <a:solidFill>
+                  <a:srgbClr val="556575"/>
+                </a:solidFill>
+                <a:latin typeface="Arial"/>
+              </a:rPr>
+              <a:t>M13 · 4.3 Der 4-Schritte-Cross-Selling-Prozess</a:t>
+            </a:r>
+          </a:p>
+        </p:txBody>
+      </p:sp>
+      <p:sp>
+        <p:nvSpPr>
+          <p:cNvPr id="4" name="TextBox 3"/>
+          <p:cNvSpPr txBox="1"/>
+          <p:nvPr/>
+        </p:nvSpPr>
+        <p:spPr>
+          <a:xfrm>
+            <a:off x="365760" y="274320"/>
+            <a:ext cx="11430000" cy="777240"/>
+          </a:xfrm>
+          <a:prstGeom prst="rect">
+            <a:avLst/>
+          </a:prstGeom>
+          <a:noFill/>
+        </p:spPr>
+        <p:txBody>
+          <a:bodyPr wrap="square">
+            <a:spAutoFit/>
+          </a:bodyPr>
+          <a:lstStyle/>
+          <a:p>
+            <a:pPr algn="l"/>
+            <a:r>
+              <a:rPr sz="2200" b="1" i="0">
+                <a:solidFill>
+                  <a:srgbClr val="003DA5"/>
+                </a:solidFill>
+                <a:latin typeface="Arial"/>
+              </a:rPr>
+              <a:t>Schritt 2: Hypothese formulieren</a:t>
+            </a:r>
+          </a:p>
+        </p:txBody>
+      </p:sp>
+      <p:sp>
+        <p:nvSpPr>
+          <p:cNvPr id="5" name="Rectangle 4"/>
+          <p:cNvSpPr/>
+          <p:nvPr/>
+        </p:nvSpPr>
+        <p:spPr>
+          <a:xfrm>
+            <a:off x="365760" y="1005840"/>
+            <a:ext cx="11430000" cy="27432"/>
+          </a:xfrm>
+          <a:prstGeom prst="rect">
+            <a:avLst/>
+          </a:prstGeom>
+          <a:solidFill>
+            <a:srgbClr val="D1D5DB"/>
+          </a:solidFill>
+          <a:ln>
+            <a:noFill/>
+          </a:ln>
+        </p:spPr>
+        <p:style>
+          <a:lnRef idx="1">
+            <a:schemeClr val="accent1"/>
+          </a:lnRef>
+          <a:fillRef idx="3">
+            <a:schemeClr val="accent1"/>
+          </a:fillRef>
+          <a:effectRef idx="2">
+            <a:schemeClr val="accent1"/>
+          </a:effectRef>
+          <a:fontRef idx="minor">
+            <a:schemeClr val="lt1"/>
+          </a:fontRef>
+        </p:style>
+        <p:txBody>
+          <a:bodyPr rtlCol="0" anchor="ctr"/>
+          <a:lstStyle/>
+          <a:p>
+            <a:pPr algn="ctr"/>
+          </a:p>
+        </p:txBody>
+      </p:sp>
+      <p:sp>
+        <p:nvSpPr>
+          <p:cNvPr id="6" name="TextBox 5"/>
+          <p:cNvSpPr txBox="1"/>
+          <p:nvPr/>
+        </p:nvSpPr>
+        <p:spPr>
+          <a:xfrm>
+            <a:off x="365760" y="1143000"/>
+            <a:ext cx="11430000" cy="5212080"/>
+          </a:xfrm>
+          <a:prstGeom prst="rect">
+            <a:avLst/>
+          </a:prstGeom>
+          <a:noFill/>
+        </p:spPr>
+        <p:txBody>
+          <a:bodyPr wrap="square">
+            <a:spAutoFit/>
+          </a:bodyPr>
+          <a:lstStyle/>
+          <a:p>
+            <a:pPr>
+              <a:spcBef>
+                <a:spcPts val="500"/>
+              </a:spcBef>
+            </a:pPr>
+            <a:r>
+              <a:rPr sz="1500">
+                <a:solidFill>
+                  <a:srgbClr val="003DA5"/>
+                </a:solidFill>
+                <a:latin typeface="Arial"/>
+              </a:rPr>
+              <a:t>▪  </a:t>
+            </a:r>
+            <a:r>
+              <a:rPr sz="1700">
+                <a:solidFill>
+                  <a:srgbClr val="1A1A1A"/>
+                </a:solidFill>
+                <a:latin typeface="Arial"/>
+              </a:rPr>
+              <a:t>Eine Cross-Selling-Hypothese verknüpft einen beobachteten Kundenbedarf mit einem konkreten Lösungsansatz. Gutes Format:</a:t>
+            </a:r>
+          </a:p>
+          <a:p>
+            <a:pPr>
+              <a:spcBef>
+                <a:spcPts val="500"/>
+              </a:spcBef>
+            </a:pPr>
+            <a:r>
+              <a:rPr sz="1500">
+                <a:solidFill>
+                  <a:srgbClr val="003DA5"/>
+                </a:solidFill>
+                <a:latin typeface="Arial"/>
+              </a:rPr>
+              <a:t>▪  </a:t>
+            </a:r>
+            <a:r>
+              <a:rPr sz="1700">
+                <a:solidFill>
+                  <a:srgbClr val="1A1A1A"/>
+                </a:solidFill>
+                <a:latin typeface="Arial"/>
+              </a:rPr>
+              <a:t>&gt; „[Kunde] hat [Situation/Signal]. Ich vermute deshalb, dass er [Bedarf] hat – passend dazu wäre [Lösung/Verbundpartner]."</a:t>
+            </a:r>
+          </a:p>
+          <a:p>
+            <a:pPr>
+              <a:spcBef>
+                <a:spcPts val="500"/>
+              </a:spcBef>
+            </a:pPr>
+            <a:r>
+              <a:rPr sz="1500">
+                <a:solidFill>
+                  <a:srgbClr val="003DA5"/>
+                </a:solidFill>
+                <a:latin typeface="Arial"/>
+              </a:rPr>
+              <a:t>▪  </a:t>
+            </a:r>
+            <a:r>
+              <a:rPr sz="1700">
+                <a:solidFill>
+                  <a:srgbClr val="1A1A1A"/>
+                </a:solidFill>
+                <a:latin typeface="Arial"/>
+              </a:rPr>
+              <a:t>Beispiel 1: „Herr Berger hat seinen Betrieb vor zwei Jahren auf eine GmbH umgewandelt. Ich vermute, dass eine D&amp;O-Versicherung für den Geschäftsführer noch…</a:t>
+            </a:r>
+          </a:p>
+          <a:p>
+            <a:pPr>
+              <a:spcBef>
+                <a:spcPts val="500"/>
+              </a:spcBef>
+            </a:pPr>
+            <a:r>
+              <a:rPr sz="1500">
+                <a:solidFill>
+                  <a:srgbClr val="003DA5"/>
+                </a:solidFill>
+                <a:latin typeface="Arial"/>
+              </a:rPr>
+              <a:t>▪  </a:t>
+            </a:r>
+            <a:r>
+              <a:rPr sz="1700">
+                <a:solidFill>
+                  <a:srgbClr val="1A1A1A"/>
+                </a:solidFill>
+                <a:latin typeface="Arial"/>
+              </a:rPr>
+              <a:t>Beispiel 2 (ZV-Bereich): „Frau Meier führt Auslandszahlungen über die Commerzbank ab – das hat sie beim letzten Gespräch nebenbei erwähnt. Ich vermute, dass…</a:t>
+            </a:r>
+          </a:p>
+        </p:txBody>
+      </p:sp>
+    </p:spTree>
+  </p:cSld>
+  <p:clrMapOvr>
+    <a:masterClrMapping/>
+  </p:clrMapOvr>
+</p:sld>
+</file>
+
+<file path=ppt/slides/slide17.xml><?xml version="1.0" encoding="utf-8"?>
 <p:sld xmlns:a="http://schemas.openxmlformats.org/drawingml/2006/main" xmlns:p="http://schemas.openxmlformats.org/presentationml/2006/main" xmlns:r="http://schemas.openxmlformats.org/officeDocument/2006/relationships">
   <p:cSld>
     <p:bg>
@@ -4039,8 +5586,8 @@
         </p:nvSpPr>
         <p:spPr>
           <a:xfrm>
-            <a:off x="365760" y="2286000"/>
-            <a:ext cx="11430000" cy="1828800"/>
+            <a:off x="365760" y="2011680"/>
+            <a:ext cx="11430000" cy="2011680"/>
           </a:xfrm>
           <a:prstGeom prst="rect">
             <a:avLst/>
@@ -4055,13 +5602,13 @@
           <a:p>
             <a:pPr algn="l"/>
             <a:r>
-              <a:rPr sz="3600" b="1">
+              <a:rPr sz="3600" b="1" i="0">
                 <a:solidFill>
                   <a:srgbClr val="FFFFFF"/>
                 </a:solidFill>
                 <a:latin typeface="Arial"/>
               </a:rPr>
-              <a:t>Verbundpartner-Materialien</a:t>
+              <a:t>Schritt 3: Gespräch</a:t>
             </a:r>
           </a:p>
         </p:txBody>
@@ -4074,7 +5621,2752 @@
 </p:sld>
 </file>
 
-<file path=ppt/slides/slide17.xml><?xml version="1.0" encoding="utf-8"?>
+<file path=ppt/slides/slide18.xml><?xml version="1.0" encoding="utf-8"?>
+<p:sld xmlns:a="http://schemas.openxmlformats.org/drawingml/2006/main" xmlns:p="http://schemas.openxmlformats.org/presentationml/2006/main" xmlns:r="http://schemas.openxmlformats.org/officeDocument/2006/relationships">
+  <p:cSld>
+    <p:bg>
+      <p:bgPr>
+        <a:solidFill>
+          <a:srgbClr val="FFFFFF"/>
+        </a:solidFill>
+        <a:effectLst/>
+      </p:bgPr>
+    </p:bg>
+    <p:spTree>
+      <p:nvGrpSpPr>
+        <p:cNvPr id="1" name=""/>
+        <p:cNvGrpSpPr/>
+        <p:nvPr/>
+      </p:nvGrpSpPr>
+      <p:grpSpPr/>
+      <p:sp>
+        <p:nvSpPr>
+          <p:cNvPr id="2" name="Rectangle 1"/>
+          <p:cNvSpPr/>
+          <p:nvPr/>
+        </p:nvSpPr>
+        <p:spPr>
+          <a:xfrm>
+            <a:off x="0" y="0"/>
+            <a:ext cx="73152" cy="6858000"/>
+          </a:xfrm>
+          <a:prstGeom prst="rect">
+            <a:avLst/>
+          </a:prstGeom>
+          <a:solidFill>
+            <a:srgbClr val="003DA5"/>
+          </a:solidFill>
+          <a:ln>
+            <a:noFill/>
+          </a:ln>
+        </p:spPr>
+        <p:style>
+          <a:lnRef idx="1">
+            <a:schemeClr val="accent1"/>
+          </a:lnRef>
+          <a:fillRef idx="3">
+            <a:schemeClr val="accent1"/>
+          </a:fillRef>
+          <a:effectRef idx="2">
+            <a:schemeClr val="accent1"/>
+          </a:effectRef>
+          <a:fontRef idx="minor">
+            <a:schemeClr val="lt1"/>
+          </a:fontRef>
+        </p:style>
+        <p:txBody>
+          <a:bodyPr rtlCol="0" anchor="ctr"/>
+          <a:lstStyle/>
+          <a:p>
+            <a:pPr algn="ctr"/>
+          </a:p>
+        </p:txBody>
+      </p:sp>
+      <p:sp>
+        <p:nvSpPr>
+          <p:cNvPr id="3" name="TextBox 2"/>
+          <p:cNvSpPr txBox="1"/>
+          <p:nvPr/>
+        </p:nvSpPr>
+        <p:spPr>
+          <a:xfrm>
+            <a:off x="228600" y="182880"/>
+            <a:ext cx="11430000" cy="320040"/>
+          </a:xfrm>
+          <a:prstGeom prst="rect">
+            <a:avLst/>
+          </a:prstGeom>
+          <a:noFill/>
+        </p:spPr>
+        <p:txBody>
+          <a:bodyPr wrap="square">
+            <a:spAutoFit/>
+          </a:bodyPr>
+          <a:lstStyle/>
+          <a:p>
+            <a:pPr algn="l"/>
+            <a:r>
+              <a:rPr sz="900" b="0" i="0">
+                <a:solidFill>
+                  <a:srgbClr val="556575"/>
+                </a:solidFill>
+                <a:latin typeface="Arial"/>
+              </a:rPr>
+              <a:t>M13 · 4.3 Der 4-Schritte-Cross-Selling-Prozess</a:t>
+            </a:r>
+          </a:p>
+        </p:txBody>
+      </p:sp>
+      <p:sp>
+        <p:nvSpPr>
+          <p:cNvPr id="4" name="TextBox 3"/>
+          <p:cNvSpPr txBox="1"/>
+          <p:nvPr/>
+        </p:nvSpPr>
+        <p:spPr>
+          <a:xfrm>
+            <a:off x="365760" y="274320"/>
+            <a:ext cx="11430000" cy="777240"/>
+          </a:xfrm>
+          <a:prstGeom prst="rect">
+            <a:avLst/>
+          </a:prstGeom>
+          <a:noFill/>
+        </p:spPr>
+        <p:txBody>
+          <a:bodyPr wrap="square">
+            <a:spAutoFit/>
+          </a:bodyPr>
+          <a:lstStyle/>
+          <a:p>
+            <a:pPr algn="l"/>
+            <a:r>
+              <a:rPr sz="2200" b="1" i="0">
+                <a:solidFill>
+                  <a:srgbClr val="003DA5"/>
+                </a:solidFill>
+                <a:latin typeface="Arial"/>
+              </a:rPr>
+              <a:t>Schritt 3: Gespräch</a:t>
+            </a:r>
+          </a:p>
+        </p:txBody>
+      </p:sp>
+      <p:sp>
+        <p:nvSpPr>
+          <p:cNvPr id="5" name="Rectangle 4"/>
+          <p:cNvSpPr/>
+          <p:nvPr/>
+        </p:nvSpPr>
+        <p:spPr>
+          <a:xfrm>
+            <a:off x="365760" y="1005840"/>
+            <a:ext cx="11430000" cy="27432"/>
+          </a:xfrm>
+          <a:prstGeom prst="rect">
+            <a:avLst/>
+          </a:prstGeom>
+          <a:solidFill>
+            <a:srgbClr val="D1D5DB"/>
+          </a:solidFill>
+          <a:ln>
+            <a:noFill/>
+          </a:ln>
+        </p:spPr>
+        <p:style>
+          <a:lnRef idx="1">
+            <a:schemeClr val="accent1"/>
+          </a:lnRef>
+          <a:fillRef idx="3">
+            <a:schemeClr val="accent1"/>
+          </a:fillRef>
+          <a:effectRef idx="2">
+            <a:schemeClr val="accent1"/>
+          </a:effectRef>
+          <a:fontRef idx="minor">
+            <a:schemeClr val="lt1"/>
+          </a:fontRef>
+        </p:style>
+        <p:txBody>
+          <a:bodyPr rtlCol="0" anchor="ctr"/>
+          <a:lstStyle/>
+          <a:p>
+            <a:pPr algn="ctr"/>
+          </a:p>
+        </p:txBody>
+      </p:sp>
+      <p:sp>
+        <p:nvSpPr>
+          <p:cNvPr id="6" name="TextBox 5"/>
+          <p:cNvSpPr txBox="1"/>
+          <p:nvPr/>
+        </p:nvSpPr>
+        <p:spPr>
+          <a:xfrm>
+            <a:off x="365760" y="1143000"/>
+            <a:ext cx="11430000" cy="5212080"/>
+          </a:xfrm>
+          <a:prstGeom prst="rect">
+            <a:avLst/>
+          </a:prstGeom>
+          <a:noFill/>
+        </p:spPr>
+        <p:txBody>
+          <a:bodyPr wrap="square">
+            <a:spAutoFit/>
+          </a:bodyPr>
+          <a:lstStyle/>
+          <a:p>
+            <a:pPr>
+              <a:spcBef>
+                <a:spcPts val="500"/>
+              </a:spcBef>
+            </a:pPr>
+            <a:r>
+              <a:rPr sz="1500">
+                <a:solidFill>
+                  <a:srgbClr val="003DA5"/>
+                </a:solidFill>
+                <a:latin typeface="Arial"/>
+              </a:rPr>
+              <a:t>▪  </a:t>
+            </a:r>
+            <a:r>
+              <a:rPr sz="1700">
+                <a:solidFill>
+                  <a:srgbClr val="1A1A1A"/>
+                </a:solidFill>
+                <a:latin typeface="Arial"/>
+              </a:rPr>
+              <a:t>Situationsfrage: „Wie haben Sie aktuell Ihre Betriebsunterbrechungsrisiken abgesichert?"</a:t>
+            </a:r>
+          </a:p>
+          <a:p>
+            <a:pPr>
+              <a:spcBef>
+                <a:spcPts val="500"/>
+              </a:spcBef>
+            </a:pPr>
+            <a:r>
+              <a:rPr sz="1500">
+                <a:solidFill>
+                  <a:srgbClr val="003DA5"/>
+                </a:solidFill>
+                <a:latin typeface="Arial"/>
+              </a:rPr>
+              <a:t>▪  </a:t>
+            </a:r>
+            <a:r>
+              <a:rPr sz="1700">
+                <a:solidFill>
+                  <a:srgbClr val="1A1A1A"/>
+                </a:solidFill>
+                <a:latin typeface="Arial"/>
+              </a:rPr>
+              <a:t>Problemfrage: „Gibt es Bereiche, bei denen Sie sich fragen, ob das ausreicht?"</a:t>
+            </a:r>
+          </a:p>
+          <a:p>
+            <a:pPr>
+              <a:spcBef>
+                <a:spcPts val="500"/>
+              </a:spcBef>
+            </a:pPr>
+            <a:r>
+              <a:rPr sz="1500">
+                <a:solidFill>
+                  <a:srgbClr val="003DA5"/>
+                </a:solidFill>
+                <a:latin typeface="Arial"/>
+              </a:rPr>
+              <a:t>▪  </a:t>
+            </a:r>
+            <a:r>
+              <a:rPr sz="1700">
+                <a:solidFill>
+                  <a:srgbClr val="1A1A1A"/>
+                </a:solidFill>
+                <a:latin typeface="Arial"/>
+              </a:rPr>
+              <a:t>Implikationsfrage: „Was würde ein Ausfall von zwei Wochen für Ihren Betrieb bedeuten?"</a:t>
+            </a:r>
+          </a:p>
+          <a:p>
+            <a:pPr>
+              <a:spcBef>
+                <a:spcPts val="500"/>
+              </a:spcBef>
+            </a:pPr>
+            <a:r>
+              <a:rPr sz="1500">
+                <a:solidFill>
+                  <a:srgbClr val="003DA5"/>
+                </a:solidFill>
+                <a:latin typeface="Arial"/>
+              </a:rPr>
+              <a:t>▪  </a:t>
+            </a:r>
+            <a:r>
+              <a:rPr sz="1700">
+                <a:solidFill>
+                  <a:srgbClr val="1A1A1A"/>
+                </a:solidFill>
+                <a:latin typeface="Arial"/>
+              </a:rPr>
+              <a:t>Nutzenfrage: „Was wäre für Sie die ideale Lösung, wenn das Risiko vollständig gedeckt wäre?"</a:t>
+            </a:r>
+          </a:p>
+        </p:txBody>
+      </p:sp>
+    </p:spTree>
+  </p:cSld>
+  <p:clrMapOvr>
+    <a:masterClrMapping/>
+  </p:clrMapOvr>
+</p:sld>
+</file>
+
+<file path=ppt/slides/slide19.xml><?xml version="1.0" encoding="utf-8"?>
+<p:sld xmlns:a="http://schemas.openxmlformats.org/drawingml/2006/main" xmlns:p="http://schemas.openxmlformats.org/presentationml/2006/main" xmlns:r="http://schemas.openxmlformats.org/officeDocument/2006/relationships">
+  <p:cSld>
+    <p:bg>
+      <p:bgPr>
+        <a:solidFill>
+          <a:srgbClr val="1A1A1A"/>
+        </a:solidFill>
+        <a:effectLst/>
+      </p:bgPr>
+    </p:bg>
+    <p:spTree>
+      <p:nvGrpSpPr>
+        <p:cNvPr id="1" name=""/>
+        <p:cNvGrpSpPr/>
+        <p:nvPr/>
+      </p:nvGrpSpPr>
+      <p:grpSpPr/>
+      <p:sp>
+        <p:nvSpPr>
+          <p:cNvPr id="2" name="Rectangle 1"/>
+          <p:cNvSpPr/>
+          <p:nvPr/>
+        </p:nvSpPr>
+        <p:spPr>
+          <a:xfrm>
+            <a:off x="0" y="0"/>
+            <a:ext cx="73152" cy="6858000"/>
+          </a:xfrm>
+          <a:prstGeom prst="rect">
+            <a:avLst/>
+          </a:prstGeom>
+          <a:solidFill>
+            <a:srgbClr val="E05B00"/>
+          </a:solidFill>
+          <a:ln>
+            <a:noFill/>
+          </a:ln>
+        </p:spPr>
+        <p:style>
+          <a:lnRef idx="1">
+            <a:schemeClr val="accent1"/>
+          </a:lnRef>
+          <a:fillRef idx="3">
+            <a:schemeClr val="accent1"/>
+          </a:fillRef>
+          <a:effectRef idx="2">
+            <a:schemeClr val="accent1"/>
+          </a:effectRef>
+          <a:fontRef idx="minor">
+            <a:schemeClr val="lt1"/>
+          </a:fontRef>
+        </p:style>
+        <p:txBody>
+          <a:bodyPr rtlCol="0" anchor="ctr"/>
+          <a:lstStyle/>
+          <a:p>
+            <a:pPr algn="ctr"/>
+          </a:p>
+        </p:txBody>
+      </p:sp>
+      <p:sp>
+        <p:nvSpPr>
+          <p:cNvPr id="3" name="TextBox 2"/>
+          <p:cNvSpPr txBox="1"/>
+          <p:nvPr/>
+        </p:nvSpPr>
+        <p:spPr>
+          <a:xfrm>
+            <a:off x="365760" y="2011680"/>
+            <a:ext cx="11430000" cy="2011680"/>
+          </a:xfrm>
+          <a:prstGeom prst="rect">
+            <a:avLst/>
+          </a:prstGeom>
+          <a:noFill/>
+        </p:spPr>
+        <p:txBody>
+          <a:bodyPr wrap="square">
+            <a:spAutoFit/>
+          </a:bodyPr>
+          <a:lstStyle/>
+          <a:p>
+            <a:pPr algn="l"/>
+            <a:r>
+              <a:rPr sz="3600" b="1" i="0">
+                <a:solidFill>
+                  <a:srgbClr val="FFFFFF"/>
+                </a:solidFill>
+                <a:latin typeface="Arial"/>
+              </a:rPr>
+              <a:t>Schritt 4: Dokumentation</a:t>
+            </a:r>
+          </a:p>
+        </p:txBody>
+      </p:sp>
+    </p:spTree>
+  </p:cSld>
+  <p:clrMapOvr>
+    <a:masterClrMapping/>
+  </p:clrMapOvr>
+</p:sld>
+</file>
+
+<file path=ppt/slides/slide2.xml><?xml version="1.0" encoding="utf-8"?>
+<p:sld xmlns:a="http://schemas.openxmlformats.org/drawingml/2006/main" xmlns:p="http://schemas.openxmlformats.org/presentationml/2006/main" xmlns:r="http://schemas.openxmlformats.org/officeDocument/2006/relationships">
+  <p:cSld>
+    <p:bg>
+      <p:bgPr>
+        <a:solidFill>
+          <a:srgbClr val="F4F6FA"/>
+        </a:solidFill>
+        <a:effectLst/>
+      </p:bgPr>
+    </p:bg>
+    <p:spTree>
+      <p:nvGrpSpPr>
+        <p:cNvPr id="1" name=""/>
+        <p:cNvGrpSpPr/>
+        <p:nvPr/>
+      </p:nvGrpSpPr>
+      <p:grpSpPr/>
+      <p:sp>
+        <p:nvSpPr>
+          <p:cNvPr id="2" name="Rectangle 1"/>
+          <p:cNvSpPr/>
+          <p:nvPr/>
+        </p:nvSpPr>
+        <p:spPr>
+          <a:xfrm>
+            <a:off x="0" y="0"/>
+            <a:ext cx="73152" cy="6858000"/>
+          </a:xfrm>
+          <a:prstGeom prst="rect">
+            <a:avLst/>
+          </a:prstGeom>
+          <a:solidFill>
+            <a:srgbClr val="003DA5"/>
+          </a:solidFill>
+          <a:ln>
+            <a:noFill/>
+          </a:ln>
+        </p:spPr>
+        <p:style>
+          <a:lnRef idx="1">
+            <a:schemeClr val="accent1"/>
+          </a:lnRef>
+          <a:fillRef idx="3">
+            <a:schemeClr val="accent1"/>
+          </a:fillRef>
+          <a:effectRef idx="2">
+            <a:schemeClr val="accent1"/>
+          </a:effectRef>
+          <a:fontRef idx="minor">
+            <a:schemeClr val="lt1"/>
+          </a:fontRef>
+        </p:style>
+        <p:txBody>
+          <a:bodyPr rtlCol="0" anchor="ctr"/>
+          <a:lstStyle/>
+          <a:p>
+            <a:pPr algn="ctr"/>
+          </a:p>
+        </p:txBody>
+      </p:sp>
+      <p:sp>
+        <p:nvSpPr>
+          <p:cNvPr id="3" name="Rectangle 2"/>
+          <p:cNvSpPr/>
+          <p:nvPr/>
+        </p:nvSpPr>
+        <p:spPr>
+          <a:xfrm>
+            <a:off x="228600" y="804672"/>
+            <a:ext cx="11612880" cy="22860"/>
+          </a:xfrm>
+          <a:prstGeom prst="rect">
+            <a:avLst/>
+          </a:prstGeom>
+          <a:solidFill>
+            <a:srgbClr val="D1D5DB"/>
+          </a:solidFill>
+          <a:ln>
+            <a:noFill/>
+          </a:ln>
+        </p:spPr>
+        <p:style>
+          <a:lnRef idx="1">
+            <a:schemeClr val="accent1"/>
+          </a:lnRef>
+          <a:fillRef idx="3">
+            <a:schemeClr val="accent1"/>
+          </a:fillRef>
+          <a:effectRef idx="2">
+            <a:schemeClr val="accent1"/>
+          </a:effectRef>
+          <a:fontRef idx="minor">
+            <a:schemeClr val="lt1"/>
+          </a:fontRef>
+        </p:style>
+        <p:txBody>
+          <a:bodyPr rtlCol="0" anchor="ctr"/>
+          <a:lstStyle/>
+          <a:p>
+            <a:pPr algn="ctr"/>
+          </a:p>
+        </p:txBody>
+      </p:sp>
+      <p:sp>
+        <p:nvSpPr>
+          <p:cNvPr id="4" name="TextBox 3"/>
+          <p:cNvSpPr txBox="1"/>
+          <p:nvPr/>
+        </p:nvSpPr>
+        <p:spPr>
+          <a:xfrm>
+            <a:off x="365760" y="320040"/>
+            <a:ext cx="4572000" cy="347472"/>
+          </a:xfrm>
+          <a:prstGeom prst="rect">
+            <a:avLst/>
+          </a:prstGeom>
+          <a:noFill/>
+        </p:spPr>
+        <p:txBody>
+          <a:bodyPr wrap="square">
+            <a:spAutoFit/>
+          </a:bodyPr>
+          <a:lstStyle/>
+          <a:p>
+            <a:pPr algn="l"/>
+            <a:r>
+              <a:rPr sz="900" b="1" i="0">
+                <a:solidFill>
+                  <a:srgbClr val="003DA5"/>
+                </a:solidFill>
+                <a:latin typeface="Arial"/>
+              </a:rPr>
+              <a:t>LERNZIELE</a:t>
+            </a:r>
+          </a:p>
+        </p:txBody>
+      </p:sp>
+      <p:sp>
+        <p:nvSpPr>
+          <p:cNvPr id="5" name="TextBox 4"/>
+          <p:cNvSpPr txBox="1"/>
+          <p:nvPr/>
+        </p:nvSpPr>
+        <p:spPr>
+          <a:xfrm>
+            <a:off x="365760" y="502920"/>
+            <a:ext cx="10058400" cy="640080"/>
+          </a:xfrm>
+          <a:prstGeom prst="rect">
+            <a:avLst/>
+          </a:prstGeom>
+          <a:noFill/>
+        </p:spPr>
+        <p:txBody>
+          <a:bodyPr wrap="square">
+            <a:spAutoFit/>
+          </a:bodyPr>
+          <a:lstStyle/>
+          <a:p>
+            <a:pPr algn="l"/>
+            <a:r>
+              <a:rPr sz="2400" b="1" i="0">
+                <a:solidFill>
+                  <a:srgbClr val="1A1A1A"/>
+                </a:solidFill>
+                <a:latin typeface="Arial"/>
+              </a:rPr>
+              <a:t>Was Sie nach diesem Modul können.</a:t>
+            </a:r>
+          </a:p>
+        </p:txBody>
+      </p:sp>
+      <p:sp>
+        <p:nvSpPr>
+          <p:cNvPr id="6" name="TextBox 5"/>
+          <p:cNvSpPr txBox="1"/>
+          <p:nvPr/>
+        </p:nvSpPr>
+        <p:spPr>
+          <a:xfrm>
+            <a:off x="365760" y="1234440"/>
+            <a:ext cx="11430000" cy="5303520"/>
+          </a:xfrm>
+          <a:prstGeom prst="rect">
+            <a:avLst/>
+          </a:prstGeom>
+          <a:noFill/>
+        </p:spPr>
+        <p:txBody>
+          <a:bodyPr wrap="square">
+            <a:spAutoFit/>
+          </a:bodyPr>
+          <a:lstStyle/>
+          <a:p>
+            <a:pPr>
+              <a:spcBef>
+                <a:spcPts val="500"/>
+              </a:spcBef>
+            </a:pPr>
+            <a:r>
+              <a:rPr sz="1500">
+                <a:solidFill>
+                  <a:srgbClr val="003DA5"/>
+                </a:solidFill>
+                <a:latin typeface="Arial"/>
+              </a:rPr>
+              <a:t>▪  </a:t>
+            </a:r>
+            <a:r>
+              <a:rPr sz="1700">
+                <a:solidFill>
+                  <a:srgbClr val="1A1A1A"/>
+                </a:solidFill>
+                <a:latin typeface="Arial"/>
+              </a:rPr>
+              <a:t>Den Unterschied zwischen reaktivem und systematisch-bedarfsorientiertem Cross-Selling erklären und begründen, warum der zweite Ansatz nachhaltiger ist</a:t>
+            </a:r>
+          </a:p>
+          <a:p>
+            <a:pPr>
+              <a:spcBef>
+                <a:spcPts val="500"/>
+              </a:spcBef>
+            </a:pPr>
+            <a:r>
+              <a:rPr sz="1500">
+                <a:solidFill>
+                  <a:srgbClr val="003DA5"/>
+                </a:solidFill>
+                <a:latin typeface="Arial"/>
+              </a:rPr>
+              <a:t>▪  </a:t>
+            </a:r>
+            <a:r>
+              <a:rPr sz="1700">
+                <a:solidFill>
+                  <a:srgbClr val="1A1A1A"/>
+                </a:solidFill>
+                <a:latin typeface="Arial"/>
+              </a:rPr>
+              <a:t>Cross-Selling-Potenziale in einem gegebenen Kundenprofil anhand der Wallet-Share-Methodik identifizieren und die zwei vielversprechendsten Ansatzpunkte benennen</a:t>
+            </a:r>
+          </a:p>
+          <a:p>
+            <a:pPr>
+              <a:spcBef>
+                <a:spcPts val="500"/>
+              </a:spcBef>
+            </a:pPr>
+            <a:r>
+              <a:rPr sz="1500">
+                <a:solidFill>
+                  <a:srgbClr val="003DA5"/>
+                </a:solidFill>
+                <a:latin typeface="Arial"/>
+              </a:rPr>
+              <a:t>▪  </a:t>
+            </a:r>
+            <a:r>
+              <a:rPr sz="1700">
+                <a:solidFill>
+                  <a:srgbClr val="1A1A1A"/>
+                </a:solidFill>
+                <a:latin typeface="Arial"/>
+              </a:rPr>
+              <a:t>Den 4-Schritte-Cross-Selling-Prozess (Analyse – Hypothese – Gespräch – Dokumentation) in einem simulierten Kundengespräch anwenden</a:t>
+            </a:r>
+          </a:p>
+          <a:p>
+            <a:pPr>
+              <a:spcBef>
+                <a:spcPts val="500"/>
+              </a:spcBef>
+            </a:pPr>
+            <a:r>
+              <a:rPr sz="1500">
+                <a:solidFill>
+                  <a:srgbClr val="003DA5"/>
+                </a:solidFill>
+                <a:latin typeface="Arial"/>
+              </a:rPr>
+              <a:t>▪  </a:t>
+            </a:r>
+            <a:r>
+              <a:rPr sz="1700">
+                <a:solidFill>
+                  <a:srgbClr val="1A1A1A"/>
+                </a:solidFill>
+                <a:latin typeface="Arial"/>
+              </a:rPr>
+              <a:t>Die relevanten Verbundpartner den typischen Bedarfsfeldern der Firmenkunden zuordnen</a:t>
+            </a:r>
+          </a:p>
+          <a:p>
+            <a:pPr>
+              <a:spcBef>
+                <a:spcPts val="500"/>
+              </a:spcBef>
+            </a:pPr>
+            <a:r>
+              <a:rPr sz="1500">
+                <a:solidFill>
+                  <a:srgbClr val="003DA5"/>
+                </a:solidFill>
+                <a:latin typeface="Arial"/>
+              </a:rPr>
+              <a:t>▪  </a:t>
+            </a:r>
+            <a:r>
+              <a:rPr sz="1700">
+                <a:solidFill>
+                  <a:srgbClr val="1A1A1A"/>
+                </a:solidFill>
+                <a:latin typeface="Arial"/>
+              </a:rPr>
+              <a:t>Produktgetriebenes Push-Cross-Selling von bedarfsorientiertem Cross-Selling unterscheiden und die situationsgerechte Vorgehensweise wählen</a:t>
+            </a:r>
+          </a:p>
+        </p:txBody>
+      </p:sp>
+    </p:spTree>
+  </p:cSld>
+  <p:clrMapOvr>
+    <a:masterClrMapping/>
+  </p:clrMapOvr>
+</p:sld>
+</file>
+
+<file path=ppt/slides/slide20.xml><?xml version="1.0" encoding="utf-8"?>
+<p:sld xmlns:a="http://schemas.openxmlformats.org/drawingml/2006/main" xmlns:p="http://schemas.openxmlformats.org/presentationml/2006/main" xmlns:r="http://schemas.openxmlformats.org/officeDocument/2006/relationships">
+  <p:cSld>
+    <p:bg>
+      <p:bgPr>
+        <a:solidFill>
+          <a:srgbClr val="FFFFFF"/>
+        </a:solidFill>
+        <a:effectLst/>
+      </p:bgPr>
+    </p:bg>
+    <p:spTree>
+      <p:nvGrpSpPr>
+        <p:cNvPr id="1" name=""/>
+        <p:cNvGrpSpPr/>
+        <p:nvPr/>
+      </p:nvGrpSpPr>
+      <p:grpSpPr/>
+      <p:sp>
+        <p:nvSpPr>
+          <p:cNvPr id="2" name="Rectangle 1"/>
+          <p:cNvSpPr/>
+          <p:nvPr/>
+        </p:nvSpPr>
+        <p:spPr>
+          <a:xfrm>
+            <a:off x="0" y="0"/>
+            <a:ext cx="73152" cy="6858000"/>
+          </a:xfrm>
+          <a:prstGeom prst="rect">
+            <a:avLst/>
+          </a:prstGeom>
+          <a:solidFill>
+            <a:srgbClr val="003DA5"/>
+          </a:solidFill>
+          <a:ln>
+            <a:noFill/>
+          </a:ln>
+        </p:spPr>
+        <p:style>
+          <a:lnRef idx="1">
+            <a:schemeClr val="accent1"/>
+          </a:lnRef>
+          <a:fillRef idx="3">
+            <a:schemeClr val="accent1"/>
+          </a:fillRef>
+          <a:effectRef idx="2">
+            <a:schemeClr val="accent1"/>
+          </a:effectRef>
+          <a:fontRef idx="minor">
+            <a:schemeClr val="lt1"/>
+          </a:fontRef>
+        </p:style>
+        <p:txBody>
+          <a:bodyPr rtlCol="0" anchor="ctr"/>
+          <a:lstStyle/>
+          <a:p>
+            <a:pPr algn="ctr"/>
+          </a:p>
+        </p:txBody>
+      </p:sp>
+      <p:sp>
+        <p:nvSpPr>
+          <p:cNvPr id="3" name="TextBox 2"/>
+          <p:cNvSpPr txBox="1"/>
+          <p:nvPr/>
+        </p:nvSpPr>
+        <p:spPr>
+          <a:xfrm>
+            <a:off x="228600" y="182880"/>
+            <a:ext cx="11430000" cy="320040"/>
+          </a:xfrm>
+          <a:prstGeom prst="rect">
+            <a:avLst/>
+          </a:prstGeom>
+          <a:noFill/>
+        </p:spPr>
+        <p:txBody>
+          <a:bodyPr wrap="square">
+            <a:spAutoFit/>
+          </a:bodyPr>
+          <a:lstStyle/>
+          <a:p>
+            <a:pPr algn="l"/>
+            <a:r>
+              <a:rPr sz="900" b="0" i="0">
+                <a:solidFill>
+                  <a:srgbClr val="556575"/>
+                </a:solidFill>
+                <a:latin typeface="Arial"/>
+              </a:rPr>
+              <a:t>M13 · 4.3 Der 4-Schritte-Cross-Selling-Prozess</a:t>
+            </a:r>
+          </a:p>
+        </p:txBody>
+      </p:sp>
+      <p:sp>
+        <p:nvSpPr>
+          <p:cNvPr id="4" name="TextBox 3"/>
+          <p:cNvSpPr txBox="1"/>
+          <p:nvPr/>
+        </p:nvSpPr>
+        <p:spPr>
+          <a:xfrm>
+            <a:off x="365760" y="274320"/>
+            <a:ext cx="11430000" cy="777240"/>
+          </a:xfrm>
+          <a:prstGeom prst="rect">
+            <a:avLst/>
+          </a:prstGeom>
+          <a:noFill/>
+        </p:spPr>
+        <p:txBody>
+          <a:bodyPr wrap="square">
+            <a:spAutoFit/>
+          </a:bodyPr>
+          <a:lstStyle/>
+          <a:p>
+            <a:pPr algn="l"/>
+            <a:r>
+              <a:rPr sz="2200" b="1" i="0">
+                <a:solidFill>
+                  <a:srgbClr val="003DA5"/>
+                </a:solidFill>
+                <a:latin typeface="Arial"/>
+              </a:rPr>
+              <a:t>Schritt 4: Dokumentation</a:t>
+            </a:r>
+          </a:p>
+        </p:txBody>
+      </p:sp>
+      <p:sp>
+        <p:nvSpPr>
+          <p:cNvPr id="5" name="Rectangle 4"/>
+          <p:cNvSpPr/>
+          <p:nvPr/>
+        </p:nvSpPr>
+        <p:spPr>
+          <a:xfrm>
+            <a:off x="365760" y="1005840"/>
+            <a:ext cx="11430000" cy="27432"/>
+          </a:xfrm>
+          <a:prstGeom prst="rect">
+            <a:avLst/>
+          </a:prstGeom>
+          <a:solidFill>
+            <a:srgbClr val="D1D5DB"/>
+          </a:solidFill>
+          <a:ln>
+            <a:noFill/>
+          </a:ln>
+        </p:spPr>
+        <p:style>
+          <a:lnRef idx="1">
+            <a:schemeClr val="accent1"/>
+          </a:lnRef>
+          <a:fillRef idx="3">
+            <a:schemeClr val="accent1"/>
+          </a:fillRef>
+          <a:effectRef idx="2">
+            <a:schemeClr val="accent1"/>
+          </a:effectRef>
+          <a:fontRef idx="minor">
+            <a:schemeClr val="lt1"/>
+          </a:fontRef>
+        </p:style>
+        <p:txBody>
+          <a:bodyPr rtlCol="0" anchor="ctr"/>
+          <a:lstStyle/>
+          <a:p>
+            <a:pPr algn="ctr"/>
+          </a:p>
+        </p:txBody>
+      </p:sp>
+      <p:sp>
+        <p:nvSpPr>
+          <p:cNvPr id="6" name="TextBox 5"/>
+          <p:cNvSpPr txBox="1"/>
+          <p:nvPr/>
+        </p:nvSpPr>
+        <p:spPr>
+          <a:xfrm>
+            <a:off x="365760" y="1143000"/>
+            <a:ext cx="11430000" cy="5212080"/>
+          </a:xfrm>
+          <a:prstGeom prst="rect">
+            <a:avLst/>
+          </a:prstGeom>
+          <a:noFill/>
+        </p:spPr>
+        <p:txBody>
+          <a:bodyPr wrap="square">
+            <a:spAutoFit/>
+          </a:bodyPr>
+          <a:lstStyle/>
+          <a:p>
+            <a:pPr>
+              <a:spcBef>
+                <a:spcPts val="500"/>
+              </a:spcBef>
+            </a:pPr>
+            <a:r>
+              <a:rPr sz="1500">
+                <a:solidFill>
+                  <a:srgbClr val="003DA5"/>
+                </a:solidFill>
+                <a:latin typeface="Arial"/>
+              </a:rPr>
+              <a:t>▪  </a:t>
+            </a:r>
+            <a:r>
+              <a:rPr sz="1700" b="1">
+                <a:solidFill>
+                  <a:srgbClr val="003DA5"/>
+                </a:solidFill>
+                <a:latin typeface="Arial"/>
+              </a:rPr>
+              <a:t>Navigationspfad: </a:t>
+            </a:r>
+            <a:r>
+              <a:rPr sz="1700">
+                <a:solidFill>
+                  <a:srgbClr val="1A1A1A"/>
+                </a:solidFill>
+                <a:latin typeface="Arial"/>
+              </a:rPr>
+              <a:t>agree → Vertriebssteuerung → Aktivitätenverwaltung (alternativ: Gesprächsnotiz im UnternehmerDialog-Protokoll). Zu erfassen sind: - Besprochene Bedarfsfelder - Ergebnis (Abschluss…</a:t>
+            </a:r>
+          </a:p>
+          <a:p>
+            <a:pPr>
+              <a:spcBef>
+                <a:spcPts val="500"/>
+              </a:spcBef>
+            </a:pPr>
+            <a:r>
+              <a:rPr sz="1500">
+                <a:solidFill>
+                  <a:srgbClr val="003DA5"/>
+                </a:solidFill>
+                <a:latin typeface="Arial"/>
+              </a:rPr>
+              <a:t>▪  </a:t>
+            </a:r>
+            <a:r>
+              <a:rPr sz="1700" b="1">
+                <a:solidFill>
+                  <a:srgbClr val="003DA5"/>
+                </a:solidFill>
+                <a:latin typeface="Arial"/>
+              </a:rPr>
+              <a:t>Nicht dokumentierte Aktivitäten sind in Bestandsbesuchen und Zielerfüllung nicht sichtbar: </a:t>
+            </a:r>
+            <a:r>
+              <a:rPr sz="1700">
+                <a:solidFill>
+                  <a:srgbClr val="1A1A1A"/>
+                </a:solidFill>
+                <a:latin typeface="Arial"/>
+              </a:rPr>
+              <a:t>– was nicht in agree steht, hat aus Steuerungssicht nicht stattgefunden.</a:t>
+            </a:r>
+          </a:p>
+        </p:txBody>
+      </p:sp>
+    </p:spTree>
+  </p:cSld>
+  <p:clrMapOvr>
+    <a:masterClrMapping/>
+  </p:clrMapOvr>
+</p:sld>
+</file>
+
+<file path=ppt/slides/slide21.xml><?xml version="1.0" encoding="utf-8"?>
+<p:sld xmlns:a="http://schemas.openxmlformats.org/drawingml/2006/main" xmlns:p="http://schemas.openxmlformats.org/presentationml/2006/main" xmlns:r="http://schemas.openxmlformats.org/officeDocument/2006/relationships">
+  <p:cSld>
+    <p:bg>
+      <p:bgPr>
+        <a:solidFill>
+          <a:srgbClr val="1A1A1A"/>
+        </a:solidFill>
+        <a:effectLst/>
+      </p:bgPr>
+    </p:bg>
+    <p:spTree>
+      <p:nvGrpSpPr>
+        <p:cNvPr id="1" name=""/>
+        <p:cNvGrpSpPr/>
+        <p:nvPr/>
+      </p:nvGrpSpPr>
+      <p:grpSpPr/>
+      <p:sp>
+        <p:nvSpPr>
+          <p:cNvPr id="2" name="Rectangle 1"/>
+          <p:cNvSpPr/>
+          <p:nvPr/>
+        </p:nvSpPr>
+        <p:spPr>
+          <a:xfrm>
+            <a:off x="0" y="0"/>
+            <a:ext cx="73152" cy="6858000"/>
+          </a:xfrm>
+          <a:prstGeom prst="rect">
+            <a:avLst/>
+          </a:prstGeom>
+          <a:solidFill>
+            <a:srgbClr val="E05B00"/>
+          </a:solidFill>
+          <a:ln>
+            <a:noFill/>
+          </a:ln>
+        </p:spPr>
+        <p:style>
+          <a:lnRef idx="1">
+            <a:schemeClr val="accent1"/>
+          </a:lnRef>
+          <a:fillRef idx="3">
+            <a:schemeClr val="accent1"/>
+          </a:fillRef>
+          <a:effectRef idx="2">
+            <a:schemeClr val="accent1"/>
+          </a:effectRef>
+          <a:fontRef idx="minor">
+            <a:schemeClr val="lt1"/>
+          </a:fontRef>
+        </p:style>
+        <p:txBody>
+          <a:bodyPr rtlCol="0" anchor="ctr"/>
+          <a:lstStyle/>
+          <a:p>
+            <a:pPr algn="ctr"/>
+          </a:p>
+        </p:txBody>
+      </p:sp>
+      <p:sp>
+        <p:nvSpPr>
+          <p:cNvPr id="3" name="TextBox 2"/>
+          <p:cNvSpPr txBox="1"/>
+          <p:nvPr/>
+        </p:nvSpPr>
+        <p:spPr>
+          <a:xfrm>
+            <a:off x="365760" y="2011680"/>
+            <a:ext cx="11430000" cy="2011680"/>
+          </a:xfrm>
+          <a:prstGeom prst="rect">
+            <a:avLst/>
+          </a:prstGeom>
+          <a:noFill/>
+        </p:spPr>
+        <p:txBody>
+          <a:bodyPr wrap="square">
+            <a:spAutoFit/>
+          </a:bodyPr>
+          <a:lstStyle/>
+          <a:p>
+            <a:pPr algn="l"/>
+            <a:r>
+              <a:rPr sz="3600" b="1" i="0">
+                <a:solidFill>
+                  <a:srgbClr val="FFFFFF"/>
+                </a:solidFill>
+                <a:latin typeface="Arial"/>
+              </a:rPr>
+              <a:t>Arbeitsblatt A: Wallet-Share-Analyse</a:t>
+            </a:r>
+          </a:p>
+        </p:txBody>
+      </p:sp>
+    </p:spTree>
+  </p:cSld>
+  <p:clrMapOvr>
+    <a:masterClrMapping/>
+  </p:clrMapOvr>
+</p:sld>
+</file>
+
+<file path=ppt/slides/slide22.xml><?xml version="1.0" encoding="utf-8"?>
+<p:sld xmlns:a="http://schemas.openxmlformats.org/drawingml/2006/main" xmlns:p="http://schemas.openxmlformats.org/presentationml/2006/main" xmlns:r="http://schemas.openxmlformats.org/officeDocument/2006/relationships">
+  <p:cSld>
+    <p:bg>
+      <p:bgPr>
+        <a:solidFill>
+          <a:srgbClr val="FFFFFF"/>
+        </a:solidFill>
+        <a:effectLst/>
+      </p:bgPr>
+    </p:bg>
+    <p:spTree>
+      <p:nvGrpSpPr>
+        <p:cNvPr id="1" name=""/>
+        <p:cNvGrpSpPr/>
+        <p:nvPr/>
+      </p:nvGrpSpPr>
+      <p:grpSpPr/>
+      <p:sp>
+        <p:nvSpPr>
+          <p:cNvPr id="2" name="Rectangle 1"/>
+          <p:cNvSpPr/>
+          <p:nvPr/>
+        </p:nvSpPr>
+        <p:spPr>
+          <a:xfrm>
+            <a:off x="0" y="0"/>
+            <a:ext cx="73152" cy="6858000"/>
+          </a:xfrm>
+          <a:prstGeom prst="rect">
+            <a:avLst/>
+          </a:prstGeom>
+          <a:solidFill>
+            <a:srgbClr val="003DA5"/>
+          </a:solidFill>
+          <a:ln>
+            <a:noFill/>
+          </a:ln>
+        </p:spPr>
+        <p:style>
+          <a:lnRef idx="1">
+            <a:schemeClr val="accent1"/>
+          </a:lnRef>
+          <a:fillRef idx="3">
+            <a:schemeClr val="accent1"/>
+          </a:fillRef>
+          <a:effectRef idx="2">
+            <a:schemeClr val="accent1"/>
+          </a:effectRef>
+          <a:fontRef idx="minor">
+            <a:schemeClr val="lt1"/>
+          </a:fontRef>
+        </p:style>
+        <p:txBody>
+          <a:bodyPr rtlCol="0" anchor="ctr"/>
+          <a:lstStyle/>
+          <a:p>
+            <a:pPr algn="ctr"/>
+          </a:p>
+        </p:txBody>
+      </p:sp>
+      <p:sp>
+        <p:nvSpPr>
+          <p:cNvPr id="3" name="TextBox 2"/>
+          <p:cNvSpPr txBox="1"/>
+          <p:nvPr/>
+        </p:nvSpPr>
+        <p:spPr>
+          <a:xfrm>
+            <a:off x="228600" y="182880"/>
+            <a:ext cx="11430000" cy="320040"/>
+          </a:xfrm>
+          <a:prstGeom prst="rect">
+            <a:avLst/>
+          </a:prstGeom>
+          <a:noFill/>
+        </p:spPr>
+        <p:txBody>
+          <a:bodyPr wrap="square">
+            <a:spAutoFit/>
+          </a:bodyPr>
+          <a:lstStyle/>
+          <a:p>
+            <a:pPr algn="l"/>
+            <a:r>
+              <a:rPr sz="900" b="0" i="0">
+                <a:solidFill>
+                  <a:srgbClr val="556575"/>
+                </a:solidFill>
+                <a:latin typeface="Arial"/>
+              </a:rPr>
+              <a:t>M13 · 4.6 Arbeitsblätter</a:t>
+            </a:r>
+          </a:p>
+        </p:txBody>
+      </p:sp>
+      <p:sp>
+        <p:nvSpPr>
+          <p:cNvPr id="4" name="TextBox 3"/>
+          <p:cNvSpPr txBox="1"/>
+          <p:nvPr/>
+        </p:nvSpPr>
+        <p:spPr>
+          <a:xfrm>
+            <a:off x="365760" y="274320"/>
+            <a:ext cx="11430000" cy="777240"/>
+          </a:xfrm>
+          <a:prstGeom prst="rect">
+            <a:avLst/>
+          </a:prstGeom>
+          <a:noFill/>
+        </p:spPr>
+        <p:txBody>
+          <a:bodyPr wrap="square">
+            <a:spAutoFit/>
+          </a:bodyPr>
+          <a:lstStyle/>
+          <a:p>
+            <a:pPr algn="l"/>
+            <a:r>
+              <a:rPr sz="2200" b="1" i="0">
+                <a:solidFill>
+                  <a:srgbClr val="003DA5"/>
+                </a:solidFill>
+                <a:latin typeface="Arial"/>
+              </a:rPr>
+              <a:t>Arbeitsblatt A: Wallet-Share-Analyse</a:t>
+            </a:r>
+          </a:p>
+        </p:txBody>
+      </p:sp>
+      <p:sp>
+        <p:nvSpPr>
+          <p:cNvPr id="5" name="Rectangle 4"/>
+          <p:cNvSpPr/>
+          <p:nvPr/>
+        </p:nvSpPr>
+        <p:spPr>
+          <a:xfrm>
+            <a:off x="365760" y="1005840"/>
+            <a:ext cx="11430000" cy="27432"/>
+          </a:xfrm>
+          <a:prstGeom prst="rect">
+            <a:avLst/>
+          </a:prstGeom>
+          <a:solidFill>
+            <a:srgbClr val="D1D5DB"/>
+          </a:solidFill>
+          <a:ln>
+            <a:noFill/>
+          </a:ln>
+        </p:spPr>
+        <p:style>
+          <a:lnRef idx="1">
+            <a:schemeClr val="accent1"/>
+          </a:lnRef>
+          <a:fillRef idx="3">
+            <a:schemeClr val="accent1"/>
+          </a:fillRef>
+          <a:effectRef idx="2">
+            <a:schemeClr val="accent1"/>
+          </a:effectRef>
+          <a:fontRef idx="minor">
+            <a:schemeClr val="lt1"/>
+          </a:fontRef>
+        </p:style>
+        <p:txBody>
+          <a:bodyPr rtlCol="0" anchor="ctr"/>
+          <a:lstStyle/>
+          <a:p>
+            <a:pPr algn="ctr"/>
+          </a:p>
+        </p:txBody>
+      </p:sp>
+      <p:graphicFrame>
+        <p:nvGraphicFramePr>
+          <p:cNvPr id="6" name="Table 5"/>
+          <p:cNvGraphicFramePr>
+            <a:graphicFrameLocks noGrp="1"/>
+          </p:cNvGraphicFramePr>
+          <p:nvPr/>
+        </p:nvGraphicFramePr>
+        <p:xfrm>
+          <a:off x="365760" y="1143000"/>
+          <a:ext cx="11430000" cy="3328416"/>
+        </p:xfrm>
+        <a:graphic>
+          <a:graphicData uri="http://schemas.openxmlformats.org/drawingml/2006/table">
+            <a:tbl>
+              <a:tblPr firstRow="1" bandRow="1">
+                <a:tableStyleId>{5C22544A-7EE6-4342-B048-85BDC9FD1C3A}</a:tableStyleId>
+              </a:tblPr>
+              <a:tblGrid>
+                <a:gridCol w="2286000"/>
+                <a:gridCol w="2286000"/>
+                <a:gridCol w="2286000"/>
+                <a:gridCol w="2286000"/>
+                <a:gridCol w="2286000"/>
+              </a:tblGrid>
+              <a:tr h="475488">
+                <a:tc>
+                  <a:txBody>
+                    <a:bodyPr wrap="square"/>
+                    <a:lstStyle/>
+                    <a:p>
+                      <a:r>
+                        <a:rPr sz="1100" b="1">
+                          <a:solidFill>
+                            <a:srgbClr val="FFFFFF"/>
+                          </a:solidFill>
+                          <a:latin typeface="Arial"/>
+                        </a:rPr>
+                        <a:t>Dimension</a:t>
+                      </a:r>
+                    </a:p>
+                  </a:txBody>
+                  <a:tcPr>
+                    <a:solidFill>
+                      <a:srgbClr val="003DA5"/>
+                    </a:solidFill>
+                  </a:tcPr>
+                </a:tc>
+                <a:tc>
+                  <a:txBody>
+                    <a:bodyPr wrap="square"/>
+                    <a:lstStyle/>
+                    <a:p>
+                      <a:r>
+                        <a:rPr sz="1100" b="1">
+                          <a:solidFill>
+                            <a:srgbClr val="FFFFFF"/>
+                          </a:solidFill>
+                          <a:latin typeface="Arial"/>
+                        </a:rPr>
+                        <a:t>Aktueller Stand (uns bekannt)</a:t>
+                      </a:r>
+                    </a:p>
+                  </a:txBody>
+                  <a:tcPr>
+                    <a:solidFill>
+                      <a:srgbClr val="003DA5"/>
+                    </a:solidFill>
+                  </a:tcPr>
+                </a:tc>
+                <a:tc>
+                  <a:txBody>
+                    <a:bodyPr wrap="square"/>
+                    <a:lstStyle/>
+                    <a:p>
+                      <a:r>
+                        <a:rPr sz="1100" b="1">
+                          <a:solidFill>
+                            <a:srgbClr val="FFFFFF"/>
+                          </a:solidFill>
+                          <a:latin typeface="Arial"/>
+                        </a:rPr>
+                        <a:t>Schätzung Gesamtbedarf</a:t>
+                      </a:r>
+                    </a:p>
+                  </a:txBody>
+                  <a:tcPr>
+                    <a:solidFill>
+                      <a:srgbClr val="003DA5"/>
+                    </a:solidFill>
+                  </a:tcPr>
+                </a:tc>
+                <a:tc>
+                  <a:txBody>
+                    <a:bodyPr wrap="square"/>
+                    <a:lstStyle/>
+                    <a:p>
+                      <a:r>
+                        <a:rPr sz="1100" b="1">
+                          <a:solidFill>
+                            <a:srgbClr val="FFFFFF"/>
+                          </a:solidFill>
+                          <a:latin typeface="Arial"/>
+                        </a:rPr>
+                        <a:t>Wallet-Share (%)</a:t>
+                      </a:r>
+                    </a:p>
+                  </a:txBody>
+                  <a:tcPr>
+                    <a:solidFill>
+                      <a:srgbClr val="003DA5"/>
+                    </a:solidFill>
+                  </a:tcPr>
+                </a:tc>
+                <a:tc>
+                  <a:txBody>
+                    <a:bodyPr wrap="square"/>
+                    <a:lstStyle/>
+                    <a:p>
+                      <a:r>
+                        <a:rPr sz="1100" b="1">
+                          <a:solidFill>
+                            <a:srgbClr val="FFFFFF"/>
+                          </a:solidFill>
+                          <a:latin typeface="Arial"/>
+                        </a:rPr>
+                        <a:t>Cross-Selling-Potenzial</a:t>
+                      </a:r>
+                    </a:p>
+                  </a:txBody>
+                  <a:tcPr>
+                    <a:solidFill>
+                      <a:srgbClr val="003DA5"/>
+                    </a:solidFill>
+                  </a:tcPr>
+                </a:tc>
+              </a:tr>
+              <a:tr h="475488">
+                <a:tc>
+                  <a:txBody>
+                    <a:bodyPr wrap="square"/>
+                    <a:lstStyle/>
+                    <a:p>
+                      <a:r>
+                        <a:rPr sz="1100" b="0">
+                          <a:solidFill>
+                            <a:srgbClr val="1A1A1A"/>
+                          </a:solidFill>
+                          <a:latin typeface="Arial"/>
+                        </a:rPr>
+                        <a:t>Finanzierung</a:t>
+                      </a:r>
+                    </a:p>
+                  </a:txBody>
+                  <a:tcPr>
+                    <a:solidFill>
+                      <a:srgbClr val="FFFFFF"/>
+                    </a:solidFill>
+                  </a:tcPr>
+                </a:tc>
+                <a:tc>
+                  <a:txBody>
+                    <a:bodyPr wrap="square"/>
+                    <a:lstStyle/>
+                    <a:p>
+                      <a:r>
+                        <a:rPr sz="1100" b="0">
+                          <a:solidFill>
+                            <a:srgbClr val="1A1A1A"/>
+                          </a:solidFill>
+                          <a:latin typeface="Arial"/>
+                        </a:rPr>
+                        <a:t/>
+                      </a:r>
+                    </a:p>
+                  </a:txBody>
+                  <a:tcPr>
+                    <a:solidFill>
+                      <a:srgbClr val="FFFFFF"/>
+                    </a:solidFill>
+                  </a:tcPr>
+                </a:tc>
+                <a:tc>
+                  <a:txBody>
+                    <a:bodyPr wrap="square"/>
+                    <a:lstStyle/>
+                    <a:p>
+                      <a:r>
+                        <a:rPr sz="1100" b="0">
+                          <a:solidFill>
+                            <a:srgbClr val="1A1A1A"/>
+                          </a:solidFill>
+                          <a:latin typeface="Arial"/>
+                        </a:rPr>
+                        <a:t/>
+                      </a:r>
+                    </a:p>
+                  </a:txBody>
+                  <a:tcPr>
+                    <a:solidFill>
+                      <a:srgbClr val="FFFFFF"/>
+                    </a:solidFill>
+                  </a:tcPr>
+                </a:tc>
+                <a:tc>
+                  <a:txBody>
+                    <a:bodyPr wrap="square"/>
+                    <a:lstStyle/>
+                    <a:p>
+                      <a:r>
+                        <a:rPr sz="1100" b="0">
+                          <a:solidFill>
+                            <a:srgbClr val="1A1A1A"/>
+                          </a:solidFill>
+                          <a:latin typeface="Arial"/>
+                        </a:rPr>
+                        <a:t/>
+                      </a:r>
+                    </a:p>
+                  </a:txBody>
+                  <a:tcPr>
+                    <a:solidFill>
+                      <a:srgbClr val="FFFFFF"/>
+                    </a:solidFill>
+                  </a:tcPr>
+                </a:tc>
+                <a:tc>
+                  <a:txBody>
+                    <a:bodyPr wrap="square"/>
+                    <a:lstStyle/>
+                    <a:p>
+                      <a:r>
+                        <a:rPr sz="1100" b="0">
+                          <a:solidFill>
+                            <a:srgbClr val="1A1A1A"/>
+                          </a:solidFill>
+                          <a:latin typeface="Arial"/>
+                        </a:rPr>
+                        <a:t/>
+                      </a:r>
+                    </a:p>
+                  </a:txBody>
+                  <a:tcPr>
+                    <a:solidFill>
+                      <a:srgbClr val="FFFFFF"/>
+                    </a:solidFill>
+                  </a:tcPr>
+                </a:tc>
+              </a:tr>
+              <a:tr h="475488">
+                <a:tc>
+                  <a:txBody>
+                    <a:bodyPr wrap="square"/>
+                    <a:lstStyle/>
+                    <a:p>
+                      <a:r>
+                        <a:rPr sz="1100" b="0">
+                          <a:solidFill>
+                            <a:srgbClr val="1A1A1A"/>
+                          </a:solidFill>
+                          <a:latin typeface="Arial"/>
+                        </a:rPr>
+                        <a:t>Absicherung</a:t>
+                      </a:r>
+                    </a:p>
+                  </a:txBody>
+                  <a:tcPr>
+                    <a:solidFill>
+                      <a:srgbClr val="F4F6FA"/>
+                    </a:solidFill>
+                  </a:tcPr>
+                </a:tc>
+                <a:tc>
+                  <a:txBody>
+                    <a:bodyPr wrap="square"/>
+                    <a:lstStyle/>
+                    <a:p>
+                      <a:r>
+                        <a:rPr sz="1100" b="0">
+                          <a:solidFill>
+                            <a:srgbClr val="1A1A1A"/>
+                          </a:solidFill>
+                          <a:latin typeface="Arial"/>
+                        </a:rPr>
+                        <a:t/>
+                      </a:r>
+                    </a:p>
+                  </a:txBody>
+                  <a:tcPr>
+                    <a:solidFill>
+                      <a:srgbClr val="F4F6FA"/>
+                    </a:solidFill>
+                  </a:tcPr>
+                </a:tc>
+                <a:tc>
+                  <a:txBody>
+                    <a:bodyPr wrap="square"/>
+                    <a:lstStyle/>
+                    <a:p>
+                      <a:r>
+                        <a:rPr sz="1100" b="0">
+                          <a:solidFill>
+                            <a:srgbClr val="1A1A1A"/>
+                          </a:solidFill>
+                          <a:latin typeface="Arial"/>
+                        </a:rPr>
+                        <a:t/>
+                      </a:r>
+                    </a:p>
+                  </a:txBody>
+                  <a:tcPr>
+                    <a:solidFill>
+                      <a:srgbClr val="F4F6FA"/>
+                    </a:solidFill>
+                  </a:tcPr>
+                </a:tc>
+                <a:tc>
+                  <a:txBody>
+                    <a:bodyPr wrap="square"/>
+                    <a:lstStyle/>
+                    <a:p>
+                      <a:r>
+                        <a:rPr sz="1100" b="0">
+                          <a:solidFill>
+                            <a:srgbClr val="1A1A1A"/>
+                          </a:solidFill>
+                          <a:latin typeface="Arial"/>
+                        </a:rPr>
+                        <a:t/>
+                      </a:r>
+                    </a:p>
+                  </a:txBody>
+                  <a:tcPr>
+                    <a:solidFill>
+                      <a:srgbClr val="F4F6FA"/>
+                    </a:solidFill>
+                  </a:tcPr>
+                </a:tc>
+                <a:tc>
+                  <a:txBody>
+                    <a:bodyPr wrap="square"/>
+                    <a:lstStyle/>
+                    <a:p>
+                      <a:r>
+                        <a:rPr sz="1100" b="0">
+                          <a:solidFill>
+                            <a:srgbClr val="1A1A1A"/>
+                          </a:solidFill>
+                          <a:latin typeface="Arial"/>
+                        </a:rPr>
+                        <a:t/>
+                      </a:r>
+                    </a:p>
+                  </a:txBody>
+                  <a:tcPr>
+                    <a:solidFill>
+                      <a:srgbClr val="F4F6FA"/>
+                    </a:solidFill>
+                  </a:tcPr>
+                </a:tc>
+              </a:tr>
+              <a:tr h="475488">
+                <a:tc>
+                  <a:txBody>
+                    <a:bodyPr wrap="square"/>
+                    <a:lstStyle/>
+                    <a:p>
+                      <a:r>
+                        <a:rPr sz="1100" b="0">
+                          <a:solidFill>
+                            <a:srgbClr val="1A1A1A"/>
+                          </a:solidFill>
+                          <a:latin typeface="Arial"/>
+                        </a:rPr>
+                        <a:t>Kapitalanlage</a:t>
+                      </a:r>
+                    </a:p>
+                  </a:txBody>
+                  <a:tcPr>
+                    <a:solidFill>
+                      <a:srgbClr val="FFFFFF"/>
+                    </a:solidFill>
+                  </a:tcPr>
+                </a:tc>
+                <a:tc>
+                  <a:txBody>
+                    <a:bodyPr wrap="square"/>
+                    <a:lstStyle/>
+                    <a:p>
+                      <a:r>
+                        <a:rPr sz="1100" b="0">
+                          <a:solidFill>
+                            <a:srgbClr val="1A1A1A"/>
+                          </a:solidFill>
+                          <a:latin typeface="Arial"/>
+                        </a:rPr>
+                        <a:t/>
+                      </a:r>
+                    </a:p>
+                  </a:txBody>
+                  <a:tcPr>
+                    <a:solidFill>
+                      <a:srgbClr val="FFFFFF"/>
+                    </a:solidFill>
+                  </a:tcPr>
+                </a:tc>
+                <a:tc>
+                  <a:txBody>
+                    <a:bodyPr wrap="square"/>
+                    <a:lstStyle/>
+                    <a:p>
+                      <a:r>
+                        <a:rPr sz="1100" b="0">
+                          <a:solidFill>
+                            <a:srgbClr val="1A1A1A"/>
+                          </a:solidFill>
+                          <a:latin typeface="Arial"/>
+                        </a:rPr>
+                        <a:t/>
+                      </a:r>
+                    </a:p>
+                  </a:txBody>
+                  <a:tcPr>
+                    <a:solidFill>
+                      <a:srgbClr val="FFFFFF"/>
+                    </a:solidFill>
+                  </a:tcPr>
+                </a:tc>
+                <a:tc>
+                  <a:txBody>
+                    <a:bodyPr wrap="square"/>
+                    <a:lstStyle/>
+                    <a:p>
+                      <a:r>
+                        <a:rPr sz="1100" b="0">
+                          <a:solidFill>
+                            <a:srgbClr val="1A1A1A"/>
+                          </a:solidFill>
+                          <a:latin typeface="Arial"/>
+                        </a:rPr>
+                        <a:t/>
+                      </a:r>
+                    </a:p>
+                  </a:txBody>
+                  <a:tcPr>
+                    <a:solidFill>
+                      <a:srgbClr val="FFFFFF"/>
+                    </a:solidFill>
+                  </a:tcPr>
+                </a:tc>
+                <a:tc>
+                  <a:txBody>
+                    <a:bodyPr wrap="square"/>
+                    <a:lstStyle/>
+                    <a:p>
+                      <a:r>
+                        <a:rPr sz="1100" b="0">
+                          <a:solidFill>
+                            <a:srgbClr val="1A1A1A"/>
+                          </a:solidFill>
+                          <a:latin typeface="Arial"/>
+                        </a:rPr>
+                        <a:t/>
+                      </a:r>
+                    </a:p>
+                  </a:txBody>
+                  <a:tcPr>
+                    <a:solidFill>
+                      <a:srgbClr val="FFFFFF"/>
+                    </a:solidFill>
+                  </a:tcPr>
+                </a:tc>
+              </a:tr>
+              <a:tr h="475488">
+                <a:tc>
+                  <a:txBody>
+                    <a:bodyPr wrap="square"/>
+                    <a:lstStyle/>
+                    <a:p>
+                      <a:r>
+                        <a:rPr sz="1100" b="0">
+                          <a:solidFill>
+                            <a:srgbClr val="1A1A1A"/>
+                          </a:solidFill>
+                          <a:latin typeface="Arial"/>
+                        </a:rPr>
+                        <a:t>Zahlungsverkehr</a:t>
+                      </a:r>
+                    </a:p>
+                  </a:txBody>
+                  <a:tcPr>
+                    <a:solidFill>
+                      <a:srgbClr val="F4F6FA"/>
+                    </a:solidFill>
+                  </a:tcPr>
+                </a:tc>
+                <a:tc>
+                  <a:txBody>
+                    <a:bodyPr wrap="square"/>
+                    <a:lstStyle/>
+                    <a:p>
+                      <a:r>
+                        <a:rPr sz="1100" b="0">
+                          <a:solidFill>
+                            <a:srgbClr val="1A1A1A"/>
+                          </a:solidFill>
+                          <a:latin typeface="Arial"/>
+                        </a:rPr>
+                        <a:t/>
+                      </a:r>
+                    </a:p>
+                  </a:txBody>
+                  <a:tcPr>
+                    <a:solidFill>
+                      <a:srgbClr val="F4F6FA"/>
+                    </a:solidFill>
+                  </a:tcPr>
+                </a:tc>
+                <a:tc>
+                  <a:txBody>
+                    <a:bodyPr wrap="square"/>
+                    <a:lstStyle/>
+                    <a:p>
+                      <a:r>
+                        <a:rPr sz="1100" b="0">
+                          <a:solidFill>
+                            <a:srgbClr val="1A1A1A"/>
+                          </a:solidFill>
+                          <a:latin typeface="Arial"/>
+                        </a:rPr>
+                        <a:t/>
+                      </a:r>
+                    </a:p>
+                  </a:txBody>
+                  <a:tcPr>
+                    <a:solidFill>
+                      <a:srgbClr val="F4F6FA"/>
+                    </a:solidFill>
+                  </a:tcPr>
+                </a:tc>
+                <a:tc>
+                  <a:txBody>
+                    <a:bodyPr wrap="square"/>
+                    <a:lstStyle/>
+                    <a:p>
+                      <a:r>
+                        <a:rPr sz="1100" b="0">
+                          <a:solidFill>
+                            <a:srgbClr val="1A1A1A"/>
+                          </a:solidFill>
+                          <a:latin typeface="Arial"/>
+                        </a:rPr>
+                        <a:t/>
+                      </a:r>
+                    </a:p>
+                  </a:txBody>
+                  <a:tcPr>
+                    <a:solidFill>
+                      <a:srgbClr val="F4F6FA"/>
+                    </a:solidFill>
+                  </a:tcPr>
+                </a:tc>
+                <a:tc>
+                  <a:txBody>
+                    <a:bodyPr wrap="square"/>
+                    <a:lstStyle/>
+                    <a:p>
+                      <a:r>
+                        <a:rPr sz="1100" b="0">
+                          <a:solidFill>
+                            <a:srgbClr val="1A1A1A"/>
+                          </a:solidFill>
+                          <a:latin typeface="Arial"/>
+                        </a:rPr>
+                        <a:t/>
+                      </a:r>
+                    </a:p>
+                  </a:txBody>
+                  <a:tcPr>
+                    <a:solidFill>
+                      <a:srgbClr val="F4F6FA"/>
+                    </a:solidFill>
+                  </a:tcPr>
+                </a:tc>
+              </a:tr>
+              <a:tr h="475488">
+                <a:tc>
+                  <a:txBody>
+                    <a:bodyPr wrap="square"/>
+                    <a:lstStyle/>
+                    <a:p>
+                      <a:r>
+                        <a:rPr sz="1100" b="0">
+                          <a:solidFill>
+                            <a:srgbClr val="1A1A1A"/>
+                          </a:solidFill>
+                          <a:latin typeface="Arial"/>
+                        </a:rPr>
+                        <a:t>Privat/Gesellschafter</a:t>
+                      </a:r>
+                    </a:p>
+                  </a:txBody>
+                  <a:tcPr>
+                    <a:solidFill>
+                      <a:srgbClr val="FFFFFF"/>
+                    </a:solidFill>
+                  </a:tcPr>
+                </a:tc>
+                <a:tc>
+                  <a:txBody>
+                    <a:bodyPr wrap="square"/>
+                    <a:lstStyle/>
+                    <a:p>
+                      <a:r>
+                        <a:rPr sz="1100" b="0">
+                          <a:solidFill>
+                            <a:srgbClr val="1A1A1A"/>
+                          </a:solidFill>
+                          <a:latin typeface="Arial"/>
+                        </a:rPr>
+                        <a:t/>
+                      </a:r>
+                    </a:p>
+                  </a:txBody>
+                  <a:tcPr>
+                    <a:solidFill>
+                      <a:srgbClr val="FFFFFF"/>
+                    </a:solidFill>
+                  </a:tcPr>
+                </a:tc>
+                <a:tc>
+                  <a:txBody>
+                    <a:bodyPr wrap="square"/>
+                    <a:lstStyle/>
+                    <a:p>
+                      <a:r>
+                        <a:rPr sz="1100" b="0">
+                          <a:solidFill>
+                            <a:srgbClr val="1A1A1A"/>
+                          </a:solidFill>
+                          <a:latin typeface="Arial"/>
+                        </a:rPr>
+                        <a:t/>
+                      </a:r>
+                    </a:p>
+                  </a:txBody>
+                  <a:tcPr>
+                    <a:solidFill>
+                      <a:srgbClr val="FFFFFF"/>
+                    </a:solidFill>
+                  </a:tcPr>
+                </a:tc>
+                <a:tc>
+                  <a:txBody>
+                    <a:bodyPr wrap="square"/>
+                    <a:lstStyle/>
+                    <a:p>
+                      <a:r>
+                        <a:rPr sz="1100" b="0">
+                          <a:solidFill>
+                            <a:srgbClr val="1A1A1A"/>
+                          </a:solidFill>
+                          <a:latin typeface="Arial"/>
+                        </a:rPr>
+                        <a:t/>
+                      </a:r>
+                    </a:p>
+                  </a:txBody>
+                  <a:tcPr>
+                    <a:solidFill>
+                      <a:srgbClr val="FFFFFF"/>
+                    </a:solidFill>
+                  </a:tcPr>
+                </a:tc>
+                <a:tc>
+                  <a:txBody>
+                    <a:bodyPr wrap="square"/>
+                    <a:lstStyle/>
+                    <a:p>
+                      <a:r>
+                        <a:rPr sz="1100" b="0">
+                          <a:solidFill>
+                            <a:srgbClr val="1A1A1A"/>
+                          </a:solidFill>
+                          <a:latin typeface="Arial"/>
+                        </a:rPr>
+                        <a:t/>
+                      </a:r>
+                    </a:p>
+                  </a:txBody>
+                  <a:tcPr>
+                    <a:solidFill>
+                      <a:srgbClr val="FFFFFF"/>
+                    </a:solidFill>
+                  </a:tcPr>
+                </a:tc>
+              </a:tr>
+              <a:tr h="475488">
+                <a:tc>
+                  <a:txBody>
+                    <a:bodyPr wrap="square"/>
+                    <a:lstStyle/>
+                    <a:p>
+                      <a:r>
+                        <a:rPr sz="1100" b="0">
+                          <a:solidFill>
+                            <a:srgbClr val="1A1A1A"/>
+                          </a:solidFill>
+                          <a:latin typeface="Arial"/>
+                        </a:rPr>
+                        <a:t>Gesamt</a:t>
+                      </a:r>
+                    </a:p>
+                  </a:txBody>
+                  <a:tcPr>
+                    <a:solidFill>
+                      <a:srgbClr val="F4F6FA"/>
+                    </a:solidFill>
+                  </a:tcPr>
+                </a:tc>
+                <a:tc>
+                  <a:txBody>
+                    <a:bodyPr wrap="square"/>
+                    <a:lstStyle/>
+                    <a:p>
+                      <a:r>
+                        <a:rPr sz="1100" b="0">
+                          <a:solidFill>
+                            <a:srgbClr val="1A1A1A"/>
+                          </a:solidFill>
+                          <a:latin typeface="Arial"/>
+                        </a:rPr>
+                        <a:t/>
+                      </a:r>
+                    </a:p>
+                  </a:txBody>
+                  <a:tcPr>
+                    <a:solidFill>
+                      <a:srgbClr val="F4F6FA"/>
+                    </a:solidFill>
+                  </a:tcPr>
+                </a:tc>
+                <a:tc>
+                  <a:txBody>
+                    <a:bodyPr wrap="square"/>
+                    <a:lstStyle/>
+                    <a:p>
+                      <a:r>
+                        <a:rPr sz="1100" b="0">
+                          <a:solidFill>
+                            <a:srgbClr val="1A1A1A"/>
+                          </a:solidFill>
+                          <a:latin typeface="Arial"/>
+                        </a:rPr>
+                        <a:t/>
+                      </a:r>
+                    </a:p>
+                  </a:txBody>
+                  <a:tcPr>
+                    <a:solidFill>
+                      <a:srgbClr val="F4F6FA"/>
+                    </a:solidFill>
+                  </a:tcPr>
+                </a:tc>
+                <a:tc>
+                  <a:txBody>
+                    <a:bodyPr wrap="square"/>
+                    <a:lstStyle/>
+                    <a:p>
+                      <a:r>
+                        <a:rPr sz="1100" b="0">
+                          <a:solidFill>
+                            <a:srgbClr val="1A1A1A"/>
+                          </a:solidFill>
+                          <a:latin typeface="Arial"/>
+                        </a:rPr>
+                        <a:t/>
+                      </a:r>
+                    </a:p>
+                  </a:txBody>
+                  <a:tcPr>
+                    <a:solidFill>
+                      <a:srgbClr val="F4F6FA"/>
+                    </a:solidFill>
+                  </a:tcPr>
+                </a:tc>
+                <a:tc>
+                  <a:txBody>
+                    <a:bodyPr wrap="square"/>
+                    <a:lstStyle/>
+                    <a:p>
+                      <a:r>
+                        <a:rPr sz="1100" b="0">
+                          <a:solidFill>
+                            <a:srgbClr val="1A1A1A"/>
+                          </a:solidFill>
+                          <a:latin typeface="Arial"/>
+                        </a:rPr>
+                        <a:t/>
+                      </a:r>
+                    </a:p>
+                  </a:txBody>
+                  <a:tcPr>
+                    <a:solidFill>
+                      <a:srgbClr val="F4F6FA"/>
+                    </a:solidFill>
+                  </a:tcPr>
+                </a:tc>
+              </a:tr>
+            </a:tbl>
+          </a:graphicData>
+        </a:graphic>
+      </p:graphicFrame>
+    </p:spTree>
+  </p:cSld>
+  <p:clrMapOvr>
+    <a:masterClrMapping/>
+  </p:clrMapOvr>
+</p:sld>
+</file>
+
+<file path=ppt/slides/slide23.xml><?xml version="1.0" encoding="utf-8"?>
+<p:sld xmlns:a="http://schemas.openxmlformats.org/drawingml/2006/main" xmlns:p="http://schemas.openxmlformats.org/presentationml/2006/main" xmlns:r="http://schemas.openxmlformats.org/officeDocument/2006/relationships">
+  <p:cSld>
+    <p:bg>
+      <p:bgPr>
+        <a:solidFill>
+          <a:srgbClr val="1A1A1A"/>
+        </a:solidFill>
+        <a:effectLst/>
+      </p:bgPr>
+    </p:bg>
+    <p:spTree>
+      <p:nvGrpSpPr>
+        <p:cNvPr id="1" name=""/>
+        <p:cNvGrpSpPr/>
+        <p:nvPr/>
+      </p:nvGrpSpPr>
+      <p:grpSpPr/>
+      <p:sp>
+        <p:nvSpPr>
+          <p:cNvPr id="2" name="Rectangle 1"/>
+          <p:cNvSpPr/>
+          <p:nvPr/>
+        </p:nvSpPr>
+        <p:spPr>
+          <a:xfrm>
+            <a:off x="0" y="0"/>
+            <a:ext cx="73152" cy="6858000"/>
+          </a:xfrm>
+          <a:prstGeom prst="rect">
+            <a:avLst/>
+          </a:prstGeom>
+          <a:solidFill>
+            <a:srgbClr val="E05B00"/>
+          </a:solidFill>
+          <a:ln>
+            <a:noFill/>
+          </a:ln>
+        </p:spPr>
+        <p:style>
+          <a:lnRef idx="1">
+            <a:schemeClr val="accent1"/>
+          </a:lnRef>
+          <a:fillRef idx="3">
+            <a:schemeClr val="accent1"/>
+          </a:fillRef>
+          <a:effectRef idx="2">
+            <a:schemeClr val="accent1"/>
+          </a:effectRef>
+          <a:fontRef idx="minor">
+            <a:schemeClr val="lt1"/>
+          </a:fontRef>
+        </p:style>
+        <p:txBody>
+          <a:bodyPr rtlCol="0" anchor="ctr"/>
+          <a:lstStyle/>
+          <a:p>
+            <a:pPr algn="ctr"/>
+          </a:p>
+        </p:txBody>
+      </p:sp>
+      <p:sp>
+        <p:nvSpPr>
+          <p:cNvPr id="3" name="TextBox 2"/>
+          <p:cNvSpPr txBox="1"/>
+          <p:nvPr/>
+        </p:nvSpPr>
+        <p:spPr>
+          <a:xfrm>
+            <a:off x="365760" y="2011680"/>
+            <a:ext cx="11430000" cy="2011680"/>
+          </a:xfrm>
+          <a:prstGeom prst="rect">
+            <a:avLst/>
+          </a:prstGeom>
+          <a:noFill/>
+        </p:spPr>
+        <p:txBody>
+          <a:bodyPr wrap="square">
+            <a:spAutoFit/>
+          </a:bodyPr>
+          <a:lstStyle/>
+          <a:p>
+            <a:pPr algn="l"/>
+            <a:r>
+              <a:rPr sz="3600" b="1" i="0">
+                <a:solidFill>
+                  <a:srgbClr val="FFFFFF"/>
+                </a:solidFill>
+                <a:latin typeface="Arial"/>
+              </a:rPr>
+              <a:t>Arbeitsblatt B: Cross-Selling-Gesprächsvorbereitung</a:t>
+            </a:r>
+          </a:p>
+        </p:txBody>
+      </p:sp>
+    </p:spTree>
+  </p:cSld>
+  <p:clrMapOvr>
+    <a:masterClrMapping/>
+  </p:clrMapOvr>
+</p:sld>
+</file>
+
+<file path=ppt/slides/slide24.xml><?xml version="1.0" encoding="utf-8"?>
+<p:sld xmlns:a="http://schemas.openxmlformats.org/drawingml/2006/main" xmlns:p="http://schemas.openxmlformats.org/presentationml/2006/main" xmlns:r="http://schemas.openxmlformats.org/officeDocument/2006/relationships">
+  <p:cSld>
+    <p:bg>
+      <p:bgPr>
+        <a:solidFill>
+          <a:srgbClr val="FFFFFF"/>
+        </a:solidFill>
+        <a:effectLst/>
+      </p:bgPr>
+    </p:bg>
+    <p:spTree>
+      <p:nvGrpSpPr>
+        <p:cNvPr id="1" name=""/>
+        <p:cNvGrpSpPr/>
+        <p:nvPr/>
+      </p:nvGrpSpPr>
+      <p:grpSpPr/>
+      <p:sp>
+        <p:nvSpPr>
+          <p:cNvPr id="2" name="Rectangle 1"/>
+          <p:cNvSpPr/>
+          <p:nvPr/>
+        </p:nvSpPr>
+        <p:spPr>
+          <a:xfrm>
+            <a:off x="0" y="0"/>
+            <a:ext cx="73152" cy="6858000"/>
+          </a:xfrm>
+          <a:prstGeom prst="rect">
+            <a:avLst/>
+          </a:prstGeom>
+          <a:solidFill>
+            <a:srgbClr val="003DA5"/>
+          </a:solidFill>
+          <a:ln>
+            <a:noFill/>
+          </a:ln>
+        </p:spPr>
+        <p:style>
+          <a:lnRef idx="1">
+            <a:schemeClr val="accent1"/>
+          </a:lnRef>
+          <a:fillRef idx="3">
+            <a:schemeClr val="accent1"/>
+          </a:fillRef>
+          <a:effectRef idx="2">
+            <a:schemeClr val="accent1"/>
+          </a:effectRef>
+          <a:fontRef idx="minor">
+            <a:schemeClr val="lt1"/>
+          </a:fontRef>
+        </p:style>
+        <p:txBody>
+          <a:bodyPr rtlCol="0" anchor="ctr"/>
+          <a:lstStyle/>
+          <a:p>
+            <a:pPr algn="ctr"/>
+          </a:p>
+        </p:txBody>
+      </p:sp>
+      <p:sp>
+        <p:nvSpPr>
+          <p:cNvPr id="3" name="TextBox 2"/>
+          <p:cNvSpPr txBox="1"/>
+          <p:nvPr/>
+        </p:nvSpPr>
+        <p:spPr>
+          <a:xfrm>
+            <a:off x="228600" y="182880"/>
+            <a:ext cx="11430000" cy="320040"/>
+          </a:xfrm>
+          <a:prstGeom prst="rect">
+            <a:avLst/>
+          </a:prstGeom>
+          <a:noFill/>
+        </p:spPr>
+        <p:txBody>
+          <a:bodyPr wrap="square">
+            <a:spAutoFit/>
+          </a:bodyPr>
+          <a:lstStyle/>
+          <a:p>
+            <a:pPr algn="l"/>
+            <a:r>
+              <a:rPr sz="900" b="0" i="0">
+                <a:solidFill>
+                  <a:srgbClr val="556575"/>
+                </a:solidFill>
+                <a:latin typeface="Arial"/>
+              </a:rPr>
+              <a:t>M13 · 4.6 Arbeitsblätter</a:t>
+            </a:r>
+          </a:p>
+        </p:txBody>
+      </p:sp>
+      <p:sp>
+        <p:nvSpPr>
+          <p:cNvPr id="4" name="TextBox 3"/>
+          <p:cNvSpPr txBox="1"/>
+          <p:nvPr/>
+        </p:nvSpPr>
+        <p:spPr>
+          <a:xfrm>
+            <a:off x="365760" y="274320"/>
+            <a:ext cx="11430000" cy="777240"/>
+          </a:xfrm>
+          <a:prstGeom prst="rect">
+            <a:avLst/>
+          </a:prstGeom>
+          <a:noFill/>
+        </p:spPr>
+        <p:txBody>
+          <a:bodyPr wrap="square">
+            <a:spAutoFit/>
+          </a:bodyPr>
+          <a:lstStyle/>
+          <a:p>
+            <a:pPr algn="l"/>
+            <a:r>
+              <a:rPr sz="2200" b="1" i="0">
+                <a:solidFill>
+                  <a:srgbClr val="003DA5"/>
+                </a:solidFill>
+                <a:latin typeface="Arial"/>
+              </a:rPr>
+              <a:t>Arbeitsblatt B: Cross-Selling-Gesprächsvorbereitung</a:t>
+            </a:r>
+          </a:p>
+        </p:txBody>
+      </p:sp>
+      <p:sp>
+        <p:nvSpPr>
+          <p:cNvPr id="5" name="Rectangle 4"/>
+          <p:cNvSpPr/>
+          <p:nvPr/>
+        </p:nvSpPr>
+        <p:spPr>
+          <a:xfrm>
+            <a:off x="365760" y="1005840"/>
+            <a:ext cx="11430000" cy="27432"/>
+          </a:xfrm>
+          <a:prstGeom prst="rect">
+            <a:avLst/>
+          </a:prstGeom>
+          <a:solidFill>
+            <a:srgbClr val="D1D5DB"/>
+          </a:solidFill>
+          <a:ln>
+            <a:noFill/>
+          </a:ln>
+        </p:spPr>
+        <p:style>
+          <a:lnRef idx="1">
+            <a:schemeClr val="accent1"/>
+          </a:lnRef>
+          <a:fillRef idx="3">
+            <a:schemeClr val="accent1"/>
+          </a:fillRef>
+          <a:effectRef idx="2">
+            <a:schemeClr val="accent1"/>
+          </a:effectRef>
+          <a:fontRef idx="minor">
+            <a:schemeClr val="lt1"/>
+          </a:fontRef>
+        </p:style>
+        <p:txBody>
+          <a:bodyPr rtlCol="0" anchor="ctr"/>
+          <a:lstStyle/>
+          <a:p>
+            <a:pPr algn="ctr"/>
+          </a:p>
+        </p:txBody>
+      </p:sp>
+      <p:graphicFrame>
+        <p:nvGraphicFramePr>
+          <p:cNvPr id="6" name="Table 5"/>
+          <p:cNvGraphicFramePr>
+            <a:graphicFrameLocks noGrp="1"/>
+          </p:cNvGraphicFramePr>
+          <p:nvPr/>
+        </p:nvGraphicFramePr>
+        <p:xfrm>
+          <a:off x="365760" y="1143000"/>
+          <a:ext cx="11430000" cy="3328416"/>
+        </p:xfrm>
+        <a:graphic>
+          <a:graphicData uri="http://schemas.openxmlformats.org/drawingml/2006/table">
+            <a:tbl>
+              <a:tblPr firstRow="1" bandRow="1">
+                <a:tableStyleId>{5C22544A-7EE6-4342-B048-85BDC9FD1C3A}</a:tableStyleId>
+              </a:tblPr>
+              <a:tblGrid>
+                <a:gridCol w="5715000"/>
+                <a:gridCol w="5715000"/>
+              </a:tblGrid>
+              <a:tr h="475488">
+                <a:tc>
+                  <a:txBody>
+                    <a:bodyPr wrap="square"/>
+                    <a:lstStyle/>
+                    <a:p>
+                      <a:r>
+                        <a:rPr sz="1100" b="1">
+                          <a:solidFill>
+                            <a:srgbClr val="FFFFFF"/>
+                          </a:solidFill>
+                          <a:latin typeface="Arial"/>
+                        </a:rPr>
+                        <a:t>Schritt</a:t>
+                      </a:r>
+                    </a:p>
+                  </a:txBody>
+                  <a:tcPr>
+                    <a:solidFill>
+                      <a:srgbClr val="003DA5"/>
+                    </a:solidFill>
+                  </a:tcPr>
+                </a:tc>
+                <a:tc>
+                  <a:txBody>
+                    <a:bodyPr wrap="square"/>
+                    <a:lstStyle/>
+                    <a:p>
+                      <a:r>
+                        <a:rPr sz="1100" b="1">
+                          <a:solidFill>
+                            <a:srgbClr val="FFFFFF"/>
+                          </a:solidFill>
+                          <a:latin typeface="Arial"/>
+                        </a:rPr>
+                        <a:t>Meine Vorbereitung</a:t>
+                      </a:r>
+                    </a:p>
+                  </a:txBody>
+                  <a:tcPr>
+                    <a:solidFill>
+                      <a:srgbClr val="003DA5"/>
+                    </a:solidFill>
+                  </a:tcPr>
+                </a:tc>
+              </a:tr>
+              <a:tr h="475488">
+                <a:tc>
+                  <a:txBody>
+                    <a:bodyPr wrap="square"/>
+                    <a:lstStyle/>
+                    <a:p>
+                      <a:r>
+                        <a:rPr sz="1100" b="0">
+                          <a:solidFill>
+                            <a:srgbClr val="1A1A1A"/>
+                          </a:solidFill>
+                          <a:latin typeface="Arial"/>
+                        </a:rPr>
+                        <a:t>Situationsfrage</a:t>
+                      </a:r>
+                    </a:p>
+                  </a:txBody>
+                  <a:tcPr>
+                    <a:solidFill>
+                      <a:srgbClr val="FFFFFF"/>
+                    </a:solidFill>
+                  </a:tcPr>
+                </a:tc>
+                <a:tc>
+                  <a:txBody>
+                    <a:bodyPr wrap="square"/>
+                    <a:lstStyle/>
+                    <a:p>
+                      <a:r>
+                        <a:rPr sz="1100" b="0">
+                          <a:solidFill>
+                            <a:srgbClr val="1A1A1A"/>
+                          </a:solidFill>
+                          <a:latin typeface="Arial"/>
+                        </a:rPr>
+                        <a:t/>
+                      </a:r>
+                    </a:p>
+                  </a:txBody>
+                  <a:tcPr>
+                    <a:solidFill>
+                      <a:srgbClr val="FFFFFF"/>
+                    </a:solidFill>
+                  </a:tcPr>
+                </a:tc>
+              </a:tr>
+              <a:tr h="475488">
+                <a:tc>
+                  <a:txBody>
+                    <a:bodyPr wrap="square"/>
+                    <a:lstStyle/>
+                    <a:p>
+                      <a:r>
+                        <a:rPr sz="1100" b="0">
+                          <a:solidFill>
+                            <a:srgbClr val="1A1A1A"/>
+                          </a:solidFill>
+                          <a:latin typeface="Arial"/>
+                        </a:rPr>
+                        <a:t>Problemfrage</a:t>
+                      </a:r>
+                    </a:p>
+                  </a:txBody>
+                  <a:tcPr>
+                    <a:solidFill>
+                      <a:srgbClr val="F4F6FA"/>
+                    </a:solidFill>
+                  </a:tcPr>
+                </a:tc>
+                <a:tc>
+                  <a:txBody>
+                    <a:bodyPr wrap="square"/>
+                    <a:lstStyle/>
+                    <a:p>
+                      <a:r>
+                        <a:rPr sz="1100" b="0">
+                          <a:solidFill>
+                            <a:srgbClr val="1A1A1A"/>
+                          </a:solidFill>
+                          <a:latin typeface="Arial"/>
+                        </a:rPr>
+                        <a:t/>
+                      </a:r>
+                    </a:p>
+                  </a:txBody>
+                  <a:tcPr>
+                    <a:solidFill>
+                      <a:srgbClr val="F4F6FA"/>
+                    </a:solidFill>
+                  </a:tcPr>
+                </a:tc>
+              </a:tr>
+              <a:tr h="475488">
+                <a:tc>
+                  <a:txBody>
+                    <a:bodyPr wrap="square"/>
+                    <a:lstStyle/>
+                    <a:p>
+                      <a:r>
+                        <a:rPr sz="1100" b="0">
+                          <a:solidFill>
+                            <a:srgbClr val="1A1A1A"/>
+                          </a:solidFill>
+                          <a:latin typeface="Arial"/>
+                        </a:rPr>
+                        <a:t>Implikationsfrage</a:t>
+                      </a:r>
+                    </a:p>
+                  </a:txBody>
+                  <a:tcPr>
+                    <a:solidFill>
+                      <a:srgbClr val="FFFFFF"/>
+                    </a:solidFill>
+                  </a:tcPr>
+                </a:tc>
+                <a:tc>
+                  <a:txBody>
+                    <a:bodyPr wrap="square"/>
+                    <a:lstStyle/>
+                    <a:p>
+                      <a:r>
+                        <a:rPr sz="1100" b="0">
+                          <a:solidFill>
+                            <a:srgbClr val="1A1A1A"/>
+                          </a:solidFill>
+                          <a:latin typeface="Arial"/>
+                        </a:rPr>
+                        <a:t/>
+                      </a:r>
+                    </a:p>
+                  </a:txBody>
+                  <a:tcPr>
+                    <a:solidFill>
+                      <a:srgbClr val="FFFFFF"/>
+                    </a:solidFill>
+                  </a:tcPr>
+                </a:tc>
+              </a:tr>
+              <a:tr h="475488">
+                <a:tc>
+                  <a:txBody>
+                    <a:bodyPr wrap="square"/>
+                    <a:lstStyle/>
+                    <a:p>
+                      <a:r>
+                        <a:rPr sz="1100" b="0">
+                          <a:solidFill>
+                            <a:srgbClr val="1A1A1A"/>
+                          </a:solidFill>
+                          <a:latin typeface="Arial"/>
+                        </a:rPr>
+                        <a:t>Nutzenfrage</a:t>
+                      </a:r>
+                    </a:p>
+                  </a:txBody>
+                  <a:tcPr>
+                    <a:solidFill>
+                      <a:srgbClr val="F4F6FA"/>
+                    </a:solidFill>
+                  </a:tcPr>
+                </a:tc>
+                <a:tc>
+                  <a:txBody>
+                    <a:bodyPr wrap="square"/>
+                    <a:lstStyle/>
+                    <a:p>
+                      <a:r>
+                        <a:rPr sz="1100" b="0">
+                          <a:solidFill>
+                            <a:srgbClr val="1A1A1A"/>
+                          </a:solidFill>
+                          <a:latin typeface="Arial"/>
+                        </a:rPr>
+                        <a:t/>
+                      </a:r>
+                    </a:p>
+                  </a:txBody>
+                  <a:tcPr>
+                    <a:solidFill>
+                      <a:srgbClr val="F4F6FA"/>
+                    </a:solidFill>
+                  </a:tcPr>
+                </a:tc>
+              </a:tr>
+              <a:tr h="475488">
+                <a:tc>
+                  <a:txBody>
+                    <a:bodyPr wrap="square"/>
+                    <a:lstStyle/>
+                    <a:p>
+                      <a:r>
+                        <a:rPr sz="1100" b="0">
+                          <a:solidFill>
+                            <a:srgbClr val="1A1A1A"/>
+                          </a:solidFill>
+                          <a:latin typeface="Arial"/>
+                        </a:rPr>
+                        <a:t>Verbundpartner / Lösung</a:t>
+                      </a:r>
+                    </a:p>
+                  </a:txBody>
+                  <a:tcPr>
+                    <a:solidFill>
+                      <a:srgbClr val="FFFFFF"/>
+                    </a:solidFill>
+                  </a:tcPr>
+                </a:tc>
+                <a:tc>
+                  <a:txBody>
+                    <a:bodyPr wrap="square"/>
+                    <a:lstStyle/>
+                    <a:p>
+                      <a:r>
+                        <a:rPr sz="1100" b="0">
+                          <a:solidFill>
+                            <a:srgbClr val="1A1A1A"/>
+                          </a:solidFill>
+                          <a:latin typeface="Arial"/>
+                        </a:rPr>
+                        <a:t/>
+                      </a:r>
+                    </a:p>
+                  </a:txBody>
+                  <a:tcPr>
+                    <a:solidFill>
+                      <a:srgbClr val="FFFFFF"/>
+                    </a:solidFill>
+                  </a:tcPr>
+                </a:tc>
+              </a:tr>
+              <a:tr h="475488">
+                <a:tc>
+                  <a:txBody>
+                    <a:bodyPr wrap="square"/>
+                    <a:lstStyle/>
+                    <a:p>
+                      <a:r>
+                        <a:rPr sz="1100" b="0">
+                          <a:solidFill>
+                            <a:srgbClr val="1A1A1A"/>
+                          </a:solidFill>
+                          <a:latin typeface="Arial"/>
+                        </a:rPr>
+                        <a:t>Dokumentation in agree</a:t>
+                      </a:r>
+                    </a:p>
+                  </a:txBody>
+                  <a:tcPr>
+                    <a:solidFill>
+                      <a:srgbClr val="F4F6FA"/>
+                    </a:solidFill>
+                  </a:tcPr>
+                </a:tc>
+                <a:tc>
+                  <a:txBody>
+                    <a:bodyPr wrap="square"/>
+                    <a:lstStyle/>
+                    <a:p>
+                      <a:r>
+                        <a:rPr sz="1100" b="0">
+                          <a:solidFill>
+                            <a:srgbClr val="1A1A1A"/>
+                          </a:solidFill>
+                          <a:latin typeface="Arial"/>
+                        </a:rPr>
+                        <a:t/>
+                      </a:r>
+                    </a:p>
+                  </a:txBody>
+                  <a:tcPr>
+                    <a:solidFill>
+                      <a:srgbClr val="F4F6FA"/>
+                    </a:solidFill>
+                  </a:tcPr>
+                </a:tc>
+              </a:tr>
+            </a:tbl>
+          </a:graphicData>
+        </a:graphic>
+      </p:graphicFrame>
+    </p:spTree>
+  </p:cSld>
+  <p:clrMapOvr>
+    <a:masterClrMapping/>
+  </p:clrMapOvr>
+</p:sld>
+</file>
+
+<file path=ppt/slides/slide25.xml><?xml version="1.0" encoding="utf-8"?>
 <p:sld xmlns:a="http://schemas.openxmlformats.org/drawingml/2006/main" xmlns:p="http://schemas.openxmlformats.org/presentationml/2006/main" xmlns:r="http://schemas.openxmlformats.org/officeDocument/2006/relationships">
   <p:cSld>
     <p:bg>
@@ -4143,8 +8435,8 @@
         </p:nvSpPr>
         <p:spPr>
           <a:xfrm>
-            <a:off x="365760" y="365760"/>
-            <a:ext cx="5486400" cy="365760"/>
+            <a:off x="365760" y="347472"/>
+            <a:ext cx="7315200" cy="384048"/>
           </a:xfrm>
           <a:prstGeom prst="rect">
             <a:avLst/>
@@ -4159,62 +8451,27 @@
           <a:p>
             <a:pPr algn="l"/>
             <a:r>
-              <a:rPr sz="1000" b="1">
+              <a:rPr sz="900" b="1" i="0">
                 <a:solidFill>
                   <a:srgbClr val="CCD6F0"/>
                 </a:solidFill>
                 <a:latin typeface="Arial"/>
               </a:rPr>
-              <a:t>PRAXISTRANSFER</a:t>
-            </a:r>
-          </a:p>
-        </p:txBody>
-      </p:sp>
-      <p:sp>
-        <p:nvSpPr>
-          <p:cNvPr id="4" name="TextBox 3"/>
-          <p:cNvSpPr txBox="1"/>
-          <p:nvPr/>
-        </p:nvSpPr>
-        <p:spPr>
-          <a:xfrm>
-            <a:off x="365760" y="640080"/>
-            <a:ext cx="9144000" cy="914400"/>
-          </a:xfrm>
-          <a:prstGeom prst="rect">
-            <a:avLst/>
-          </a:prstGeom>
-          <a:noFill/>
-        </p:spPr>
-        <p:txBody>
-          <a:bodyPr wrap="square">
-            <a:spAutoFit/>
-          </a:bodyPr>
-          <a:lstStyle/>
-          <a:p>
-            <a:pPr algn="l"/>
-            <a:r>
-              <a:rPr sz="2800" b="1">
-                <a:solidFill>
-                  <a:srgbClr val="FFFFFF"/>
-                </a:solidFill>
-                <a:latin typeface="Arial"/>
-              </a:rPr>
-              <a:t>Was nehmen Sie mit?</a:t>
-            </a:r>
-          </a:p>
-        </p:txBody>
-      </p:sp>
-      <p:sp>
-        <p:nvSpPr>
-          <p:cNvPr id="5" name="Rectangle 4"/>
+              <a:t>PRAXISTRANSFER &amp; NÄCHSTE SCHRITTE</a:t>
+            </a:r>
+          </a:p>
+        </p:txBody>
+      </p:sp>
+      <p:sp>
+        <p:nvSpPr>
+          <p:cNvPr id="4" name="Rectangle 3"/>
           <p:cNvSpPr/>
           <p:nvPr/>
         </p:nvSpPr>
         <p:spPr>
           <a:xfrm>
-            <a:off x="365760" y="1463040"/>
-            <a:ext cx="7315200" cy="27432"/>
+            <a:off x="365760" y="804672"/>
+            <a:ext cx="8229600" cy="22860"/>
           </a:xfrm>
           <a:prstGeom prst="rect">
             <a:avLst/>
@@ -4250,14 +8507,14 @@
       </p:sp>
       <p:sp>
         <p:nvSpPr>
-          <p:cNvPr id="6" name="TextBox 5"/>
+          <p:cNvPr id="5" name="TextBox 4"/>
           <p:cNvSpPr txBox="1"/>
           <p:nvPr/>
         </p:nvSpPr>
         <p:spPr>
           <a:xfrm>
-            <a:off x="365760" y="1645920"/>
-            <a:ext cx="11430000" cy="4114800"/>
+            <a:off x="365760" y="960120"/>
+            <a:ext cx="9144000" cy="914400"/>
           </a:xfrm>
           <a:prstGeom prst="rect">
             <a:avLst/>
@@ -4270,67 +8527,29 @@
           </a:bodyPr>
           <a:lstStyle/>
           <a:p>
-            <a:pPr>
-              <a:spcBef>
-                <a:spcPts val="400"/>
-              </a:spcBef>
-            </a:pPr>
-            <a:r>
-              <a:rPr sz="1600">
-                <a:solidFill>
-                  <a:srgbClr val="E05B00"/>
+            <a:pPr algn="l"/>
+            <a:r>
+              <a:rPr sz="3000" b="1" i="0">
+                <a:solidFill>
+                  <a:srgbClr val="FFFFFF"/>
                 </a:solidFill>
                 <a:latin typeface="Arial"/>
               </a:rPr>
-              <a:t>▪  </a:t>
-            </a:r>
-            <a:r>
-              <a:rPr sz="1800">
-                <a:solidFill>
-                  <a:srgbClr val="FFFFFF"/>
-                </a:solidFill>
-                <a:latin typeface="Arial"/>
-              </a:rPr>
-              <a:t>Transferaufgabe: Wenden Sie das Gelernte in den nächsten 14 Tagen bei einem konkreten Kunden an.</a:t>
-            </a:r>
-          </a:p>
-          <a:p>
-            <a:pPr>
-              <a:spcBef>
-                <a:spcPts val="400"/>
-              </a:spcBef>
-            </a:pPr>
-            <a:r>
-              <a:rPr sz="1600">
-                <a:solidFill>
-                  <a:srgbClr val="E05B00"/>
-                </a:solidFill>
-                <a:latin typeface="Arial"/>
-              </a:rPr>
-              <a:t>▪  </a:t>
-            </a:r>
-            <a:r>
-              <a:rPr sz="1800">
-                <a:solidFill>
-                  <a:srgbClr val="FFFFFF"/>
-                </a:solidFill>
-                <a:latin typeface="Arial"/>
-              </a:rPr>
-              <a:t>Selbstcheck nach 4 Wochen: Was hat sich verändert?</a:t>
-            </a:r>
-          </a:p>
-        </p:txBody>
-      </p:sp>
-      <p:sp>
-        <p:nvSpPr>
-          <p:cNvPr id="7" name="TextBox 6"/>
+              <a:t>Was nehmen Sie mit?</a:t>
+            </a:r>
+          </a:p>
+        </p:txBody>
+      </p:sp>
+      <p:sp>
+        <p:nvSpPr>
+          <p:cNvPr id="6" name="TextBox 5"/>
           <p:cNvSpPr txBox="1"/>
           <p:nvPr/>
         </p:nvSpPr>
         <p:spPr>
           <a:xfrm>
-            <a:off x="365760" y="6309360"/>
-            <a:ext cx="11430000" cy="365760"/>
+            <a:off x="365760" y="2103120"/>
+            <a:ext cx="11430000" cy="4114800"/>
           </a:xfrm>
           <a:prstGeom prst="rect">
             <a:avLst/>
@@ -4343,141 +8562,92 @@
           </a:bodyPr>
           <a:lstStyle/>
           <a:p>
-            <a:pPr algn="l"/>
-            <a:r>
-              <a:rPr sz="900" b="0">
-                <a:solidFill>
-                  <a:srgbClr val="99AACC"/>
+            <a:pPr>
+              <a:spcBef>
+                <a:spcPts val="500"/>
+              </a:spcBef>
+            </a:pPr>
+            <a:r>
+              <a:rPr sz="1600">
+                <a:solidFill>
+                  <a:srgbClr val="E05B00"/>
                 </a:solidFill>
                 <a:latin typeface="Arial"/>
               </a:rPr>
-              <a:t>M13 · Cross-Selling systematisch  ·  v0.3  ·  Benedikt Zoller Coaching</a:t>
-            </a:r>
-          </a:p>
-        </p:txBody>
-      </p:sp>
-    </p:spTree>
-  </p:cSld>
-  <p:clrMapOvr>
-    <a:masterClrMapping/>
-  </p:clrMapOvr>
-</p:sld>
-</file>
-
-<file path=ppt/slides/slide2.xml><?xml version="1.0" encoding="utf-8"?>
-<p:sld xmlns:a="http://schemas.openxmlformats.org/drawingml/2006/main" xmlns:p="http://schemas.openxmlformats.org/presentationml/2006/main" xmlns:r="http://schemas.openxmlformats.org/officeDocument/2006/relationships">
-  <p:cSld>
-    <p:bg>
-      <p:bgPr>
-        <a:solidFill>
-          <a:srgbClr val="F5F7FA"/>
-        </a:solidFill>
-        <a:effectLst/>
-      </p:bgPr>
-    </p:bg>
-    <p:spTree>
-      <p:nvGrpSpPr>
-        <p:cNvPr id="1" name=""/>
-        <p:cNvGrpSpPr/>
-        <p:nvPr/>
-      </p:nvGrpSpPr>
-      <p:grpSpPr/>
-      <p:sp>
-        <p:nvSpPr>
-          <p:cNvPr id="2" name="Rectangle 1"/>
-          <p:cNvSpPr/>
-          <p:nvPr/>
-        </p:nvSpPr>
-        <p:spPr>
-          <a:xfrm>
-            <a:off x="0" y="0"/>
-            <a:ext cx="73152" cy="6858000"/>
-          </a:xfrm>
-          <a:prstGeom prst="rect">
-            <a:avLst/>
-          </a:prstGeom>
-          <a:solidFill>
-            <a:srgbClr val="003DA5"/>
-          </a:solidFill>
-          <a:ln>
-            <a:noFill/>
-          </a:ln>
-        </p:spPr>
-        <p:style>
-          <a:lnRef idx="1">
-            <a:schemeClr val="accent1"/>
-          </a:lnRef>
-          <a:fillRef idx="3">
-            <a:schemeClr val="accent1"/>
-          </a:fillRef>
-          <a:effectRef idx="2">
-            <a:schemeClr val="accent1"/>
-          </a:effectRef>
-          <a:fontRef idx="minor">
-            <a:schemeClr val="lt1"/>
-          </a:fontRef>
-        </p:style>
-        <p:txBody>
-          <a:bodyPr rtlCol="0" anchor="ctr"/>
-          <a:lstStyle/>
-          <a:p>
-            <a:pPr algn="ctr"/>
-          </a:p>
-        </p:txBody>
-      </p:sp>
-      <p:sp>
-        <p:nvSpPr>
-          <p:cNvPr id="3" name="Rectangle 2"/>
-          <p:cNvSpPr/>
-          <p:nvPr/>
-        </p:nvSpPr>
-        <p:spPr>
-          <a:xfrm>
-            <a:off x="365760" y="868680"/>
-            <a:ext cx="7315200" cy="27432"/>
-          </a:xfrm>
-          <a:prstGeom prst="rect">
-            <a:avLst/>
-          </a:prstGeom>
-          <a:solidFill>
-            <a:srgbClr val="E5E7EB"/>
-          </a:solidFill>
-          <a:ln>
-            <a:noFill/>
-          </a:ln>
-        </p:spPr>
-        <p:style>
-          <a:lnRef idx="1">
-            <a:schemeClr val="accent1"/>
-          </a:lnRef>
-          <a:fillRef idx="3">
-            <a:schemeClr val="accent1"/>
-          </a:fillRef>
-          <a:effectRef idx="2">
-            <a:schemeClr val="accent1"/>
-          </a:effectRef>
-          <a:fontRef idx="minor">
-            <a:schemeClr val="lt1"/>
-          </a:fontRef>
-        </p:style>
-        <p:txBody>
-          <a:bodyPr rtlCol="0" anchor="ctr"/>
-          <a:lstStyle/>
-          <a:p>
-            <a:pPr algn="ctr"/>
-          </a:p>
-        </p:txBody>
-      </p:sp>
-      <p:sp>
-        <p:nvSpPr>
-          <p:cNvPr id="4" name="TextBox 3"/>
+              <a:t>▪  </a:t>
+            </a:r>
+            <a:r>
+              <a:rPr sz="1800">
+                <a:solidFill>
+                  <a:srgbClr val="FFFFFF"/>
+                </a:solidFill>
+                <a:latin typeface="Arial"/>
+              </a:rPr>
+              <a:t>Transferaufgabe: Wenden Sie das Gelernte in den nächsten 14 Tagen bei einem konkreten Kunden an.</a:t>
+            </a:r>
+          </a:p>
+          <a:p>
+            <a:pPr>
+              <a:spcBef>
+                <a:spcPts val="500"/>
+              </a:spcBef>
+            </a:pPr>
+            <a:r>
+              <a:rPr sz="1600">
+                <a:solidFill>
+                  <a:srgbClr val="E05B00"/>
+                </a:solidFill>
+                <a:latin typeface="Arial"/>
+              </a:rPr>
+              <a:t>▪  </a:t>
+            </a:r>
+            <a:r>
+              <a:rPr sz="1800">
+                <a:solidFill>
+                  <a:srgbClr val="FFFFFF"/>
+                </a:solidFill>
+                <a:latin typeface="Arial"/>
+              </a:rPr>
+              <a:t>Selbstcheck nach 4 Wochen: Bewerten Sie Ihre Fortschritte ehrlich.</a:t>
+            </a:r>
+          </a:p>
+          <a:p>
+            <a:pPr>
+              <a:spcBef>
+                <a:spcPts val="500"/>
+              </a:spcBef>
+            </a:pPr>
+            <a:r>
+              <a:rPr sz="1600">
+                <a:solidFill>
+                  <a:srgbClr val="E05B00"/>
+                </a:solidFill>
+                <a:latin typeface="Arial"/>
+              </a:rPr>
+              <a:t>▪  </a:t>
+            </a:r>
+            <a:r>
+              <a:rPr sz="1800">
+                <a:solidFill>
+                  <a:srgbClr val="FFFFFF"/>
+                </a:solidFill>
+                <a:latin typeface="Arial"/>
+              </a:rPr>
+              <a:t>Nächste Module: M14, M16</a:t>
+            </a:r>
+          </a:p>
+        </p:txBody>
+      </p:sp>
+      <p:sp>
+        <p:nvSpPr>
+          <p:cNvPr id="7" name="TextBox 6"/>
           <p:cNvSpPr txBox="1"/>
           <p:nvPr/>
         </p:nvSpPr>
         <p:spPr>
           <a:xfrm>
-            <a:off x="365760" y="320040"/>
-            <a:ext cx="3657600" cy="365760"/>
+            <a:off x="365760" y="6309360"/>
+            <a:ext cx="11430000" cy="365760"/>
           </a:xfrm>
           <a:prstGeom prst="rect">
             <a:avLst/>
@@ -4492,196 +8662,13 @@
           <a:p>
             <a:pPr algn="l"/>
             <a:r>
-              <a:rPr sz="1000" b="1">
-                <a:solidFill>
-                  <a:srgbClr val="003DA5"/>
+              <a:rPr sz="900" b="0" i="0">
+                <a:solidFill>
+                  <a:srgbClr val="889ACC"/>
                 </a:solidFill>
                 <a:latin typeface="Arial"/>
               </a:rPr>
-              <a:t>LERNZIELE</a:t>
-            </a:r>
-          </a:p>
-        </p:txBody>
-      </p:sp>
-      <p:sp>
-        <p:nvSpPr>
-          <p:cNvPr id="5" name="TextBox 4"/>
-          <p:cNvSpPr txBox="1"/>
-          <p:nvPr/>
-        </p:nvSpPr>
-        <p:spPr>
-          <a:xfrm>
-            <a:off x="365760" y="502920"/>
-            <a:ext cx="9144000" cy="548640"/>
-          </a:xfrm>
-          <a:prstGeom prst="rect">
-            <a:avLst/>
-          </a:prstGeom>
-          <a:noFill/>
-        </p:spPr>
-        <p:txBody>
-          <a:bodyPr wrap="square">
-            <a:spAutoFit/>
-          </a:bodyPr>
-          <a:lstStyle/>
-          <a:p>
-            <a:pPr algn="l"/>
-            <a:r>
-              <a:rPr sz="2200" b="1">
-                <a:solidFill>
-                  <a:srgbClr val="1A1A1A"/>
-                </a:solidFill>
-                <a:latin typeface="Arial"/>
-              </a:rPr>
-              <a:t>Was Sie nach diesem Modul können.</a:t>
-            </a:r>
-          </a:p>
-        </p:txBody>
-      </p:sp>
-      <p:sp>
-        <p:nvSpPr>
-          <p:cNvPr id="6" name="TextBox 5"/>
-          <p:cNvSpPr txBox="1"/>
-          <p:nvPr/>
-        </p:nvSpPr>
-        <p:spPr>
-          <a:xfrm>
-            <a:off x="365760" y="1188720"/>
-            <a:ext cx="11430000" cy="5303520"/>
-          </a:xfrm>
-          <a:prstGeom prst="rect">
-            <a:avLst/>
-          </a:prstGeom>
-          <a:noFill/>
-        </p:spPr>
-        <p:txBody>
-          <a:bodyPr wrap="square">
-            <a:spAutoFit/>
-          </a:bodyPr>
-          <a:lstStyle/>
-          <a:p>
-            <a:pPr>
-              <a:spcBef>
-                <a:spcPts val="400"/>
-              </a:spcBef>
-            </a:pPr>
-            <a:r>
-              <a:rPr sz="1400">
-                <a:solidFill>
-                  <a:srgbClr val="003DA5"/>
-                </a:solidFill>
-                <a:latin typeface="Arial"/>
-              </a:rPr>
-              <a:t>▪  </a:t>
-            </a:r>
-            <a:r>
-              <a:rPr sz="1600">
-                <a:solidFill>
-                  <a:srgbClr val="1A1A1A"/>
-                </a:solidFill>
-                <a:latin typeface="Arial"/>
-              </a:rPr>
-              <a:t>Den Unterschied zwischen reaktivem und systematisch-bedarfsorientiertem Cross-Selling erklären und begründen, warum der zweite Ansatz nachhaltiger ist</a:t>
-            </a:r>
-          </a:p>
-          <a:p>
-            <a:pPr>
-              <a:spcBef>
-                <a:spcPts val="400"/>
-              </a:spcBef>
-            </a:pPr>
-            <a:r>
-              <a:rPr sz="1400">
-                <a:solidFill>
-                  <a:srgbClr val="003DA5"/>
-                </a:solidFill>
-                <a:latin typeface="Arial"/>
-              </a:rPr>
-              <a:t>▪  </a:t>
-            </a:r>
-            <a:r>
-              <a:rPr sz="1600">
-                <a:solidFill>
-                  <a:srgbClr val="1A1A1A"/>
-                </a:solidFill>
-                <a:latin typeface="Arial"/>
-              </a:rPr>
-              <a:t>Cross-Selling-Potenziale in einem gegebenen Kundenprofil anhand der Wallet-Share-Methodik identifizieren und die zwei vielversprechendsten Ansatzpunkte benennen</a:t>
-            </a:r>
-          </a:p>
-          <a:p>
-            <a:pPr>
-              <a:spcBef>
-                <a:spcPts val="400"/>
-              </a:spcBef>
-            </a:pPr>
-            <a:r>
-              <a:rPr sz="1400">
-                <a:solidFill>
-                  <a:srgbClr val="003DA5"/>
-                </a:solidFill>
-                <a:latin typeface="Arial"/>
-              </a:rPr>
-              <a:t>▪  </a:t>
-            </a:r>
-            <a:r>
-              <a:rPr sz="1600">
-                <a:solidFill>
-                  <a:srgbClr val="1A1A1A"/>
-                </a:solidFill>
-                <a:latin typeface="Arial"/>
-              </a:rPr>
-              <a:t>Den 4-Schritte-Cross-Selling-Prozess (Analyse – Hypothese – Gespräch – Dokumentation) in einem simulierten Kundengespräch anwenden</a:t>
-            </a:r>
-          </a:p>
-          <a:p>
-            <a:pPr>
-              <a:spcBef>
-                <a:spcPts val="400"/>
-              </a:spcBef>
-            </a:pPr>
-            <a:r>
-              <a:rPr sz="1400">
-                <a:solidFill>
-                  <a:srgbClr val="003DA5"/>
-                </a:solidFill>
-                <a:latin typeface="Arial"/>
-              </a:rPr>
-              <a:t>▪  </a:t>
-            </a:r>
-            <a:r>
-              <a:rPr sz="1600">
-                <a:solidFill>
-                  <a:srgbClr val="1A1A1A"/>
-                </a:solidFill>
-                <a:latin typeface="Arial"/>
-              </a:rPr>
-              <a:t>Die relevanten Verbundpartner den typischen Bedarfsfeldern der Firmenkunden zuordnen</a:t>
-            </a:r>
-          </a:p>
-          <a:p>
-            <a:pPr>
-              <a:spcBef>
-                <a:spcPts val="400"/>
-              </a:spcBef>
-            </a:pPr>
-            <a:r>
-              <a:rPr sz="1400">
-                <a:solidFill>
-                  <a:srgbClr val="003DA5"/>
-                </a:solidFill>
-                <a:latin typeface="Arial"/>
-              </a:rPr>
-              <a:t>▪  </a:t>
-            </a:r>
-            <a:r>
-              <a:rPr sz="1600">
-                <a:solidFill>
-                  <a:srgbClr val="1A1A1A"/>
-                </a:solidFill>
-                <a:latin typeface="Arial"/>
-              </a:rPr>
-              <a:t>Produktgetriebenes Push-Cross-Selling von bedarfsorientiertem Cross-Selling unterscheiden und die situationsgerechte Vorgehensweise wählen</a:t>
+              <a:t>M13 · Cross-Selling systematisch  ·  v0.3  ·  Benedikt Zoller Coaching</a:t>
             </a:r>
           </a:p>
         </p:txBody>
@@ -4763,8 +8750,8 @@
         </p:nvSpPr>
         <p:spPr>
           <a:xfrm>
-            <a:off x="365760" y="2286000"/>
-            <a:ext cx="11430000" cy="1828800"/>
+            <a:off x="365760" y="2011680"/>
+            <a:ext cx="11430000" cy="2011680"/>
           </a:xfrm>
           <a:prstGeom prst="rect">
             <a:avLst/>
@@ -4779,7 +8766,7 @@
           <a:p>
             <a:pPr algn="l"/>
             <a:r>
-              <a:rPr sz="3600" b="1">
+              <a:rPr sz="3600" b="1" i="0">
                 <a:solidFill>
                   <a:srgbClr val="FFFFFF"/>
                 </a:solidFill>
@@ -4804,7 +8791,7 @@
     <p:bg>
       <p:bgPr>
         <a:solidFill>
-          <a:srgbClr val="1A1A1A"/>
+          <a:srgbClr val="FFFFFF"/>
         </a:solidFill>
         <a:effectLst/>
       </p:bgPr>
@@ -4831,7 +8818,7 @@
             <a:avLst/>
           </a:prstGeom>
           <a:solidFill>
-            <a:srgbClr val="E05B00"/>
+            <a:srgbClr val="003DA5"/>
           </a:solidFill>
           <a:ln>
             <a:noFill/>
@@ -4867,8 +8854,8 @@
         </p:nvSpPr>
         <p:spPr>
           <a:xfrm>
-            <a:off x="365760" y="2286000"/>
-            <a:ext cx="11430000" cy="1828800"/>
+            <a:off x="228600" y="182880"/>
+            <a:ext cx="11430000" cy="320040"/>
           </a:xfrm>
           <a:prstGeom prst="rect">
             <a:avLst/>
@@ -4883,13 +8870,189 @@
           <a:p>
             <a:pPr algn="l"/>
             <a:r>
-              <a:rPr sz="3600" b="1">
-                <a:solidFill>
-                  <a:srgbClr val="FFFFFF"/>
+              <a:rPr sz="900" b="0" i="0">
+                <a:solidFill>
+                  <a:srgbClr val="556575"/>
                 </a:solidFill>
                 <a:latin typeface="Arial"/>
               </a:rPr>
-              <a:t>Zwei Typen: Push vs. Pull</a:t>
+              <a:t>M13 · Modulinhalte</a:t>
+            </a:r>
+          </a:p>
+        </p:txBody>
+      </p:sp>
+      <p:sp>
+        <p:nvSpPr>
+          <p:cNvPr id="4" name="TextBox 3"/>
+          <p:cNvSpPr txBox="1"/>
+          <p:nvPr/>
+        </p:nvSpPr>
+        <p:spPr>
+          <a:xfrm>
+            <a:off x="365760" y="274320"/>
+            <a:ext cx="11430000" cy="777240"/>
+          </a:xfrm>
+          <a:prstGeom prst="rect">
+            <a:avLst/>
+          </a:prstGeom>
+          <a:noFill/>
+        </p:spPr>
+        <p:txBody>
+          <a:bodyPr wrap="square">
+            <a:spAutoFit/>
+          </a:bodyPr>
+          <a:lstStyle/>
+          <a:p>
+            <a:pPr algn="l"/>
+            <a:r>
+              <a:rPr sz="2200" b="1" i="0">
+                <a:solidFill>
+                  <a:srgbClr val="003DA5"/>
+                </a:solidFill>
+                <a:latin typeface="Arial"/>
+              </a:rPr>
+              <a:t>Definition</a:t>
+            </a:r>
+          </a:p>
+        </p:txBody>
+      </p:sp>
+      <p:sp>
+        <p:nvSpPr>
+          <p:cNvPr id="5" name="Rectangle 4"/>
+          <p:cNvSpPr/>
+          <p:nvPr/>
+        </p:nvSpPr>
+        <p:spPr>
+          <a:xfrm>
+            <a:off x="365760" y="1005840"/>
+            <a:ext cx="11430000" cy="27432"/>
+          </a:xfrm>
+          <a:prstGeom prst="rect">
+            <a:avLst/>
+          </a:prstGeom>
+          <a:solidFill>
+            <a:srgbClr val="D1D5DB"/>
+          </a:solidFill>
+          <a:ln>
+            <a:noFill/>
+          </a:ln>
+        </p:spPr>
+        <p:style>
+          <a:lnRef idx="1">
+            <a:schemeClr val="accent1"/>
+          </a:lnRef>
+          <a:fillRef idx="3">
+            <a:schemeClr val="accent1"/>
+          </a:fillRef>
+          <a:effectRef idx="2">
+            <a:schemeClr val="accent1"/>
+          </a:effectRef>
+          <a:fontRef idx="minor">
+            <a:schemeClr val="lt1"/>
+          </a:fontRef>
+        </p:style>
+        <p:txBody>
+          <a:bodyPr rtlCol="0" anchor="ctr"/>
+          <a:lstStyle/>
+          <a:p>
+            <a:pPr algn="ctr"/>
+          </a:p>
+        </p:txBody>
+      </p:sp>
+      <p:sp>
+        <p:nvSpPr>
+          <p:cNvPr id="6" name="TextBox 5"/>
+          <p:cNvSpPr txBox="1"/>
+          <p:nvPr/>
+        </p:nvSpPr>
+        <p:spPr>
+          <a:xfrm>
+            <a:off x="365760" y="1143000"/>
+            <a:ext cx="11430000" cy="5212080"/>
+          </a:xfrm>
+          <a:prstGeom prst="rect">
+            <a:avLst/>
+          </a:prstGeom>
+          <a:noFill/>
+        </p:spPr>
+        <p:txBody>
+          <a:bodyPr wrap="square">
+            <a:spAutoFit/>
+          </a:bodyPr>
+          <a:lstStyle/>
+          <a:p>
+            <a:pPr>
+              <a:spcBef>
+                <a:spcPts val="500"/>
+              </a:spcBef>
+            </a:pPr>
+            <a:r>
+              <a:rPr sz="1500">
+                <a:solidFill>
+                  <a:srgbClr val="003DA5"/>
+                </a:solidFill>
+                <a:latin typeface="Arial"/>
+              </a:rPr>
+              <a:t>▪  </a:t>
+            </a:r>
+            <a:r>
+              <a:rPr sz="1700">
+                <a:solidFill>
+                  <a:srgbClr val="1A1A1A"/>
+                </a:solidFill>
+                <a:latin typeface="Arial"/>
+              </a:rPr>
+              <a:t>Cross-Selling bezeichnet den Verkauf ergänzender Produkte oder Dienstleistungen an einen bestehenden Kunden, der bereits eine Bankbeziehung unterhält. Im…</a:t>
+            </a:r>
+          </a:p>
+          <a:p>
+            <a:pPr>
+              <a:spcBef>
+                <a:spcPts val="500"/>
+              </a:spcBef>
+            </a:pPr>
+            <a:r>
+              <a:rPr sz="1500">
+                <a:solidFill>
+                  <a:srgbClr val="003DA5"/>
+                </a:solidFill>
+                <a:latin typeface="Arial"/>
+              </a:rPr>
+              <a:t>▪  </a:t>
+            </a:r>
+            <a:r>
+              <a:rPr sz="1700">
+                <a:solidFill>
+                  <a:srgbClr val="1A1A1A"/>
+                </a:solidFill>
+                <a:latin typeface="Arial"/>
+              </a:rPr>
+              <a:t>Die zeb-Firmenkundenstudie zeigt: Der durchschnittliche Wallet-Share einer VR-Bank im Firmenkundensegment liegt bei rund 35–40 %. Das bedeutet: 60–65 % des…</a:t>
+            </a:r>
+          </a:p>
+          <a:p>
+            <a:pPr>
+              <a:spcBef>
+                <a:spcPts val="500"/>
+              </a:spcBef>
+            </a:pPr>
+            <a:r>
+              <a:rPr sz="1500">
+                <a:solidFill>
+                  <a:srgbClr val="003DA5"/>
+                </a:solidFill>
+                <a:latin typeface="Arial"/>
+              </a:rPr>
+              <a:t>▪  </a:t>
+            </a:r>
+            <a:r>
+              <a:rPr sz="1700">
+                <a:solidFill>
+                  <a:srgbClr val="1A1A1A"/>
+                </a:solidFill>
+                <a:latin typeface="Arial"/>
+              </a:rPr>
+              <a:t>&gt; Cross-Selling ist kein Verkaufsakt. Es ist das konsequente Ausfüllen eines Bedarfs, den der Kunde ohnehin hat – bei der eigenen Bank oder einem Wettbewerber.</a:t>
             </a:r>
           </a:p>
         </p:txBody>
@@ -4971,8 +9134,8 @@
         </p:nvSpPr>
         <p:spPr>
           <a:xfrm>
-            <a:off x="365760" y="2286000"/>
-            <a:ext cx="11430000" cy="1828800"/>
+            <a:off x="365760" y="2011680"/>
+            <a:ext cx="11430000" cy="2011680"/>
           </a:xfrm>
           <a:prstGeom prst="rect">
             <a:avLst/>
@@ -4987,13 +9150,13 @@
           <a:p>
             <a:pPr algn="l"/>
             <a:r>
-              <a:rPr sz="3600" b="1">
+              <a:rPr sz="3600" b="1" i="0">
                 <a:solidFill>
                   <a:srgbClr val="FFFFFF"/>
                 </a:solidFill>
                 <a:latin typeface="Arial"/>
               </a:rPr>
-              <a:t>Das Konzept</a:t>
+              <a:t>Zwei Typen: Push vs. Pull</a:t>
             </a:r>
           </a:p>
         </p:txBody>
@@ -5012,7 +9175,7 @@
     <p:bg>
       <p:bgPr>
         <a:solidFill>
-          <a:srgbClr val="1A1A1A"/>
+          <a:srgbClr val="FFFFFF"/>
         </a:solidFill>
         <a:effectLst/>
       </p:bgPr>
@@ -5039,7 +9202,7 @@
             <a:avLst/>
           </a:prstGeom>
           <a:solidFill>
-            <a:srgbClr val="E05B00"/>
+            <a:srgbClr val="003DA5"/>
           </a:solidFill>
           <a:ln>
             <a:noFill/>
@@ -5075,8 +9238,8 @@
         </p:nvSpPr>
         <p:spPr>
           <a:xfrm>
-            <a:off x="365760" y="2286000"/>
-            <a:ext cx="11430000" cy="1828800"/>
+            <a:off x="228600" y="182880"/>
+            <a:ext cx="11430000" cy="320040"/>
           </a:xfrm>
           <a:prstGeom prst="rect">
             <a:avLst/>
@@ -5091,17 +9254,326 @@
           <a:p>
             <a:pPr algn="l"/>
             <a:r>
-              <a:rPr sz="3600" b="1">
-                <a:solidFill>
-                  <a:srgbClr val="FFFFFF"/>
+              <a:rPr sz="900" b="0" i="0">
+                <a:solidFill>
+                  <a:srgbClr val="556575"/>
                 </a:solidFill>
                 <a:latin typeface="Arial"/>
               </a:rPr>
-              <a:t>Potenzialanalyse in agree</a:t>
-            </a:r>
-          </a:p>
-        </p:txBody>
-      </p:sp>
+              <a:t>M13 · Modulinhalte</a:t>
+            </a:r>
+          </a:p>
+        </p:txBody>
+      </p:sp>
+      <p:sp>
+        <p:nvSpPr>
+          <p:cNvPr id="4" name="TextBox 3"/>
+          <p:cNvSpPr txBox="1"/>
+          <p:nvPr/>
+        </p:nvSpPr>
+        <p:spPr>
+          <a:xfrm>
+            <a:off x="365760" y="274320"/>
+            <a:ext cx="11430000" cy="777240"/>
+          </a:xfrm>
+          <a:prstGeom prst="rect">
+            <a:avLst/>
+          </a:prstGeom>
+          <a:noFill/>
+        </p:spPr>
+        <p:txBody>
+          <a:bodyPr wrap="square">
+            <a:spAutoFit/>
+          </a:bodyPr>
+          <a:lstStyle/>
+          <a:p>
+            <a:pPr algn="l"/>
+            <a:r>
+              <a:rPr sz="2200" b="1" i="0">
+                <a:solidFill>
+                  <a:srgbClr val="003DA5"/>
+                </a:solidFill>
+                <a:latin typeface="Arial"/>
+              </a:rPr>
+              <a:t>Zwei Typen: Push vs. Pull</a:t>
+            </a:r>
+          </a:p>
+        </p:txBody>
+      </p:sp>
+      <p:sp>
+        <p:nvSpPr>
+          <p:cNvPr id="5" name="Rectangle 4"/>
+          <p:cNvSpPr/>
+          <p:nvPr/>
+        </p:nvSpPr>
+        <p:spPr>
+          <a:xfrm>
+            <a:off x="365760" y="1005840"/>
+            <a:ext cx="11430000" cy="27432"/>
+          </a:xfrm>
+          <a:prstGeom prst="rect">
+            <a:avLst/>
+          </a:prstGeom>
+          <a:solidFill>
+            <a:srgbClr val="D1D5DB"/>
+          </a:solidFill>
+          <a:ln>
+            <a:noFill/>
+          </a:ln>
+        </p:spPr>
+        <p:style>
+          <a:lnRef idx="1">
+            <a:schemeClr val="accent1"/>
+          </a:lnRef>
+          <a:fillRef idx="3">
+            <a:schemeClr val="accent1"/>
+          </a:fillRef>
+          <a:effectRef idx="2">
+            <a:schemeClr val="accent1"/>
+          </a:effectRef>
+          <a:fontRef idx="minor">
+            <a:schemeClr val="lt1"/>
+          </a:fontRef>
+        </p:style>
+        <p:txBody>
+          <a:bodyPr rtlCol="0" anchor="ctr"/>
+          <a:lstStyle/>
+          <a:p>
+            <a:pPr algn="ctr"/>
+          </a:p>
+        </p:txBody>
+      </p:sp>
+      <p:graphicFrame>
+        <p:nvGraphicFramePr>
+          <p:cNvPr id="6" name="Table 5"/>
+          <p:cNvGraphicFramePr>
+            <a:graphicFrameLocks noGrp="1"/>
+          </p:cNvGraphicFramePr>
+          <p:nvPr/>
+        </p:nvGraphicFramePr>
+        <p:xfrm>
+          <a:off x="365760" y="1143000"/>
+          <a:ext cx="11430000" cy="1426464"/>
+        </p:xfrm>
+        <a:graphic>
+          <a:graphicData uri="http://schemas.openxmlformats.org/drawingml/2006/table">
+            <a:tbl>
+              <a:tblPr firstRow="1" bandRow="1">
+                <a:tableStyleId>{5C22544A-7EE6-4342-B048-85BDC9FD1C3A}</a:tableStyleId>
+              </a:tblPr>
+              <a:tblGrid>
+                <a:gridCol w="3810000"/>
+                <a:gridCol w="3810000"/>
+                <a:gridCol w="3810000"/>
+              </a:tblGrid>
+              <a:tr h="475488">
+                <a:tc>
+                  <a:txBody>
+                    <a:bodyPr wrap="square"/>
+                    <a:lstStyle/>
+                    <a:p>
+                      <a:r>
+                        <a:rPr sz="1100" b="1">
+                          <a:solidFill>
+                            <a:srgbClr val="FFFFFF"/>
+                          </a:solidFill>
+                          <a:latin typeface="Arial"/>
+                        </a:rPr>
+                        <a:t>Typ</a:t>
+                      </a:r>
+                    </a:p>
+                  </a:txBody>
+                  <a:tcPr>
+                    <a:solidFill>
+                      <a:srgbClr val="003DA5"/>
+                    </a:solidFill>
+                  </a:tcPr>
+                </a:tc>
+                <a:tc>
+                  <a:txBody>
+                    <a:bodyPr wrap="square"/>
+                    <a:lstStyle/>
+                    <a:p>
+                      <a:r>
+                        <a:rPr sz="1100" b="1">
+                          <a:solidFill>
+                            <a:srgbClr val="FFFFFF"/>
+                          </a:solidFill>
+                          <a:latin typeface="Arial"/>
+                        </a:rPr>
+                        <a:t>Beschreibung</a:t>
+                      </a:r>
+                    </a:p>
+                  </a:txBody>
+                  <a:tcPr>
+                    <a:solidFill>
+                      <a:srgbClr val="003DA5"/>
+                    </a:solidFill>
+                  </a:tcPr>
+                </a:tc>
+                <a:tc>
+                  <a:txBody>
+                    <a:bodyPr wrap="square"/>
+                    <a:lstStyle/>
+                    <a:p>
+                      <a:r>
+                        <a:rPr sz="1100" b="1">
+                          <a:solidFill>
+                            <a:srgbClr val="FFFFFF"/>
+                          </a:solidFill>
+                          <a:latin typeface="Arial"/>
+                        </a:rPr>
+                        <a:t>Risiko</a:t>
+                      </a:r>
+                    </a:p>
+                  </a:txBody>
+                  <a:tcPr>
+                    <a:solidFill>
+                      <a:srgbClr val="003DA5"/>
+                    </a:solidFill>
+                  </a:tcPr>
+                </a:tc>
+              </a:tr>
+              <a:tr h="475488">
+                <a:tc>
+                  <a:txBody>
+                    <a:bodyPr wrap="square"/>
+                    <a:lstStyle/>
+                    <a:p>
+                      <a:r>
+                        <a:rPr sz="1100" b="0">
+                          <a:solidFill>
+                            <a:srgbClr val="1A1A1A"/>
+                          </a:solidFill>
+                          <a:latin typeface="Arial"/>
+                        </a:rPr>
+                        <a:t>Push-Cross-Selling</a:t>
+                      </a:r>
+                    </a:p>
+                  </a:txBody>
+                  <a:tcPr>
+                    <a:solidFill>
+                      <a:srgbClr val="FFFFFF"/>
+                    </a:solidFill>
+                  </a:tcPr>
+                </a:tc>
+                <a:tc>
+                  <a:txBody>
+                    <a:bodyPr wrap="square"/>
+                    <a:lstStyle/>
+                    <a:p>
+                      <a:r>
+                        <a:rPr sz="1100" b="0">
+                          <a:solidFill>
+                            <a:srgbClr val="1A1A1A"/>
+                          </a:solidFill>
+                          <a:latin typeface="Arial"/>
+                        </a:rPr>
+                        <a:t>Produktorientiert: Der Berater verkauft, was er verkaufen soll (Kampagne, Quartalsziel).</a:t>
+                      </a:r>
+                    </a:p>
+                  </a:txBody>
+                  <a:tcPr>
+                    <a:solidFill>
+                      <a:srgbClr val="FFFFFF"/>
+                    </a:solidFill>
+                  </a:tcPr>
+                </a:tc>
+                <a:tc>
+                  <a:txBody>
+                    <a:bodyPr wrap="square"/>
+                    <a:lstStyle/>
+                    <a:p>
+                      <a:r>
+                        <a:rPr sz="1100" b="0">
+                          <a:solidFill>
+                            <a:srgbClr val="1A1A1A"/>
+                          </a:solidFill>
+                          <a:latin typeface="Arial"/>
+                        </a:rPr>
+                        <a:t>Kundenzufriedenheit sinkt, wenn Produkt nicht zum Bedarf passt. Beziehungsschaden möglich.</a:t>
+                      </a:r>
+                    </a:p>
+                  </a:txBody>
+                  <a:tcPr>
+                    <a:solidFill>
+                      <a:srgbClr val="FFFFFF"/>
+                    </a:solidFill>
+                  </a:tcPr>
+                </a:tc>
+              </a:tr>
+              <a:tr h="475488">
+                <a:tc>
+                  <a:txBody>
+                    <a:bodyPr wrap="square"/>
+                    <a:lstStyle/>
+                    <a:p>
+                      <a:r>
+                        <a:rPr sz="1100" b="0">
+                          <a:solidFill>
+                            <a:srgbClr val="1A1A1A"/>
+                          </a:solidFill>
+                          <a:latin typeface="Arial"/>
+                        </a:rPr>
+                        <a:t>Pull-Cross-Selling</a:t>
+                      </a:r>
+                    </a:p>
+                  </a:txBody>
+                  <a:tcPr>
+                    <a:solidFill>
+                      <a:srgbClr val="F4F6FA"/>
+                    </a:solidFill>
+                  </a:tcPr>
+                </a:tc>
+                <a:tc>
+                  <a:txBody>
+                    <a:bodyPr wrap="square"/>
+                    <a:lstStyle/>
+                    <a:p>
+                      <a:r>
+                        <a:rPr sz="1100" b="0">
+                          <a:solidFill>
+                            <a:srgbClr val="1A1A1A"/>
+                          </a:solidFill>
+                          <a:latin typeface="Arial"/>
+                        </a:rPr>
+                        <a:t>Bedarfsorientiert: Der Berater erkennt einen Bedarf und macht ein passendes Angebot.</a:t>
+                      </a:r>
+                    </a:p>
+                  </a:txBody>
+                  <a:tcPr>
+                    <a:solidFill>
+                      <a:srgbClr val="F4F6FA"/>
+                    </a:solidFill>
+                  </a:tcPr>
+                </a:tc>
+                <a:tc>
+                  <a:txBody>
+                    <a:bodyPr wrap="square"/>
+                    <a:lstStyle/>
+                    <a:p>
+                      <a:r>
+                        <a:rPr sz="1100" b="0">
+                          <a:solidFill>
+                            <a:srgbClr val="1A1A1A"/>
+                          </a:solidFill>
+                          <a:latin typeface="Arial"/>
+                        </a:rPr>
+                        <a:t>Skaliert langsamer, aber nachhaltiger. Höhere Abschlussquote und Kundenloyalität.</a:t>
+                      </a:r>
+                    </a:p>
+                  </a:txBody>
+                  <a:tcPr>
+                    <a:solidFill>
+                      <a:srgbClr val="F4F6FA"/>
+                    </a:solidFill>
+                  </a:tcPr>
+                </a:tc>
+              </a:tr>
+            </a:tbl>
+          </a:graphicData>
+        </a:graphic>
+      </p:graphicFrame>
     </p:spTree>
   </p:cSld>
   <p:clrMapOvr>
@@ -5179,8 +9651,8 @@
         </p:nvSpPr>
         <p:spPr>
           <a:xfrm>
-            <a:off x="365760" y="2286000"/>
-            <a:ext cx="11430000" cy="1828800"/>
+            <a:off x="365760" y="2011680"/>
+            <a:ext cx="11430000" cy="2011680"/>
           </a:xfrm>
           <a:prstGeom prst="rect">
             <a:avLst/>
@@ -5195,13 +9667,13 @@
           <a:p>
             <a:pPr algn="l"/>
             <a:r>
-              <a:rPr sz="3600" b="1">
+              <a:rPr sz="3600" b="1" i="0">
                 <a:solidFill>
                   <a:srgbClr val="FFFFFF"/>
                 </a:solidFill>
                 <a:latin typeface="Arial"/>
               </a:rPr>
-              <a:t>Ereignisbasierte Cross-Selling-Anlässe</a:t>
+              <a:t>Das Konzept</a:t>
             </a:r>
           </a:p>
         </p:txBody>
@@ -5220,7 +9692,7 @@
     <p:bg>
       <p:bgPr>
         <a:solidFill>
-          <a:srgbClr val="1A1A1A"/>
+          <a:srgbClr val="FFFFFF"/>
         </a:solidFill>
         <a:effectLst/>
       </p:bgPr>
@@ -5247,7 +9719,7 @@
             <a:avLst/>
           </a:prstGeom>
           <a:solidFill>
-            <a:srgbClr val="E05B00"/>
+            <a:srgbClr val="003DA5"/>
           </a:solidFill>
           <a:ln>
             <a:noFill/>
@@ -5283,8 +9755,8 @@
         </p:nvSpPr>
         <p:spPr>
           <a:xfrm>
-            <a:off x="365760" y="2286000"/>
-            <a:ext cx="11430000" cy="1828800"/>
+            <a:off x="228600" y="182880"/>
+            <a:ext cx="11430000" cy="320040"/>
           </a:xfrm>
           <a:prstGeom prst="rect">
             <a:avLst/>
@@ -5299,13 +9771,164 @@
           <a:p>
             <a:pPr algn="l"/>
             <a:r>
-              <a:rPr sz="3600" b="1">
-                <a:solidFill>
-                  <a:srgbClr val="FFFFFF"/>
+              <a:rPr sz="900" b="0" i="0">
+                <a:solidFill>
+                  <a:srgbClr val="556575"/>
                 </a:solidFill>
                 <a:latin typeface="Arial"/>
               </a:rPr>
-              <a:t>Schritt 1: Analyse</a:t>
+              <a:t>M13 · 4.2 Wallet-Share-Analyse: Wo liegt das Potenzial?</a:t>
+            </a:r>
+          </a:p>
+        </p:txBody>
+      </p:sp>
+      <p:sp>
+        <p:nvSpPr>
+          <p:cNvPr id="4" name="TextBox 3"/>
+          <p:cNvSpPr txBox="1"/>
+          <p:nvPr/>
+        </p:nvSpPr>
+        <p:spPr>
+          <a:xfrm>
+            <a:off x="365760" y="274320"/>
+            <a:ext cx="11430000" cy="777240"/>
+          </a:xfrm>
+          <a:prstGeom prst="rect">
+            <a:avLst/>
+          </a:prstGeom>
+          <a:noFill/>
+        </p:spPr>
+        <p:txBody>
+          <a:bodyPr wrap="square">
+            <a:spAutoFit/>
+          </a:bodyPr>
+          <a:lstStyle/>
+          <a:p>
+            <a:pPr algn="l"/>
+            <a:r>
+              <a:rPr sz="2200" b="1" i="0">
+                <a:solidFill>
+                  <a:srgbClr val="003DA5"/>
+                </a:solidFill>
+                <a:latin typeface="Arial"/>
+              </a:rPr>
+              <a:t>Das Konzept</a:t>
+            </a:r>
+          </a:p>
+        </p:txBody>
+      </p:sp>
+      <p:sp>
+        <p:nvSpPr>
+          <p:cNvPr id="5" name="Rectangle 4"/>
+          <p:cNvSpPr/>
+          <p:nvPr/>
+        </p:nvSpPr>
+        <p:spPr>
+          <a:xfrm>
+            <a:off x="365760" y="1005840"/>
+            <a:ext cx="11430000" cy="27432"/>
+          </a:xfrm>
+          <a:prstGeom prst="rect">
+            <a:avLst/>
+          </a:prstGeom>
+          <a:solidFill>
+            <a:srgbClr val="D1D5DB"/>
+          </a:solidFill>
+          <a:ln>
+            <a:noFill/>
+          </a:ln>
+        </p:spPr>
+        <p:style>
+          <a:lnRef idx="1">
+            <a:schemeClr val="accent1"/>
+          </a:lnRef>
+          <a:fillRef idx="3">
+            <a:schemeClr val="accent1"/>
+          </a:fillRef>
+          <a:effectRef idx="2">
+            <a:schemeClr val="accent1"/>
+          </a:effectRef>
+          <a:fontRef idx="minor">
+            <a:schemeClr val="lt1"/>
+          </a:fontRef>
+        </p:style>
+        <p:txBody>
+          <a:bodyPr rtlCol="0" anchor="ctr"/>
+          <a:lstStyle/>
+          <a:p>
+            <a:pPr algn="ctr"/>
+          </a:p>
+        </p:txBody>
+      </p:sp>
+      <p:sp>
+        <p:nvSpPr>
+          <p:cNvPr id="6" name="TextBox 5"/>
+          <p:cNvSpPr txBox="1"/>
+          <p:nvPr/>
+        </p:nvSpPr>
+        <p:spPr>
+          <a:xfrm>
+            <a:off x="365760" y="1143000"/>
+            <a:ext cx="11430000" cy="5212080"/>
+          </a:xfrm>
+          <a:prstGeom prst="rect">
+            <a:avLst/>
+          </a:prstGeom>
+          <a:noFill/>
+        </p:spPr>
+        <p:txBody>
+          <a:bodyPr wrap="square">
+            <a:spAutoFit/>
+          </a:bodyPr>
+          <a:lstStyle/>
+          <a:p>
+            <a:pPr>
+              <a:spcBef>
+                <a:spcPts val="500"/>
+              </a:spcBef>
+            </a:pPr>
+            <a:r>
+              <a:rPr sz="1500">
+                <a:solidFill>
+                  <a:srgbClr val="003DA5"/>
+                </a:solidFill>
+                <a:latin typeface="Arial"/>
+              </a:rPr>
+              <a:t>▪  </a:t>
+            </a:r>
+            <a:r>
+              <a:rPr sz="1700">
+                <a:solidFill>
+                  <a:srgbClr val="1A1A1A"/>
+                </a:solidFill>
+                <a:latin typeface="Arial"/>
+              </a:rPr>
+              <a:t>Der Wallet-Share bezeichnet den Anteil der eigenen Bank am Gesamtvolumen der Finanzdienstleistungen, die ein Kunde nutzt. Ein Firmenkunde mit einem…</a:t>
+            </a:r>
+          </a:p>
+          <a:p>
+            <a:pPr>
+              <a:spcBef>
+                <a:spcPts val="500"/>
+              </a:spcBef>
+            </a:pPr>
+            <a:r>
+              <a:rPr sz="1500">
+                <a:solidFill>
+                  <a:srgbClr val="003DA5"/>
+                </a:solidFill>
+                <a:latin typeface="Arial"/>
+              </a:rPr>
+              <a:t>▪  </a:t>
+            </a:r>
+            <a:r>
+              <a:rPr sz="1700">
+                <a:solidFill>
+                  <a:srgbClr val="1A1A1A"/>
+                </a:solidFill>
+                <a:latin typeface="Arial"/>
+              </a:rPr>
+              <a:t>Das unausgeschöpfte Potenzial von 60 % ist nicht verloren – es ist bei einem Wettbewerber.</a:t>
             </a:r>
           </a:p>
         </p:txBody>
@@ -5387,8 +10010,8 @@
         </p:nvSpPr>
         <p:spPr>
           <a:xfrm>
-            <a:off x="365760" y="2286000"/>
-            <a:ext cx="11430000" cy="1828800"/>
+            <a:off x="365760" y="2011680"/>
+            <a:ext cx="11430000" cy="2011680"/>
           </a:xfrm>
           <a:prstGeom prst="rect">
             <a:avLst/>
@@ -5403,13 +10026,13 @@
           <a:p>
             <a:pPr algn="l"/>
             <a:r>
-              <a:rPr sz="3600" b="1">
+              <a:rPr sz="3600" b="1" i="0">
                 <a:solidFill>
                   <a:srgbClr val="FFFFFF"/>
                 </a:solidFill>
                 <a:latin typeface="Arial"/>
               </a:rPr>
-              <a:t>Schritt 2: Hypothese formulieren</a:t>
+              <a:t>Potenzialanalyse in agree</a:t>
             </a:r>
           </a:p>
         </p:txBody>

--- a/public/downloads/praesentation/M13.pptx
+++ b/public/downloads/praesentation/M13.pptx
@@ -3462,7 +3462,7 @@
     <p:bg>
       <p:bgPr>
         <a:solidFill>
-          <a:srgbClr val="191D2E"/>
+          <a:srgbClr val="1F2B56"/>
         </a:solidFill>
         <a:effectLst/>
       </p:bgPr>
@@ -6288,7 +6288,7 @@
     <p:bg>
       <p:bgPr>
         <a:solidFill>
-          <a:srgbClr val="191D2E"/>
+          <a:srgbClr val="1F2B56"/>
         </a:solidFill>
         <a:effectLst/>
       </p:bgPr>
@@ -6489,7 +6489,7 @@
     <p:bg>
       <p:bgPr>
         <a:solidFill>
-          <a:srgbClr val="191D2E"/>
+          <a:srgbClr val="1F2B56"/>
         </a:solidFill>
         <a:effectLst/>
       </p:bgPr>
@@ -6690,7 +6690,7 @@
     <p:bg>
       <p:bgPr>
         <a:solidFill>
-          <a:srgbClr val="191D2E"/>
+          <a:srgbClr val="1F2B56"/>
         </a:solidFill>
         <a:effectLst/>
       </p:bgPr>
@@ -7200,7 +7200,7 @@
                   </a:txBody>
                   <a:tcPr>
                     <a:solidFill>
-                      <a:srgbClr val="191D2E"/>
+                      <a:srgbClr val="1F2B56"/>
                     </a:solidFill>
                   </a:tcPr>
                 </a:tc>
@@ -7222,7 +7222,7 @@
                   </a:txBody>
                   <a:tcPr>
                     <a:solidFill>
-                      <a:srgbClr val="191D2E"/>
+                      <a:srgbClr val="1F2B56"/>
                     </a:solidFill>
                   </a:tcPr>
                 </a:tc>
@@ -7244,7 +7244,7 @@
                   </a:txBody>
                   <a:tcPr>
                     <a:solidFill>
-                      <a:srgbClr val="191D2E"/>
+                      <a:srgbClr val="1F2B56"/>
                     </a:solidFill>
                   </a:tcPr>
                 </a:tc>
@@ -7266,7 +7266,7 @@
                   </a:txBody>
                   <a:tcPr>
                     <a:solidFill>
-                      <a:srgbClr val="191D2E"/>
+                      <a:srgbClr val="1F2B56"/>
                     </a:solidFill>
                   </a:tcPr>
                 </a:tc>
@@ -7288,7 +7288,7 @@
                   </a:txBody>
                   <a:tcPr>
                     <a:solidFill>
-                      <a:srgbClr val="191D2E"/>
+                      <a:srgbClr val="1F2B56"/>
                     </a:solidFill>
                   </a:tcPr>
                 </a:tc>
@@ -8254,7 +8254,7 @@
                   </a:txBody>
                   <a:tcPr>
                     <a:solidFill>
-                      <a:srgbClr val="191D2E"/>
+                      <a:srgbClr val="1F2B56"/>
                     </a:solidFill>
                   </a:tcPr>
                 </a:tc>
@@ -8276,7 +8276,7 @@
                   </a:txBody>
                   <a:tcPr>
                     <a:solidFill>
-                      <a:srgbClr val="191D2E"/>
+                      <a:srgbClr val="1F2B56"/>
                     </a:solidFill>
                   </a:tcPr>
                 </a:tc>
@@ -8821,29 +8821,29 @@
         </p:nvSpPr>
         <p:spPr>
           <a:xfrm>
-            <a:off x="4064000" y="927100"/>
-            <a:ext cx="508000" cy="647700"/>
-          </a:xfrm>
-          <a:prstGeom prst="rect">
-            <a:avLst/>
-          </a:prstGeom>
-          <a:noFill/>
-        </p:spPr>
-        <p:txBody>
-          <a:bodyPr wrap="square">
+            <a:off x="4064000" y="939799"/>
+            <a:ext cx="762000" cy="647700"/>
+          </a:xfrm>
+          <a:prstGeom prst="rect">
+            <a:avLst/>
+          </a:prstGeom>
+          <a:noFill/>
+        </p:spPr>
+        <p:txBody>
+          <a:bodyPr wrap="none">
             <a:normAutofit/>
           </a:bodyPr>
           <a:lstStyle/>
           <a:p>
             <a:pPr algn="l"/>
             <a:r>
-              <a:rPr sz="2600" b="0" i="1">
+              <a:rPr sz="2400" b="0" i="1">
                 <a:solidFill>
                   <a:srgbClr val="1F2B56"/>
                 </a:solidFill>
                 <a:latin typeface="Georgia"/>
               </a:rPr>
-              <a:t>I.</a:t>
+              <a:t>I</a:t>
             </a:r>
           </a:p>
         </p:txBody>
@@ -8856,8 +8856,8 @@
         </p:nvSpPr>
         <p:spPr>
           <a:xfrm>
-            <a:off x="4699000" y="952500"/>
-            <a:ext cx="6858000" cy="622300"/>
+            <a:off x="4953000" y="952500"/>
+            <a:ext cx="6629400" cy="635000"/>
           </a:xfrm>
           <a:prstGeom prst="rect">
             <a:avLst/>
@@ -8891,7 +8891,7 @@
         </p:nvSpPr>
         <p:spPr>
           <a:xfrm>
-            <a:off x="4064000" y="1574800"/>
+            <a:off x="4064000" y="1587500"/>
             <a:ext cx="7518399" cy="6350"/>
           </a:xfrm>
           <a:prstGeom prst="rect">
@@ -8934,29 +8934,29 @@
         </p:nvSpPr>
         <p:spPr>
           <a:xfrm>
-            <a:off x="4064000" y="1612900"/>
-            <a:ext cx="508000" cy="647700"/>
-          </a:xfrm>
-          <a:prstGeom prst="rect">
-            <a:avLst/>
-          </a:prstGeom>
-          <a:noFill/>
-        </p:spPr>
-        <p:txBody>
-          <a:bodyPr wrap="square">
+            <a:off x="4064000" y="1638300"/>
+            <a:ext cx="762000" cy="647700"/>
+          </a:xfrm>
+          <a:prstGeom prst="rect">
+            <a:avLst/>
+          </a:prstGeom>
+          <a:noFill/>
+        </p:spPr>
+        <p:txBody>
+          <a:bodyPr wrap="none">
             <a:normAutofit/>
           </a:bodyPr>
           <a:lstStyle/>
           <a:p>
             <a:pPr algn="l"/>
             <a:r>
-              <a:rPr sz="2600" b="0" i="1">
+              <a:rPr sz="2400" b="0" i="1">
                 <a:solidFill>
                   <a:srgbClr val="1F2B56"/>
                 </a:solidFill>
                 <a:latin typeface="Georgia"/>
               </a:rPr>
-              <a:t>II.</a:t>
+              <a:t>II</a:t>
             </a:r>
           </a:p>
         </p:txBody>
@@ -8969,8 +8969,8 @@
         </p:nvSpPr>
         <p:spPr>
           <a:xfrm>
-            <a:off x="4699000" y="1638300"/>
-            <a:ext cx="6858000" cy="622300"/>
+            <a:off x="4953000" y="1651000"/>
+            <a:ext cx="6629400" cy="635000"/>
           </a:xfrm>
           <a:prstGeom prst="rect">
             <a:avLst/>
@@ -9004,7 +9004,7 @@
         </p:nvSpPr>
         <p:spPr>
           <a:xfrm>
-            <a:off x="4064000" y="2260600"/>
+            <a:off x="4064000" y="2286000"/>
             <a:ext cx="7518399" cy="6350"/>
           </a:xfrm>
           <a:prstGeom prst="rect">
@@ -9047,29 +9047,29 @@
         </p:nvSpPr>
         <p:spPr>
           <a:xfrm>
-            <a:off x="4064000" y="2298700"/>
-            <a:ext cx="508000" cy="647700"/>
-          </a:xfrm>
-          <a:prstGeom prst="rect">
-            <a:avLst/>
-          </a:prstGeom>
-          <a:noFill/>
-        </p:spPr>
-        <p:txBody>
-          <a:bodyPr wrap="square">
+            <a:off x="4064000" y="2336800"/>
+            <a:ext cx="762000" cy="647700"/>
+          </a:xfrm>
+          <a:prstGeom prst="rect">
+            <a:avLst/>
+          </a:prstGeom>
+          <a:noFill/>
+        </p:spPr>
+        <p:txBody>
+          <a:bodyPr wrap="none">
             <a:normAutofit/>
           </a:bodyPr>
           <a:lstStyle/>
           <a:p>
             <a:pPr algn="l"/>
             <a:r>
-              <a:rPr sz="2600" b="0" i="1">
+              <a:rPr sz="2400" b="0" i="1">
                 <a:solidFill>
                   <a:srgbClr val="1F2B56"/>
                 </a:solidFill>
                 <a:latin typeface="Georgia"/>
               </a:rPr>
-              <a:t>III.</a:t>
+              <a:t>III</a:t>
             </a:r>
           </a:p>
         </p:txBody>
@@ -9082,8 +9082,8 @@
         </p:nvSpPr>
         <p:spPr>
           <a:xfrm>
-            <a:off x="4699000" y="2324100"/>
-            <a:ext cx="6858000" cy="622300"/>
+            <a:off x="4953000" y="2349500"/>
+            <a:ext cx="6629400" cy="635000"/>
           </a:xfrm>
           <a:prstGeom prst="rect">
             <a:avLst/>
@@ -9117,7 +9117,7 @@
         </p:nvSpPr>
         <p:spPr>
           <a:xfrm>
-            <a:off x="4064000" y="2946400"/>
+            <a:off x="4064000" y="2984500"/>
             <a:ext cx="7518399" cy="6350"/>
           </a:xfrm>
           <a:prstGeom prst="rect">
@@ -9160,29 +9160,29 @@
         </p:nvSpPr>
         <p:spPr>
           <a:xfrm>
-            <a:off x="4064000" y="2984500"/>
-            <a:ext cx="508000" cy="647700"/>
-          </a:xfrm>
-          <a:prstGeom prst="rect">
-            <a:avLst/>
-          </a:prstGeom>
-          <a:noFill/>
-        </p:spPr>
-        <p:txBody>
-          <a:bodyPr wrap="square">
+            <a:off x="4064000" y="3035300"/>
+            <a:ext cx="762000" cy="647700"/>
+          </a:xfrm>
+          <a:prstGeom prst="rect">
+            <a:avLst/>
+          </a:prstGeom>
+          <a:noFill/>
+        </p:spPr>
+        <p:txBody>
+          <a:bodyPr wrap="none">
             <a:normAutofit/>
           </a:bodyPr>
           <a:lstStyle/>
           <a:p>
             <a:pPr algn="l"/>
             <a:r>
-              <a:rPr sz="2600" b="0" i="1">
+              <a:rPr sz="2400" b="0" i="1">
                 <a:solidFill>
                   <a:srgbClr val="1F2B56"/>
                 </a:solidFill>
                 <a:latin typeface="Georgia"/>
               </a:rPr>
-              <a:t>IV.</a:t>
+              <a:t>IV</a:t>
             </a:r>
           </a:p>
         </p:txBody>
@@ -9195,8 +9195,8 @@
         </p:nvSpPr>
         <p:spPr>
           <a:xfrm>
-            <a:off x="4699000" y="3009900"/>
-            <a:ext cx="6858000" cy="622300"/>
+            <a:off x="4953000" y="3048000"/>
+            <a:ext cx="6629400" cy="635000"/>
           </a:xfrm>
           <a:prstGeom prst="rect">
             <a:avLst/>
@@ -9230,7 +9230,7 @@
         </p:nvSpPr>
         <p:spPr>
           <a:xfrm>
-            <a:off x="4064000" y="3632200"/>
+            <a:off x="4064000" y="3683000"/>
             <a:ext cx="7518399" cy="6350"/>
           </a:xfrm>
           <a:prstGeom prst="rect">
@@ -9273,29 +9273,29 @@
         </p:nvSpPr>
         <p:spPr>
           <a:xfrm>
-            <a:off x="4064000" y="3670300"/>
-            <a:ext cx="508000" cy="647700"/>
-          </a:xfrm>
-          <a:prstGeom prst="rect">
-            <a:avLst/>
-          </a:prstGeom>
-          <a:noFill/>
-        </p:spPr>
-        <p:txBody>
-          <a:bodyPr wrap="square">
+            <a:off x="4064000" y="3733799"/>
+            <a:ext cx="762000" cy="647700"/>
+          </a:xfrm>
+          <a:prstGeom prst="rect">
+            <a:avLst/>
+          </a:prstGeom>
+          <a:noFill/>
+        </p:spPr>
+        <p:txBody>
+          <a:bodyPr wrap="none">
             <a:normAutofit/>
           </a:bodyPr>
           <a:lstStyle/>
           <a:p>
             <a:pPr algn="l"/>
             <a:r>
-              <a:rPr sz="2600" b="0" i="1">
+              <a:rPr sz="2400" b="0" i="1">
                 <a:solidFill>
                   <a:srgbClr val="1F2B56"/>
                 </a:solidFill>
                 <a:latin typeface="Georgia"/>
               </a:rPr>
-              <a:t>V.</a:t>
+              <a:t>V</a:t>
             </a:r>
           </a:p>
         </p:txBody>
@@ -9308,8 +9308,8 @@
         </p:nvSpPr>
         <p:spPr>
           <a:xfrm>
-            <a:off x="4699000" y="3695700"/>
-            <a:ext cx="6858000" cy="622300"/>
+            <a:off x="4953000" y="3746500"/>
+            <a:ext cx="6629400" cy="635000"/>
           </a:xfrm>
           <a:prstGeom prst="rect">
             <a:avLst/>
@@ -9349,7 +9349,7 @@
     <p:bg>
       <p:bgPr>
         <a:solidFill>
-          <a:srgbClr val="191D2E"/>
+          <a:srgbClr val="1F2B56"/>
         </a:solidFill>
         <a:effectLst/>
       </p:bgPr>
@@ -9550,7 +9550,7 @@
     <p:bg>
       <p:bgPr>
         <a:solidFill>
-          <a:srgbClr val="191D2E"/>
+          <a:srgbClr val="1F2B56"/>
         </a:solidFill>
         <a:effectLst/>
       </p:bgPr>
@@ -9751,7 +9751,7 @@
     <p:bg>
       <p:bgPr>
         <a:solidFill>
-          <a:srgbClr val="191D2E"/>
+          <a:srgbClr val="1F2B56"/>
         </a:solidFill>
         <a:effectLst/>
       </p:bgPr>
@@ -11647,7 +11647,7 @@
     <p:bg>
       <p:bgPr>
         <a:solidFill>
-          <a:srgbClr val="191D2E"/>
+          <a:srgbClr val="1F2B56"/>
         </a:solidFill>
         <a:effectLst/>
       </p:bgPr>
@@ -11848,7 +11848,7 @@
     <p:bg>
       <p:bgPr>
         <a:solidFill>
-          <a:srgbClr val="191D2E"/>
+          <a:srgbClr val="1F2B56"/>
         </a:solidFill>
         <a:effectLst/>
       </p:bgPr>
@@ -12049,7 +12049,7 @@
     <p:bg>
       <p:bgPr>
         <a:solidFill>
-          <a:srgbClr val="191D2E"/>
+          <a:srgbClr val="1F2B56"/>
         </a:solidFill>
         <a:effectLst/>
       </p:bgPr>
@@ -12250,7 +12250,7 @@
     <p:bg>
       <p:bgPr>
         <a:solidFill>
-          <a:srgbClr val="191D2E"/>
+          <a:srgbClr val="1F2B56"/>
         </a:solidFill>
         <a:effectLst/>
       </p:bgPr>
@@ -12451,7 +12451,7 @@
     <p:bg>
       <p:bgPr>
         <a:solidFill>
-          <a:srgbClr val="191D2E"/>
+          <a:srgbClr val="1F2B56"/>
         </a:solidFill>
         <a:effectLst/>
       </p:bgPr>
@@ -13900,7 +13900,7 @@
                   </a:txBody>
                   <a:tcPr>
                     <a:solidFill>
-                      <a:srgbClr val="191D2E"/>
+                      <a:srgbClr val="1F2B56"/>
                     </a:solidFill>
                   </a:tcPr>
                 </a:tc>
@@ -13922,7 +13922,7 @@
                   </a:txBody>
                   <a:tcPr>
                     <a:solidFill>
-                      <a:srgbClr val="191D2E"/>
+                      <a:srgbClr val="1F2B56"/>
                     </a:solidFill>
                   </a:tcPr>
                 </a:tc>
@@ -13944,7 +13944,7 @@
                   </a:txBody>
                   <a:tcPr>
                     <a:solidFill>
-                      <a:srgbClr val="191D2E"/>
+                      <a:srgbClr val="1F2B56"/>
                     </a:solidFill>
                   </a:tcPr>
                 </a:tc>
@@ -14103,7 +14103,7 @@
     <p:bg>
       <p:bgPr>
         <a:solidFill>
-          <a:srgbClr val="191D2E"/>
+          <a:srgbClr val="1F2B56"/>
         </a:solidFill>
         <a:effectLst/>
       </p:bgPr>
@@ -15089,7 +15089,7 @@
                   </a:txBody>
                   <a:tcPr>
                     <a:solidFill>
-                      <a:srgbClr val="191D2E"/>
+                      <a:srgbClr val="1F2B56"/>
                     </a:solidFill>
                   </a:tcPr>
                 </a:tc>
@@ -15111,7 +15111,7 @@
                   </a:txBody>
                   <a:tcPr>
                     <a:solidFill>
-                      <a:srgbClr val="191D2E"/>
+                      <a:srgbClr val="1F2B56"/>
                     </a:solidFill>
                   </a:tcPr>
                 </a:tc>
@@ -15133,7 +15133,7 @@
                   </a:txBody>
                   <a:tcPr>
                     <a:solidFill>
-                      <a:srgbClr val="191D2E"/>
+                      <a:srgbClr val="1F2B56"/>
                     </a:solidFill>
                   </a:tcPr>
                 </a:tc>
@@ -15767,7 +15767,7 @@
                   </a:txBody>
                   <a:tcPr>
                     <a:solidFill>
-                      <a:srgbClr val="191D2E"/>
+                      <a:srgbClr val="1F2B56"/>
                     </a:solidFill>
                   </a:tcPr>
                 </a:tc>
@@ -15789,7 +15789,7 @@
                   </a:txBody>
                   <a:tcPr>
                     <a:solidFill>
-                      <a:srgbClr val="191D2E"/>
+                      <a:srgbClr val="1F2B56"/>
                     </a:solidFill>
                   </a:tcPr>
                 </a:tc>

--- a/public/downloads/praesentation/M13.pptx
+++ b/public/downloads/praesentation/M13.pptx
@@ -17,8 +17,10 @@
     <p:sldId id="265" r:id="rId16"/>
     <p:sldId id="266" r:id="rId17"/>
     <p:sldId id="267" r:id="rId18"/>
+    <p:sldId id="268" r:id="rId19"/>
+    <p:sldId id="269" r:id="rId20"/>
   </p:sldIdLst>
-  <p:sldSz cx="12191695" cy="6858000" type="screen4x3"/>
+  <p:sldSz cx="12188952" cy="6858000" type="screen4x3"/>
   <p:notesSz cx="6858000" cy="9144000"/>
   <p:defaultTextStyle>
     <a:defPPr>
@@ -3092,14 +3094,6 @@
 <file path=ppt/slides/slide1.xml><?xml version="1.0" encoding="utf-8"?>
 <p:sld xmlns:a="http://schemas.openxmlformats.org/drawingml/2006/main" xmlns:p="http://schemas.openxmlformats.org/presentationml/2006/main" xmlns:r="http://schemas.openxmlformats.org/officeDocument/2006/relationships">
   <p:cSld>
-    <p:bg>
-      <p:bgPr>
-        <a:solidFill>
-          <a:srgbClr val="F8F8FA"/>
-        </a:solidFill>
-        <a:effectLst/>
-      </p:bgPr>
-    </p:bg>
     <p:spTree>
       <p:nvGrpSpPr>
         <p:cNvPr id="1" name=""/>
@@ -3109,125 +3103,20 @@
       <p:grpSpPr/>
       <p:sp>
         <p:nvSpPr>
-          <p:cNvPr id="2" name="TextBox 1"/>
-          <p:cNvSpPr txBox="1"/>
-          <p:nvPr/>
-        </p:nvSpPr>
-        <p:spPr>
-          <a:xfrm>
-            <a:off x="609600" y="304800"/>
-            <a:ext cx="3175000" cy="279400"/>
-          </a:xfrm>
-          <a:prstGeom prst="rect">
-            <a:avLst/>
-          </a:prstGeom>
-          <a:noFill/>
-        </p:spPr>
-        <p:txBody>
-          <a:bodyPr wrap="square">
-            <a:normAutofit/>
-          </a:bodyPr>
-          <a:lstStyle/>
-          <a:p>
-            <a:pPr algn="l"/>
-            <a:r>
-              <a:rPr sz="1000" b="1" i="0">
-                <a:solidFill>
-                  <a:srgbClr val="191D2E"/>
-                </a:solidFill>
-                <a:latin typeface="Arial"/>
-              </a:rPr>
-              <a:t>FKB  Campus</a:t>
-            </a:r>
-          </a:p>
-        </p:txBody>
-      </p:sp>
-      <p:sp>
-        <p:nvSpPr>
-          <p:cNvPr id="3" name="TextBox 2"/>
-          <p:cNvSpPr txBox="1"/>
-          <p:nvPr/>
-        </p:nvSpPr>
-        <p:spPr>
-          <a:xfrm>
-            <a:off x="609600" y="304800"/>
-            <a:ext cx="10972800" cy="279400"/>
-          </a:xfrm>
-          <a:prstGeom prst="rect">
-            <a:avLst/>
-          </a:prstGeom>
-          <a:noFill/>
-        </p:spPr>
-        <p:txBody>
-          <a:bodyPr wrap="square">
-            <a:normAutofit/>
-          </a:bodyPr>
-          <a:lstStyle/>
-          <a:p>
-            <a:pPr algn="r"/>
-            <a:r>
-              <a:rPr sz="900" b="0" i="0">
-                <a:solidFill>
-                  <a:srgbClr val="7B7FA0"/>
-                </a:solidFill>
-                <a:latin typeface="Courier New"/>
-              </a:rPr>
-              <a:t>M13  ·  v0.3</a:t>
-            </a:r>
-          </a:p>
-        </p:txBody>
-      </p:sp>
-      <p:sp>
-        <p:nvSpPr>
-          <p:cNvPr id="4" name="TextBox 3"/>
-          <p:cNvSpPr txBox="1"/>
-          <p:nvPr/>
-        </p:nvSpPr>
-        <p:spPr>
-          <a:xfrm>
-            <a:off x="609600" y="2794000"/>
-            <a:ext cx="10972800" cy="2032000"/>
-          </a:xfrm>
-          <a:prstGeom prst="rect">
-            <a:avLst/>
-          </a:prstGeom>
-          <a:noFill/>
-        </p:spPr>
-        <p:txBody>
-          <a:bodyPr wrap="square">
-            <a:normAutofit/>
-          </a:bodyPr>
-          <a:lstStyle/>
-          <a:p>
-            <a:pPr algn="l"/>
-            <a:r>
-              <a:rPr sz="6000" b="0" i="0">
-                <a:solidFill>
-                  <a:srgbClr val="191D2E"/>
-                </a:solidFill>
-                <a:latin typeface="Georgia"/>
-              </a:rPr>
-              <a:t>Cross-Selling systematisch</a:t>
-            </a:r>
-          </a:p>
-        </p:txBody>
-      </p:sp>
-      <p:sp>
-        <p:nvSpPr>
-          <p:cNvPr id="5" name="Rectangle 4"/>
+          <p:cNvPr id="2" name="Rectangle 1"/>
           <p:cNvSpPr/>
           <p:nvPr/>
         </p:nvSpPr>
         <p:spPr>
           <a:xfrm>
-            <a:off x="609600" y="4889500"/>
-            <a:ext cx="10972800" cy="6350"/>
+            <a:off x="0" y="0"/>
+            <a:ext cx="12188952" cy="6858000"/>
           </a:xfrm>
           <a:prstGeom prst="rect">
             <a:avLst/>
           </a:prstGeom>
           <a:solidFill>
-            <a:srgbClr val="191D2E"/>
+            <a:srgbClr val="1F2C56"/>
           </a:solidFill>
           <a:ln>
             <a:noFill/>
@@ -3257,14 +3146,57 @@
       </p:sp>
       <p:sp>
         <p:nvSpPr>
-          <p:cNvPr id="6" name="TextBox 5"/>
+          <p:cNvPr id="3" name="Rectangle 2"/>
+          <p:cNvSpPr/>
+          <p:nvPr/>
+        </p:nvSpPr>
+        <p:spPr>
+          <a:xfrm>
+            <a:off x="0" y="0"/>
+            <a:ext cx="12188952" cy="54864"/>
+          </a:xfrm>
+          <a:prstGeom prst="rect">
+            <a:avLst/>
+          </a:prstGeom>
+          <a:solidFill>
+            <a:srgbClr val="D9C089"/>
+          </a:solidFill>
+          <a:ln>
+            <a:noFill/>
+          </a:ln>
+        </p:spPr>
+        <p:style>
+          <a:lnRef idx="1">
+            <a:schemeClr val="accent1"/>
+          </a:lnRef>
+          <a:fillRef idx="3">
+            <a:schemeClr val="accent1"/>
+          </a:fillRef>
+          <a:effectRef idx="2">
+            <a:schemeClr val="accent1"/>
+          </a:effectRef>
+          <a:fontRef idx="minor">
+            <a:schemeClr val="lt1"/>
+          </a:fontRef>
+        </p:style>
+        <p:txBody>
+          <a:bodyPr rtlCol="0" anchor="ctr"/>
+          <a:lstStyle/>
+          <a:p>
+            <a:pPr algn="ctr"/>
+          </a:p>
+        </p:txBody>
+      </p:sp>
+      <p:sp>
+        <p:nvSpPr>
+          <p:cNvPr id="4" name="TextBox 3"/>
           <p:cNvSpPr txBox="1"/>
           <p:nvPr/>
         </p:nvSpPr>
         <p:spPr>
           <a:xfrm>
-            <a:off x="609600" y="5016500"/>
-            <a:ext cx="5207000" cy="1143000"/>
+            <a:off x="685800" y="201168"/>
+            <a:ext cx="10817352" cy="256032"/>
           </a:xfrm>
           <a:prstGeom prst="rect">
             <a:avLst/>
@@ -3272,21 +3204,99 @@
           <a:noFill/>
         </p:spPr>
         <p:txBody>
+          <a:bodyPr wrap="none">
+            <a:spAutoFit/>
+          </a:bodyPr>
+          <a:lstStyle/>
+          <a:p>
+            <a:pPr algn="l"/>
+            <a:r>
+              <a:rPr sz="800">
+                <a:solidFill>
+                  <a:srgbClr val="C8D2E6"/>
+                </a:solidFill>
+                <a:latin typeface="JetBrains Mono"/>
+              </a:rPr>
+              <a:t>FKB CAMPUS  ·  FIRMENKUNDENAKADEMIE  ·  M13</a:t>
+            </a:r>
+          </a:p>
+        </p:txBody>
+      </p:sp>
+      <p:sp>
+        <p:nvSpPr>
+          <p:cNvPr id="5" name="TextBox 4"/>
+          <p:cNvSpPr txBox="1"/>
+          <p:nvPr/>
+        </p:nvSpPr>
+        <p:spPr>
+          <a:xfrm>
+            <a:off x="685800" y="1828800"/>
+            <a:ext cx="10817352" cy="2011680"/>
+          </a:xfrm>
+          <a:prstGeom prst="rect">
+            <a:avLst/>
+          </a:prstGeom>
+          <a:noFill/>
+        </p:spPr>
+        <p:txBody>
           <a:bodyPr wrap="square">
-            <a:normAutofit/>
+            <a:spAutoFit/>
           </a:bodyPr>
           <a:lstStyle/>
           <a:p>
             <a:pPr algn="l"/>
             <a:r>
-              <a:rPr sz="1400" b="0" i="1">
-                <a:solidFill>
-                  <a:srgbClr val="4D5270"/>
-                </a:solidFill>
-                <a:latin typeface="Georgia"/>
+              <a:rPr sz="4600" b="1" i="0">
+                <a:solidFill>
+                  <a:srgbClr val="FFFFFF"/>
+                </a:solidFill>
+                <a:latin typeface="Source Serif 4"/>
               </a:rPr>
-              <a:t>Kundenpotenziale durch bedarfsorientiertes Cross-Selling und Wallet-Share-Analyse erschließen</a:t>
-            </a:r>
+              <a:t>Cross-Selling systematisch</a:t>
+            </a:r>
+          </a:p>
+        </p:txBody>
+      </p:sp>
+      <p:sp>
+        <p:nvSpPr>
+          <p:cNvPr id="6" name="Rectangle 5"/>
+          <p:cNvSpPr/>
+          <p:nvPr/>
+        </p:nvSpPr>
+        <p:spPr>
+          <a:xfrm>
+            <a:off x="685800" y="5029200"/>
+            <a:ext cx="10817352" cy="12700"/>
+          </a:xfrm>
+          <a:prstGeom prst="rect">
+            <a:avLst/>
+          </a:prstGeom>
+          <a:solidFill>
+            <a:srgbClr val="FFFFFF"/>
+          </a:solidFill>
+          <a:ln>
+            <a:noFill/>
+          </a:ln>
+        </p:spPr>
+        <p:style>
+          <a:lnRef idx="1">
+            <a:schemeClr val="accent1"/>
+          </a:lnRef>
+          <a:fillRef idx="3">
+            <a:schemeClr val="accent1"/>
+          </a:fillRef>
+          <a:effectRef idx="2">
+            <a:schemeClr val="accent1"/>
+          </a:effectRef>
+          <a:fontRef idx="minor">
+            <a:schemeClr val="lt1"/>
+          </a:fontRef>
+        </p:style>
+        <p:txBody>
+          <a:bodyPr rtlCol="0" anchor="ctr"/>
+          <a:lstStyle/>
+          <a:p>
+            <a:pPr algn="ctr"/>
           </a:p>
         </p:txBody>
       </p:sp>
@@ -3298,8 +3308,8 @@
         </p:nvSpPr>
         <p:spPr>
           <a:xfrm>
-            <a:off x="6032500" y="5016500"/>
-            <a:ext cx="2540000" cy="177800"/>
+            <a:off x="685800" y="5193792"/>
+            <a:ext cx="5408676" cy="201168"/>
           </a:xfrm>
           <a:prstGeom prst="rect">
             <a:avLst/>
@@ -3307,20 +3317,20 @@
           <a:noFill/>
         </p:spPr>
         <p:txBody>
-          <a:bodyPr wrap="square">
-            <a:normAutofit/>
+          <a:bodyPr wrap="none">
+            <a:spAutoFit/>
           </a:bodyPr>
           <a:lstStyle/>
           <a:p>
             <a:pPr algn="l"/>
             <a:r>
-              <a:rPr sz="900" b="0" i="0">
-                <a:solidFill>
-                  <a:srgbClr val="7B7FA0"/>
-                </a:solidFill>
-                <a:latin typeface="Courier New"/>
+              <a:rPr sz="700">
+                <a:solidFill>
+                  <a:srgbClr val="A0B4D2"/>
+                </a:solidFill>
+                <a:latin typeface="JetBrains Mono"/>
               </a:rPr>
-              <a:t>ZIELSTUFE</a:t>
+              <a:t>KOMPETENZSTUFE</a:t>
             </a:r>
           </a:p>
         </p:txBody>
@@ -3333,8 +3343,8 @@
         </p:nvSpPr>
         <p:spPr>
           <a:xfrm>
-            <a:off x="6032500" y="5207000"/>
-            <a:ext cx="2540000" cy="508000"/>
+            <a:off x="685800" y="5394960"/>
+            <a:ext cx="5408676" cy="320040"/>
           </a:xfrm>
           <a:prstGeom prst="rect">
             <a:avLst/>
@@ -3343,17 +3353,17 @@
         </p:spPr>
         <p:txBody>
           <a:bodyPr wrap="square">
-            <a:normAutofit/>
+            <a:spAutoFit/>
           </a:bodyPr>
           <a:lstStyle/>
           <a:p>
             <a:pPr algn="l"/>
             <a:r>
-              <a:rPr sz="1400" b="0" i="0">
-                <a:solidFill>
-                  <a:srgbClr val="191D2E"/>
-                </a:solidFill>
-                <a:latin typeface="Georgia"/>
+              <a:rPr sz="1100" b="0" i="0">
+                <a:solidFill>
+                  <a:srgbClr val="FFFFFF"/>
+                </a:solidFill>
+                <a:latin typeface="Arial"/>
               </a:rPr>
               <a:t>Berater</a:t>
             </a:r>
@@ -3368,8 +3378,8 @@
         </p:nvSpPr>
         <p:spPr>
           <a:xfrm>
-            <a:off x="8890000" y="5016500"/>
-            <a:ext cx="2667000" cy="177800"/>
+            <a:off x="6094476" y="5193792"/>
+            <a:ext cx="5408676" cy="201168"/>
           </a:xfrm>
           <a:prstGeom prst="rect">
             <a:avLst/>
@@ -3377,20 +3387,20 @@
           <a:noFill/>
         </p:spPr>
         <p:txBody>
-          <a:bodyPr wrap="square">
-            <a:normAutofit/>
+          <a:bodyPr wrap="none">
+            <a:spAutoFit/>
           </a:bodyPr>
           <a:lstStyle/>
           <a:p>
             <a:pPr algn="l"/>
             <a:r>
-              <a:rPr sz="900" b="0" i="0">
-                <a:solidFill>
-                  <a:srgbClr val="7B7FA0"/>
-                </a:solidFill>
-                <a:latin typeface="Courier New"/>
+              <a:rPr sz="700">
+                <a:solidFill>
+                  <a:srgbClr val="A0B4D2"/>
+                </a:solidFill>
+                <a:latin typeface="JetBrains Mono"/>
               </a:rPr>
-              <a:t>DAUER</a:t>
+              <a:t>VERSION</a:t>
             </a:r>
           </a:p>
         </p:txBody>
@@ -3403,8 +3413,8 @@
         </p:nvSpPr>
         <p:spPr>
           <a:xfrm>
-            <a:off x="8890000" y="5207000"/>
-            <a:ext cx="2667000" cy="508000"/>
+            <a:off x="6094476" y="5394960"/>
+            <a:ext cx="5408676" cy="320040"/>
           </a:xfrm>
           <a:prstGeom prst="rect">
             <a:avLst/>
@@ -3413,19 +3423,132 @@
         </p:spPr>
         <p:txBody>
           <a:bodyPr wrap="square">
-            <a:normAutofit/>
+            <a:spAutoFit/>
           </a:bodyPr>
           <a:lstStyle/>
           <a:p>
             <a:pPr algn="l"/>
             <a:r>
-              <a:rPr sz="1400" b="0" i="0">
-                <a:solidFill>
-                  <a:srgbClr val="191D2E"/>
-                </a:solidFill>
-                <a:latin typeface="Georgia"/>
+              <a:rPr sz="1100" b="0" i="0">
+                <a:solidFill>
+                  <a:srgbClr val="FFFFFF"/>
+                </a:solidFill>
+                <a:latin typeface="Arial"/>
               </a:rPr>
-              <a:t>90 Min.</a:t>
+              <a:t>v0.3</a:t>
+            </a:r>
+          </a:p>
+        </p:txBody>
+      </p:sp>
+      <p:sp>
+        <p:nvSpPr>
+          <p:cNvPr id="11" name="Rectangle 10"/>
+          <p:cNvSpPr/>
+          <p:nvPr/>
+        </p:nvSpPr>
+        <p:spPr>
+          <a:xfrm>
+            <a:off x="0" y="6510528"/>
+            <a:ext cx="12188952" cy="347472"/>
+          </a:xfrm>
+          <a:prstGeom prst="rect">
+            <a:avLst/>
+          </a:prstGeom>
+          <a:solidFill>
+            <a:srgbClr val="0A1937"/>
+          </a:solidFill>
+          <a:ln>
+            <a:noFill/>
+          </a:ln>
+        </p:spPr>
+        <p:style>
+          <a:lnRef idx="1">
+            <a:schemeClr val="accent1"/>
+          </a:lnRef>
+          <a:fillRef idx="3">
+            <a:schemeClr val="accent1"/>
+          </a:fillRef>
+          <a:effectRef idx="2">
+            <a:schemeClr val="accent1"/>
+          </a:effectRef>
+          <a:fontRef idx="minor">
+            <a:schemeClr val="lt1"/>
+          </a:fontRef>
+        </p:style>
+        <p:txBody>
+          <a:bodyPr rtlCol="0" anchor="ctr"/>
+          <a:lstStyle/>
+          <a:p>
+            <a:pPr algn="ctr"/>
+          </a:p>
+        </p:txBody>
+      </p:sp>
+      <p:sp>
+        <p:nvSpPr>
+          <p:cNvPr id="12" name="TextBox 11"/>
+          <p:cNvSpPr txBox="1"/>
+          <p:nvPr/>
+        </p:nvSpPr>
+        <p:spPr>
+          <a:xfrm>
+            <a:off x="685800" y="6583680"/>
+            <a:ext cx="5408676" cy="256032"/>
+          </a:xfrm>
+          <a:prstGeom prst="rect">
+            <a:avLst/>
+          </a:prstGeom>
+          <a:noFill/>
+        </p:spPr>
+        <p:txBody>
+          <a:bodyPr wrap="none">
+            <a:spAutoFit/>
+          </a:bodyPr>
+          <a:lstStyle/>
+          <a:p>
+            <a:pPr algn="l"/>
+            <a:r>
+              <a:rPr sz="700">
+                <a:solidFill>
+                  <a:srgbClr val="96A5BE"/>
+                </a:solidFill>
+                <a:latin typeface="JetBrains Mono"/>
+              </a:rPr>
+              <a:t>Benedikt Zoller Coaching  ·  FKB Campus  ·  2026</a:t>
+            </a:r>
+          </a:p>
+        </p:txBody>
+      </p:sp>
+      <p:sp>
+        <p:nvSpPr>
+          <p:cNvPr id="13" name="TextBox 12"/>
+          <p:cNvSpPr txBox="1"/>
+          <p:nvPr/>
+        </p:nvSpPr>
+        <p:spPr>
+          <a:xfrm>
+            <a:off x="6094476" y="6583680"/>
+            <a:ext cx="5408676" cy="256032"/>
+          </a:xfrm>
+          <a:prstGeom prst="rect">
+            <a:avLst/>
+          </a:prstGeom>
+          <a:noFill/>
+        </p:spPr>
+        <p:txBody>
+          <a:bodyPr wrap="none">
+            <a:spAutoFit/>
+          </a:bodyPr>
+          <a:lstStyle/>
+          <a:p>
+            <a:pPr algn="r"/>
+            <a:r>
+              <a:rPr sz="700">
+                <a:solidFill>
+                  <a:srgbClr val="96A5BE"/>
+                </a:solidFill>
+                <a:latin typeface="JetBrains Mono"/>
+              </a:rPr>
+              <a:t>Trainer-Präsentation</a:t>
             </a:r>
           </a:p>
         </p:txBody>
@@ -3441,14 +3564,6 @@
 <file path=ppt/slides/slide10.xml><?xml version="1.0" encoding="utf-8"?>
 <p:sld xmlns:a="http://schemas.openxmlformats.org/drawingml/2006/main" xmlns:p="http://schemas.openxmlformats.org/presentationml/2006/main" xmlns:r="http://schemas.openxmlformats.org/officeDocument/2006/relationships">
   <p:cSld>
-    <p:bg>
-      <p:bgPr>
-        <a:solidFill>
-          <a:srgbClr val="F8F8FA"/>
-        </a:solidFill>
-        <a:effectLst/>
-      </p:bgPr>
-    </p:bg>
     <p:spTree>
       <p:nvGrpSpPr>
         <p:cNvPr id="1" name=""/>
@@ -3458,125 +3573,20 @@
       <p:grpSpPr/>
       <p:sp>
         <p:nvSpPr>
-          <p:cNvPr id="2" name="TextBox 1"/>
-          <p:cNvSpPr txBox="1"/>
-          <p:nvPr/>
-        </p:nvSpPr>
-        <p:spPr>
-          <a:xfrm>
-            <a:off x="609600" y="279400"/>
-            <a:ext cx="2540000" cy="279400"/>
-          </a:xfrm>
-          <a:prstGeom prst="rect">
-            <a:avLst/>
-          </a:prstGeom>
-          <a:noFill/>
-        </p:spPr>
-        <p:txBody>
-          <a:bodyPr wrap="square">
-            <a:normAutofit/>
-          </a:bodyPr>
-          <a:lstStyle/>
-          <a:p>
-            <a:pPr algn="l"/>
-            <a:r>
-              <a:rPr sz="1000" b="1" i="0">
-                <a:solidFill>
-                  <a:srgbClr val="191D2E"/>
-                </a:solidFill>
-                <a:latin typeface="Arial"/>
-              </a:rPr>
-              <a:t>FKB  Campus</a:t>
-            </a:r>
-          </a:p>
-        </p:txBody>
-      </p:sp>
-      <p:sp>
-        <p:nvSpPr>
-          <p:cNvPr id="3" name="TextBox 2"/>
-          <p:cNvSpPr txBox="1"/>
-          <p:nvPr/>
-        </p:nvSpPr>
-        <p:spPr>
-          <a:xfrm>
-            <a:off x="609600" y="279400"/>
-            <a:ext cx="10972800" cy="279400"/>
-          </a:xfrm>
-          <a:prstGeom prst="rect">
-            <a:avLst/>
-          </a:prstGeom>
-          <a:noFill/>
-        </p:spPr>
-        <p:txBody>
-          <a:bodyPr wrap="square">
-            <a:normAutofit/>
-          </a:bodyPr>
-          <a:lstStyle/>
-          <a:p>
-            <a:pPr algn="r"/>
-            <a:r>
-              <a:rPr sz="900" b="0" i="0">
-                <a:solidFill>
-                  <a:srgbClr val="7B7FA0"/>
-                </a:solidFill>
-                <a:latin typeface="Courier New"/>
-              </a:rPr>
-              <a:t>III · DER 4-SCHRITTE-PROZESS</a:t>
-            </a:r>
-          </a:p>
-        </p:txBody>
-      </p:sp>
-      <p:sp>
-        <p:nvSpPr>
-          <p:cNvPr id="4" name="TextBox 3"/>
-          <p:cNvSpPr txBox="1"/>
-          <p:nvPr/>
-        </p:nvSpPr>
-        <p:spPr>
-          <a:xfrm>
-            <a:off x="609600" y="6426200"/>
-            <a:ext cx="10972800" cy="228600"/>
-          </a:xfrm>
-          <a:prstGeom prst="rect">
-            <a:avLst/>
-          </a:prstGeom>
-          <a:noFill/>
-        </p:spPr>
-        <p:txBody>
-          <a:bodyPr wrap="square">
-            <a:normAutofit/>
-          </a:bodyPr>
-          <a:lstStyle/>
-          <a:p>
-            <a:pPr algn="r"/>
-            <a:r>
-              <a:rPr sz="900" b="0" i="0">
-                <a:solidFill>
-                  <a:srgbClr val="7B7FA0"/>
-                </a:solidFill>
-                <a:latin typeface="Courier New"/>
-              </a:rPr>
-              <a:t>10</a:t>
-            </a:r>
-          </a:p>
-        </p:txBody>
-      </p:sp>
-      <p:sp>
-        <p:nvSpPr>
-          <p:cNvPr id="5" name="Rectangle 4"/>
+          <p:cNvPr id="2" name="Rectangle 1"/>
           <p:cNvSpPr/>
           <p:nvPr/>
         </p:nvSpPr>
         <p:spPr>
           <a:xfrm>
-            <a:off x="609600" y="825500"/>
-            <a:ext cx="10972800" cy="6350"/>
+            <a:off x="0" y="0"/>
+            <a:ext cx="12188952" cy="6858000"/>
           </a:xfrm>
           <a:prstGeom prst="rect">
             <a:avLst/>
           </a:prstGeom>
           <a:solidFill>
-            <a:srgbClr val="191D2E"/>
+            <a:srgbClr val="EDEDF3"/>
           </a:solidFill>
           <a:ln>
             <a:noFill/>
@@ -3606,14 +3616,57 @@
       </p:sp>
       <p:sp>
         <p:nvSpPr>
-          <p:cNvPr id="6" name="TextBox 5"/>
+          <p:cNvPr id="3" name="Rectangle 2"/>
+          <p:cNvSpPr/>
+          <p:nvPr/>
+        </p:nvSpPr>
+        <p:spPr>
+          <a:xfrm>
+            <a:off x="0" y="0"/>
+            <a:ext cx="12188952" cy="50292"/>
+          </a:xfrm>
+          <a:prstGeom prst="rect">
+            <a:avLst/>
+          </a:prstGeom>
+          <a:solidFill>
+            <a:srgbClr val="1F2C56"/>
+          </a:solidFill>
+          <a:ln>
+            <a:noFill/>
+          </a:ln>
+        </p:spPr>
+        <p:style>
+          <a:lnRef idx="1">
+            <a:schemeClr val="accent1"/>
+          </a:lnRef>
+          <a:fillRef idx="3">
+            <a:schemeClr val="accent1"/>
+          </a:fillRef>
+          <a:effectRef idx="2">
+            <a:schemeClr val="accent1"/>
+          </a:effectRef>
+          <a:fontRef idx="minor">
+            <a:schemeClr val="lt1"/>
+          </a:fontRef>
+        </p:style>
+        <p:txBody>
+          <a:bodyPr rtlCol="0" anchor="ctr"/>
+          <a:lstStyle/>
+          <a:p>
+            <a:pPr algn="ctr"/>
+          </a:p>
+        </p:txBody>
+      </p:sp>
+      <p:sp>
+        <p:nvSpPr>
+          <p:cNvPr id="4" name="TextBox 3"/>
           <p:cNvSpPr txBox="1"/>
           <p:nvPr/>
         </p:nvSpPr>
         <p:spPr>
           <a:xfrm>
-            <a:off x="609600" y="920750"/>
-            <a:ext cx="4826000" cy="1778000"/>
+            <a:off x="685800" y="109728"/>
+            <a:ext cx="10817352" cy="228600"/>
           </a:xfrm>
           <a:prstGeom prst="rect">
             <a:avLst/>
@@ -3621,391 +3674,379 @@
           <a:noFill/>
         </p:spPr>
         <p:txBody>
+          <a:bodyPr wrap="none">
+            <a:spAutoFit/>
+          </a:bodyPr>
+          <a:lstStyle/>
+          <a:p>
+            <a:pPr algn="l"/>
+            <a:r>
+              <a:rPr sz="750">
+                <a:solidFill>
+                  <a:srgbClr val="78808C"/>
+                </a:solidFill>
+                <a:latin typeface="JetBrains Mono"/>
+              </a:rPr>
+              <a:t>M13  ·  INHALT</a:t>
+            </a:r>
+          </a:p>
+        </p:txBody>
+      </p:sp>
+      <p:sp>
+        <p:nvSpPr>
+          <p:cNvPr id="5" name="Rectangle 4"/>
+          <p:cNvSpPr/>
+          <p:nvPr/>
+        </p:nvSpPr>
+        <p:spPr>
+          <a:xfrm>
+            <a:off x="0" y="1234440"/>
+            <a:ext cx="12188952" cy="12700"/>
+          </a:xfrm>
+          <a:prstGeom prst="rect">
+            <a:avLst/>
+          </a:prstGeom>
+          <a:solidFill>
+            <a:srgbClr val="D8DFE4"/>
+          </a:solidFill>
+          <a:ln>
+            <a:noFill/>
+          </a:ln>
+        </p:spPr>
+        <p:style>
+          <a:lnRef idx="1">
+            <a:schemeClr val="accent1"/>
+          </a:lnRef>
+          <a:fillRef idx="3">
+            <a:schemeClr val="accent1"/>
+          </a:fillRef>
+          <a:effectRef idx="2">
+            <a:schemeClr val="accent1"/>
+          </a:effectRef>
+          <a:fontRef idx="minor">
+            <a:schemeClr val="lt1"/>
+          </a:fontRef>
+        </p:style>
+        <p:txBody>
+          <a:bodyPr rtlCol="0" anchor="ctr"/>
+          <a:lstStyle/>
+          <a:p>
+            <a:pPr algn="ctr"/>
+          </a:p>
+        </p:txBody>
+      </p:sp>
+      <p:sp>
+        <p:nvSpPr>
+          <p:cNvPr id="6" name="Rectangle 5"/>
+          <p:cNvSpPr/>
+          <p:nvPr/>
+        </p:nvSpPr>
+        <p:spPr>
+          <a:xfrm>
+            <a:off x="685800" y="502920"/>
+            <a:ext cx="36576" cy="658368"/>
+          </a:xfrm>
+          <a:prstGeom prst="rect">
+            <a:avLst/>
+          </a:prstGeom>
+          <a:solidFill>
+            <a:srgbClr val="D9C089"/>
+          </a:solidFill>
+          <a:ln>
+            <a:noFill/>
+          </a:ln>
+        </p:spPr>
+        <p:style>
+          <a:lnRef idx="1">
+            <a:schemeClr val="accent1"/>
+          </a:lnRef>
+          <a:fillRef idx="3">
+            <a:schemeClr val="accent1"/>
+          </a:fillRef>
+          <a:effectRef idx="2">
+            <a:schemeClr val="accent1"/>
+          </a:effectRef>
+          <a:fontRef idx="minor">
+            <a:schemeClr val="lt1"/>
+          </a:fontRef>
+        </p:style>
+        <p:txBody>
+          <a:bodyPr rtlCol="0" anchor="ctr"/>
+          <a:lstStyle/>
+          <a:p>
+            <a:pPr algn="ctr"/>
+          </a:p>
+        </p:txBody>
+      </p:sp>
+      <p:sp>
+        <p:nvSpPr>
+          <p:cNvPr id="7" name="TextBox 6"/>
+          <p:cNvSpPr txBox="1"/>
+          <p:nvPr/>
+        </p:nvSpPr>
+        <p:spPr>
+          <a:xfrm>
+            <a:off x="813816" y="502920"/>
+            <a:ext cx="10634472" cy="685800"/>
+          </a:xfrm>
+          <a:prstGeom prst="rect">
+            <a:avLst/>
+          </a:prstGeom>
+          <a:noFill/>
+        </p:spPr>
+        <p:txBody>
           <a:bodyPr wrap="square">
-            <a:normAutofit/>
+            <a:spAutoFit/>
           </a:bodyPr>
           <a:lstStyle/>
           <a:p>
             <a:pPr algn="l"/>
             <a:r>
-              <a:rPr sz="3800" b="0" i="0">
-                <a:solidFill>
-                  <a:srgbClr val="191D2E"/>
-                </a:solidFill>
-                <a:latin typeface="Georgia"/>
+              <a:rPr sz="2400" b="1" i="0">
+                <a:solidFill>
+                  <a:srgbClr val="1F2C56"/>
+                </a:solidFill>
+                <a:latin typeface="Source Serif 4"/>
               </a:rPr>
-              <a:t>Verbundpartner: Wer liefert was?</a:t>
-            </a:r>
-          </a:p>
-        </p:txBody>
-      </p:sp>
-      <p:graphicFrame>
-        <p:nvGraphicFramePr>
-          <p:cNvPr id="7" name="Table 6"/>
-          <p:cNvGraphicFramePr>
-            <a:graphicFrameLocks noGrp="1"/>
-          </p:cNvGraphicFramePr>
-          <p:nvPr/>
-        </p:nvGraphicFramePr>
-        <p:xfrm>
-          <a:off x="5715000" y="920750"/>
-          <a:ext cx="5867400" cy="1905000"/>
-        </p:xfrm>
-        <a:graphic>
-          <a:graphicData uri="http://schemas.openxmlformats.org/drawingml/2006/table">
-            <a:tbl>
-              <a:tblPr firstRow="1" bandRow="1">
-                <a:tableStyleId>{5C22544A-7EE6-4342-B048-85BDC9FD1C3A}</a:tableStyleId>
-              </a:tblPr>
-              <a:tblGrid>
-                <a:gridCol w="1955800"/>
-                <a:gridCol w="1955800"/>
-                <a:gridCol w="1955800"/>
-              </a:tblGrid>
-              <a:tr h="381000">
-                <a:tc>
-                  <a:txBody>
-                    <a:bodyPr wrap="square"/>
-                    <a:lstStyle/>
-                    <a:p>
-                      <a:r>
-                        <a:rPr sz="1000" b="1">
-                          <a:solidFill>
-                            <a:srgbClr val="F8F8FA"/>
-                          </a:solidFill>
-                          <a:latin typeface="Courier New"/>
-                        </a:rPr>
-                        <a:t>Bedarf</a:t>
-                      </a:r>
-                    </a:p>
-                  </a:txBody>
-                  <a:tcPr>
-                    <a:solidFill>
-                      <a:srgbClr val="1F2B56"/>
-                    </a:solidFill>
-                  </a:tcPr>
-                </a:tc>
-                <a:tc>
-                  <a:txBody>
-                    <a:bodyPr wrap="square"/>
-                    <a:lstStyle/>
-                    <a:p>
-                      <a:r>
-                        <a:rPr sz="1000" b="1">
-                          <a:solidFill>
-                            <a:srgbClr val="F8F8FA"/>
-                          </a:solidFill>
-                          <a:latin typeface="Courier New"/>
-                        </a:rPr>
-                        <a:t>Verbundpartner</a:t>
-                      </a:r>
-                    </a:p>
-                  </a:txBody>
-                  <a:tcPr>
-                    <a:solidFill>
-                      <a:srgbClr val="1F2B56"/>
-                    </a:solidFill>
-                  </a:tcPr>
-                </a:tc>
-                <a:tc>
-                  <a:txBody>
-                    <a:bodyPr wrap="square"/>
-                    <a:lstStyle/>
-                    <a:p>
-                      <a:r>
-                        <a:rPr sz="1000" b="1">
-                          <a:solidFill>
-                            <a:srgbClr val="F8F8FA"/>
-                          </a:solidFill>
-                          <a:latin typeface="Courier New"/>
-                        </a:rPr>
-                        <a:t>Ansprechpartner</a:t>
-                      </a:r>
-                    </a:p>
-                  </a:txBody>
-                  <a:tcPr>
-                    <a:solidFill>
-                      <a:srgbClr val="1F2B56"/>
-                    </a:solidFill>
-                  </a:tcPr>
-                </a:tc>
-              </a:tr>
-              <a:tr h="381000">
-                <a:tc>
-                  <a:txBody>
-                    <a:bodyPr wrap="square"/>
-                    <a:lstStyle/>
-                    <a:p>
-                      <a:r>
-                        <a:rPr sz="1000" b="0">
-                          <a:solidFill>
-                            <a:srgbClr val="191D2E"/>
-                          </a:solidFill>
-                          <a:latin typeface="Courier New"/>
-                        </a:rPr>
-                        <a:t>Sachversicherung, BU</a:t>
-                      </a:r>
-                    </a:p>
-                  </a:txBody>
-                  <a:tcPr>
-                    <a:solidFill>
-                      <a:srgbClr val="F8F8FA"/>
-                    </a:solidFill>
-                  </a:tcPr>
-                </a:tc>
-                <a:tc>
-                  <a:txBody>
-                    <a:bodyPr wrap="square"/>
-                    <a:lstStyle/>
-                    <a:p>
-                      <a:r>
-                        <a:rPr sz="1000" b="0">
-                          <a:solidFill>
-                            <a:srgbClr val="191D2E"/>
-                          </a:solidFill>
-                          <a:latin typeface="Courier New"/>
-                        </a:rPr>
-                        <a:t>R+V Versicherung</a:t>
-                      </a:r>
-                    </a:p>
-                  </a:txBody>
-                  <a:tcPr>
-                    <a:solidFill>
-                      <a:srgbClr val="F8F8FA"/>
-                    </a:solidFill>
-                  </a:tcPr>
-                </a:tc>
-                <a:tc>
-                  <a:txBody>
-                    <a:bodyPr wrap="square"/>
-                    <a:lstStyle/>
-                    <a:p>
-                      <a:r>
-                        <a:rPr sz="1000" b="0">
-                          <a:solidFill>
-                            <a:srgbClr val="191D2E"/>
-                          </a:solidFill>
-                          <a:latin typeface="Courier New"/>
-                        </a:rPr>
-                        <a:t>Regionaler Außendienst</a:t>
-                      </a:r>
-                    </a:p>
-                  </a:txBody>
-                  <a:tcPr>
-                    <a:solidFill>
-                      <a:srgbClr val="F8F8FA"/>
-                    </a:solidFill>
-                  </a:tcPr>
-                </a:tc>
-              </a:tr>
-              <a:tr h="381000">
-                <a:tc>
-                  <a:txBody>
-                    <a:bodyPr wrap="square"/>
-                    <a:lstStyle/>
-                    <a:p>
-                      <a:r>
-                        <a:rPr sz="1000" b="0">
-                          <a:solidFill>
-                            <a:srgbClr val="191D2E"/>
-                          </a:solidFill>
-                          <a:latin typeface="Courier New"/>
-                        </a:rPr>
-                        <a:t>Betriebliche AV, Fonds</a:t>
-                      </a:r>
-                    </a:p>
-                  </a:txBody>
-                  <a:tcPr>
-                    <a:solidFill>
-                      <a:srgbClr val="F0F0F5"/>
-                    </a:solidFill>
-                  </a:tcPr>
-                </a:tc>
-                <a:tc>
-                  <a:txBody>
-                    <a:bodyPr wrap="square"/>
-                    <a:lstStyle/>
-                    <a:p>
-                      <a:r>
-                        <a:rPr sz="1000" b="0">
-                          <a:solidFill>
-                            <a:srgbClr val="191D2E"/>
-                          </a:solidFill>
-                          <a:latin typeface="Courier New"/>
-                        </a:rPr>
-                        <a:t>Union Investment</a:t>
-                      </a:r>
-                    </a:p>
-                  </a:txBody>
-                  <a:tcPr>
-                    <a:solidFill>
-                      <a:srgbClr val="F0F0F5"/>
-                    </a:solidFill>
-                  </a:tcPr>
-                </a:tc>
-                <a:tc>
-                  <a:txBody>
-                    <a:bodyPr wrap="square"/>
-                    <a:lstStyle/>
-                    <a:p>
-                      <a:r>
-                        <a:rPr sz="1000" b="0">
-                          <a:solidFill>
-                            <a:srgbClr val="191D2E"/>
-                          </a:solidFill>
-                          <a:latin typeface="Courier New"/>
-                        </a:rPr>
-                        <a:t>Regionaler Berater</a:t>
-                      </a:r>
-                    </a:p>
-                  </a:txBody>
-                  <a:tcPr>
-                    <a:solidFill>
-                      <a:srgbClr val="F0F0F5"/>
-                    </a:solidFill>
-                  </a:tcPr>
-                </a:tc>
-              </a:tr>
-              <a:tr h="381000">
-                <a:tc>
-                  <a:txBody>
-                    <a:bodyPr wrap="square"/>
-                    <a:lstStyle/>
-                    <a:p>
-                      <a:r>
-                        <a:rPr sz="1000" b="0">
-                          <a:solidFill>
-                            <a:srgbClr val="191D2E"/>
-                          </a:solidFill>
-                          <a:latin typeface="Courier New"/>
-                        </a:rPr>
-                        <a:t>Baufinanzierung</a:t>
-                      </a:r>
-                    </a:p>
-                  </a:txBody>
-                  <a:tcPr>
-                    <a:solidFill>
-                      <a:srgbClr val="F8F8FA"/>
-                    </a:solidFill>
-                  </a:tcPr>
-                </a:tc>
-                <a:tc>
-                  <a:txBody>
-                    <a:bodyPr wrap="square"/>
-                    <a:lstStyle/>
-                    <a:p>
-                      <a:r>
-                        <a:rPr sz="1000" b="0">
-                          <a:solidFill>
-                            <a:srgbClr val="191D2E"/>
-                          </a:solidFill>
-                          <a:latin typeface="Courier New"/>
-                        </a:rPr>
-                        <a:t>Schwäbisch Hall / MünchenerHyp</a:t>
-                      </a:r>
-                    </a:p>
-                  </a:txBody>
-                  <a:tcPr>
-                    <a:solidFill>
-                      <a:srgbClr val="F8F8FA"/>
-                    </a:solidFill>
-                  </a:tcPr>
-                </a:tc>
-                <a:tc>
-                  <a:txBody>
-                    <a:bodyPr wrap="square"/>
-                    <a:lstStyle/>
-                    <a:p>
-                      <a:r>
-                        <a:rPr sz="1000" b="0">
-                          <a:solidFill>
-                            <a:srgbClr val="191D2E"/>
-                          </a:solidFill>
-                          <a:latin typeface="Courier New"/>
-                        </a:rPr>
-                        <a:t>Spezialist Bank</a:t>
-                      </a:r>
-                    </a:p>
-                  </a:txBody>
-                  <a:tcPr>
-                    <a:solidFill>
-                      <a:srgbClr val="F8F8FA"/>
-                    </a:solidFill>
-                  </a:tcPr>
-                </a:tc>
-              </a:tr>
-              <a:tr h="381000">
-                <a:tc>
-                  <a:txBody>
-                    <a:bodyPr wrap="square"/>
-                    <a:lstStyle/>
-                    <a:p>
-                      <a:r>
-                        <a:rPr sz="1000" b="0">
-                          <a:solidFill>
-                            <a:srgbClr val="191D2E"/>
-                          </a:solidFill>
-                          <a:latin typeface="Courier New"/>
-                        </a:rPr>
-                        <a:t>Firmenfinanzierung &gt; 5 Mio.</a:t>
-                      </a:r>
-                    </a:p>
-                  </a:txBody>
-                  <a:tcPr>
-                    <a:solidFill>
-                      <a:srgbClr val="F0F0F5"/>
-                    </a:solidFill>
-                  </a:tcPr>
-                </a:tc>
-                <a:tc>
-                  <a:txBody>
-                    <a:bodyPr wrap="square"/>
-                    <a:lstStyle/>
-                    <a:p>
-                      <a:r>
-                        <a:rPr sz="1000" b="0">
-                          <a:solidFill>
-                            <a:srgbClr val="191D2E"/>
-                          </a:solidFill>
-                          <a:latin typeface="Courier New"/>
-                        </a:rPr>
-                        <a:t>DZ BANK</a:t>
-                      </a:r>
-                    </a:p>
-                  </a:txBody>
-                  <a:tcPr>
-                    <a:solidFill>
-                      <a:srgbClr val="F0F0F5"/>
-                    </a:solidFill>
-                  </a:tcPr>
-                </a:tc>
-                <a:tc>
-                  <a:txBody>
-                    <a:bodyPr wrap="square"/>
-                    <a:lstStyle/>
-                    <a:p>
-                      <a:r>
-                        <a:rPr sz="1000" b="0">
-                          <a:solidFill>
-                            <a:srgbClr val="191D2E"/>
-                          </a:solidFill>
-                          <a:latin typeface="Courier New"/>
-                        </a:rPr>
-                        <a:t>Kompetenzcenter FK</a:t>
-                      </a:r>
-                    </a:p>
-                  </a:txBody>
-                  <a:tcPr>
-                    <a:solidFill>
-                      <a:srgbClr val="F0F0F5"/>
-                    </a:solidFill>
-                  </a:tcPr>
-                </a:tc>
-              </a:tr>
-            </a:tbl>
-          </a:graphicData>
-        </a:graphic>
-      </p:graphicFrame>
+              <a:t>Schritt 3: Gespräch</a:t>
+            </a:r>
+          </a:p>
+        </p:txBody>
+      </p:sp>
+      <p:sp>
+        <p:nvSpPr>
+          <p:cNvPr id="8" name="TextBox 7"/>
+          <p:cNvSpPr txBox="1"/>
+          <p:nvPr/>
+        </p:nvSpPr>
+        <p:spPr>
+          <a:xfrm>
+            <a:off x="685800" y="1417320"/>
+            <a:ext cx="10817352" cy="5029200"/>
+          </a:xfrm>
+          <a:prstGeom prst="rect">
+            <a:avLst/>
+          </a:prstGeom>
+          <a:noFill/>
+        </p:spPr>
+        <p:txBody>
+          <a:bodyPr wrap="square">
+            <a:spAutoFit/>
+          </a:bodyPr>
+          <a:lstStyle/>
+          <a:p>
+            <a:pPr>
+              <a:spcBef>
+                <a:spcPts val="400"/>
+              </a:spcBef>
+              <a:spcAft>
+                <a:spcPts val="200"/>
+              </a:spcAft>
+            </a:pPr>
+            <a:r>
+              <a:rPr sz="1200">
+                <a:solidFill>
+                  <a:srgbClr val="3D5466"/>
+                </a:solidFill>
+                <a:latin typeface="Arial"/>
+              </a:rPr>
+              <a:t>Das Cross-Selling-Gespräch ist kein Verkaufsgespräch. Es ist eine bedarfsgeleitete Gesprächserweiterung. Der Einstieg erfolgt über eine offene Frage zur Situation – nicht mit einem Produktvorschlag.</a:t>
+            </a:r>
+          </a:p>
+          <a:p>
+            <a:pPr>
+              <a:spcBef>
+                <a:spcPts val="400"/>
+              </a:spcBef>
+              <a:spcAft>
+                <a:spcPts val="200"/>
+              </a:spcAft>
+            </a:pPr>
+            <a:r>
+              <a:rPr sz="1200">
+                <a:solidFill>
+                  <a:srgbClr val="3D5466"/>
+                </a:solidFill>
+                <a:latin typeface="Arial"/>
+              </a:rPr>
+              <a:t>Gesprächseinstieg nach SPIN :</a:t>
+            </a:r>
+          </a:p>
+          <a:p>
+            <a:pPr>
+              <a:spcBef>
+                <a:spcPts val="400"/>
+              </a:spcBef>
+              <a:spcAft>
+                <a:spcPts val="200"/>
+              </a:spcAft>
+            </a:pPr>
+            <a:r>
+              <a:rPr sz="1300">
+                <a:solidFill>
+                  <a:srgbClr val="3D5466"/>
+                </a:solidFill>
+                <a:latin typeface="Arial"/>
+              </a:rPr>
+              <a:t>▸  Situationsfrage: „Wie haben Sie aktuell Ihre Betriebsunterbrechungsrisiken abgesichert?"</a:t>
+            </a:r>
+          </a:p>
+          <a:p>
+            <a:pPr>
+              <a:spcBef>
+                <a:spcPts val="400"/>
+              </a:spcBef>
+              <a:spcAft>
+                <a:spcPts val="200"/>
+              </a:spcAft>
+            </a:pPr>
+            <a:r>
+              <a:rPr sz="1300">
+                <a:solidFill>
+                  <a:srgbClr val="3D5466"/>
+                </a:solidFill>
+                <a:latin typeface="Arial"/>
+              </a:rPr>
+              <a:t>▸  Problemfrage: „Gibt es Bereiche, bei denen Sie sich fragen, ob das ausreicht?"</a:t>
+            </a:r>
+          </a:p>
+          <a:p>
+            <a:pPr>
+              <a:spcBef>
+                <a:spcPts val="400"/>
+              </a:spcBef>
+              <a:spcAft>
+                <a:spcPts val="200"/>
+              </a:spcAft>
+            </a:pPr>
+            <a:r>
+              <a:rPr sz="1300">
+                <a:solidFill>
+                  <a:srgbClr val="3D5466"/>
+                </a:solidFill>
+                <a:latin typeface="Arial"/>
+              </a:rPr>
+              <a:t>▸  Implikationsfrage: „Was würde ein Ausfall von zwei Wochen für Ihren Betrieb bedeuten?"</a:t>
+            </a:r>
+          </a:p>
+          <a:p>
+            <a:pPr>
+              <a:spcBef>
+                <a:spcPts val="400"/>
+              </a:spcBef>
+              <a:spcAft>
+                <a:spcPts val="200"/>
+              </a:spcAft>
+            </a:pPr>
+            <a:r>
+              <a:rPr sz="1300">
+                <a:solidFill>
+                  <a:srgbClr val="3D5466"/>
+                </a:solidFill>
+                <a:latin typeface="Arial"/>
+              </a:rPr>
+              <a:t>▸  Nutzenfrage: „Was wäre für Sie die ideale Lösung, wenn das Risiko vollständig gedeckt wäre?"</a:t>
+            </a:r>
+          </a:p>
+          <a:p>
+            <a:pPr>
+              <a:spcBef>
+                <a:spcPts val="400"/>
+              </a:spcBef>
+              <a:spcAft>
+                <a:spcPts val="200"/>
+              </a:spcAft>
+            </a:pPr>
+            <a:r>
+              <a:rPr sz="1200">
+                <a:solidFill>
+                  <a:srgbClr val="3D5466"/>
+                </a:solidFill>
+                <a:latin typeface="Arial"/>
+              </a:rPr>
+              <a:t>Erst nach diesem Verlauf folgt der Produktvorschlag – oder die Einbeziehung des Verbundpartners.</a:t>
+            </a:r>
+          </a:p>
+        </p:txBody>
+      </p:sp>
+      <p:sp>
+        <p:nvSpPr>
+          <p:cNvPr id="9" name="Rectangle 8"/>
+          <p:cNvSpPr/>
+          <p:nvPr/>
+        </p:nvSpPr>
+        <p:spPr>
+          <a:xfrm>
+            <a:off x="0" y="6510528"/>
+            <a:ext cx="12188952" cy="347472"/>
+          </a:xfrm>
+          <a:prstGeom prst="rect">
+            <a:avLst/>
+          </a:prstGeom>
+          <a:solidFill>
+            <a:srgbClr val="0A1937"/>
+          </a:solidFill>
+          <a:ln>
+            <a:noFill/>
+          </a:ln>
+        </p:spPr>
+        <p:style>
+          <a:lnRef idx="1">
+            <a:schemeClr val="accent1"/>
+          </a:lnRef>
+          <a:fillRef idx="3">
+            <a:schemeClr val="accent1"/>
+          </a:fillRef>
+          <a:effectRef idx="2">
+            <a:schemeClr val="accent1"/>
+          </a:effectRef>
+          <a:fontRef idx="minor">
+            <a:schemeClr val="lt1"/>
+          </a:fontRef>
+        </p:style>
+        <p:txBody>
+          <a:bodyPr rtlCol="0" anchor="ctr"/>
+          <a:lstStyle/>
+          <a:p>
+            <a:pPr algn="ctr"/>
+          </a:p>
+        </p:txBody>
+      </p:sp>
+      <p:sp>
+        <p:nvSpPr>
+          <p:cNvPr id="10" name="TextBox 9"/>
+          <p:cNvSpPr txBox="1"/>
+          <p:nvPr/>
+        </p:nvSpPr>
+        <p:spPr>
+          <a:xfrm>
+            <a:off x="685800" y="6583680"/>
+            <a:ext cx="6490411" cy="256032"/>
+          </a:xfrm>
+          <a:prstGeom prst="rect">
+            <a:avLst/>
+          </a:prstGeom>
+          <a:noFill/>
+        </p:spPr>
+        <p:txBody>
+          <a:bodyPr wrap="none">
+            <a:spAutoFit/>
+          </a:bodyPr>
+          <a:lstStyle/>
+          <a:p>
+            <a:pPr algn="l"/>
+            <a:r>
+              <a:rPr sz="700">
+                <a:solidFill>
+                  <a:srgbClr val="A0B4D2"/>
+                </a:solidFill>
+                <a:latin typeface="JetBrains Mono"/>
+              </a:rPr>
+              <a:t>Benedikt Zoller Coaching  ·  FKB Campus  ·  M13</a:t>
+            </a:r>
+          </a:p>
+        </p:txBody>
+      </p:sp>
     </p:spTree>
   </p:cSld>
   <p:clrMapOvr>
@@ -4017,14 +4058,6 @@
 <file path=ppt/slides/slide11.xml><?xml version="1.0" encoding="utf-8"?>
 <p:sld xmlns:a="http://schemas.openxmlformats.org/drawingml/2006/main" xmlns:p="http://schemas.openxmlformats.org/presentationml/2006/main" xmlns:r="http://schemas.openxmlformats.org/officeDocument/2006/relationships">
   <p:cSld>
-    <p:bg>
-      <p:bgPr>
-        <a:solidFill>
-          <a:srgbClr val="F8F8FA"/>
-        </a:solidFill>
-        <a:effectLst/>
-      </p:bgPr>
-    </p:bg>
     <p:spTree>
       <p:nvGrpSpPr>
         <p:cNvPr id="1" name=""/>
@@ -4034,125 +4067,20 @@
       <p:grpSpPr/>
       <p:sp>
         <p:nvSpPr>
-          <p:cNvPr id="2" name="TextBox 1"/>
-          <p:cNvSpPr txBox="1"/>
-          <p:nvPr/>
-        </p:nvSpPr>
-        <p:spPr>
-          <a:xfrm>
-            <a:off x="609600" y="279400"/>
-            <a:ext cx="2540000" cy="279400"/>
-          </a:xfrm>
-          <a:prstGeom prst="rect">
-            <a:avLst/>
-          </a:prstGeom>
-          <a:noFill/>
-        </p:spPr>
-        <p:txBody>
-          <a:bodyPr wrap="square">
-            <a:normAutofit/>
-          </a:bodyPr>
-          <a:lstStyle/>
-          <a:p>
-            <a:pPr algn="l"/>
-            <a:r>
-              <a:rPr sz="1000" b="1" i="0">
-                <a:solidFill>
-                  <a:srgbClr val="191D2E"/>
-                </a:solidFill>
-                <a:latin typeface="Arial"/>
-              </a:rPr>
-              <a:t>FKB  Campus</a:t>
-            </a:r>
-          </a:p>
-        </p:txBody>
-      </p:sp>
-      <p:sp>
-        <p:nvSpPr>
-          <p:cNvPr id="3" name="TextBox 2"/>
-          <p:cNvSpPr txBox="1"/>
-          <p:nvPr/>
-        </p:nvSpPr>
-        <p:spPr>
-          <a:xfrm>
-            <a:off x="609600" y="279400"/>
-            <a:ext cx="10972800" cy="279400"/>
-          </a:xfrm>
-          <a:prstGeom prst="rect">
-            <a:avLst/>
-          </a:prstGeom>
-          <a:noFill/>
-        </p:spPr>
-        <p:txBody>
-          <a:bodyPr wrap="square">
-            <a:normAutofit/>
-          </a:bodyPr>
-          <a:lstStyle/>
-          <a:p>
-            <a:pPr algn="r"/>
-            <a:r>
-              <a:rPr sz="900" b="0" i="0">
-                <a:solidFill>
-                  <a:srgbClr val="7B7FA0"/>
-                </a:solidFill>
-                <a:latin typeface="Courier New"/>
-              </a:rPr>
-              <a:t>III · DER 4-SCHRITTE-PROZESS</a:t>
-            </a:r>
-          </a:p>
-        </p:txBody>
-      </p:sp>
-      <p:sp>
-        <p:nvSpPr>
-          <p:cNvPr id="4" name="TextBox 3"/>
-          <p:cNvSpPr txBox="1"/>
-          <p:nvPr/>
-        </p:nvSpPr>
-        <p:spPr>
-          <a:xfrm>
-            <a:off x="609600" y="6426200"/>
-            <a:ext cx="10972800" cy="228600"/>
-          </a:xfrm>
-          <a:prstGeom prst="rect">
-            <a:avLst/>
-          </a:prstGeom>
-          <a:noFill/>
-        </p:spPr>
-        <p:txBody>
-          <a:bodyPr wrap="square">
-            <a:normAutofit/>
-          </a:bodyPr>
-          <a:lstStyle/>
-          <a:p>
-            <a:pPr algn="r"/>
-            <a:r>
-              <a:rPr sz="900" b="0" i="0">
-                <a:solidFill>
-                  <a:srgbClr val="7B7FA0"/>
-                </a:solidFill>
-                <a:latin typeface="Courier New"/>
-              </a:rPr>
-              <a:t>11</a:t>
-            </a:r>
-          </a:p>
-        </p:txBody>
-      </p:sp>
-      <p:sp>
-        <p:nvSpPr>
-          <p:cNvPr id="5" name="Rectangle 4"/>
+          <p:cNvPr id="2" name="Rectangle 1"/>
           <p:cNvSpPr/>
           <p:nvPr/>
         </p:nvSpPr>
         <p:spPr>
           <a:xfrm>
-            <a:off x="609600" y="825500"/>
-            <a:ext cx="10972800" cy="6350"/>
+            <a:off x="0" y="0"/>
+            <a:ext cx="12188952" cy="6858000"/>
           </a:xfrm>
           <a:prstGeom prst="rect">
             <a:avLst/>
           </a:prstGeom>
           <a:solidFill>
-            <a:srgbClr val="191D2E"/>
+            <a:srgbClr val="EDEDF3"/>
           </a:solidFill>
           <a:ln>
             <a:noFill/>
@@ -4182,55 +4110,20 @@
       </p:sp>
       <p:sp>
         <p:nvSpPr>
-          <p:cNvPr id="6" name="TextBox 5"/>
-          <p:cNvSpPr txBox="1"/>
-          <p:nvPr/>
-        </p:nvSpPr>
-        <p:spPr>
-          <a:xfrm>
-            <a:off x="609600" y="920750"/>
-            <a:ext cx="10972800" cy="1778000"/>
-          </a:xfrm>
-          <a:prstGeom prst="rect">
-            <a:avLst/>
-          </a:prstGeom>
-          <a:noFill/>
-        </p:spPr>
-        <p:txBody>
-          <a:bodyPr wrap="square">
-            <a:normAutofit/>
-          </a:bodyPr>
-          <a:lstStyle/>
-          <a:p>
-            <a:pPr algn="l"/>
-            <a:r>
-              <a:rPr sz="3800" b="0" i="0">
-                <a:solidFill>
-                  <a:srgbClr val="191D2E"/>
-                </a:solidFill>
-                <a:latin typeface="Georgia"/>
-              </a:rPr>
-              <a:t>Ihr Auftrag: Wallet-Share-Analyse für drei Kunden</a:t>
-            </a:r>
-          </a:p>
-        </p:txBody>
-      </p:sp>
-      <p:sp>
-        <p:nvSpPr>
-          <p:cNvPr id="7" name="Rectangle 6"/>
+          <p:cNvPr id="3" name="Rectangle 2"/>
           <p:cNvSpPr/>
           <p:nvPr/>
         </p:nvSpPr>
         <p:spPr>
           <a:xfrm>
-            <a:off x="609600" y="2762250"/>
-            <a:ext cx="10972800" cy="6350"/>
+            <a:off x="0" y="0"/>
+            <a:ext cx="12188952" cy="50292"/>
           </a:xfrm>
           <a:prstGeom prst="rect">
             <a:avLst/>
           </a:prstGeom>
           <a:solidFill>
-            <a:srgbClr val="E0E0E8"/>
+            <a:srgbClr val="1F2C56"/>
           </a:solidFill>
           <a:ln>
             <a:noFill/>
@@ -4260,14 +4153,170 @@
       </p:sp>
       <p:sp>
         <p:nvSpPr>
+          <p:cNvPr id="4" name="TextBox 3"/>
+          <p:cNvSpPr txBox="1"/>
+          <p:nvPr/>
+        </p:nvSpPr>
+        <p:spPr>
+          <a:xfrm>
+            <a:off x="685800" y="109728"/>
+            <a:ext cx="10817352" cy="228600"/>
+          </a:xfrm>
+          <a:prstGeom prst="rect">
+            <a:avLst/>
+          </a:prstGeom>
+          <a:noFill/>
+        </p:spPr>
+        <p:txBody>
+          <a:bodyPr wrap="none">
+            <a:spAutoFit/>
+          </a:bodyPr>
+          <a:lstStyle/>
+          <a:p>
+            <a:pPr algn="l"/>
+            <a:r>
+              <a:rPr sz="750">
+                <a:solidFill>
+                  <a:srgbClr val="78808C"/>
+                </a:solidFill>
+                <a:latin typeface="JetBrains Mono"/>
+              </a:rPr>
+              <a:t>M13  ·  INHALT</a:t>
+            </a:r>
+          </a:p>
+        </p:txBody>
+      </p:sp>
+      <p:sp>
+        <p:nvSpPr>
+          <p:cNvPr id="5" name="Rectangle 4"/>
+          <p:cNvSpPr/>
+          <p:nvPr/>
+        </p:nvSpPr>
+        <p:spPr>
+          <a:xfrm>
+            <a:off x="0" y="1234440"/>
+            <a:ext cx="12188952" cy="12700"/>
+          </a:xfrm>
+          <a:prstGeom prst="rect">
+            <a:avLst/>
+          </a:prstGeom>
+          <a:solidFill>
+            <a:srgbClr val="D8DFE4"/>
+          </a:solidFill>
+          <a:ln>
+            <a:noFill/>
+          </a:ln>
+        </p:spPr>
+        <p:style>
+          <a:lnRef idx="1">
+            <a:schemeClr val="accent1"/>
+          </a:lnRef>
+          <a:fillRef idx="3">
+            <a:schemeClr val="accent1"/>
+          </a:fillRef>
+          <a:effectRef idx="2">
+            <a:schemeClr val="accent1"/>
+          </a:effectRef>
+          <a:fontRef idx="minor">
+            <a:schemeClr val="lt1"/>
+          </a:fontRef>
+        </p:style>
+        <p:txBody>
+          <a:bodyPr rtlCol="0" anchor="ctr"/>
+          <a:lstStyle/>
+          <a:p>
+            <a:pPr algn="ctr"/>
+          </a:p>
+        </p:txBody>
+      </p:sp>
+      <p:sp>
+        <p:nvSpPr>
+          <p:cNvPr id="6" name="Rectangle 5"/>
+          <p:cNvSpPr/>
+          <p:nvPr/>
+        </p:nvSpPr>
+        <p:spPr>
+          <a:xfrm>
+            <a:off x="685800" y="502920"/>
+            <a:ext cx="36576" cy="658368"/>
+          </a:xfrm>
+          <a:prstGeom prst="rect">
+            <a:avLst/>
+          </a:prstGeom>
+          <a:solidFill>
+            <a:srgbClr val="D9C089"/>
+          </a:solidFill>
+          <a:ln>
+            <a:noFill/>
+          </a:ln>
+        </p:spPr>
+        <p:style>
+          <a:lnRef idx="1">
+            <a:schemeClr val="accent1"/>
+          </a:lnRef>
+          <a:fillRef idx="3">
+            <a:schemeClr val="accent1"/>
+          </a:fillRef>
+          <a:effectRef idx="2">
+            <a:schemeClr val="accent1"/>
+          </a:effectRef>
+          <a:fontRef idx="minor">
+            <a:schemeClr val="lt1"/>
+          </a:fontRef>
+        </p:style>
+        <p:txBody>
+          <a:bodyPr rtlCol="0" anchor="ctr"/>
+          <a:lstStyle/>
+          <a:p>
+            <a:pPr algn="ctr"/>
+          </a:p>
+        </p:txBody>
+      </p:sp>
+      <p:sp>
+        <p:nvSpPr>
+          <p:cNvPr id="7" name="TextBox 6"/>
+          <p:cNvSpPr txBox="1"/>
+          <p:nvPr/>
+        </p:nvSpPr>
+        <p:spPr>
+          <a:xfrm>
+            <a:off x="813816" y="502920"/>
+            <a:ext cx="10634472" cy="685800"/>
+          </a:xfrm>
+          <a:prstGeom prst="rect">
+            <a:avLst/>
+          </a:prstGeom>
+          <a:noFill/>
+        </p:spPr>
+        <p:txBody>
+          <a:bodyPr wrap="square">
+            <a:spAutoFit/>
+          </a:bodyPr>
+          <a:lstStyle/>
+          <a:p>
+            <a:pPr algn="l"/>
+            <a:r>
+              <a:rPr sz="2400" b="1" i="0">
+                <a:solidFill>
+                  <a:srgbClr val="1F2C56"/>
+                </a:solidFill>
+                <a:latin typeface="Source Serif 4"/>
+              </a:rPr>
+              <a:t>Schritt 4: Dokumentation</a:t>
+            </a:r>
+          </a:p>
+        </p:txBody>
+      </p:sp>
+      <p:sp>
+        <p:nvSpPr>
           <p:cNvPr id="8" name="TextBox 7"/>
           <p:cNvSpPr txBox="1"/>
           <p:nvPr/>
         </p:nvSpPr>
         <p:spPr>
           <a:xfrm>
-            <a:off x="609600" y="2851150"/>
-            <a:ext cx="10972800" cy="3448050"/>
+            <a:off x="685800" y="1417320"/>
+            <a:ext cx="10817352" cy="5029200"/>
           </a:xfrm>
           <a:prstGeom prst="rect">
             <a:avLst/>
@@ -4276,83 +4325,313 @@
         </p:spPr>
         <p:txBody>
           <a:bodyPr wrap="square">
-            <a:normAutofit/>
+            <a:spAutoFit/>
           </a:bodyPr>
           <a:lstStyle/>
           <a:p>
             <a:pPr>
               <a:spcBef>
-                <a:spcPts val="600"/>
+                <a:spcPts val="400"/>
               </a:spcBef>
               <a:spcAft>
-                <a:spcPts val="600"/>
+                <a:spcPts val="200"/>
               </a:spcAft>
             </a:pPr>
             <a:r>
-              <a:rPr sz="1400">
-                <a:solidFill>
-                  <a:srgbClr val="191D2E"/>
-                </a:solidFill>
-                <a:latin typeface="Georgia"/>
+              <a:rPr sz="1300">
+                <a:solidFill>
+                  <a:srgbClr val="3D5466"/>
+                </a:solidFill>
+                <a:latin typeface="Arial"/>
               </a:rPr>
-              <a:t>–  Drei Kunden aus dem Portfolio auswählen</a:t>
+              <a:t>▸  Besprochene Bedarfsfelder</a:t>
             </a:r>
           </a:p>
           <a:p>
             <a:pPr>
               <a:spcBef>
-                <a:spcPts val="600"/>
+                <a:spcPts val="400"/>
               </a:spcBef>
               <a:spcAft>
-                <a:spcPts val="600"/>
+                <a:spcPts val="200"/>
               </a:spcAft>
             </a:pPr>
             <a:r>
-              <a:rPr sz="1400">
-                <a:solidFill>
-                  <a:srgbClr val="191D2E"/>
-                </a:solidFill>
-                <a:latin typeface="Georgia"/>
+              <a:rPr sz="1300">
+                <a:solidFill>
+                  <a:srgbClr val="3D5466"/>
+                </a:solidFill>
+                <a:latin typeface="Arial"/>
               </a:rPr>
-              <a:t>–  Produktlandschaft vollständig erfassen (was haben sie schon?)</a:t>
+              <a:t>▸  Ergebnis (Abschluss / offen / kein Bedarf)</a:t>
             </a:r>
           </a:p>
           <a:p>
             <a:pPr>
               <a:spcBef>
-                <a:spcPts val="600"/>
+                <a:spcPts val="400"/>
               </a:spcBef>
               <a:spcAft>
-                <a:spcPts val="600"/>
+                <a:spcPts val="200"/>
               </a:spcAft>
             </a:pPr>
             <a:r>
-              <a:rPr sz="1400">
-                <a:solidFill>
-                  <a:srgbClr val="191D2E"/>
-                </a:solidFill>
-                <a:latin typeface="Georgia"/>
+              <a:rPr sz="1300">
+                <a:solidFill>
+                  <a:srgbClr val="3D5466"/>
+                </a:solidFill>
+                <a:latin typeface="Arial"/>
               </a:rPr>
-              <a:t>–  Größten Gap identifizieren</a:t>
+              <a:t>▸  Nächste Schritte und Folgetermine</a:t>
             </a:r>
           </a:p>
           <a:p>
             <a:pPr>
               <a:spcBef>
-                <a:spcPts val="600"/>
+                <a:spcPts val="400"/>
               </a:spcBef>
               <a:spcAft>
-                <a:spcPts val="600"/>
+                <a:spcPts val="200"/>
               </a:spcAft>
             </a:pPr>
             <a:r>
-              <a:rPr sz="1400">
-                <a:solidFill>
-                  <a:srgbClr val="191D2E"/>
-                </a:solidFill>
-                <a:latin typeface="Georgia"/>
+              <a:rPr sz="1300">
+                <a:solidFill>
+                  <a:srgbClr val="3D5466"/>
+                </a:solidFill>
+                <a:latin typeface="Arial"/>
               </a:rPr>
-              <a:t>–  Cross-Selling-Gespräch für den nächsten Kontakt vorbereiten</a:t>
+              <a:t>▸  Verbundpartner-Übergabe (falls relevant)</a:t>
+            </a:r>
+          </a:p>
+          <a:p>
+            <a:pPr>
+              <a:spcBef>
+                <a:spcPts val="400"/>
+              </a:spcBef>
+              <a:spcAft>
+                <a:spcPts val="200"/>
+              </a:spcAft>
+            </a:pPr>
+            <a:r>
+              <a:rPr sz="1200">
+                <a:solidFill>
+                  <a:srgbClr val="3D5466"/>
+                </a:solidFill>
+                <a:latin typeface="Arial"/>
+              </a:rPr>
+              <a:t>## 4.4 Verbundpartner-Matrix</a:t>
+            </a:r>
+          </a:p>
+          <a:p>
+            <a:pPr>
+              <a:spcBef>
+                <a:spcPts val="400"/>
+              </a:spcBef>
+              <a:spcAft>
+                <a:spcPts val="200"/>
+              </a:spcAft>
+            </a:pPr>
+            <a:r>
+              <a:rPr sz="1200">
+                <a:solidFill>
+                  <a:srgbClr val="3D5466"/>
+                </a:solidFill>
+                <a:latin typeface="Arial"/>
+              </a:rPr>
+              <a:t>Die Stärke der VR-Bank liegt im Verbund. Welcher Verbundpartner ist für welches Bedarfsfeld relevant?</a:t>
+            </a:r>
+          </a:p>
+          <a:p>
+            <a:pPr>
+              <a:spcBef>
+                <a:spcPts val="400"/>
+              </a:spcBef>
+              <a:spcAft>
+                <a:spcPts val="200"/>
+              </a:spcAft>
+            </a:pPr>
+            <a:r>
+              <a:rPr sz="1200">
+                <a:solidFill>
+                  <a:srgbClr val="3D5466"/>
+                </a:solidFill>
+                <a:latin typeface="Arial"/>
+              </a:rPr>
+              <a:t>## 4.5 Praxiscase: Vom Kreditgespräch zum Vollbankverbund</a:t>
+            </a:r>
+          </a:p>
+          <a:p>
+            <a:pPr>
+              <a:spcBef>
+                <a:spcPts val="400"/>
+              </a:spcBef>
+              <a:spcAft>
+                <a:spcPts val="200"/>
+              </a:spcAft>
+            </a:pPr>
+            <a:r>
+              <a:rPr sz="1200">
+                <a:solidFill>
+                  <a:srgbClr val="3D5466"/>
+                </a:solidFill>
+                <a:latin typeface="Arial"/>
+              </a:rPr>
+              <a:t>Ausgangssituation</a:t>
+            </a:r>
+          </a:p>
+          <a:p>
+            <a:pPr>
+              <a:spcBef>
+                <a:spcPts val="400"/>
+              </a:spcBef>
+              <a:spcAft>
+                <a:spcPts val="200"/>
+              </a:spcAft>
+            </a:pPr>
+            <a:r>
+              <a:rPr sz="1200">
+                <a:solidFill>
+                  <a:srgbClr val="3D5466"/>
+                </a:solidFill>
+                <a:latin typeface="Arial"/>
+              </a:rPr>
+              <a:t>Vor dem Jahresgespräch analysiert Markus den Kunden in agree:</a:t>
+            </a:r>
+          </a:p>
+          <a:p>
+            <a:pPr>
+              <a:spcBef>
+                <a:spcPts val="400"/>
+              </a:spcBef>
+              <a:spcAft>
+                <a:spcPts val="200"/>
+              </a:spcAft>
+            </a:pPr>
+            <a:r>
+              <a:rPr sz="1200">
+                <a:solidFill>
+                  <a:srgbClr val="3D5466"/>
+                </a:solidFill>
+                <a:latin typeface="Arial"/>
+              </a:rPr>
+              <a:t>Das Gespräch</a:t>
+            </a:r>
+          </a:p>
+          <a:p>
+            <a:pPr>
+              <a:spcBef>
+                <a:spcPts val="400"/>
+              </a:spcBef>
+              <a:spcAft>
+                <a:spcPts val="200"/>
+              </a:spcAft>
+            </a:pPr>
+            <a:r>
+              <a:rPr sz="1200">
+                <a:solidFill>
+                  <a:srgbClr val="3D5466"/>
+                </a:solidFill>
+                <a:latin typeface="Arial"/>
+              </a:rPr>
+              <a:t>„Sie hatten letztes Jahr den Ausfall der CNC-Anlage erwähnt. Wie haben Sie die zwei Wochen finanziell abgefedert?"</a:t>
+            </a:r>
+          </a:p>
+          <a:p>
+            <a:pPr>
+              <a:spcBef>
+                <a:spcPts val="400"/>
+              </a:spcBef>
+              <a:spcAft>
+                <a:spcPts val="200"/>
+              </a:spcAft>
+            </a:pPr>
+            <a:r>
+              <a:rPr sz="1200">
+                <a:solidFill>
+                  <a:srgbClr val="3D5466"/>
+                </a:solidFill>
+                <a:latin typeface="Arial"/>
+              </a:rPr>
+              <a:t>Der Kunde: „Ehrlich gesagt war das eng. Wir haben aus den Rücklagen überbrückt – aber das war ungeplant."</a:t>
+            </a:r>
+          </a:p>
+        </p:txBody>
+      </p:sp>
+      <p:sp>
+        <p:nvSpPr>
+          <p:cNvPr id="9" name="Rectangle 8"/>
+          <p:cNvSpPr/>
+          <p:nvPr/>
+        </p:nvSpPr>
+        <p:spPr>
+          <a:xfrm>
+            <a:off x="0" y="6510528"/>
+            <a:ext cx="12188952" cy="347472"/>
+          </a:xfrm>
+          <a:prstGeom prst="rect">
+            <a:avLst/>
+          </a:prstGeom>
+          <a:solidFill>
+            <a:srgbClr val="0A1937"/>
+          </a:solidFill>
+          <a:ln>
+            <a:noFill/>
+          </a:ln>
+        </p:spPr>
+        <p:style>
+          <a:lnRef idx="1">
+            <a:schemeClr val="accent1"/>
+          </a:lnRef>
+          <a:fillRef idx="3">
+            <a:schemeClr val="accent1"/>
+          </a:fillRef>
+          <a:effectRef idx="2">
+            <a:schemeClr val="accent1"/>
+          </a:effectRef>
+          <a:fontRef idx="minor">
+            <a:schemeClr val="lt1"/>
+          </a:fontRef>
+        </p:style>
+        <p:txBody>
+          <a:bodyPr rtlCol="0" anchor="ctr"/>
+          <a:lstStyle/>
+          <a:p>
+            <a:pPr algn="ctr"/>
+          </a:p>
+        </p:txBody>
+      </p:sp>
+      <p:sp>
+        <p:nvSpPr>
+          <p:cNvPr id="10" name="TextBox 9"/>
+          <p:cNvSpPr txBox="1"/>
+          <p:nvPr/>
+        </p:nvSpPr>
+        <p:spPr>
+          <a:xfrm>
+            <a:off x="685800" y="6583680"/>
+            <a:ext cx="6490411" cy="256032"/>
+          </a:xfrm>
+          <a:prstGeom prst="rect">
+            <a:avLst/>
+          </a:prstGeom>
+          <a:noFill/>
+        </p:spPr>
+        <p:txBody>
+          <a:bodyPr wrap="none">
+            <a:spAutoFit/>
+          </a:bodyPr>
+          <a:lstStyle/>
+          <a:p>
+            <a:pPr algn="l"/>
+            <a:r>
+              <a:rPr sz="700">
+                <a:solidFill>
+                  <a:srgbClr val="A0B4D2"/>
+                </a:solidFill>
+                <a:latin typeface="JetBrains Mono"/>
+              </a:rPr>
+              <a:t>Benedikt Zoller Coaching  ·  FKB Campus  ·  M13</a:t>
             </a:r>
           </a:p>
         </p:txBody>
@@ -4368,14 +4647,6 @@
 <file path=ppt/slides/slide12.xml><?xml version="1.0" encoding="utf-8"?>
 <p:sld xmlns:a="http://schemas.openxmlformats.org/drawingml/2006/main" xmlns:p="http://schemas.openxmlformats.org/presentationml/2006/main" xmlns:r="http://schemas.openxmlformats.org/officeDocument/2006/relationships">
   <p:cSld>
-    <p:bg>
-      <p:bgPr>
-        <a:solidFill>
-          <a:srgbClr val="F8F8FA"/>
-        </a:solidFill>
-        <a:effectLst/>
-      </p:bgPr>
-    </p:bg>
     <p:spTree>
       <p:nvGrpSpPr>
         <p:cNvPr id="1" name=""/>
@@ -4385,126 +4656,20 @@
       <p:grpSpPr/>
       <p:sp>
         <p:nvSpPr>
-          <p:cNvPr id="2" name="TextBox 1"/>
-          <p:cNvSpPr txBox="1"/>
-          <p:nvPr/>
-        </p:nvSpPr>
-        <p:spPr>
-          <a:xfrm>
-            <a:off x="609600" y="457200"/>
-            <a:ext cx="3175000" cy="279400"/>
-          </a:xfrm>
-          <a:prstGeom prst="rect">
-            <a:avLst/>
-          </a:prstGeom>
-          <a:noFill/>
-        </p:spPr>
-        <p:txBody>
-          <a:bodyPr wrap="square">
-            <a:normAutofit/>
-          </a:bodyPr>
-          <a:lstStyle/>
-          <a:p>
-            <a:pPr algn="l"/>
-            <a:r>
-              <a:rPr sz="1000" b="1" i="0">
-                <a:solidFill>
-                  <a:srgbClr val="191D2E"/>
-                </a:solidFill>
-                <a:latin typeface="Arial"/>
-              </a:rPr>
-              <a:t>FKB  Campus</a:t>
-            </a:r>
-          </a:p>
-        </p:txBody>
-      </p:sp>
-      <p:sp>
-        <p:nvSpPr>
-          <p:cNvPr id="3" name="TextBox 2"/>
-          <p:cNvSpPr txBox="1"/>
-          <p:nvPr/>
-        </p:nvSpPr>
-        <p:spPr>
-          <a:xfrm>
-            <a:off x="609600" y="457200"/>
-            <a:ext cx="10972800" cy="279400"/>
-          </a:xfrm>
-          <a:prstGeom prst="rect">
-            <a:avLst/>
-          </a:prstGeom>
-          <a:noFill/>
-        </p:spPr>
-        <p:txBody>
-          <a:bodyPr wrap="square">
-            <a:normAutofit/>
-          </a:bodyPr>
-          <a:lstStyle/>
-          <a:p>
-            <a:pPr algn="r"/>
-            <a:r>
-              <a:rPr sz="900" b="0" i="0">
-                <a:solidFill>
-                  <a:srgbClr val="7B7FA0"/>
-                </a:solidFill>
-                <a:latin typeface="Courier New"/>
-              </a:rPr>
-              <a:t>Ende · v0.3</a:t>
-            </a:r>
-          </a:p>
-        </p:txBody>
-      </p:sp>
-      <p:sp>
-        <p:nvSpPr>
-          <p:cNvPr id="4" name="TextBox 3"/>
-          <p:cNvSpPr txBox="1"/>
-          <p:nvPr/>
-        </p:nvSpPr>
-        <p:spPr>
-          <a:xfrm>
-            <a:off x="609600" y="1143000"/>
-            <a:ext cx="10972800" cy="3556000"/>
-          </a:xfrm>
-          <a:prstGeom prst="rect">
-            <a:avLst/>
-          </a:prstGeom>
-          <a:noFill/>
-        </p:spPr>
-        <p:txBody>
-          <a:bodyPr wrap="square">
-            <a:normAutofit/>
-          </a:bodyPr>
-          <a:lstStyle/>
-          <a:p>
-            <a:pPr algn="l"/>
-            <a:r>
-              <a:rPr sz="9600" b="0" i="0">
-                <a:solidFill>
-                  <a:srgbClr val="191D2E"/>
-                </a:solidFill>
-                <a:latin typeface="Georgia"/>
-              </a:rPr>
-              <a:t>Danke.
-Fragen?</a:t>
-            </a:r>
-          </a:p>
-        </p:txBody>
-      </p:sp>
-      <p:sp>
-        <p:nvSpPr>
-          <p:cNvPr id="5" name="Rectangle 4"/>
+          <p:cNvPr id="2" name="Rectangle 1"/>
           <p:cNvSpPr/>
           <p:nvPr/>
         </p:nvSpPr>
         <p:spPr>
           <a:xfrm>
-            <a:off x="609600" y="4826000"/>
-            <a:ext cx="10972800" cy="6350"/>
+            <a:off x="0" y="0"/>
+            <a:ext cx="12188952" cy="6858000"/>
           </a:xfrm>
           <a:prstGeom prst="rect">
             <a:avLst/>
           </a:prstGeom>
           <a:solidFill>
-            <a:srgbClr val="191D2E"/>
+            <a:srgbClr val="FFFFFF"/>
           </a:solidFill>
           <a:ln>
             <a:noFill/>
@@ -4534,14 +4699,57 @@
       </p:sp>
       <p:sp>
         <p:nvSpPr>
-          <p:cNvPr id="6" name="TextBox 5"/>
+          <p:cNvPr id="3" name="Rectangle 2"/>
+          <p:cNvSpPr/>
+          <p:nvPr/>
+        </p:nvSpPr>
+        <p:spPr>
+          <a:xfrm>
+            <a:off x="0" y="0"/>
+            <a:ext cx="12188952" cy="50292"/>
+          </a:xfrm>
+          <a:prstGeom prst="rect">
+            <a:avLst/>
+          </a:prstGeom>
+          <a:solidFill>
+            <a:srgbClr val="1F2C56"/>
+          </a:solidFill>
+          <a:ln>
+            <a:noFill/>
+          </a:ln>
+        </p:spPr>
+        <p:style>
+          <a:lnRef idx="1">
+            <a:schemeClr val="accent1"/>
+          </a:lnRef>
+          <a:fillRef idx="3">
+            <a:schemeClr val="accent1"/>
+          </a:fillRef>
+          <a:effectRef idx="2">
+            <a:schemeClr val="accent1"/>
+          </a:effectRef>
+          <a:fontRef idx="minor">
+            <a:schemeClr val="lt1"/>
+          </a:fontRef>
+        </p:style>
+        <p:txBody>
+          <a:bodyPr rtlCol="0" anchor="ctr"/>
+          <a:lstStyle/>
+          <a:p>
+            <a:pPr algn="ctr"/>
+          </a:p>
+        </p:txBody>
+      </p:sp>
+      <p:sp>
+        <p:nvSpPr>
+          <p:cNvPr id="4" name="TextBox 3"/>
           <p:cNvSpPr txBox="1"/>
           <p:nvPr/>
         </p:nvSpPr>
         <p:spPr>
           <a:xfrm>
-            <a:off x="609600" y="4953000"/>
-            <a:ext cx="5715000" cy="1143000"/>
+            <a:off x="685800" y="109728"/>
+            <a:ext cx="10817352" cy="228600"/>
           </a:xfrm>
           <a:prstGeom prst="rect">
             <a:avLst/>
@@ -4549,21 +4757,461 @@
           <a:noFill/>
         </p:spPr>
         <p:txBody>
+          <a:bodyPr wrap="none">
+            <a:spAutoFit/>
+          </a:bodyPr>
+          <a:lstStyle/>
+          <a:p>
+            <a:pPr algn="l"/>
+            <a:r>
+              <a:rPr sz="750">
+                <a:solidFill>
+                  <a:srgbClr val="78808C"/>
+                </a:solidFill>
+                <a:latin typeface="JetBrains Mono"/>
+              </a:rPr>
+              <a:t>M13  ·  SCHAUBILD</a:t>
+            </a:r>
+          </a:p>
+        </p:txBody>
+      </p:sp>
+      <p:sp>
+        <p:nvSpPr>
+          <p:cNvPr id="5" name="TextBox 4"/>
+          <p:cNvSpPr txBox="1"/>
+          <p:nvPr/>
+        </p:nvSpPr>
+        <p:spPr>
+          <a:xfrm>
+            <a:off x="685800" y="502920"/>
+            <a:ext cx="10817352" cy="594360"/>
+          </a:xfrm>
+          <a:prstGeom prst="rect">
+            <a:avLst/>
+          </a:prstGeom>
+          <a:noFill/>
+        </p:spPr>
+        <p:txBody>
           <a:bodyPr wrap="square">
-            <a:normAutofit/>
+            <a:spAutoFit/>
           </a:bodyPr>
           <a:lstStyle/>
           <a:p>
             <a:pPr algn="l"/>
             <a:r>
-              <a:rPr sz="1400" b="0" i="1">
-                <a:solidFill>
-                  <a:srgbClr val="191D2E"/>
-                </a:solidFill>
-                <a:latin typeface="Georgia"/>
+              <a:rPr sz="2000" b="1" i="0">
+                <a:solidFill>
+                  <a:srgbClr val="1F2C56"/>
+                </a:solidFill>
+                <a:latin typeface="Source Serif 4"/>
               </a:rPr>
-              <a:t>Modul «Cross-Selling systematisch» auf FKB Campus — 5 Lernziele, Praxisfall und Quellenapparat.</a:t>
-            </a:r>
+              <a:t>Verbundpartner-Matrix</a:t>
+            </a:r>
+          </a:p>
+        </p:txBody>
+      </p:sp>
+      <p:sp>
+        <p:nvSpPr>
+          <p:cNvPr id="6" name="Rectangle 5"/>
+          <p:cNvSpPr/>
+          <p:nvPr/>
+        </p:nvSpPr>
+        <p:spPr>
+          <a:xfrm>
+            <a:off x="685800" y="1143000"/>
+            <a:ext cx="10817352" cy="25400"/>
+          </a:xfrm>
+          <a:prstGeom prst="rect">
+            <a:avLst/>
+          </a:prstGeom>
+          <a:solidFill>
+            <a:srgbClr val="D9C089"/>
+          </a:solidFill>
+          <a:ln>
+            <a:noFill/>
+          </a:ln>
+        </p:spPr>
+        <p:style>
+          <a:lnRef idx="1">
+            <a:schemeClr val="accent1"/>
+          </a:lnRef>
+          <a:fillRef idx="3">
+            <a:schemeClr val="accent1"/>
+          </a:fillRef>
+          <a:effectRef idx="2">
+            <a:schemeClr val="accent1"/>
+          </a:effectRef>
+          <a:fontRef idx="minor">
+            <a:schemeClr val="lt1"/>
+          </a:fontRef>
+        </p:style>
+        <p:txBody>
+          <a:bodyPr rtlCol="0" anchor="ctr"/>
+          <a:lstStyle/>
+          <a:p>
+            <a:pPr algn="ctr"/>
+          </a:p>
+        </p:txBody>
+      </p:sp>
+      <p:pic>
+        <p:nvPicPr>
+          <p:cNvPr id="7" name="Picture 6" descr="image.png"/>
+          <p:cNvPicPr>
+            <a:picLocks noChangeAspect="1"/>
+          </p:cNvPicPr>
+          <p:nvPr/>
+        </p:nvPicPr>
+        <p:blipFill>
+          <a:blip r:embed="rId2"/>
+          <a:stretch>
+            <a:fillRect/>
+          </a:stretch>
+        </p:blipFill>
+        <p:spPr>
+          <a:xfrm>
+            <a:off x="2433486" y="1325880"/>
+            <a:ext cx="7321979" cy="4937760"/>
+          </a:xfrm>
+          <a:prstGeom prst="rect">
+            <a:avLst/>
+          </a:prstGeom>
+        </p:spPr>
+      </p:pic>
+      <p:sp>
+        <p:nvSpPr>
+          <p:cNvPr id="8" name="Rectangle 7"/>
+          <p:cNvSpPr/>
+          <p:nvPr/>
+        </p:nvSpPr>
+        <p:spPr>
+          <a:xfrm>
+            <a:off x="0" y="6510528"/>
+            <a:ext cx="12188952" cy="347472"/>
+          </a:xfrm>
+          <a:prstGeom prst="rect">
+            <a:avLst/>
+          </a:prstGeom>
+          <a:solidFill>
+            <a:srgbClr val="0A1937"/>
+          </a:solidFill>
+          <a:ln>
+            <a:noFill/>
+          </a:ln>
+        </p:spPr>
+        <p:style>
+          <a:lnRef idx="1">
+            <a:schemeClr val="accent1"/>
+          </a:lnRef>
+          <a:fillRef idx="3">
+            <a:schemeClr val="accent1"/>
+          </a:fillRef>
+          <a:effectRef idx="2">
+            <a:schemeClr val="accent1"/>
+          </a:effectRef>
+          <a:fontRef idx="minor">
+            <a:schemeClr val="lt1"/>
+          </a:fontRef>
+        </p:style>
+        <p:txBody>
+          <a:bodyPr rtlCol="0" anchor="ctr"/>
+          <a:lstStyle/>
+          <a:p>
+            <a:pPr algn="ctr"/>
+          </a:p>
+        </p:txBody>
+      </p:sp>
+      <p:sp>
+        <p:nvSpPr>
+          <p:cNvPr id="9" name="TextBox 8"/>
+          <p:cNvSpPr txBox="1"/>
+          <p:nvPr/>
+        </p:nvSpPr>
+        <p:spPr>
+          <a:xfrm>
+            <a:off x="685800" y="6583680"/>
+            <a:ext cx="6490411" cy="256032"/>
+          </a:xfrm>
+          <a:prstGeom prst="rect">
+            <a:avLst/>
+          </a:prstGeom>
+          <a:noFill/>
+        </p:spPr>
+        <p:txBody>
+          <a:bodyPr wrap="none">
+            <a:spAutoFit/>
+          </a:bodyPr>
+          <a:lstStyle/>
+          <a:p>
+            <a:pPr algn="l"/>
+            <a:r>
+              <a:rPr sz="700">
+                <a:solidFill>
+                  <a:srgbClr val="A0B4D2"/>
+                </a:solidFill>
+                <a:latin typeface="JetBrains Mono"/>
+              </a:rPr>
+              <a:t>Benedikt Zoller Coaching  ·  FKB Campus  ·  M13</a:t>
+            </a:r>
+          </a:p>
+        </p:txBody>
+      </p:sp>
+      <p:sp>
+        <p:nvSpPr>
+          <p:cNvPr id="10" name="TextBox 9"/>
+          <p:cNvSpPr txBox="1"/>
+          <p:nvPr/>
+        </p:nvSpPr>
+        <p:spPr>
+          <a:xfrm>
+            <a:off x="7176211" y="6583680"/>
+            <a:ext cx="4326940" cy="256032"/>
+          </a:xfrm>
+          <a:prstGeom prst="rect">
+            <a:avLst/>
+          </a:prstGeom>
+          <a:noFill/>
+        </p:spPr>
+        <p:txBody>
+          <a:bodyPr wrap="none">
+            <a:spAutoFit/>
+          </a:bodyPr>
+          <a:lstStyle/>
+          <a:p>
+            <a:pPr algn="r"/>
+            <a:r>
+              <a:rPr sz="700">
+                <a:solidFill>
+                  <a:srgbClr val="A0B4D2"/>
+                </a:solidFill>
+                <a:latin typeface="JetBrains Mono"/>
+              </a:rPr>
+              <a:t>Schaubild</a:t>
+            </a:r>
+          </a:p>
+        </p:txBody>
+      </p:sp>
+    </p:spTree>
+  </p:cSld>
+  <p:clrMapOvr>
+    <a:masterClrMapping/>
+  </p:clrMapOvr>
+</p:sld>
+</file>
+
+<file path=ppt/slides/slide13.xml><?xml version="1.0" encoding="utf-8"?>
+<p:sld xmlns:a="http://schemas.openxmlformats.org/drawingml/2006/main" xmlns:p="http://schemas.openxmlformats.org/presentationml/2006/main" xmlns:r="http://schemas.openxmlformats.org/officeDocument/2006/relationships">
+  <p:cSld>
+    <p:spTree>
+      <p:nvGrpSpPr>
+        <p:cNvPr id="1" name=""/>
+        <p:cNvGrpSpPr/>
+        <p:nvPr/>
+      </p:nvGrpSpPr>
+      <p:grpSpPr/>
+      <p:sp>
+        <p:nvSpPr>
+          <p:cNvPr id="2" name="Rectangle 1"/>
+          <p:cNvSpPr/>
+          <p:nvPr/>
+        </p:nvSpPr>
+        <p:spPr>
+          <a:xfrm>
+            <a:off x="0" y="0"/>
+            <a:ext cx="12188952" cy="6858000"/>
+          </a:xfrm>
+          <a:prstGeom prst="rect">
+            <a:avLst/>
+          </a:prstGeom>
+          <a:solidFill>
+            <a:srgbClr val="EDEDF3"/>
+          </a:solidFill>
+          <a:ln>
+            <a:noFill/>
+          </a:ln>
+        </p:spPr>
+        <p:style>
+          <a:lnRef idx="1">
+            <a:schemeClr val="accent1"/>
+          </a:lnRef>
+          <a:fillRef idx="3">
+            <a:schemeClr val="accent1"/>
+          </a:fillRef>
+          <a:effectRef idx="2">
+            <a:schemeClr val="accent1"/>
+          </a:effectRef>
+          <a:fontRef idx="minor">
+            <a:schemeClr val="lt1"/>
+          </a:fontRef>
+        </p:style>
+        <p:txBody>
+          <a:bodyPr rtlCol="0" anchor="ctr"/>
+          <a:lstStyle/>
+          <a:p>
+            <a:pPr algn="ctr"/>
+          </a:p>
+        </p:txBody>
+      </p:sp>
+      <p:sp>
+        <p:nvSpPr>
+          <p:cNvPr id="3" name="Rectangle 2"/>
+          <p:cNvSpPr/>
+          <p:nvPr/>
+        </p:nvSpPr>
+        <p:spPr>
+          <a:xfrm>
+            <a:off x="0" y="0"/>
+            <a:ext cx="12188952" cy="50292"/>
+          </a:xfrm>
+          <a:prstGeom prst="rect">
+            <a:avLst/>
+          </a:prstGeom>
+          <a:solidFill>
+            <a:srgbClr val="1F2C56"/>
+          </a:solidFill>
+          <a:ln>
+            <a:noFill/>
+          </a:ln>
+        </p:spPr>
+        <p:style>
+          <a:lnRef idx="1">
+            <a:schemeClr val="accent1"/>
+          </a:lnRef>
+          <a:fillRef idx="3">
+            <a:schemeClr val="accent1"/>
+          </a:fillRef>
+          <a:effectRef idx="2">
+            <a:schemeClr val="accent1"/>
+          </a:effectRef>
+          <a:fontRef idx="minor">
+            <a:schemeClr val="lt1"/>
+          </a:fontRef>
+        </p:style>
+        <p:txBody>
+          <a:bodyPr rtlCol="0" anchor="ctr"/>
+          <a:lstStyle/>
+          <a:p>
+            <a:pPr algn="ctr"/>
+          </a:p>
+        </p:txBody>
+      </p:sp>
+      <p:sp>
+        <p:nvSpPr>
+          <p:cNvPr id="4" name="TextBox 3"/>
+          <p:cNvSpPr txBox="1"/>
+          <p:nvPr/>
+        </p:nvSpPr>
+        <p:spPr>
+          <a:xfrm>
+            <a:off x="685800" y="109728"/>
+            <a:ext cx="10817352" cy="228600"/>
+          </a:xfrm>
+          <a:prstGeom prst="rect">
+            <a:avLst/>
+          </a:prstGeom>
+          <a:noFill/>
+        </p:spPr>
+        <p:txBody>
+          <a:bodyPr wrap="none">
+            <a:spAutoFit/>
+          </a:bodyPr>
+          <a:lstStyle/>
+          <a:p>
+            <a:pPr algn="l"/>
+            <a:r>
+              <a:rPr sz="750">
+                <a:solidFill>
+                  <a:srgbClr val="78808C"/>
+                </a:solidFill>
+                <a:latin typeface="JetBrains Mono"/>
+              </a:rPr>
+              <a:t>M13  ·  INHALT</a:t>
+            </a:r>
+          </a:p>
+        </p:txBody>
+      </p:sp>
+      <p:sp>
+        <p:nvSpPr>
+          <p:cNvPr id="5" name="Rectangle 4"/>
+          <p:cNvSpPr/>
+          <p:nvPr/>
+        </p:nvSpPr>
+        <p:spPr>
+          <a:xfrm>
+            <a:off x="0" y="1234440"/>
+            <a:ext cx="12188952" cy="12700"/>
+          </a:xfrm>
+          <a:prstGeom prst="rect">
+            <a:avLst/>
+          </a:prstGeom>
+          <a:solidFill>
+            <a:srgbClr val="D8DFE4"/>
+          </a:solidFill>
+          <a:ln>
+            <a:noFill/>
+          </a:ln>
+        </p:spPr>
+        <p:style>
+          <a:lnRef idx="1">
+            <a:schemeClr val="accent1"/>
+          </a:lnRef>
+          <a:fillRef idx="3">
+            <a:schemeClr val="accent1"/>
+          </a:fillRef>
+          <a:effectRef idx="2">
+            <a:schemeClr val="accent1"/>
+          </a:effectRef>
+          <a:fontRef idx="minor">
+            <a:schemeClr val="lt1"/>
+          </a:fontRef>
+        </p:style>
+        <p:txBody>
+          <a:bodyPr rtlCol="0" anchor="ctr"/>
+          <a:lstStyle/>
+          <a:p>
+            <a:pPr algn="ctr"/>
+          </a:p>
+        </p:txBody>
+      </p:sp>
+      <p:sp>
+        <p:nvSpPr>
+          <p:cNvPr id="6" name="Rectangle 5"/>
+          <p:cNvSpPr/>
+          <p:nvPr/>
+        </p:nvSpPr>
+        <p:spPr>
+          <a:xfrm>
+            <a:off x="685800" y="502920"/>
+            <a:ext cx="36576" cy="658368"/>
+          </a:xfrm>
+          <a:prstGeom prst="rect">
+            <a:avLst/>
+          </a:prstGeom>
+          <a:solidFill>
+            <a:srgbClr val="D9C089"/>
+          </a:solidFill>
+          <a:ln>
+            <a:noFill/>
+          </a:ln>
+        </p:spPr>
+        <p:style>
+          <a:lnRef idx="1">
+            <a:schemeClr val="accent1"/>
+          </a:lnRef>
+          <a:fillRef idx="3">
+            <a:schemeClr val="accent1"/>
+          </a:fillRef>
+          <a:effectRef idx="2">
+            <a:schemeClr val="accent1"/>
+          </a:effectRef>
+          <a:fontRef idx="minor">
+            <a:schemeClr val="lt1"/>
+          </a:fontRef>
+        </p:style>
+        <p:txBody>
+          <a:bodyPr rtlCol="0" anchor="ctr"/>
+          <a:lstStyle/>
+          <a:p>
+            <a:pPr algn="ctr"/>
           </a:p>
         </p:txBody>
       </p:sp>
@@ -4575,8 +5223,8 @@
         </p:nvSpPr>
         <p:spPr>
           <a:xfrm>
-            <a:off x="6731000" y="4953000"/>
-            <a:ext cx="2413000" cy="177800"/>
+            <a:off x="813816" y="502920"/>
+            <a:ext cx="10634472" cy="685800"/>
           </a:xfrm>
           <a:prstGeom prst="rect">
             <a:avLst/>
@@ -4585,19 +5233,19 @@
         </p:spPr>
         <p:txBody>
           <a:bodyPr wrap="square">
-            <a:normAutofit/>
+            <a:spAutoFit/>
           </a:bodyPr>
           <a:lstStyle/>
           <a:p>
             <a:pPr algn="l"/>
             <a:r>
-              <a:rPr sz="900" b="0" i="0">
-                <a:solidFill>
-                  <a:srgbClr val="7B7FA0"/>
-                </a:solidFill>
-                <a:latin typeface="Courier New"/>
+              <a:rPr sz="2400" b="1" i="0">
+                <a:solidFill>
+                  <a:srgbClr val="1F2C56"/>
+                </a:solidFill>
+                <a:latin typeface="Source Serif 4"/>
               </a:rPr>
-              <a:t>Trainer</a:t>
+              <a:t>Arbeitsblatt A: Wallet-Share-Analyse</a:t>
             </a:r>
           </a:p>
         </p:txBody>
@@ -4610,8 +5258,8 @@
         </p:nvSpPr>
         <p:spPr>
           <a:xfrm>
-            <a:off x="6731000" y="5156200"/>
-            <a:ext cx="2413000" cy="381000"/>
+            <a:off x="685800" y="1417320"/>
+            <a:ext cx="10817352" cy="5029200"/>
           </a:xfrm>
           <a:prstGeom prst="rect">
             <a:avLst/>
@@ -4620,55 +5268,127 @@
         </p:spPr>
         <p:txBody>
           <a:bodyPr wrap="square">
-            <a:normAutofit/>
+            <a:spAutoFit/>
           </a:bodyPr>
           <a:lstStyle/>
           <a:p>
-            <a:pPr algn="l"/>
-            <a:r>
-              <a:rPr sz="1400" b="0" i="0">
-                <a:solidFill>
-                  <a:srgbClr val="4D5270"/>
-                </a:solidFill>
-                <a:latin typeface="Georgia"/>
+            <a:pPr>
+              <a:spcBef>
+                <a:spcPts val="400"/>
+              </a:spcBef>
+              <a:spcAft>
+                <a:spcPts val="200"/>
+              </a:spcAft>
+            </a:pPr>
+            <a:r>
+              <a:rPr sz="1200">
+                <a:solidFill>
+                  <a:srgbClr val="3D5466"/>
+                </a:solidFill>
+                <a:latin typeface="Arial"/>
               </a:rPr>
-              <a:t>[Name · Kontakt]</a:t>
-            </a:r>
-          </a:p>
-        </p:txBody>
-      </p:sp>
-      <p:sp>
-        <p:nvSpPr>
-          <p:cNvPr id="9" name="TextBox 8"/>
-          <p:cNvSpPr txBox="1"/>
-          <p:nvPr/>
-        </p:nvSpPr>
-        <p:spPr>
-          <a:xfrm>
-            <a:off x="9398000" y="4953000"/>
-            <a:ext cx="2184400" cy="177800"/>
-          </a:xfrm>
-          <a:prstGeom prst="rect">
-            <a:avLst/>
-          </a:prstGeom>
-          <a:noFill/>
-        </p:spPr>
-        <p:txBody>
-          <a:bodyPr wrap="square">
-            <a:normAutofit/>
-          </a:bodyPr>
-          <a:lstStyle/>
-          <a:p>
-            <a:pPr algn="l"/>
-            <a:r>
-              <a:rPr sz="900" b="0" i="0">
-                <a:solidFill>
-                  <a:srgbClr val="7B7FA0"/>
-                </a:solidFill>
-                <a:latin typeface="Courier New"/>
+              <a:t>Kundenname (anonymisiert): ___________________________ Datum: _______________</a:t>
+            </a:r>
+          </a:p>
+          <a:p>
+            <a:pPr>
+              <a:spcBef>
+                <a:spcPts val="400"/>
+              </a:spcBef>
+              <a:spcAft>
+                <a:spcPts val="200"/>
+              </a:spcAft>
+            </a:pPr>
+            <a:r>
+              <a:rPr sz="1200">
+                <a:solidFill>
+                  <a:srgbClr val="3D5466"/>
+                </a:solidFill>
+                <a:latin typeface="Arial"/>
               </a:rPr>
-              <a:t>Modul</a:t>
-            </a:r>
+              <a:t>Meine Top-2 Cross-Selling-Hypothesen für diesen Kunden:</a:t>
+            </a:r>
+          </a:p>
+          <a:p>
+            <a:pPr>
+              <a:spcBef>
+                <a:spcPts val="400"/>
+              </a:spcBef>
+              <a:spcAft>
+                <a:spcPts val="200"/>
+              </a:spcAft>
+            </a:pPr>
+            <a:r>
+              <a:rPr sz="1300">
+                <a:solidFill>
+                  <a:srgbClr val="3D5466"/>
+                </a:solidFill>
+                <a:latin typeface="Arial"/>
+              </a:rPr>
+              <a:t>▸  ___________________________________________________________________________</a:t>
+            </a:r>
+          </a:p>
+          <a:p>
+            <a:pPr>
+              <a:spcBef>
+                <a:spcPts val="400"/>
+              </a:spcBef>
+              <a:spcAft>
+                <a:spcPts val="200"/>
+              </a:spcAft>
+            </a:pPr>
+            <a:r>
+              <a:rPr sz="1300">
+                <a:solidFill>
+                  <a:srgbClr val="3D5466"/>
+                </a:solidFill>
+                <a:latin typeface="Arial"/>
+              </a:rPr>
+              <a:t>▸  ___________________________________________________________________________</a:t>
+            </a:r>
+          </a:p>
+        </p:txBody>
+      </p:sp>
+      <p:sp>
+        <p:nvSpPr>
+          <p:cNvPr id="9" name="Rectangle 8"/>
+          <p:cNvSpPr/>
+          <p:nvPr/>
+        </p:nvSpPr>
+        <p:spPr>
+          <a:xfrm>
+            <a:off x="0" y="6510528"/>
+            <a:ext cx="12188952" cy="347472"/>
+          </a:xfrm>
+          <a:prstGeom prst="rect">
+            <a:avLst/>
+          </a:prstGeom>
+          <a:solidFill>
+            <a:srgbClr val="0A1937"/>
+          </a:solidFill>
+          <a:ln>
+            <a:noFill/>
+          </a:ln>
+        </p:spPr>
+        <p:style>
+          <a:lnRef idx="1">
+            <a:schemeClr val="accent1"/>
+          </a:lnRef>
+          <a:fillRef idx="3">
+            <a:schemeClr val="accent1"/>
+          </a:fillRef>
+          <a:effectRef idx="2">
+            <a:schemeClr val="accent1"/>
+          </a:effectRef>
+          <a:fontRef idx="minor">
+            <a:schemeClr val="lt1"/>
+          </a:fontRef>
+        </p:style>
+        <p:txBody>
+          <a:bodyPr rtlCol="0" anchor="ctr"/>
+          <a:lstStyle/>
+          <a:p>
+            <a:pPr algn="ctr"/>
           </a:p>
         </p:txBody>
       </p:sp>
@@ -4680,8 +5400,8 @@
         </p:nvSpPr>
         <p:spPr>
           <a:xfrm>
-            <a:off x="9398000" y="5156200"/>
-            <a:ext cx="2184400" cy="381000"/>
+            <a:off x="685800" y="6583680"/>
+            <a:ext cx="6490411" cy="256032"/>
           </a:xfrm>
           <a:prstGeom prst="rect">
             <a:avLst/>
@@ -4689,20 +5409,419 @@
           <a:noFill/>
         </p:spPr>
         <p:txBody>
+          <a:bodyPr wrap="none">
+            <a:spAutoFit/>
+          </a:bodyPr>
+          <a:lstStyle/>
+          <a:p>
+            <a:pPr algn="l"/>
+            <a:r>
+              <a:rPr sz="700">
+                <a:solidFill>
+                  <a:srgbClr val="A0B4D2"/>
+                </a:solidFill>
+                <a:latin typeface="JetBrains Mono"/>
+              </a:rPr>
+              <a:t>Benedikt Zoller Coaching  ·  FKB Campus  ·  M13</a:t>
+            </a:r>
+          </a:p>
+        </p:txBody>
+      </p:sp>
+    </p:spTree>
+  </p:cSld>
+  <p:clrMapOvr>
+    <a:masterClrMapping/>
+  </p:clrMapOvr>
+</p:sld>
+</file>
+
+<file path=ppt/slides/slide14.xml><?xml version="1.0" encoding="utf-8"?>
+<p:sld xmlns:a="http://schemas.openxmlformats.org/drawingml/2006/main" xmlns:p="http://schemas.openxmlformats.org/presentationml/2006/main" xmlns:r="http://schemas.openxmlformats.org/officeDocument/2006/relationships">
+  <p:cSld>
+    <p:spTree>
+      <p:nvGrpSpPr>
+        <p:cNvPr id="1" name=""/>
+        <p:cNvGrpSpPr/>
+        <p:nvPr/>
+      </p:nvGrpSpPr>
+      <p:grpSpPr/>
+      <p:sp>
+        <p:nvSpPr>
+          <p:cNvPr id="2" name="Rectangle 1"/>
+          <p:cNvSpPr/>
+          <p:nvPr/>
+        </p:nvSpPr>
+        <p:spPr>
+          <a:xfrm>
+            <a:off x="0" y="0"/>
+            <a:ext cx="12188952" cy="6858000"/>
+          </a:xfrm>
+          <a:prstGeom prst="rect">
+            <a:avLst/>
+          </a:prstGeom>
+          <a:solidFill>
+            <a:srgbClr val="EDEDF3"/>
+          </a:solidFill>
+          <a:ln>
+            <a:noFill/>
+          </a:ln>
+        </p:spPr>
+        <p:style>
+          <a:lnRef idx="1">
+            <a:schemeClr val="accent1"/>
+          </a:lnRef>
+          <a:fillRef idx="3">
+            <a:schemeClr val="accent1"/>
+          </a:fillRef>
+          <a:effectRef idx="2">
+            <a:schemeClr val="accent1"/>
+          </a:effectRef>
+          <a:fontRef idx="minor">
+            <a:schemeClr val="lt1"/>
+          </a:fontRef>
+        </p:style>
+        <p:txBody>
+          <a:bodyPr rtlCol="0" anchor="ctr"/>
+          <a:lstStyle/>
+          <a:p>
+            <a:pPr algn="ctr"/>
+          </a:p>
+        </p:txBody>
+      </p:sp>
+      <p:sp>
+        <p:nvSpPr>
+          <p:cNvPr id="3" name="Rectangle 2"/>
+          <p:cNvSpPr/>
+          <p:nvPr/>
+        </p:nvSpPr>
+        <p:spPr>
+          <a:xfrm>
+            <a:off x="0" y="0"/>
+            <a:ext cx="12188952" cy="50292"/>
+          </a:xfrm>
+          <a:prstGeom prst="rect">
+            <a:avLst/>
+          </a:prstGeom>
+          <a:solidFill>
+            <a:srgbClr val="1F2C56"/>
+          </a:solidFill>
+          <a:ln>
+            <a:noFill/>
+          </a:ln>
+        </p:spPr>
+        <p:style>
+          <a:lnRef idx="1">
+            <a:schemeClr val="accent1"/>
+          </a:lnRef>
+          <a:fillRef idx="3">
+            <a:schemeClr val="accent1"/>
+          </a:fillRef>
+          <a:effectRef idx="2">
+            <a:schemeClr val="accent1"/>
+          </a:effectRef>
+          <a:fontRef idx="minor">
+            <a:schemeClr val="lt1"/>
+          </a:fontRef>
+        </p:style>
+        <p:txBody>
+          <a:bodyPr rtlCol="0" anchor="ctr"/>
+          <a:lstStyle/>
+          <a:p>
+            <a:pPr algn="ctr"/>
+          </a:p>
+        </p:txBody>
+      </p:sp>
+      <p:sp>
+        <p:nvSpPr>
+          <p:cNvPr id="4" name="TextBox 3"/>
+          <p:cNvSpPr txBox="1"/>
+          <p:nvPr/>
+        </p:nvSpPr>
+        <p:spPr>
+          <a:xfrm>
+            <a:off x="685800" y="109728"/>
+            <a:ext cx="10817352" cy="228600"/>
+          </a:xfrm>
+          <a:prstGeom prst="rect">
+            <a:avLst/>
+          </a:prstGeom>
+          <a:noFill/>
+        </p:spPr>
+        <p:txBody>
+          <a:bodyPr wrap="none">
+            <a:spAutoFit/>
+          </a:bodyPr>
+          <a:lstStyle/>
+          <a:p>
+            <a:pPr algn="l"/>
+            <a:r>
+              <a:rPr sz="750">
+                <a:solidFill>
+                  <a:srgbClr val="78808C"/>
+                </a:solidFill>
+                <a:latin typeface="JetBrains Mono"/>
+              </a:rPr>
+              <a:t>M13  ·  INHALT</a:t>
+            </a:r>
+          </a:p>
+        </p:txBody>
+      </p:sp>
+      <p:sp>
+        <p:nvSpPr>
+          <p:cNvPr id="5" name="Rectangle 4"/>
+          <p:cNvSpPr/>
+          <p:nvPr/>
+        </p:nvSpPr>
+        <p:spPr>
+          <a:xfrm>
+            <a:off x="0" y="1234440"/>
+            <a:ext cx="12188952" cy="12700"/>
+          </a:xfrm>
+          <a:prstGeom prst="rect">
+            <a:avLst/>
+          </a:prstGeom>
+          <a:solidFill>
+            <a:srgbClr val="D8DFE4"/>
+          </a:solidFill>
+          <a:ln>
+            <a:noFill/>
+          </a:ln>
+        </p:spPr>
+        <p:style>
+          <a:lnRef idx="1">
+            <a:schemeClr val="accent1"/>
+          </a:lnRef>
+          <a:fillRef idx="3">
+            <a:schemeClr val="accent1"/>
+          </a:fillRef>
+          <a:effectRef idx="2">
+            <a:schemeClr val="accent1"/>
+          </a:effectRef>
+          <a:fontRef idx="minor">
+            <a:schemeClr val="lt1"/>
+          </a:fontRef>
+        </p:style>
+        <p:txBody>
+          <a:bodyPr rtlCol="0" anchor="ctr"/>
+          <a:lstStyle/>
+          <a:p>
+            <a:pPr algn="ctr"/>
+          </a:p>
+        </p:txBody>
+      </p:sp>
+      <p:sp>
+        <p:nvSpPr>
+          <p:cNvPr id="6" name="Rectangle 5"/>
+          <p:cNvSpPr/>
+          <p:nvPr/>
+        </p:nvSpPr>
+        <p:spPr>
+          <a:xfrm>
+            <a:off x="685800" y="502920"/>
+            <a:ext cx="36576" cy="658368"/>
+          </a:xfrm>
+          <a:prstGeom prst="rect">
+            <a:avLst/>
+          </a:prstGeom>
+          <a:solidFill>
+            <a:srgbClr val="D9C089"/>
+          </a:solidFill>
+          <a:ln>
+            <a:noFill/>
+          </a:ln>
+        </p:spPr>
+        <p:style>
+          <a:lnRef idx="1">
+            <a:schemeClr val="accent1"/>
+          </a:lnRef>
+          <a:fillRef idx="3">
+            <a:schemeClr val="accent1"/>
+          </a:fillRef>
+          <a:effectRef idx="2">
+            <a:schemeClr val="accent1"/>
+          </a:effectRef>
+          <a:fontRef idx="minor">
+            <a:schemeClr val="lt1"/>
+          </a:fontRef>
+        </p:style>
+        <p:txBody>
+          <a:bodyPr rtlCol="0" anchor="ctr"/>
+          <a:lstStyle/>
+          <a:p>
+            <a:pPr algn="ctr"/>
+          </a:p>
+        </p:txBody>
+      </p:sp>
+      <p:sp>
+        <p:nvSpPr>
+          <p:cNvPr id="7" name="TextBox 6"/>
+          <p:cNvSpPr txBox="1"/>
+          <p:nvPr/>
+        </p:nvSpPr>
+        <p:spPr>
+          <a:xfrm>
+            <a:off x="813816" y="502920"/>
+            <a:ext cx="10634472" cy="685800"/>
+          </a:xfrm>
+          <a:prstGeom prst="rect">
+            <a:avLst/>
+          </a:prstGeom>
+          <a:noFill/>
+        </p:spPr>
+        <p:txBody>
           <a:bodyPr wrap="square">
-            <a:normAutofit/>
+            <a:spAutoFit/>
           </a:bodyPr>
           <a:lstStyle/>
           <a:p>
             <a:pPr algn="l"/>
             <a:r>
-              <a:rPr sz="1400" b="0" i="0">
-                <a:solidFill>
-                  <a:srgbClr val="191D2E"/>
-                </a:solidFill>
-                <a:latin typeface="Georgia"/>
+              <a:rPr sz="2400" b="1" i="0">
+                <a:solidFill>
+                  <a:srgbClr val="1F2C56"/>
+                </a:solidFill>
+                <a:latin typeface="Source Serif 4"/>
               </a:rPr>
-              <a:t>M13 · Berater</a:t>
+              <a:t>Arbeitsblatt B: Cross-Selling-Gesprächsvorbereitung</a:t>
+            </a:r>
+          </a:p>
+        </p:txBody>
+      </p:sp>
+      <p:sp>
+        <p:nvSpPr>
+          <p:cNvPr id="8" name="TextBox 7"/>
+          <p:cNvSpPr txBox="1"/>
+          <p:nvPr/>
+        </p:nvSpPr>
+        <p:spPr>
+          <a:xfrm>
+            <a:off x="685800" y="1417320"/>
+            <a:ext cx="10817352" cy="5029200"/>
+          </a:xfrm>
+          <a:prstGeom prst="rect">
+            <a:avLst/>
+          </a:prstGeom>
+          <a:noFill/>
+        </p:spPr>
+        <p:txBody>
+          <a:bodyPr wrap="square">
+            <a:spAutoFit/>
+          </a:bodyPr>
+          <a:lstStyle/>
+          <a:p>
+            <a:pPr>
+              <a:spcBef>
+                <a:spcPts val="400"/>
+              </a:spcBef>
+              <a:spcAft>
+                <a:spcPts val="200"/>
+              </a:spcAft>
+            </a:pPr>
+            <a:r>
+              <a:rPr sz="1200">
+                <a:solidFill>
+                  <a:srgbClr val="3D5466"/>
+                </a:solidFill>
+                <a:latin typeface="Arial"/>
+              </a:rPr>
+              <a:t>Ausgewählte Hypothese: ___________________________</a:t>
+            </a:r>
+          </a:p>
+          <a:p>
+            <a:pPr>
+              <a:spcBef>
+                <a:spcPts val="400"/>
+              </a:spcBef>
+              <a:spcAft>
+                <a:spcPts val="200"/>
+              </a:spcAft>
+            </a:pPr>
+            <a:r>
+              <a:rPr sz="1200">
+                <a:solidFill>
+                  <a:srgbClr val="3D5466"/>
+                </a:solidFill>
+                <a:latin typeface="Arial"/>
+              </a:rPr>
+              <a:t># 5. PRAXISTRANSFER</a:t>
+            </a:r>
+          </a:p>
+        </p:txBody>
+      </p:sp>
+      <p:sp>
+        <p:nvSpPr>
+          <p:cNvPr id="9" name="Rectangle 8"/>
+          <p:cNvSpPr/>
+          <p:nvPr/>
+        </p:nvSpPr>
+        <p:spPr>
+          <a:xfrm>
+            <a:off x="0" y="6510528"/>
+            <a:ext cx="12188952" cy="347472"/>
+          </a:xfrm>
+          <a:prstGeom prst="rect">
+            <a:avLst/>
+          </a:prstGeom>
+          <a:solidFill>
+            <a:srgbClr val="0A1937"/>
+          </a:solidFill>
+          <a:ln>
+            <a:noFill/>
+          </a:ln>
+        </p:spPr>
+        <p:style>
+          <a:lnRef idx="1">
+            <a:schemeClr val="accent1"/>
+          </a:lnRef>
+          <a:fillRef idx="3">
+            <a:schemeClr val="accent1"/>
+          </a:fillRef>
+          <a:effectRef idx="2">
+            <a:schemeClr val="accent1"/>
+          </a:effectRef>
+          <a:fontRef idx="minor">
+            <a:schemeClr val="lt1"/>
+          </a:fontRef>
+        </p:style>
+        <p:txBody>
+          <a:bodyPr rtlCol="0" anchor="ctr"/>
+          <a:lstStyle/>
+          <a:p>
+            <a:pPr algn="ctr"/>
+          </a:p>
+        </p:txBody>
+      </p:sp>
+      <p:sp>
+        <p:nvSpPr>
+          <p:cNvPr id="10" name="TextBox 9"/>
+          <p:cNvSpPr txBox="1"/>
+          <p:nvPr/>
+        </p:nvSpPr>
+        <p:spPr>
+          <a:xfrm>
+            <a:off x="685800" y="6583680"/>
+            <a:ext cx="6490411" cy="256032"/>
+          </a:xfrm>
+          <a:prstGeom prst="rect">
+            <a:avLst/>
+          </a:prstGeom>
+          <a:noFill/>
+        </p:spPr>
+        <p:txBody>
+          <a:bodyPr wrap="none">
+            <a:spAutoFit/>
+          </a:bodyPr>
+          <a:lstStyle/>
+          <a:p>
+            <a:pPr algn="l"/>
+            <a:r>
+              <a:rPr sz="700">
+                <a:solidFill>
+                  <a:srgbClr val="A0B4D2"/>
+                </a:solidFill>
+                <a:latin typeface="JetBrains Mono"/>
+              </a:rPr>
+              <a:t>Benedikt Zoller Coaching  ·  FKB Campus  ·  M13</a:t>
             </a:r>
           </a:p>
         </p:txBody>
@@ -4718,14 +5837,6 @@
 <file path=ppt/slides/slide2.xml><?xml version="1.0" encoding="utf-8"?>
 <p:sld xmlns:a="http://schemas.openxmlformats.org/drawingml/2006/main" xmlns:p="http://schemas.openxmlformats.org/presentationml/2006/main" xmlns:r="http://schemas.openxmlformats.org/officeDocument/2006/relationships">
   <p:cSld>
-    <p:bg>
-      <p:bgPr>
-        <a:solidFill>
-          <a:srgbClr val="F8F8FA"/>
-        </a:solidFill>
-        <a:effectLst/>
-      </p:bgPr>
-    </p:bg>
     <p:spTree>
       <p:nvGrpSpPr>
         <p:cNvPr id="1" name=""/>
@@ -4735,125 +5846,20 @@
       <p:grpSpPr/>
       <p:sp>
         <p:nvSpPr>
-          <p:cNvPr id="2" name="TextBox 1"/>
-          <p:cNvSpPr txBox="1"/>
-          <p:nvPr/>
-        </p:nvSpPr>
-        <p:spPr>
-          <a:xfrm>
-            <a:off x="609600" y="279400"/>
-            <a:ext cx="2540000" cy="279400"/>
-          </a:xfrm>
-          <a:prstGeom prst="rect">
-            <a:avLst/>
-          </a:prstGeom>
-          <a:noFill/>
-        </p:spPr>
-        <p:txBody>
-          <a:bodyPr wrap="square">
-            <a:normAutofit/>
-          </a:bodyPr>
-          <a:lstStyle/>
-          <a:p>
-            <a:pPr algn="l"/>
-            <a:r>
-              <a:rPr sz="1000" b="1" i="0">
-                <a:solidFill>
-                  <a:srgbClr val="191D2E"/>
-                </a:solidFill>
-                <a:latin typeface="Arial"/>
-              </a:rPr>
-              <a:t>FKB  Campus</a:t>
-            </a:r>
-          </a:p>
-        </p:txBody>
-      </p:sp>
-      <p:sp>
-        <p:nvSpPr>
-          <p:cNvPr id="3" name="TextBox 2"/>
-          <p:cNvSpPr txBox="1"/>
-          <p:nvPr/>
-        </p:nvSpPr>
-        <p:spPr>
-          <a:xfrm>
-            <a:off x="609600" y="279400"/>
-            <a:ext cx="10972800" cy="279400"/>
-          </a:xfrm>
-          <a:prstGeom prst="rect">
-            <a:avLst/>
-          </a:prstGeom>
-          <a:noFill/>
-        </p:spPr>
-        <p:txBody>
-          <a:bodyPr wrap="square">
-            <a:normAutofit/>
-          </a:bodyPr>
-          <a:lstStyle/>
-          <a:p>
-            <a:pPr algn="r"/>
-            <a:r>
-              <a:rPr sz="900" b="0" i="0">
-                <a:solidFill>
-                  <a:srgbClr val="7B7FA0"/>
-                </a:solidFill>
-                <a:latin typeface="Courier New"/>
-              </a:rPr>
-              <a:t>§ 00 — LERNZIELE</a:t>
-            </a:r>
-          </a:p>
-        </p:txBody>
-      </p:sp>
-      <p:sp>
-        <p:nvSpPr>
-          <p:cNvPr id="4" name="TextBox 3"/>
-          <p:cNvSpPr txBox="1"/>
-          <p:nvPr/>
-        </p:nvSpPr>
-        <p:spPr>
-          <a:xfrm>
-            <a:off x="609600" y="6426200"/>
-            <a:ext cx="10972800" cy="228600"/>
-          </a:xfrm>
-          <a:prstGeom prst="rect">
-            <a:avLst/>
-          </a:prstGeom>
-          <a:noFill/>
-        </p:spPr>
-        <p:txBody>
-          <a:bodyPr wrap="square">
-            <a:normAutofit/>
-          </a:bodyPr>
-          <a:lstStyle/>
-          <a:p>
-            <a:pPr algn="r"/>
-            <a:r>
-              <a:rPr sz="900" b="0" i="0">
-                <a:solidFill>
-                  <a:srgbClr val="7B7FA0"/>
-                </a:solidFill>
-                <a:latin typeface="Courier New"/>
-              </a:rPr>
-              <a:t>02</a:t>
-            </a:r>
-          </a:p>
-        </p:txBody>
-      </p:sp>
-      <p:sp>
-        <p:nvSpPr>
-          <p:cNvPr id="5" name="Rectangle 4"/>
+          <p:cNvPr id="2" name="Rectangle 1"/>
           <p:cNvSpPr/>
           <p:nvPr/>
         </p:nvSpPr>
         <p:spPr>
           <a:xfrm>
-            <a:off x="609600" y="825500"/>
-            <a:ext cx="10972800" cy="6350"/>
+            <a:off x="0" y="0"/>
+            <a:ext cx="12188952" cy="6858000"/>
           </a:xfrm>
           <a:prstGeom prst="rect">
             <a:avLst/>
           </a:prstGeom>
           <a:solidFill>
-            <a:srgbClr val="191D2E"/>
+            <a:srgbClr val="EDEDF3"/>
           </a:solidFill>
           <a:ln>
             <a:noFill/>
@@ -4883,55 +5889,20 @@
       </p:sp>
       <p:sp>
         <p:nvSpPr>
-          <p:cNvPr id="6" name="TextBox 5"/>
-          <p:cNvSpPr txBox="1"/>
-          <p:nvPr/>
-        </p:nvSpPr>
-        <p:spPr>
-          <a:xfrm>
-            <a:off x="609600" y="920750"/>
-            <a:ext cx="3175000" cy="1651000"/>
-          </a:xfrm>
-          <a:prstGeom prst="rect">
-            <a:avLst/>
-          </a:prstGeom>
-          <a:noFill/>
-        </p:spPr>
-        <p:txBody>
-          <a:bodyPr wrap="square">
-            <a:normAutofit/>
-          </a:bodyPr>
-          <a:lstStyle/>
-          <a:p>
-            <a:pPr algn="l"/>
-            <a:r>
-              <a:rPr sz="4800" b="0" i="1">
-                <a:solidFill>
-                  <a:srgbClr val="1F2B56"/>
-                </a:solidFill>
-                <a:latin typeface="Georgia"/>
-              </a:rPr>
-              <a:t>Inhalt.</a:t>
-            </a:r>
-          </a:p>
-        </p:txBody>
-      </p:sp>
-      <p:sp>
-        <p:nvSpPr>
-          <p:cNvPr id="7" name="Rectangle 6"/>
+          <p:cNvPr id="3" name="Rectangle 2"/>
           <p:cNvSpPr/>
           <p:nvPr/>
         </p:nvSpPr>
         <p:spPr>
           <a:xfrm>
-            <a:off x="4064000" y="889000"/>
-            <a:ext cx="7518399" cy="6350"/>
+            <a:off x="0" y="0"/>
+            <a:ext cx="12188952" cy="50292"/>
           </a:xfrm>
           <a:prstGeom prst="rect">
             <a:avLst/>
           </a:prstGeom>
           <a:solidFill>
-            <a:srgbClr val="E0E0E8"/>
+            <a:srgbClr val="1F2C56"/>
           </a:solidFill>
           <a:ln>
             <a:noFill/>
@@ -4961,14 +5932,14 @@
       </p:sp>
       <p:sp>
         <p:nvSpPr>
-          <p:cNvPr id="8" name="TextBox 7"/>
+          <p:cNvPr id="4" name="TextBox 3"/>
           <p:cNvSpPr txBox="1"/>
           <p:nvPr/>
         </p:nvSpPr>
         <p:spPr>
           <a:xfrm>
-            <a:off x="4064000" y="939799"/>
-            <a:ext cx="762000" cy="647700"/>
+            <a:off x="685800" y="109728"/>
+            <a:ext cx="10817352" cy="228600"/>
           </a:xfrm>
           <a:prstGeom prst="rect">
             <a:avLst/>
@@ -4977,74 +5948,39 @@
         </p:spPr>
         <p:txBody>
           <a:bodyPr wrap="none">
-            <a:normAutofit/>
+            <a:spAutoFit/>
           </a:bodyPr>
           <a:lstStyle/>
           <a:p>
             <a:pPr algn="l"/>
             <a:r>
-              <a:rPr sz="2400" b="0" i="1">
-                <a:solidFill>
-                  <a:srgbClr val="1F2B56"/>
-                </a:solidFill>
-                <a:latin typeface="Georgia"/>
+              <a:rPr sz="750">
+                <a:solidFill>
+                  <a:srgbClr val="78808C"/>
+                </a:solidFill>
+                <a:latin typeface="JetBrains Mono"/>
               </a:rPr>
-              <a:t>I</a:t>
-            </a:r>
-          </a:p>
-        </p:txBody>
-      </p:sp>
-      <p:sp>
-        <p:nvSpPr>
-          <p:cNvPr id="9" name="TextBox 8"/>
-          <p:cNvSpPr txBox="1"/>
-          <p:nvPr/>
-        </p:nvSpPr>
-        <p:spPr>
-          <a:xfrm>
-            <a:off x="4953000" y="952500"/>
-            <a:ext cx="6629400" cy="635000"/>
-          </a:xfrm>
-          <a:prstGeom prst="rect">
-            <a:avLst/>
-          </a:prstGeom>
-          <a:noFill/>
-        </p:spPr>
-        <p:txBody>
-          <a:bodyPr wrap="square">
-            <a:normAutofit/>
-          </a:bodyPr>
-          <a:lstStyle/>
-          <a:p>
-            <a:pPr algn="l"/>
-            <a:r>
-              <a:rPr sz="1400" b="0" i="0">
-                <a:solidFill>
-                  <a:srgbClr val="191D2E"/>
-                </a:solidFill>
-                <a:latin typeface="Georgia"/>
-              </a:rPr>
-              <a:t>Den Unterschied zwischen reaktivem und systematisch-bedarfsorientiertem Cross-Selling erklären und begründen, warum der zweite Ansatz nachhaltiger ist</a:t>
-            </a:r>
-          </a:p>
-        </p:txBody>
-      </p:sp>
-      <p:sp>
-        <p:nvSpPr>
-          <p:cNvPr id="10" name="Rectangle 9"/>
+              <a:t>LERNZIELE  ·  M13</a:t>
+            </a:r>
+          </a:p>
+        </p:txBody>
+      </p:sp>
+      <p:sp>
+        <p:nvSpPr>
+          <p:cNvPr id="5" name="Rectangle 4"/>
           <p:cNvSpPr/>
           <p:nvPr/>
         </p:nvSpPr>
         <p:spPr>
           <a:xfrm>
-            <a:off x="4064000" y="1587500"/>
-            <a:ext cx="7518399" cy="6350"/>
+            <a:off x="0" y="1234440"/>
+            <a:ext cx="12188952" cy="12700"/>
           </a:xfrm>
           <a:prstGeom prst="rect">
             <a:avLst/>
           </a:prstGeom>
           <a:solidFill>
-            <a:srgbClr val="E0E0E8"/>
+            <a:srgbClr val="D8DFE4"/>
           </a:solidFill>
           <a:ln>
             <a:noFill/>
@@ -5074,14 +6010,14 @@
       </p:sp>
       <p:sp>
         <p:nvSpPr>
-          <p:cNvPr id="11" name="TextBox 10"/>
+          <p:cNvPr id="6" name="TextBox 5"/>
           <p:cNvSpPr txBox="1"/>
           <p:nvPr/>
         </p:nvSpPr>
         <p:spPr>
           <a:xfrm>
-            <a:off x="4064000" y="1638300"/>
-            <a:ext cx="762000" cy="647700"/>
+            <a:off x="685800" y="502920"/>
+            <a:ext cx="10817352" cy="658368"/>
           </a:xfrm>
           <a:prstGeom prst="rect">
             <a:avLst/>
@@ -5089,34 +6025,34 @@
           <a:noFill/>
         </p:spPr>
         <p:txBody>
-          <a:bodyPr wrap="none">
-            <a:normAutofit/>
+          <a:bodyPr wrap="square">
+            <a:spAutoFit/>
           </a:bodyPr>
           <a:lstStyle/>
           <a:p>
             <a:pPr algn="l"/>
             <a:r>
-              <a:rPr sz="2400" b="0" i="1">
-                <a:solidFill>
-                  <a:srgbClr val="1F2B56"/>
-                </a:solidFill>
-                <a:latin typeface="Georgia"/>
+              <a:rPr sz="2600" b="1" i="0">
+                <a:solidFill>
+                  <a:srgbClr val="1F2C56"/>
+                </a:solidFill>
+                <a:latin typeface="Source Serif 4"/>
               </a:rPr>
-              <a:t>II</a:t>
-            </a:r>
-          </a:p>
-        </p:txBody>
-      </p:sp>
-      <p:sp>
-        <p:nvSpPr>
-          <p:cNvPr id="12" name="TextBox 11"/>
+              <a:t>Was Sie heute mitnehmen</a:t>
+            </a:r>
+          </a:p>
+        </p:txBody>
+      </p:sp>
+      <p:sp>
+        <p:nvSpPr>
+          <p:cNvPr id="7" name="TextBox 6"/>
           <p:cNvSpPr txBox="1"/>
           <p:nvPr/>
         </p:nvSpPr>
         <p:spPr>
           <a:xfrm>
-            <a:off x="4953000" y="1651000"/>
-            <a:ext cx="6629400" cy="635000"/>
+            <a:off x="685800" y="1371600"/>
+            <a:ext cx="10817352" cy="5120640"/>
           </a:xfrm>
           <a:prstGeom prst="rect">
             <a:avLst/>
@@ -5125,39 +6061,122 @@
         </p:spPr>
         <p:txBody>
           <a:bodyPr wrap="square">
-            <a:normAutofit/>
+            <a:spAutoFit/>
           </a:bodyPr>
           <a:lstStyle/>
           <a:p>
-            <a:pPr algn="l"/>
-            <a:r>
-              <a:rPr sz="1400" b="0" i="0">
-                <a:solidFill>
-                  <a:srgbClr val="191D2E"/>
-                </a:solidFill>
-                <a:latin typeface="Georgia"/>
+            <a:pPr>
+              <a:spcBef>
+                <a:spcPts val="800"/>
+              </a:spcBef>
+              <a:spcAft>
+                <a:spcPts val="200"/>
+              </a:spcAft>
+            </a:pPr>
+            <a:r>
+              <a:rPr sz="1400">
+                <a:solidFill>
+                  <a:srgbClr val="3D5466"/>
+                </a:solidFill>
+                <a:latin typeface="Arial"/>
               </a:rPr>
-              <a:t>Cross-Selling-Potenziale in einem gegebenen Kundenprofil anhand der Wallet-Share-Methodik identifizieren und die zwei vielversprechendsten Ansatzpunkte benennen</a:t>
-            </a:r>
-          </a:p>
-        </p:txBody>
-      </p:sp>
-      <p:sp>
-        <p:nvSpPr>
-          <p:cNvPr id="13" name="Rectangle 12"/>
+              <a:t>▸  Den Unterschied zwischen reaktivem und systematisch-bedarfsorientiertem Cross-Selling erklären und begründen, warum der zweite Ansatz nachhaltiger ist</a:t>
+            </a:r>
+          </a:p>
+          <a:p>
+            <a:pPr>
+              <a:spcBef>
+                <a:spcPts val="800"/>
+              </a:spcBef>
+              <a:spcAft>
+                <a:spcPts val="200"/>
+              </a:spcAft>
+            </a:pPr>
+            <a:r>
+              <a:rPr sz="1400">
+                <a:solidFill>
+                  <a:srgbClr val="3D5466"/>
+                </a:solidFill>
+                <a:latin typeface="Arial"/>
+              </a:rPr>
+              <a:t>▸  Cross-Selling-Potenziale in einem gegebenen Kundenprofil anhand der Wallet-Share-Methodik identifizieren und die zwei vielversprechendsten Ansatzpunkte benennen</a:t>
+            </a:r>
+          </a:p>
+          <a:p>
+            <a:pPr>
+              <a:spcBef>
+                <a:spcPts val="800"/>
+              </a:spcBef>
+              <a:spcAft>
+                <a:spcPts val="200"/>
+              </a:spcAft>
+            </a:pPr>
+            <a:r>
+              <a:rPr sz="1400">
+                <a:solidFill>
+                  <a:srgbClr val="3D5466"/>
+                </a:solidFill>
+                <a:latin typeface="Arial"/>
+              </a:rPr>
+              <a:t>▸  Den 4-Schritte-Cross-Selling-Prozess (Analyse – Hypothese – Gespräch – Dokumentation) in einem simulierten Kundengespräch anwenden</a:t>
+            </a:r>
+          </a:p>
+          <a:p>
+            <a:pPr>
+              <a:spcBef>
+                <a:spcPts val="800"/>
+              </a:spcBef>
+              <a:spcAft>
+                <a:spcPts val="200"/>
+              </a:spcAft>
+            </a:pPr>
+            <a:r>
+              <a:rPr sz="1400">
+                <a:solidFill>
+                  <a:srgbClr val="3D5466"/>
+                </a:solidFill>
+                <a:latin typeface="Arial"/>
+              </a:rPr>
+              <a:t>▸  Die relevanten Verbundpartner den typischen Bedarfsfeldern der Firmenkunden zuordnen</a:t>
+            </a:r>
+          </a:p>
+          <a:p>
+            <a:pPr>
+              <a:spcBef>
+                <a:spcPts val="800"/>
+              </a:spcBef>
+              <a:spcAft>
+                <a:spcPts val="200"/>
+              </a:spcAft>
+            </a:pPr>
+            <a:r>
+              <a:rPr sz="1400">
+                <a:solidFill>
+                  <a:srgbClr val="3D5466"/>
+                </a:solidFill>
+                <a:latin typeface="Arial"/>
+              </a:rPr>
+              <a:t>▸  Produktgetriebenes Push-Cross-Selling von bedarfsorientiertem Cross-Selling unterscheiden und die situationsgerechte Vorgehensweise wählen</a:t>
+            </a:r>
+          </a:p>
+        </p:txBody>
+      </p:sp>
+      <p:sp>
+        <p:nvSpPr>
+          <p:cNvPr id="8" name="Rectangle 7"/>
           <p:cNvSpPr/>
           <p:nvPr/>
         </p:nvSpPr>
         <p:spPr>
           <a:xfrm>
-            <a:off x="4064000" y="2286000"/>
-            <a:ext cx="7518399" cy="6350"/>
+            <a:off x="0" y="6510528"/>
+            <a:ext cx="12188952" cy="347472"/>
           </a:xfrm>
           <a:prstGeom prst="rect">
             <a:avLst/>
           </a:prstGeom>
           <a:solidFill>
-            <a:srgbClr val="E0E0E8"/>
+            <a:srgbClr val="0A1937"/>
           </a:solidFill>
           <a:ln>
             <a:noFill/>
@@ -5187,14 +6206,14 @@
       </p:sp>
       <p:sp>
         <p:nvSpPr>
-          <p:cNvPr id="14" name="TextBox 13"/>
+          <p:cNvPr id="9" name="TextBox 8"/>
           <p:cNvSpPr txBox="1"/>
           <p:nvPr/>
         </p:nvSpPr>
         <p:spPr>
           <a:xfrm>
-            <a:off x="4064000" y="2336800"/>
-            <a:ext cx="762000" cy="647700"/>
+            <a:off x="685800" y="6583680"/>
+            <a:ext cx="6490411" cy="256032"/>
           </a:xfrm>
           <a:prstGeom prst="rect">
             <a:avLst/>
@@ -5203,280 +6222,19 @@
         </p:spPr>
         <p:txBody>
           <a:bodyPr wrap="none">
-            <a:normAutofit/>
+            <a:spAutoFit/>
           </a:bodyPr>
           <a:lstStyle/>
           <a:p>
             <a:pPr algn="l"/>
             <a:r>
-              <a:rPr sz="2400" b="0" i="1">
-                <a:solidFill>
-                  <a:srgbClr val="1F2B56"/>
-                </a:solidFill>
-                <a:latin typeface="Georgia"/>
+              <a:rPr sz="700">
+                <a:solidFill>
+                  <a:srgbClr val="A0B4D2"/>
+                </a:solidFill>
+                <a:latin typeface="JetBrains Mono"/>
               </a:rPr>
-              <a:t>III</a:t>
-            </a:r>
-          </a:p>
-        </p:txBody>
-      </p:sp>
-      <p:sp>
-        <p:nvSpPr>
-          <p:cNvPr id="15" name="TextBox 14"/>
-          <p:cNvSpPr txBox="1"/>
-          <p:nvPr/>
-        </p:nvSpPr>
-        <p:spPr>
-          <a:xfrm>
-            <a:off x="4953000" y="2349500"/>
-            <a:ext cx="6629400" cy="635000"/>
-          </a:xfrm>
-          <a:prstGeom prst="rect">
-            <a:avLst/>
-          </a:prstGeom>
-          <a:noFill/>
-        </p:spPr>
-        <p:txBody>
-          <a:bodyPr wrap="square">
-            <a:normAutofit/>
-          </a:bodyPr>
-          <a:lstStyle/>
-          <a:p>
-            <a:pPr algn="l"/>
-            <a:r>
-              <a:rPr sz="1400" b="0" i="0">
-                <a:solidFill>
-                  <a:srgbClr val="191D2E"/>
-                </a:solidFill>
-                <a:latin typeface="Georgia"/>
-              </a:rPr>
-              <a:t>Den 4-Schritte-Cross-Selling-Prozess (Analyse – Hypothese – Gespräch – Dokumentation) in einem simulierten Kundengespräch anwenden</a:t>
-            </a:r>
-          </a:p>
-        </p:txBody>
-      </p:sp>
-      <p:sp>
-        <p:nvSpPr>
-          <p:cNvPr id="16" name="Rectangle 15"/>
-          <p:cNvSpPr/>
-          <p:nvPr/>
-        </p:nvSpPr>
-        <p:spPr>
-          <a:xfrm>
-            <a:off x="4064000" y="2984500"/>
-            <a:ext cx="7518399" cy="6350"/>
-          </a:xfrm>
-          <a:prstGeom prst="rect">
-            <a:avLst/>
-          </a:prstGeom>
-          <a:solidFill>
-            <a:srgbClr val="E0E0E8"/>
-          </a:solidFill>
-          <a:ln>
-            <a:noFill/>
-          </a:ln>
-        </p:spPr>
-        <p:style>
-          <a:lnRef idx="1">
-            <a:schemeClr val="accent1"/>
-          </a:lnRef>
-          <a:fillRef idx="3">
-            <a:schemeClr val="accent1"/>
-          </a:fillRef>
-          <a:effectRef idx="2">
-            <a:schemeClr val="accent1"/>
-          </a:effectRef>
-          <a:fontRef idx="minor">
-            <a:schemeClr val="lt1"/>
-          </a:fontRef>
-        </p:style>
-        <p:txBody>
-          <a:bodyPr rtlCol="0" anchor="ctr"/>
-          <a:lstStyle/>
-          <a:p>
-            <a:pPr algn="ctr"/>
-          </a:p>
-        </p:txBody>
-      </p:sp>
-      <p:sp>
-        <p:nvSpPr>
-          <p:cNvPr id="17" name="TextBox 16"/>
-          <p:cNvSpPr txBox="1"/>
-          <p:nvPr/>
-        </p:nvSpPr>
-        <p:spPr>
-          <a:xfrm>
-            <a:off x="4064000" y="3035300"/>
-            <a:ext cx="762000" cy="647700"/>
-          </a:xfrm>
-          <a:prstGeom prst="rect">
-            <a:avLst/>
-          </a:prstGeom>
-          <a:noFill/>
-        </p:spPr>
-        <p:txBody>
-          <a:bodyPr wrap="none">
-            <a:normAutofit/>
-          </a:bodyPr>
-          <a:lstStyle/>
-          <a:p>
-            <a:pPr algn="l"/>
-            <a:r>
-              <a:rPr sz="2400" b="0" i="1">
-                <a:solidFill>
-                  <a:srgbClr val="1F2B56"/>
-                </a:solidFill>
-                <a:latin typeface="Georgia"/>
-              </a:rPr>
-              <a:t>IV</a:t>
-            </a:r>
-          </a:p>
-        </p:txBody>
-      </p:sp>
-      <p:sp>
-        <p:nvSpPr>
-          <p:cNvPr id="18" name="TextBox 17"/>
-          <p:cNvSpPr txBox="1"/>
-          <p:nvPr/>
-        </p:nvSpPr>
-        <p:spPr>
-          <a:xfrm>
-            <a:off x="4953000" y="3048000"/>
-            <a:ext cx="6629400" cy="635000"/>
-          </a:xfrm>
-          <a:prstGeom prst="rect">
-            <a:avLst/>
-          </a:prstGeom>
-          <a:noFill/>
-        </p:spPr>
-        <p:txBody>
-          <a:bodyPr wrap="square">
-            <a:normAutofit/>
-          </a:bodyPr>
-          <a:lstStyle/>
-          <a:p>
-            <a:pPr algn="l"/>
-            <a:r>
-              <a:rPr sz="1400" b="0" i="0">
-                <a:solidFill>
-                  <a:srgbClr val="191D2E"/>
-                </a:solidFill>
-                <a:latin typeface="Georgia"/>
-              </a:rPr>
-              <a:t>Die relevanten Verbundpartner den typischen Bedarfsfeldern der Firmenkunden zuordnen</a:t>
-            </a:r>
-          </a:p>
-        </p:txBody>
-      </p:sp>
-      <p:sp>
-        <p:nvSpPr>
-          <p:cNvPr id="19" name="Rectangle 18"/>
-          <p:cNvSpPr/>
-          <p:nvPr/>
-        </p:nvSpPr>
-        <p:spPr>
-          <a:xfrm>
-            <a:off x="4064000" y="3683000"/>
-            <a:ext cx="7518399" cy="6350"/>
-          </a:xfrm>
-          <a:prstGeom prst="rect">
-            <a:avLst/>
-          </a:prstGeom>
-          <a:solidFill>
-            <a:srgbClr val="E0E0E8"/>
-          </a:solidFill>
-          <a:ln>
-            <a:noFill/>
-          </a:ln>
-        </p:spPr>
-        <p:style>
-          <a:lnRef idx="1">
-            <a:schemeClr val="accent1"/>
-          </a:lnRef>
-          <a:fillRef idx="3">
-            <a:schemeClr val="accent1"/>
-          </a:fillRef>
-          <a:effectRef idx="2">
-            <a:schemeClr val="accent1"/>
-          </a:effectRef>
-          <a:fontRef idx="minor">
-            <a:schemeClr val="lt1"/>
-          </a:fontRef>
-        </p:style>
-        <p:txBody>
-          <a:bodyPr rtlCol="0" anchor="ctr"/>
-          <a:lstStyle/>
-          <a:p>
-            <a:pPr algn="ctr"/>
-          </a:p>
-        </p:txBody>
-      </p:sp>
-      <p:sp>
-        <p:nvSpPr>
-          <p:cNvPr id="20" name="TextBox 19"/>
-          <p:cNvSpPr txBox="1"/>
-          <p:nvPr/>
-        </p:nvSpPr>
-        <p:spPr>
-          <a:xfrm>
-            <a:off x="4064000" y="3733799"/>
-            <a:ext cx="762000" cy="647700"/>
-          </a:xfrm>
-          <a:prstGeom prst="rect">
-            <a:avLst/>
-          </a:prstGeom>
-          <a:noFill/>
-        </p:spPr>
-        <p:txBody>
-          <a:bodyPr wrap="none">
-            <a:normAutofit/>
-          </a:bodyPr>
-          <a:lstStyle/>
-          <a:p>
-            <a:pPr algn="l"/>
-            <a:r>
-              <a:rPr sz="2400" b="0" i="1">
-                <a:solidFill>
-                  <a:srgbClr val="1F2B56"/>
-                </a:solidFill>
-                <a:latin typeface="Georgia"/>
-              </a:rPr>
-              <a:t>V</a:t>
-            </a:r>
-          </a:p>
-        </p:txBody>
-      </p:sp>
-      <p:sp>
-        <p:nvSpPr>
-          <p:cNvPr id="21" name="TextBox 20"/>
-          <p:cNvSpPr txBox="1"/>
-          <p:nvPr/>
-        </p:nvSpPr>
-        <p:spPr>
-          <a:xfrm>
-            <a:off x="4953000" y="3746500"/>
-            <a:ext cx="6629400" cy="635000"/>
-          </a:xfrm>
-          <a:prstGeom prst="rect">
-            <a:avLst/>
-          </a:prstGeom>
-          <a:noFill/>
-        </p:spPr>
-        <p:txBody>
-          <a:bodyPr wrap="square">
-            <a:normAutofit/>
-          </a:bodyPr>
-          <a:lstStyle/>
-          <a:p>
-            <a:pPr algn="l"/>
-            <a:r>
-              <a:rPr sz="1400" b="0" i="0">
-                <a:solidFill>
-                  <a:srgbClr val="191D2E"/>
-                </a:solidFill>
-                <a:latin typeface="Georgia"/>
-              </a:rPr>
-              <a:t>Produktgetriebenes Push-Cross-Selling von bedarfsorientiertem Cross-Selling unterscheiden und die situationsgerechte Vorgehensweise wählen</a:t>
+              <a:t>Benedikt Zoller Coaching  ·  FKB Campus  ·  M13</a:t>
             </a:r>
           </a:p>
         </p:txBody>
@@ -5492,14 +6250,6 @@
 <file path=ppt/slides/slide3.xml><?xml version="1.0" encoding="utf-8"?>
 <p:sld xmlns:a="http://schemas.openxmlformats.org/drawingml/2006/main" xmlns:p="http://schemas.openxmlformats.org/presentationml/2006/main" xmlns:r="http://schemas.openxmlformats.org/officeDocument/2006/relationships">
   <p:cSld>
-    <p:bg>
-      <p:bgPr>
-        <a:solidFill>
-          <a:srgbClr val="1F2B56"/>
-        </a:solidFill>
-        <a:effectLst/>
-      </p:bgPr>
-    </p:bg>
     <p:spTree>
       <p:nvGrpSpPr>
         <p:cNvPr id="1" name=""/>
@@ -5509,14 +6259,100 @@
       <p:grpSpPr/>
       <p:sp>
         <p:nvSpPr>
-          <p:cNvPr id="2" name="TextBox 1"/>
+          <p:cNvPr id="2" name="Rectangle 1"/>
+          <p:cNvSpPr/>
+          <p:nvPr/>
+        </p:nvSpPr>
+        <p:spPr>
+          <a:xfrm>
+            <a:off x="0" y="0"/>
+            <a:ext cx="12188952" cy="6858000"/>
+          </a:xfrm>
+          <a:prstGeom prst="rect">
+            <a:avLst/>
+          </a:prstGeom>
+          <a:solidFill>
+            <a:srgbClr val="EDEDF3"/>
+          </a:solidFill>
+          <a:ln>
+            <a:noFill/>
+          </a:ln>
+        </p:spPr>
+        <p:style>
+          <a:lnRef idx="1">
+            <a:schemeClr val="accent1"/>
+          </a:lnRef>
+          <a:fillRef idx="3">
+            <a:schemeClr val="accent1"/>
+          </a:fillRef>
+          <a:effectRef idx="2">
+            <a:schemeClr val="accent1"/>
+          </a:effectRef>
+          <a:fontRef idx="minor">
+            <a:schemeClr val="lt1"/>
+          </a:fontRef>
+        </p:style>
+        <p:txBody>
+          <a:bodyPr rtlCol="0" anchor="ctr"/>
+          <a:lstStyle/>
+          <a:p>
+            <a:pPr algn="ctr"/>
+          </a:p>
+        </p:txBody>
+      </p:sp>
+      <p:sp>
+        <p:nvSpPr>
+          <p:cNvPr id="3" name="Rectangle 2"/>
+          <p:cNvSpPr/>
+          <p:nvPr/>
+        </p:nvSpPr>
+        <p:spPr>
+          <a:xfrm>
+            <a:off x="0" y="0"/>
+            <a:ext cx="12188952" cy="50292"/>
+          </a:xfrm>
+          <a:prstGeom prst="rect">
+            <a:avLst/>
+          </a:prstGeom>
+          <a:solidFill>
+            <a:srgbClr val="1F2C56"/>
+          </a:solidFill>
+          <a:ln>
+            <a:noFill/>
+          </a:ln>
+        </p:spPr>
+        <p:style>
+          <a:lnRef idx="1">
+            <a:schemeClr val="accent1"/>
+          </a:lnRef>
+          <a:fillRef idx="3">
+            <a:schemeClr val="accent1"/>
+          </a:fillRef>
+          <a:effectRef idx="2">
+            <a:schemeClr val="accent1"/>
+          </a:effectRef>
+          <a:fontRef idx="minor">
+            <a:schemeClr val="lt1"/>
+          </a:fontRef>
+        </p:style>
+        <p:txBody>
+          <a:bodyPr rtlCol="0" anchor="ctr"/>
+          <a:lstStyle/>
+          <a:p>
+            <a:pPr algn="ctr"/>
+          </a:p>
+        </p:txBody>
+      </p:sp>
+      <p:sp>
+        <p:nvSpPr>
+          <p:cNvPr id="4" name="TextBox 3"/>
           <p:cNvSpPr txBox="1"/>
           <p:nvPr/>
         </p:nvSpPr>
         <p:spPr>
           <a:xfrm>
-            <a:off x="609600" y="279400"/>
-            <a:ext cx="2540000" cy="279400"/>
+            <a:off x="685800" y="109728"/>
+            <a:ext cx="10817352" cy="228600"/>
           </a:xfrm>
           <a:prstGeom prst="rect">
             <a:avLst/>
@@ -5524,34 +6360,240 @@
           <a:noFill/>
         </p:spPr>
         <p:txBody>
+          <a:bodyPr wrap="none">
+            <a:spAutoFit/>
+          </a:bodyPr>
+          <a:lstStyle/>
+          <a:p>
+            <a:pPr algn="l"/>
+            <a:r>
+              <a:rPr sz="750">
+                <a:solidFill>
+                  <a:srgbClr val="78808C"/>
+                </a:solidFill>
+                <a:latin typeface="JetBrains Mono"/>
+              </a:rPr>
+              <a:t>M13  ·  INHALT</a:t>
+            </a:r>
+          </a:p>
+        </p:txBody>
+      </p:sp>
+      <p:sp>
+        <p:nvSpPr>
+          <p:cNvPr id="5" name="Rectangle 4"/>
+          <p:cNvSpPr/>
+          <p:nvPr/>
+        </p:nvSpPr>
+        <p:spPr>
+          <a:xfrm>
+            <a:off x="0" y="1234440"/>
+            <a:ext cx="12188952" cy="12700"/>
+          </a:xfrm>
+          <a:prstGeom prst="rect">
+            <a:avLst/>
+          </a:prstGeom>
+          <a:solidFill>
+            <a:srgbClr val="D8DFE4"/>
+          </a:solidFill>
+          <a:ln>
+            <a:noFill/>
+          </a:ln>
+        </p:spPr>
+        <p:style>
+          <a:lnRef idx="1">
+            <a:schemeClr val="accent1"/>
+          </a:lnRef>
+          <a:fillRef idx="3">
+            <a:schemeClr val="accent1"/>
+          </a:fillRef>
+          <a:effectRef idx="2">
+            <a:schemeClr val="accent1"/>
+          </a:effectRef>
+          <a:fontRef idx="minor">
+            <a:schemeClr val="lt1"/>
+          </a:fontRef>
+        </p:style>
+        <p:txBody>
+          <a:bodyPr rtlCol="0" anchor="ctr"/>
+          <a:lstStyle/>
+          <a:p>
+            <a:pPr algn="ctr"/>
+          </a:p>
+        </p:txBody>
+      </p:sp>
+      <p:sp>
+        <p:nvSpPr>
+          <p:cNvPr id="6" name="Rectangle 5"/>
+          <p:cNvSpPr/>
+          <p:nvPr/>
+        </p:nvSpPr>
+        <p:spPr>
+          <a:xfrm>
+            <a:off x="685800" y="502920"/>
+            <a:ext cx="36576" cy="658368"/>
+          </a:xfrm>
+          <a:prstGeom prst="rect">
+            <a:avLst/>
+          </a:prstGeom>
+          <a:solidFill>
+            <a:srgbClr val="D9C089"/>
+          </a:solidFill>
+          <a:ln>
+            <a:noFill/>
+          </a:ln>
+        </p:spPr>
+        <p:style>
+          <a:lnRef idx="1">
+            <a:schemeClr val="accent1"/>
+          </a:lnRef>
+          <a:fillRef idx="3">
+            <a:schemeClr val="accent1"/>
+          </a:fillRef>
+          <a:effectRef idx="2">
+            <a:schemeClr val="accent1"/>
+          </a:effectRef>
+          <a:fontRef idx="minor">
+            <a:schemeClr val="lt1"/>
+          </a:fontRef>
+        </p:style>
+        <p:txBody>
+          <a:bodyPr rtlCol="0" anchor="ctr"/>
+          <a:lstStyle/>
+          <a:p>
+            <a:pPr algn="ctr"/>
+          </a:p>
+        </p:txBody>
+      </p:sp>
+      <p:sp>
+        <p:nvSpPr>
+          <p:cNvPr id="7" name="TextBox 6"/>
+          <p:cNvSpPr txBox="1"/>
+          <p:nvPr/>
+        </p:nvSpPr>
+        <p:spPr>
+          <a:xfrm>
+            <a:off x="813816" y="502920"/>
+            <a:ext cx="10634472" cy="685800"/>
+          </a:xfrm>
+          <a:prstGeom prst="rect">
+            <a:avLst/>
+          </a:prstGeom>
+          <a:noFill/>
+        </p:spPr>
+        <p:txBody>
           <a:bodyPr wrap="square">
-            <a:normAutofit/>
+            <a:spAutoFit/>
           </a:bodyPr>
           <a:lstStyle/>
           <a:p>
             <a:pPr algn="l"/>
             <a:r>
-              <a:rPr sz="1000" b="1" i="0">
-                <a:solidFill>
-                  <a:srgbClr val="F8F8FA"/>
+              <a:rPr sz="2400" b="1" i="0">
+                <a:solidFill>
+                  <a:srgbClr val="1F2C56"/>
+                </a:solidFill>
+                <a:latin typeface="Source Serif 4"/>
+              </a:rPr>
+              <a:t>Definition</a:t>
+            </a:r>
+          </a:p>
+        </p:txBody>
+      </p:sp>
+      <p:sp>
+        <p:nvSpPr>
+          <p:cNvPr id="8" name="TextBox 7"/>
+          <p:cNvSpPr txBox="1"/>
+          <p:nvPr/>
+        </p:nvSpPr>
+        <p:spPr>
+          <a:xfrm>
+            <a:off x="685800" y="1417320"/>
+            <a:ext cx="10817352" cy="5029200"/>
+          </a:xfrm>
+          <a:prstGeom prst="rect">
+            <a:avLst/>
+          </a:prstGeom>
+          <a:noFill/>
+        </p:spPr>
+        <p:txBody>
+          <a:bodyPr wrap="square">
+            <a:spAutoFit/>
+          </a:bodyPr>
+          <a:lstStyle/>
+          <a:p>
+            <a:pPr>
+              <a:spcBef>
+                <a:spcPts val="600"/>
+              </a:spcBef>
+              <a:spcAft>
+                <a:spcPts val="200"/>
+              </a:spcAft>
+            </a:pPr>
+            <a:r>
+              <a:rPr sz="1200" i="1">
+                <a:solidFill>
+                  <a:srgbClr val="3D5466"/>
                 </a:solidFill>
                 <a:latin typeface="Arial"/>
               </a:rPr>
-              <a:t>FKB  Campus</a:t>
-            </a:r>
-          </a:p>
-        </p:txBody>
-      </p:sp>
-      <p:sp>
-        <p:nvSpPr>
-          <p:cNvPr id="3" name="TextBox 2"/>
+              <a:t>→  Cross-Selling ist kein Verkaufsakt. Es ist das konsequente Ausfüllen eines Bedarfs, den der Kunde ohnehin hat – bei der eigenen Bank oder einem Wettbewerber.</a:t>
+            </a:r>
+          </a:p>
+        </p:txBody>
+      </p:sp>
+      <p:sp>
+        <p:nvSpPr>
+          <p:cNvPr id="9" name="Rectangle 8"/>
+          <p:cNvSpPr/>
+          <p:nvPr/>
+        </p:nvSpPr>
+        <p:spPr>
+          <a:xfrm>
+            <a:off x="0" y="6510528"/>
+            <a:ext cx="12188952" cy="347472"/>
+          </a:xfrm>
+          <a:prstGeom prst="rect">
+            <a:avLst/>
+          </a:prstGeom>
+          <a:solidFill>
+            <a:srgbClr val="0A1937"/>
+          </a:solidFill>
+          <a:ln>
+            <a:noFill/>
+          </a:ln>
+        </p:spPr>
+        <p:style>
+          <a:lnRef idx="1">
+            <a:schemeClr val="accent1"/>
+          </a:lnRef>
+          <a:fillRef idx="3">
+            <a:schemeClr val="accent1"/>
+          </a:fillRef>
+          <a:effectRef idx="2">
+            <a:schemeClr val="accent1"/>
+          </a:effectRef>
+          <a:fontRef idx="minor">
+            <a:schemeClr val="lt1"/>
+          </a:fontRef>
+        </p:style>
+        <p:txBody>
+          <a:bodyPr rtlCol="0" anchor="ctr"/>
+          <a:lstStyle/>
+          <a:p>
+            <a:pPr algn="ctr"/>
+          </a:p>
+        </p:txBody>
+      </p:sp>
+      <p:sp>
+        <p:nvSpPr>
+          <p:cNvPr id="10" name="TextBox 9"/>
           <p:cNvSpPr txBox="1"/>
           <p:nvPr/>
         </p:nvSpPr>
         <p:spPr>
           <a:xfrm>
-            <a:off x="609600" y="279400"/>
-            <a:ext cx="10972800" cy="279400"/>
+            <a:off x="685800" y="6583680"/>
+            <a:ext cx="6490411" cy="256032"/>
           </a:xfrm>
           <a:prstGeom prst="rect">
             <a:avLst/>
@@ -5559,160 +6601,20 @@
           <a:noFill/>
         </p:spPr>
         <p:txBody>
-          <a:bodyPr wrap="square">
-            <a:normAutofit/>
+          <a:bodyPr wrap="none">
+            <a:spAutoFit/>
           </a:bodyPr>
           <a:lstStyle/>
           <a:p>
-            <a:pPr algn="r"/>
-            <a:r>
-              <a:rPr sz="900" b="0" i="0">
-                <a:solidFill>
-                  <a:srgbClr val="7B7FA0"/>
-                </a:solidFill>
-                <a:latin typeface="Courier New"/>
+            <a:pPr algn="l"/>
+            <a:r>
+              <a:rPr sz="700">
+                <a:solidFill>
+                  <a:srgbClr val="A0B4D2"/>
+                </a:solidFill>
+                <a:latin typeface="JetBrains Mono"/>
               </a:rPr>
-              <a:t>CROSS-SELLING NEU DENKEN</a:t>
-            </a:r>
-          </a:p>
-        </p:txBody>
-      </p:sp>
-      <p:sp>
-        <p:nvSpPr>
-          <p:cNvPr id="4" name="TextBox 3"/>
-          <p:cNvSpPr txBox="1"/>
-          <p:nvPr/>
-        </p:nvSpPr>
-        <p:spPr>
-          <a:xfrm>
-            <a:off x="609600" y="6426200"/>
-            <a:ext cx="10972800" cy="228600"/>
-          </a:xfrm>
-          <a:prstGeom prst="rect">
-            <a:avLst/>
-          </a:prstGeom>
-          <a:noFill/>
-        </p:spPr>
-        <p:txBody>
-          <a:bodyPr wrap="square">
-            <a:normAutofit/>
-          </a:bodyPr>
-          <a:lstStyle/>
-          <a:p>
-            <a:pPr algn="r"/>
-            <a:r>
-              <a:rPr sz="900" b="0" i="0">
-                <a:solidFill>
-                  <a:srgbClr val="7B7FA0"/>
-                </a:solidFill>
-                <a:latin typeface="Courier New"/>
-              </a:rPr>
-              <a:t>03</a:t>
-            </a:r>
-          </a:p>
-        </p:txBody>
-      </p:sp>
-      <p:sp>
-        <p:nvSpPr>
-          <p:cNvPr id="5" name="TextBox 4"/>
-          <p:cNvSpPr txBox="1"/>
-          <p:nvPr/>
-        </p:nvSpPr>
-        <p:spPr>
-          <a:xfrm>
-            <a:off x="609600" y="635000"/>
-            <a:ext cx="5461000" cy="5461000"/>
-          </a:xfrm>
-          <a:prstGeom prst="rect">
-            <a:avLst/>
-          </a:prstGeom>
-          <a:noFill/>
-        </p:spPr>
-        <p:txBody>
-          <a:bodyPr wrap="square">
-            <a:normAutofit/>
-          </a:bodyPr>
-          <a:lstStyle/>
-          <a:p>
-            <a:pPr algn="l"/>
-            <a:r>
-              <a:rPr sz="28000" b="0" i="1">
-                <a:solidFill>
-                  <a:srgbClr val="D9BF7A"/>
-                </a:solidFill>
-                <a:latin typeface="Georgia"/>
-              </a:rPr>
-              <a:t>I</a:t>
-            </a:r>
-          </a:p>
-        </p:txBody>
-      </p:sp>
-      <p:sp>
-        <p:nvSpPr>
-          <p:cNvPr id="6" name="TextBox 5"/>
-          <p:cNvSpPr txBox="1"/>
-          <p:nvPr/>
-        </p:nvSpPr>
-        <p:spPr>
-          <a:xfrm>
-            <a:off x="6731000" y="4064000"/>
-            <a:ext cx="4851400" cy="1778000"/>
-          </a:xfrm>
-          <a:prstGeom prst="rect">
-            <a:avLst/>
-          </a:prstGeom>
-          <a:noFill/>
-        </p:spPr>
-        <p:txBody>
-          <a:bodyPr wrap="square">
-            <a:normAutofit/>
-          </a:bodyPr>
-          <a:lstStyle/>
-          <a:p>
-            <a:pPr algn="r"/>
-            <a:r>
-              <a:rPr sz="3800" b="0" i="0">
-                <a:solidFill>
-                  <a:srgbClr val="F8F8FA"/>
-                </a:solidFill>
-                <a:latin typeface="Georgia"/>
-              </a:rPr>
-              <a:t>Cross-Selling neu denken</a:t>
-            </a:r>
-          </a:p>
-        </p:txBody>
-      </p:sp>
-      <p:sp>
-        <p:nvSpPr>
-          <p:cNvPr id="7" name="TextBox 6"/>
-          <p:cNvSpPr txBox="1"/>
-          <p:nvPr/>
-        </p:nvSpPr>
-        <p:spPr>
-          <a:xfrm>
-            <a:off x="6731000" y="5842000"/>
-            <a:ext cx="4851400" cy="635000"/>
-          </a:xfrm>
-          <a:prstGeom prst="rect">
-            <a:avLst/>
-          </a:prstGeom>
-          <a:noFill/>
-        </p:spPr>
-        <p:txBody>
-          <a:bodyPr wrap="square">
-            <a:normAutofit/>
-          </a:bodyPr>
-          <a:lstStyle/>
-          <a:p>
-            <a:pPr algn="r"/>
-            <a:r>
-              <a:rPr sz="1400" b="0" i="1">
-                <a:solidFill>
-                  <a:srgbClr val="7B7FA0"/>
-                </a:solidFill>
-                <a:latin typeface="Georgia"/>
-              </a:rPr>
-              <a:t>Von Produkt-Push zu echtem Bedarfsservice</a:t>
+              <a:t>Benedikt Zoller Coaching  ·  FKB Campus  ·  M13</a:t>
             </a:r>
           </a:p>
         </p:txBody>
@@ -5728,14 +6630,6 @@
 <file path=ppt/slides/slide4.xml><?xml version="1.0" encoding="utf-8"?>
 <p:sld xmlns:a="http://schemas.openxmlformats.org/drawingml/2006/main" xmlns:p="http://schemas.openxmlformats.org/presentationml/2006/main" xmlns:r="http://schemas.openxmlformats.org/officeDocument/2006/relationships">
   <p:cSld>
-    <p:bg>
-      <p:bgPr>
-        <a:solidFill>
-          <a:srgbClr val="F8F8FA"/>
-        </a:solidFill>
-        <a:effectLst/>
-      </p:bgPr>
-    </p:bg>
     <p:spTree>
       <p:nvGrpSpPr>
         <p:cNvPr id="1" name=""/>
@@ -5745,125 +6639,20 @@
       <p:grpSpPr/>
       <p:sp>
         <p:nvSpPr>
-          <p:cNvPr id="2" name="TextBox 1"/>
-          <p:cNvSpPr txBox="1"/>
-          <p:nvPr/>
-        </p:nvSpPr>
-        <p:spPr>
-          <a:xfrm>
-            <a:off x="609600" y="279400"/>
-            <a:ext cx="2540000" cy="279400"/>
-          </a:xfrm>
-          <a:prstGeom prst="rect">
-            <a:avLst/>
-          </a:prstGeom>
-          <a:noFill/>
-        </p:spPr>
-        <p:txBody>
-          <a:bodyPr wrap="square">
-            <a:normAutofit/>
-          </a:bodyPr>
-          <a:lstStyle/>
-          <a:p>
-            <a:pPr algn="l"/>
-            <a:r>
-              <a:rPr sz="1000" b="1" i="0">
-                <a:solidFill>
-                  <a:srgbClr val="191D2E"/>
-                </a:solidFill>
-                <a:latin typeface="Arial"/>
-              </a:rPr>
-              <a:t>FKB  Campus</a:t>
-            </a:r>
-          </a:p>
-        </p:txBody>
-      </p:sp>
-      <p:sp>
-        <p:nvSpPr>
-          <p:cNvPr id="3" name="TextBox 2"/>
-          <p:cNvSpPr txBox="1"/>
-          <p:nvPr/>
-        </p:nvSpPr>
-        <p:spPr>
-          <a:xfrm>
-            <a:off x="609600" y="279400"/>
-            <a:ext cx="10972800" cy="279400"/>
-          </a:xfrm>
-          <a:prstGeom prst="rect">
-            <a:avLst/>
-          </a:prstGeom>
-          <a:noFill/>
-        </p:spPr>
-        <p:txBody>
-          <a:bodyPr wrap="square">
-            <a:normAutofit/>
-          </a:bodyPr>
-          <a:lstStyle/>
-          <a:p>
-            <a:pPr algn="r"/>
-            <a:r>
-              <a:rPr sz="900" b="0" i="0">
-                <a:solidFill>
-                  <a:srgbClr val="7B7FA0"/>
-                </a:solidFill>
-                <a:latin typeface="Courier New"/>
-              </a:rPr>
-              <a:t>I · CROSS-SELLING NEU DENKEN</a:t>
-            </a:r>
-          </a:p>
-        </p:txBody>
-      </p:sp>
-      <p:sp>
-        <p:nvSpPr>
-          <p:cNvPr id="4" name="TextBox 3"/>
-          <p:cNvSpPr txBox="1"/>
-          <p:nvPr/>
-        </p:nvSpPr>
-        <p:spPr>
-          <a:xfrm>
-            <a:off x="609600" y="6426200"/>
-            <a:ext cx="10972800" cy="228600"/>
-          </a:xfrm>
-          <a:prstGeom prst="rect">
-            <a:avLst/>
-          </a:prstGeom>
-          <a:noFill/>
-        </p:spPr>
-        <p:txBody>
-          <a:bodyPr wrap="square">
-            <a:normAutofit/>
-          </a:bodyPr>
-          <a:lstStyle/>
-          <a:p>
-            <a:pPr algn="r"/>
-            <a:r>
-              <a:rPr sz="900" b="0" i="0">
-                <a:solidFill>
-                  <a:srgbClr val="7B7FA0"/>
-                </a:solidFill>
-                <a:latin typeface="Courier New"/>
-              </a:rPr>
-              <a:t>04</a:t>
-            </a:r>
-          </a:p>
-        </p:txBody>
-      </p:sp>
-      <p:sp>
-        <p:nvSpPr>
-          <p:cNvPr id="5" name="Rectangle 4"/>
+          <p:cNvPr id="2" name="Rectangle 1"/>
           <p:cNvSpPr/>
           <p:nvPr/>
         </p:nvSpPr>
         <p:spPr>
           <a:xfrm>
-            <a:off x="609600" y="825500"/>
-            <a:ext cx="10972800" cy="6350"/>
+            <a:off x="0" y="0"/>
+            <a:ext cx="12188952" cy="6858000"/>
           </a:xfrm>
           <a:prstGeom prst="rect">
             <a:avLst/>
           </a:prstGeom>
           <a:solidFill>
-            <a:srgbClr val="191D2E"/>
+            <a:srgbClr val="EDEDF3"/>
           </a:solidFill>
           <a:ln>
             <a:noFill/>
@@ -5893,90 +6682,20 @@
       </p:sp>
       <p:sp>
         <p:nvSpPr>
-          <p:cNvPr id="6" name="TextBox 5"/>
-          <p:cNvSpPr txBox="1"/>
-          <p:nvPr/>
-        </p:nvSpPr>
-        <p:spPr>
-          <a:xfrm>
-            <a:off x="609600" y="889000"/>
-            <a:ext cx="3810000" cy="177800"/>
-          </a:xfrm>
-          <a:prstGeom prst="rect">
-            <a:avLst/>
-          </a:prstGeom>
-          <a:noFill/>
-        </p:spPr>
-        <p:txBody>
-          <a:bodyPr wrap="square">
-            <a:normAutofit/>
-          </a:bodyPr>
-          <a:lstStyle/>
-          <a:p>
-            <a:pPr algn="l"/>
-            <a:r>
-              <a:rPr sz="900" b="0" i="0">
-                <a:solidFill>
-                  <a:srgbClr val="7B7FA0"/>
-                </a:solidFill>
-                <a:latin typeface="Courier New"/>
-              </a:rPr>
-              <a:t>Kernaussage</a:t>
-            </a:r>
-          </a:p>
-        </p:txBody>
-      </p:sp>
-      <p:sp>
-        <p:nvSpPr>
-          <p:cNvPr id="7" name="TextBox 6"/>
-          <p:cNvSpPr txBox="1"/>
-          <p:nvPr/>
-        </p:nvSpPr>
-        <p:spPr>
-          <a:xfrm>
-            <a:off x="609600" y="920750"/>
-            <a:ext cx="10972800" cy="1778000"/>
-          </a:xfrm>
-          <a:prstGeom prst="rect">
-            <a:avLst/>
-          </a:prstGeom>
-          <a:noFill/>
-        </p:spPr>
-        <p:txBody>
-          <a:bodyPr wrap="square">
-            <a:normAutofit/>
-          </a:bodyPr>
-          <a:lstStyle/>
-          <a:p>
-            <a:pPr algn="l"/>
-            <a:r>
-              <a:rPr sz="3800" b="0" i="0">
-                <a:solidFill>
-                  <a:srgbClr val="191D2E"/>
-                </a:solidFill>
-                <a:latin typeface="Georgia"/>
-              </a:rPr>
-              <a:t>Der Unterschied: Push vs. Pull</a:t>
-            </a:r>
-          </a:p>
-        </p:txBody>
-      </p:sp>
-      <p:sp>
-        <p:nvSpPr>
-          <p:cNvPr id="8" name="Rectangle 7"/>
+          <p:cNvPr id="3" name="Rectangle 2"/>
           <p:cNvSpPr/>
           <p:nvPr/>
         </p:nvSpPr>
         <p:spPr>
           <a:xfrm>
-            <a:off x="609600" y="2762250"/>
-            <a:ext cx="10972800" cy="6350"/>
+            <a:off x="0" y="0"/>
+            <a:ext cx="12188952" cy="50292"/>
           </a:xfrm>
           <a:prstGeom prst="rect">
             <a:avLst/>
           </a:prstGeom>
           <a:solidFill>
-            <a:srgbClr val="191D2E"/>
+            <a:srgbClr val="1F2C56"/>
           </a:solidFill>
           <a:ln>
             <a:noFill/>
@@ -6006,14 +6725,14 @@
       </p:sp>
       <p:sp>
         <p:nvSpPr>
-          <p:cNvPr id="9" name="TextBox 8"/>
+          <p:cNvPr id="4" name="TextBox 3"/>
           <p:cNvSpPr txBox="1"/>
           <p:nvPr/>
         </p:nvSpPr>
         <p:spPr>
           <a:xfrm>
-            <a:off x="609600" y="2825750"/>
-            <a:ext cx="5207000" cy="2857500"/>
+            <a:off x="685800" y="109728"/>
+            <a:ext cx="10817352" cy="228600"/>
           </a:xfrm>
           <a:prstGeom prst="rect">
             <a:avLst/>
@@ -6021,21 +6740,227 @@
           <a:noFill/>
         </p:spPr>
         <p:txBody>
+          <a:bodyPr wrap="none">
+            <a:spAutoFit/>
+          </a:bodyPr>
+          <a:lstStyle/>
+          <a:p>
+            <a:pPr algn="l"/>
+            <a:r>
+              <a:rPr sz="750">
+                <a:solidFill>
+                  <a:srgbClr val="78808C"/>
+                </a:solidFill>
+                <a:latin typeface="JetBrains Mono"/>
+              </a:rPr>
+              <a:t>M13  ·  INHALT</a:t>
+            </a:r>
+          </a:p>
+        </p:txBody>
+      </p:sp>
+      <p:sp>
+        <p:nvSpPr>
+          <p:cNvPr id="5" name="Rectangle 4"/>
+          <p:cNvSpPr/>
+          <p:nvPr/>
+        </p:nvSpPr>
+        <p:spPr>
+          <a:xfrm>
+            <a:off x="0" y="1234440"/>
+            <a:ext cx="12188952" cy="12700"/>
+          </a:xfrm>
+          <a:prstGeom prst="rect">
+            <a:avLst/>
+          </a:prstGeom>
+          <a:solidFill>
+            <a:srgbClr val="D8DFE4"/>
+          </a:solidFill>
+          <a:ln>
+            <a:noFill/>
+          </a:ln>
+        </p:spPr>
+        <p:style>
+          <a:lnRef idx="1">
+            <a:schemeClr val="accent1"/>
+          </a:lnRef>
+          <a:fillRef idx="3">
+            <a:schemeClr val="accent1"/>
+          </a:fillRef>
+          <a:effectRef idx="2">
+            <a:schemeClr val="accent1"/>
+          </a:effectRef>
+          <a:fontRef idx="minor">
+            <a:schemeClr val="lt1"/>
+          </a:fontRef>
+        </p:style>
+        <p:txBody>
+          <a:bodyPr rtlCol="0" anchor="ctr"/>
+          <a:lstStyle/>
+          <a:p>
+            <a:pPr algn="ctr"/>
+          </a:p>
+        </p:txBody>
+      </p:sp>
+      <p:sp>
+        <p:nvSpPr>
+          <p:cNvPr id="6" name="Rectangle 5"/>
+          <p:cNvSpPr/>
+          <p:nvPr/>
+        </p:nvSpPr>
+        <p:spPr>
+          <a:xfrm>
+            <a:off x="685800" y="502920"/>
+            <a:ext cx="36576" cy="658368"/>
+          </a:xfrm>
+          <a:prstGeom prst="rect">
+            <a:avLst/>
+          </a:prstGeom>
+          <a:solidFill>
+            <a:srgbClr val="D9C089"/>
+          </a:solidFill>
+          <a:ln>
+            <a:noFill/>
+          </a:ln>
+        </p:spPr>
+        <p:style>
+          <a:lnRef idx="1">
+            <a:schemeClr val="accent1"/>
+          </a:lnRef>
+          <a:fillRef idx="3">
+            <a:schemeClr val="accent1"/>
+          </a:fillRef>
+          <a:effectRef idx="2">
+            <a:schemeClr val="accent1"/>
+          </a:effectRef>
+          <a:fontRef idx="minor">
+            <a:schemeClr val="lt1"/>
+          </a:fontRef>
+        </p:style>
+        <p:txBody>
+          <a:bodyPr rtlCol="0" anchor="ctr"/>
+          <a:lstStyle/>
+          <a:p>
+            <a:pPr algn="ctr"/>
+          </a:p>
+        </p:txBody>
+      </p:sp>
+      <p:sp>
+        <p:nvSpPr>
+          <p:cNvPr id="7" name="TextBox 6"/>
+          <p:cNvSpPr txBox="1"/>
+          <p:nvPr/>
+        </p:nvSpPr>
+        <p:spPr>
+          <a:xfrm>
+            <a:off x="813816" y="502920"/>
+            <a:ext cx="10634472" cy="685800"/>
+          </a:xfrm>
+          <a:prstGeom prst="rect">
+            <a:avLst/>
+          </a:prstGeom>
+          <a:noFill/>
+        </p:spPr>
+        <p:txBody>
           <a:bodyPr wrap="square">
-            <a:normAutofit/>
+            <a:spAutoFit/>
           </a:bodyPr>
           <a:lstStyle/>
           <a:p>
             <a:pPr algn="l"/>
             <a:r>
-              <a:rPr sz="1400" b="0" i="0">
-                <a:solidFill>
-                  <a:srgbClr val="191D2E"/>
-                </a:solidFill>
-                <a:latin typeface="Georgia"/>
+              <a:rPr sz="2400" b="1" i="0">
+                <a:solidFill>
+                  <a:srgbClr val="1F2C56"/>
+                </a:solidFill>
+                <a:latin typeface="Source Serif 4"/>
               </a:rPr>
-              <a:t>Push-Cross-Selling: 'Wir haben gerade eine Aktion für Zinsabsicherung.' Pull-Cross-Selling: 'Sie planen zu expandieren — welche Risiken sehen Sie dabei?' Eines nervt. Das andere schafft Mehrwert.</a:t>
-            </a:r>
+              <a:t>Zwei Typen: Push vs. Pull</a:t>
+            </a:r>
+          </a:p>
+        </p:txBody>
+      </p:sp>
+      <p:sp>
+        <p:nvSpPr>
+          <p:cNvPr id="8" name="TextBox 7"/>
+          <p:cNvSpPr txBox="1"/>
+          <p:nvPr/>
+        </p:nvSpPr>
+        <p:spPr>
+          <a:xfrm>
+            <a:off x="685800" y="1417320"/>
+            <a:ext cx="10817352" cy="5029200"/>
+          </a:xfrm>
+          <a:prstGeom prst="rect">
+            <a:avLst/>
+          </a:prstGeom>
+          <a:noFill/>
+        </p:spPr>
+        <p:txBody>
+          <a:bodyPr wrap="square">
+            <a:spAutoFit/>
+          </a:bodyPr>
+          <a:lstStyle/>
+          <a:p>
+            <a:pPr>
+              <a:spcBef>
+                <a:spcPts val="400"/>
+              </a:spcBef>
+              <a:spcAft>
+                <a:spcPts val="200"/>
+              </a:spcAft>
+            </a:pPr>
+            <a:r>
+              <a:rPr sz="1200">
+                <a:solidFill>
+                  <a:srgbClr val="3D5466"/>
+                </a:solidFill>
+                <a:latin typeface="Arial"/>
+              </a:rPr>
+              <a:t>## 4.2 Wallet-Share-Analyse: Wo liegt das Potenzial?</a:t>
+            </a:r>
+          </a:p>
+        </p:txBody>
+      </p:sp>
+      <p:sp>
+        <p:nvSpPr>
+          <p:cNvPr id="9" name="Rectangle 8"/>
+          <p:cNvSpPr/>
+          <p:nvPr/>
+        </p:nvSpPr>
+        <p:spPr>
+          <a:xfrm>
+            <a:off x="0" y="6510528"/>
+            <a:ext cx="12188952" cy="347472"/>
+          </a:xfrm>
+          <a:prstGeom prst="rect">
+            <a:avLst/>
+          </a:prstGeom>
+          <a:solidFill>
+            <a:srgbClr val="0A1937"/>
+          </a:solidFill>
+          <a:ln>
+            <a:noFill/>
+          </a:ln>
+        </p:spPr>
+        <p:style>
+          <a:lnRef idx="1">
+            <a:schemeClr val="accent1"/>
+          </a:lnRef>
+          <a:fillRef idx="3">
+            <a:schemeClr val="accent1"/>
+          </a:fillRef>
+          <a:effectRef idx="2">
+            <a:schemeClr val="accent1"/>
+          </a:effectRef>
+          <a:fontRef idx="minor">
+            <a:schemeClr val="lt1"/>
+          </a:fontRef>
+        </p:style>
+        <p:txBody>
+          <a:bodyPr rtlCol="0" anchor="ctr"/>
+          <a:lstStyle/>
+          <a:p>
+            <a:pPr algn="ctr"/>
           </a:p>
         </p:txBody>
       </p:sp>
@@ -6047,8 +6972,8 @@
         </p:nvSpPr>
         <p:spPr>
           <a:xfrm>
-            <a:off x="6096000" y="2825750"/>
-            <a:ext cx="4851400" cy="177800"/>
+            <a:off x="685800" y="6583680"/>
+            <a:ext cx="6490411" cy="256032"/>
           </a:xfrm>
           <a:prstGeom prst="rect">
             <a:avLst/>
@@ -6056,55 +6981,20 @@
           <a:noFill/>
         </p:spPr>
         <p:txBody>
-          <a:bodyPr wrap="square">
-            <a:normAutofit/>
+          <a:bodyPr wrap="none">
+            <a:spAutoFit/>
           </a:bodyPr>
           <a:lstStyle/>
           <a:p>
             <a:pPr algn="l"/>
             <a:r>
-              <a:rPr sz="900" b="0" i="0">
-                <a:solidFill>
-                  <a:srgbClr val="1F2B56"/>
-                </a:solidFill>
-                <a:latin typeface="Courier New"/>
+              <a:rPr sz="700">
+                <a:solidFill>
+                  <a:srgbClr val="A0B4D2"/>
+                </a:solidFill>
+                <a:latin typeface="JetBrains Mono"/>
               </a:rPr>
-              <a:t>Mitnahme</a:t>
-            </a:r>
-          </a:p>
-        </p:txBody>
-      </p:sp>
-      <p:sp>
-        <p:nvSpPr>
-          <p:cNvPr id="11" name="TextBox 10"/>
-          <p:cNvSpPr txBox="1"/>
-          <p:nvPr/>
-        </p:nvSpPr>
-        <p:spPr>
-          <a:xfrm>
-            <a:off x="6096000" y="3041650"/>
-            <a:ext cx="4851400" cy="2667000"/>
-          </a:xfrm>
-          <a:prstGeom prst="rect">
-            <a:avLst/>
-          </a:prstGeom>
-          <a:noFill/>
-        </p:spPr>
-        <p:txBody>
-          <a:bodyPr wrap="square">
-            <a:normAutofit/>
-          </a:bodyPr>
-          <a:lstStyle/>
-          <a:p>
-            <a:pPr algn="l"/>
-            <a:r>
-              <a:rPr sz="1400" b="0" i="1">
-                <a:solidFill>
-                  <a:srgbClr val="191D2E"/>
-                </a:solidFill>
-                <a:latin typeface="Georgia"/>
-              </a:rPr>
-              <a:t>Kunden empfehlen Berater weiter, die ihre Situation verstehen — nicht die, die Produkte anbieten.</a:t>
+              <a:t>Benedikt Zoller Coaching  ·  FKB Campus  ·  M13</a:t>
             </a:r>
           </a:p>
         </p:txBody>
@@ -6120,14 +7010,6 @@
 <file path=ppt/slides/slide5.xml><?xml version="1.0" encoding="utf-8"?>
 <p:sld xmlns:a="http://schemas.openxmlformats.org/drawingml/2006/main" xmlns:p="http://schemas.openxmlformats.org/presentationml/2006/main" xmlns:r="http://schemas.openxmlformats.org/officeDocument/2006/relationships">
   <p:cSld>
-    <p:bg>
-      <p:bgPr>
-        <a:solidFill>
-          <a:srgbClr val="1F2B56"/>
-        </a:solidFill>
-        <a:effectLst/>
-      </p:bgPr>
-    </p:bg>
     <p:spTree>
       <p:nvGrpSpPr>
         <p:cNvPr id="1" name=""/>
@@ -6137,14 +7019,100 @@
       <p:grpSpPr/>
       <p:sp>
         <p:nvSpPr>
-          <p:cNvPr id="2" name="TextBox 1"/>
+          <p:cNvPr id="2" name="Rectangle 1"/>
+          <p:cNvSpPr/>
+          <p:nvPr/>
+        </p:nvSpPr>
+        <p:spPr>
+          <a:xfrm>
+            <a:off x="0" y="0"/>
+            <a:ext cx="12188952" cy="6858000"/>
+          </a:xfrm>
+          <a:prstGeom prst="rect">
+            <a:avLst/>
+          </a:prstGeom>
+          <a:solidFill>
+            <a:srgbClr val="EDEDF3"/>
+          </a:solidFill>
+          <a:ln>
+            <a:noFill/>
+          </a:ln>
+        </p:spPr>
+        <p:style>
+          <a:lnRef idx="1">
+            <a:schemeClr val="accent1"/>
+          </a:lnRef>
+          <a:fillRef idx="3">
+            <a:schemeClr val="accent1"/>
+          </a:fillRef>
+          <a:effectRef idx="2">
+            <a:schemeClr val="accent1"/>
+          </a:effectRef>
+          <a:fontRef idx="minor">
+            <a:schemeClr val="lt1"/>
+          </a:fontRef>
+        </p:style>
+        <p:txBody>
+          <a:bodyPr rtlCol="0" anchor="ctr"/>
+          <a:lstStyle/>
+          <a:p>
+            <a:pPr algn="ctr"/>
+          </a:p>
+        </p:txBody>
+      </p:sp>
+      <p:sp>
+        <p:nvSpPr>
+          <p:cNvPr id="3" name="Rectangle 2"/>
+          <p:cNvSpPr/>
+          <p:nvPr/>
+        </p:nvSpPr>
+        <p:spPr>
+          <a:xfrm>
+            <a:off x="0" y="0"/>
+            <a:ext cx="12188952" cy="50292"/>
+          </a:xfrm>
+          <a:prstGeom prst="rect">
+            <a:avLst/>
+          </a:prstGeom>
+          <a:solidFill>
+            <a:srgbClr val="1F2C56"/>
+          </a:solidFill>
+          <a:ln>
+            <a:noFill/>
+          </a:ln>
+        </p:spPr>
+        <p:style>
+          <a:lnRef idx="1">
+            <a:schemeClr val="accent1"/>
+          </a:lnRef>
+          <a:fillRef idx="3">
+            <a:schemeClr val="accent1"/>
+          </a:fillRef>
+          <a:effectRef idx="2">
+            <a:schemeClr val="accent1"/>
+          </a:effectRef>
+          <a:fontRef idx="minor">
+            <a:schemeClr val="lt1"/>
+          </a:fontRef>
+        </p:style>
+        <p:txBody>
+          <a:bodyPr rtlCol="0" anchor="ctr"/>
+          <a:lstStyle/>
+          <a:p>
+            <a:pPr algn="ctr"/>
+          </a:p>
+        </p:txBody>
+      </p:sp>
+      <p:sp>
+        <p:nvSpPr>
+          <p:cNvPr id="4" name="TextBox 3"/>
           <p:cNvSpPr txBox="1"/>
           <p:nvPr/>
         </p:nvSpPr>
         <p:spPr>
           <a:xfrm>
-            <a:off x="609600" y="279400"/>
-            <a:ext cx="2540000" cy="279400"/>
+            <a:off x="685800" y="109728"/>
+            <a:ext cx="10817352" cy="228600"/>
           </a:xfrm>
           <a:prstGeom prst="rect">
             <a:avLst/>
@@ -6152,34 +7120,240 @@
           <a:noFill/>
         </p:spPr>
         <p:txBody>
+          <a:bodyPr wrap="none">
+            <a:spAutoFit/>
+          </a:bodyPr>
+          <a:lstStyle/>
+          <a:p>
+            <a:pPr algn="l"/>
+            <a:r>
+              <a:rPr sz="750">
+                <a:solidFill>
+                  <a:srgbClr val="78808C"/>
+                </a:solidFill>
+                <a:latin typeface="JetBrains Mono"/>
+              </a:rPr>
+              <a:t>M13  ·  INHALT</a:t>
+            </a:r>
+          </a:p>
+        </p:txBody>
+      </p:sp>
+      <p:sp>
+        <p:nvSpPr>
+          <p:cNvPr id="5" name="Rectangle 4"/>
+          <p:cNvSpPr/>
+          <p:nvPr/>
+        </p:nvSpPr>
+        <p:spPr>
+          <a:xfrm>
+            <a:off x="0" y="1234440"/>
+            <a:ext cx="12188952" cy="12700"/>
+          </a:xfrm>
+          <a:prstGeom prst="rect">
+            <a:avLst/>
+          </a:prstGeom>
+          <a:solidFill>
+            <a:srgbClr val="D8DFE4"/>
+          </a:solidFill>
+          <a:ln>
+            <a:noFill/>
+          </a:ln>
+        </p:spPr>
+        <p:style>
+          <a:lnRef idx="1">
+            <a:schemeClr val="accent1"/>
+          </a:lnRef>
+          <a:fillRef idx="3">
+            <a:schemeClr val="accent1"/>
+          </a:fillRef>
+          <a:effectRef idx="2">
+            <a:schemeClr val="accent1"/>
+          </a:effectRef>
+          <a:fontRef idx="minor">
+            <a:schemeClr val="lt1"/>
+          </a:fontRef>
+        </p:style>
+        <p:txBody>
+          <a:bodyPr rtlCol="0" anchor="ctr"/>
+          <a:lstStyle/>
+          <a:p>
+            <a:pPr algn="ctr"/>
+          </a:p>
+        </p:txBody>
+      </p:sp>
+      <p:sp>
+        <p:nvSpPr>
+          <p:cNvPr id="6" name="Rectangle 5"/>
+          <p:cNvSpPr/>
+          <p:nvPr/>
+        </p:nvSpPr>
+        <p:spPr>
+          <a:xfrm>
+            <a:off x="685800" y="502920"/>
+            <a:ext cx="36576" cy="658368"/>
+          </a:xfrm>
+          <a:prstGeom prst="rect">
+            <a:avLst/>
+          </a:prstGeom>
+          <a:solidFill>
+            <a:srgbClr val="D9C089"/>
+          </a:solidFill>
+          <a:ln>
+            <a:noFill/>
+          </a:ln>
+        </p:spPr>
+        <p:style>
+          <a:lnRef idx="1">
+            <a:schemeClr val="accent1"/>
+          </a:lnRef>
+          <a:fillRef idx="3">
+            <a:schemeClr val="accent1"/>
+          </a:fillRef>
+          <a:effectRef idx="2">
+            <a:schemeClr val="accent1"/>
+          </a:effectRef>
+          <a:fontRef idx="minor">
+            <a:schemeClr val="lt1"/>
+          </a:fontRef>
+        </p:style>
+        <p:txBody>
+          <a:bodyPr rtlCol="0" anchor="ctr"/>
+          <a:lstStyle/>
+          <a:p>
+            <a:pPr algn="ctr"/>
+          </a:p>
+        </p:txBody>
+      </p:sp>
+      <p:sp>
+        <p:nvSpPr>
+          <p:cNvPr id="7" name="TextBox 6"/>
+          <p:cNvSpPr txBox="1"/>
+          <p:nvPr/>
+        </p:nvSpPr>
+        <p:spPr>
+          <a:xfrm>
+            <a:off x="813816" y="502920"/>
+            <a:ext cx="10634472" cy="685800"/>
+          </a:xfrm>
+          <a:prstGeom prst="rect">
+            <a:avLst/>
+          </a:prstGeom>
+          <a:noFill/>
+        </p:spPr>
+        <p:txBody>
           <a:bodyPr wrap="square">
-            <a:normAutofit/>
+            <a:spAutoFit/>
           </a:bodyPr>
           <a:lstStyle/>
           <a:p>
             <a:pPr algn="l"/>
             <a:r>
-              <a:rPr sz="1000" b="1" i="0">
-                <a:solidFill>
-                  <a:srgbClr val="F8F8FA"/>
+              <a:rPr sz="2400" b="1" i="0">
+                <a:solidFill>
+                  <a:srgbClr val="1F2C56"/>
+                </a:solidFill>
+                <a:latin typeface="Source Serif 4"/>
+              </a:rPr>
+              <a:t>Das Konzept</a:t>
+            </a:r>
+          </a:p>
+        </p:txBody>
+      </p:sp>
+      <p:sp>
+        <p:nvSpPr>
+          <p:cNvPr id="8" name="TextBox 7"/>
+          <p:cNvSpPr txBox="1"/>
+          <p:nvPr/>
+        </p:nvSpPr>
+        <p:spPr>
+          <a:xfrm>
+            <a:off x="685800" y="1417320"/>
+            <a:ext cx="10817352" cy="5029200"/>
+          </a:xfrm>
+          <a:prstGeom prst="rect">
+            <a:avLst/>
+          </a:prstGeom>
+          <a:noFill/>
+        </p:spPr>
+        <p:txBody>
+          <a:bodyPr wrap="square">
+            <a:spAutoFit/>
+          </a:bodyPr>
+          <a:lstStyle/>
+          <a:p>
+            <a:pPr>
+              <a:spcBef>
+                <a:spcPts val="400"/>
+              </a:spcBef>
+              <a:spcAft>
+                <a:spcPts val="200"/>
+              </a:spcAft>
+            </a:pPr>
+            <a:r>
+              <a:rPr sz="1200">
+                <a:solidFill>
+                  <a:srgbClr val="3D5466"/>
                 </a:solidFill>
                 <a:latin typeface="Arial"/>
               </a:rPr>
-              <a:t>FKB  Campus</a:t>
-            </a:r>
-          </a:p>
-        </p:txBody>
-      </p:sp>
-      <p:sp>
-        <p:nvSpPr>
-          <p:cNvPr id="3" name="TextBox 2"/>
+              <a:t>Das unausgeschöpfte Potenzial von 60 % ist nicht verloren – es ist bei einem Wettbewerber.</a:t>
+            </a:r>
+          </a:p>
+        </p:txBody>
+      </p:sp>
+      <p:sp>
+        <p:nvSpPr>
+          <p:cNvPr id="9" name="Rectangle 8"/>
+          <p:cNvSpPr/>
+          <p:nvPr/>
+        </p:nvSpPr>
+        <p:spPr>
+          <a:xfrm>
+            <a:off x="0" y="6510528"/>
+            <a:ext cx="12188952" cy="347472"/>
+          </a:xfrm>
+          <a:prstGeom prst="rect">
+            <a:avLst/>
+          </a:prstGeom>
+          <a:solidFill>
+            <a:srgbClr val="0A1937"/>
+          </a:solidFill>
+          <a:ln>
+            <a:noFill/>
+          </a:ln>
+        </p:spPr>
+        <p:style>
+          <a:lnRef idx="1">
+            <a:schemeClr val="accent1"/>
+          </a:lnRef>
+          <a:fillRef idx="3">
+            <a:schemeClr val="accent1"/>
+          </a:fillRef>
+          <a:effectRef idx="2">
+            <a:schemeClr val="accent1"/>
+          </a:effectRef>
+          <a:fontRef idx="minor">
+            <a:schemeClr val="lt1"/>
+          </a:fontRef>
+        </p:style>
+        <p:txBody>
+          <a:bodyPr rtlCol="0" anchor="ctr"/>
+          <a:lstStyle/>
+          <a:p>
+            <a:pPr algn="ctr"/>
+          </a:p>
+        </p:txBody>
+      </p:sp>
+      <p:sp>
+        <p:nvSpPr>
+          <p:cNvPr id="10" name="TextBox 9"/>
           <p:cNvSpPr txBox="1"/>
           <p:nvPr/>
         </p:nvSpPr>
         <p:spPr>
           <a:xfrm>
-            <a:off x="609600" y="279400"/>
-            <a:ext cx="10972800" cy="279400"/>
+            <a:off x="685800" y="6583680"/>
+            <a:ext cx="6490411" cy="256032"/>
           </a:xfrm>
           <a:prstGeom prst="rect">
             <a:avLst/>
@@ -6187,160 +7361,20 @@
           <a:noFill/>
         </p:spPr>
         <p:txBody>
-          <a:bodyPr wrap="square">
-            <a:normAutofit/>
+          <a:bodyPr wrap="none">
+            <a:spAutoFit/>
           </a:bodyPr>
           <a:lstStyle/>
           <a:p>
-            <a:pPr algn="r"/>
-            <a:r>
-              <a:rPr sz="900" b="0" i="0">
-                <a:solidFill>
-                  <a:srgbClr val="7B7FA0"/>
-                </a:solidFill>
-                <a:latin typeface="Courier New"/>
+            <a:pPr algn="l"/>
+            <a:r>
+              <a:rPr sz="700">
+                <a:solidFill>
+                  <a:srgbClr val="A0B4D2"/>
+                </a:solidFill>
+                <a:latin typeface="JetBrains Mono"/>
               </a:rPr>
-              <a:t>POTENZIALE SYSTEMATISCH ENTDECKEN</a:t>
-            </a:r>
-          </a:p>
-        </p:txBody>
-      </p:sp>
-      <p:sp>
-        <p:nvSpPr>
-          <p:cNvPr id="4" name="TextBox 3"/>
-          <p:cNvSpPr txBox="1"/>
-          <p:nvPr/>
-        </p:nvSpPr>
-        <p:spPr>
-          <a:xfrm>
-            <a:off x="609600" y="6426200"/>
-            <a:ext cx="10972800" cy="228600"/>
-          </a:xfrm>
-          <a:prstGeom prst="rect">
-            <a:avLst/>
-          </a:prstGeom>
-          <a:noFill/>
-        </p:spPr>
-        <p:txBody>
-          <a:bodyPr wrap="square">
-            <a:normAutofit/>
-          </a:bodyPr>
-          <a:lstStyle/>
-          <a:p>
-            <a:pPr algn="r"/>
-            <a:r>
-              <a:rPr sz="900" b="0" i="0">
-                <a:solidFill>
-                  <a:srgbClr val="7B7FA0"/>
-                </a:solidFill>
-                <a:latin typeface="Courier New"/>
-              </a:rPr>
-              <a:t>05</a:t>
-            </a:r>
-          </a:p>
-        </p:txBody>
-      </p:sp>
-      <p:sp>
-        <p:nvSpPr>
-          <p:cNvPr id="5" name="TextBox 4"/>
-          <p:cNvSpPr txBox="1"/>
-          <p:nvPr/>
-        </p:nvSpPr>
-        <p:spPr>
-          <a:xfrm>
-            <a:off x="609600" y="635000"/>
-            <a:ext cx="5461000" cy="5461000"/>
-          </a:xfrm>
-          <a:prstGeom prst="rect">
-            <a:avLst/>
-          </a:prstGeom>
-          <a:noFill/>
-        </p:spPr>
-        <p:txBody>
-          <a:bodyPr wrap="square">
-            <a:normAutofit/>
-          </a:bodyPr>
-          <a:lstStyle/>
-          <a:p>
-            <a:pPr algn="l"/>
-            <a:r>
-              <a:rPr sz="28000" b="0" i="1">
-                <a:solidFill>
-                  <a:srgbClr val="D9BF7A"/>
-                </a:solidFill>
-                <a:latin typeface="Georgia"/>
-              </a:rPr>
-              <a:t>II</a:t>
-            </a:r>
-          </a:p>
-        </p:txBody>
-      </p:sp>
-      <p:sp>
-        <p:nvSpPr>
-          <p:cNvPr id="6" name="TextBox 5"/>
-          <p:cNvSpPr txBox="1"/>
-          <p:nvPr/>
-        </p:nvSpPr>
-        <p:spPr>
-          <a:xfrm>
-            <a:off x="6731000" y="4064000"/>
-            <a:ext cx="4851400" cy="1778000"/>
-          </a:xfrm>
-          <a:prstGeom prst="rect">
-            <a:avLst/>
-          </a:prstGeom>
-          <a:noFill/>
-        </p:spPr>
-        <p:txBody>
-          <a:bodyPr wrap="square">
-            <a:normAutofit/>
-          </a:bodyPr>
-          <a:lstStyle/>
-          <a:p>
-            <a:pPr algn="r"/>
-            <a:r>
-              <a:rPr sz="3800" b="0" i="0">
-                <a:solidFill>
-                  <a:srgbClr val="F8F8FA"/>
-                </a:solidFill>
-                <a:latin typeface="Georgia"/>
-              </a:rPr>
-              <a:t>Potenziale systematisch entdecken</a:t>
-            </a:r>
-          </a:p>
-        </p:txBody>
-      </p:sp>
-      <p:sp>
-        <p:nvSpPr>
-          <p:cNvPr id="7" name="TextBox 6"/>
-          <p:cNvSpPr txBox="1"/>
-          <p:nvPr/>
-        </p:nvSpPr>
-        <p:spPr>
-          <a:xfrm>
-            <a:off x="6731000" y="5842000"/>
-            <a:ext cx="4851400" cy="635000"/>
-          </a:xfrm>
-          <a:prstGeom prst="rect">
-            <a:avLst/>
-          </a:prstGeom>
-          <a:noFill/>
-        </p:spPr>
-        <p:txBody>
-          <a:bodyPr wrap="square">
-            <a:normAutofit/>
-          </a:bodyPr>
-          <a:lstStyle/>
-          <a:p>
-            <a:pPr algn="r"/>
-            <a:r>
-              <a:rPr sz="1400" b="0" i="1">
-                <a:solidFill>
-                  <a:srgbClr val="7B7FA0"/>
-                </a:solidFill>
-                <a:latin typeface="Georgia"/>
-              </a:rPr>
-              <a:t>Wallet-Share-Analyse: Was läuft woanders?</a:t>
+              <a:t>Benedikt Zoller Coaching  ·  FKB Campus  ·  M13</a:t>
             </a:r>
           </a:p>
         </p:txBody>
@@ -6356,14 +7390,6 @@
 <file path=ppt/slides/slide6.xml><?xml version="1.0" encoding="utf-8"?>
 <p:sld xmlns:a="http://schemas.openxmlformats.org/drawingml/2006/main" xmlns:p="http://schemas.openxmlformats.org/presentationml/2006/main" xmlns:r="http://schemas.openxmlformats.org/officeDocument/2006/relationships">
   <p:cSld>
-    <p:bg>
-      <p:bgPr>
-        <a:solidFill>
-          <a:srgbClr val="F8F8FA"/>
-        </a:solidFill>
-        <a:effectLst/>
-      </p:bgPr>
-    </p:bg>
     <p:spTree>
       <p:nvGrpSpPr>
         <p:cNvPr id="1" name=""/>
@@ -6373,125 +7399,20 @@
       <p:grpSpPr/>
       <p:sp>
         <p:nvSpPr>
-          <p:cNvPr id="2" name="TextBox 1"/>
-          <p:cNvSpPr txBox="1"/>
-          <p:nvPr/>
-        </p:nvSpPr>
-        <p:spPr>
-          <a:xfrm>
-            <a:off x="609600" y="279400"/>
-            <a:ext cx="2540000" cy="279400"/>
-          </a:xfrm>
-          <a:prstGeom prst="rect">
-            <a:avLst/>
-          </a:prstGeom>
-          <a:noFill/>
-        </p:spPr>
-        <p:txBody>
-          <a:bodyPr wrap="square">
-            <a:normAutofit/>
-          </a:bodyPr>
-          <a:lstStyle/>
-          <a:p>
-            <a:pPr algn="l"/>
-            <a:r>
-              <a:rPr sz="1000" b="1" i="0">
-                <a:solidFill>
-                  <a:srgbClr val="191D2E"/>
-                </a:solidFill>
-                <a:latin typeface="Arial"/>
-              </a:rPr>
-              <a:t>FKB  Campus</a:t>
-            </a:r>
-          </a:p>
-        </p:txBody>
-      </p:sp>
-      <p:sp>
-        <p:nvSpPr>
-          <p:cNvPr id="3" name="TextBox 2"/>
-          <p:cNvSpPr txBox="1"/>
-          <p:nvPr/>
-        </p:nvSpPr>
-        <p:spPr>
-          <a:xfrm>
-            <a:off x="609600" y="279400"/>
-            <a:ext cx="10972800" cy="279400"/>
-          </a:xfrm>
-          <a:prstGeom prst="rect">
-            <a:avLst/>
-          </a:prstGeom>
-          <a:noFill/>
-        </p:spPr>
-        <p:txBody>
-          <a:bodyPr wrap="square">
-            <a:normAutofit/>
-          </a:bodyPr>
-          <a:lstStyle/>
-          <a:p>
-            <a:pPr algn="r"/>
-            <a:r>
-              <a:rPr sz="900" b="0" i="0">
-                <a:solidFill>
-                  <a:srgbClr val="7B7FA0"/>
-                </a:solidFill>
-                <a:latin typeface="Courier New"/>
-              </a:rPr>
-              <a:t>II · POTENZIALE SYSTEMATISCH ENTDECKEN</a:t>
-            </a:r>
-          </a:p>
-        </p:txBody>
-      </p:sp>
-      <p:sp>
-        <p:nvSpPr>
-          <p:cNvPr id="4" name="TextBox 3"/>
-          <p:cNvSpPr txBox="1"/>
-          <p:nvPr/>
-        </p:nvSpPr>
-        <p:spPr>
-          <a:xfrm>
-            <a:off x="609600" y="6426200"/>
-            <a:ext cx="10972800" cy="228600"/>
-          </a:xfrm>
-          <a:prstGeom prst="rect">
-            <a:avLst/>
-          </a:prstGeom>
-          <a:noFill/>
-        </p:spPr>
-        <p:txBody>
-          <a:bodyPr wrap="square">
-            <a:normAutofit/>
-          </a:bodyPr>
-          <a:lstStyle/>
-          <a:p>
-            <a:pPr algn="r"/>
-            <a:r>
-              <a:rPr sz="900" b="0" i="0">
-                <a:solidFill>
-                  <a:srgbClr val="7B7FA0"/>
-                </a:solidFill>
-                <a:latin typeface="Courier New"/>
-              </a:rPr>
-              <a:t>06</a:t>
-            </a:r>
-          </a:p>
-        </p:txBody>
-      </p:sp>
-      <p:sp>
-        <p:nvSpPr>
-          <p:cNvPr id="5" name="Rectangle 4"/>
+          <p:cNvPr id="2" name="Rectangle 1"/>
           <p:cNvSpPr/>
           <p:nvPr/>
         </p:nvSpPr>
         <p:spPr>
           <a:xfrm>
-            <a:off x="609600" y="825500"/>
-            <a:ext cx="10972800" cy="6350"/>
+            <a:off x="0" y="0"/>
+            <a:ext cx="12188952" cy="6858000"/>
           </a:xfrm>
           <a:prstGeom prst="rect">
             <a:avLst/>
           </a:prstGeom>
           <a:solidFill>
-            <a:srgbClr val="191D2E"/>
+            <a:srgbClr val="EDEDF3"/>
           </a:solidFill>
           <a:ln>
             <a:noFill/>
@@ -6521,55 +7442,20 @@
       </p:sp>
       <p:sp>
         <p:nvSpPr>
-          <p:cNvPr id="6" name="TextBox 5"/>
-          <p:cNvSpPr txBox="1"/>
-          <p:nvPr/>
-        </p:nvSpPr>
-        <p:spPr>
-          <a:xfrm>
-            <a:off x="609600" y="920750"/>
-            <a:ext cx="10972800" cy="1778000"/>
-          </a:xfrm>
-          <a:prstGeom prst="rect">
-            <a:avLst/>
-          </a:prstGeom>
-          <a:noFill/>
-        </p:spPr>
-        <p:txBody>
-          <a:bodyPr wrap="square">
-            <a:normAutofit/>
-          </a:bodyPr>
-          <a:lstStyle/>
-          <a:p>
-            <a:pPr algn="l"/>
-            <a:r>
-              <a:rPr sz="3800" b="0" i="0">
-                <a:solidFill>
-                  <a:srgbClr val="191D2E"/>
-                </a:solidFill>
-                <a:latin typeface="Georgia"/>
-              </a:rPr>
-              <a:t>Wallet-Share: Drei Fragen für jeden Kunden</a:t>
-            </a:r>
-          </a:p>
-        </p:txBody>
-      </p:sp>
-      <p:sp>
-        <p:nvSpPr>
-          <p:cNvPr id="7" name="Rectangle 6"/>
+          <p:cNvPr id="3" name="Rectangle 2"/>
           <p:cNvSpPr/>
           <p:nvPr/>
         </p:nvSpPr>
         <p:spPr>
           <a:xfrm>
-            <a:off x="609600" y="2762250"/>
-            <a:ext cx="10972800" cy="6350"/>
+            <a:off x="0" y="0"/>
+            <a:ext cx="12188952" cy="50292"/>
           </a:xfrm>
           <a:prstGeom prst="rect">
             <a:avLst/>
           </a:prstGeom>
           <a:solidFill>
-            <a:srgbClr val="E0E0E8"/>
+            <a:srgbClr val="1F2C56"/>
           </a:solidFill>
           <a:ln>
             <a:noFill/>
@@ -6599,14 +7485,170 @@
       </p:sp>
       <p:sp>
         <p:nvSpPr>
+          <p:cNvPr id="4" name="TextBox 3"/>
+          <p:cNvSpPr txBox="1"/>
+          <p:nvPr/>
+        </p:nvSpPr>
+        <p:spPr>
+          <a:xfrm>
+            <a:off x="685800" y="109728"/>
+            <a:ext cx="10817352" cy="228600"/>
+          </a:xfrm>
+          <a:prstGeom prst="rect">
+            <a:avLst/>
+          </a:prstGeom>
+          <a:noFill/>
+        </p:spPr>
+        <p:txBody>
+          <a:bodyPr wrap="none">
+            <a:spAutoFit/>
+          </a:bodyPr>
+          <a:lstStyle/>
+          <a:p>
+            <a:pPr algn="l"/>
+            <a:r>
+              <a:rPr sz="750">
+                <a:solidFill>
+                  <a:srgbClr val="78808C"/>
+                </a:solidFill>
+                <a:latin typeface="JetBrains Mono"/>
+              </a:rPr>
+              <a:t>M13  ·  INHALT</a:t>
+            </a:r>
+          </a:p>
+        </p:txBody>
+      </p:sp>
+      <p:sp>
+        <p:nvSpPr>
+          <p:cNvPr id="5" name="Rectangle 4"/>
+          <p:cNvSpPr/>
+          <p:nvPr/>
+        </p:nvSpPr>
+        <p:spPr>
+          <a:xfrm>
+            <a:off x="0" y="1234440"/>
+            <a:ext cx="12188952" cy="12700"/>
+          </a:xfrm>
+          <a:prstGeom prst="rect">
+            <a:avLst/>
+          </a:prstGeom>
+          <a:solidFill>
+            <a:srgbClr val="D8DFE4"/>
+          </a:solidFill>
+          <a:ln>
+            <a:noFill/>
+          </a:ln>
+        </p:spPr>
+        <p:style>
+          <a:lnRef idx="1">
+            <a:schemeClr val="accent1"/>
+          </a:lnRef>
+          <a:fillRef idx="3">
+            <a:schemeClr val="accent1"/>
+          </a:fillRef>
+          <a:effectRef idx="2">
+            <a:schemeClr val="accent1"/>
+          </a:effectRef>
+          <a:fontRef idx="minor">
+            <a:schemeClr val="lt1"/>
+          </a:fontRef>
+        </p:style>
+        <p:txBody>
+          <a:bodyPr rtlCol="0" anchor="ctr"/>
+          <a:lstStyle/>
+          <a:p>
+            <a:pPr algn="ctr"/>
+          </a:p>
+        </p:txBody>
+      </p:sp>
+      <p:sp>
+        <p:nvSpPr>
+          <p:cNvPr id="6" name="Rectangle 5"/>
+          <p:cNvSpPr/>
+          <p:nvPr/>
+        </p:nvSpPr>
+        <p:spPr>
+          <a:xfrm>
+            <a:off x="685800" y="502920"/>
+            <a:ext cx="36576" cy="658368"/>
+          </a:xfrm>
+          <a:prstGeom prst="rect">
+            <a:avLst/>
+          </a:prstGeom>
+          <a:solidFill>
+            <a:srgbClr val="D9C089"/>
+          </a:solidFill>
+          <a:ln>
+            <a:noFill/>
+          </a:ln>
+        </p:spPr>
+        <p:style>
+          <a:lnRef idx="1">
+            <a:schemeClr val="accent1"/>
+          </a:lnRef>
+          <a:fillRef idx="3">
+            <a:schemeClr val="accent1"/>
+          </a:fillRef>
+          <a:effectRef idx="2">
+            <a:schemeClr val="accent1"/>
+          </a:effectRef>
+          <a:fontRef idx="minor">
+            <a:schemeClr val="lt1"/>
+          </a:fontRef>
+        </p:style>
+        <p:txBody>
+          <a:bodyPr rtlCol="0" anchor="ctr"/>
+          <a:lstStyle/>
+          <a:p>
+            <a:pPr algn="ctr"/>
+          </a:p>
+        </p:txBody>
+      </p:sp>
+      <p:sp>
+        <p:nvSpPr>
+          <p:cNvPr id="7" name="TextBox 6"/>
+          <p:cNvSpPr txBox="1"/>
+          <p:nvPr/>
+        </p:nvSpPr>
+        <p:spPr>
+          <a:xfrm>
+            <a:off x="813816" y="502920"/>
+            <a:ext cx="10634472" cy="685800"/>
+          </a:xfrm>
+          <a:prstGeom prst="rect">
+            <a:avLst/>
+          </a:prstGeom>
+          <a:noFill/>
+        </p:spPr>
+        <p:txBody>
+          <a:bodyPr wrap="square">
+            <a:spAutoFit/>
+          </a:bodyPr>
+          <a:lstStyle/>
+          <a:p>
+            <a:pPr algn="l"/>
+            <a:r>
+              <a:rPr sz="2400" b="1" i="0">
+                <a:solidFill>
+                  <a:srgbClr val="1F2C56"/>
+                </a:solidFill>
+                <a:latin typeface="Source Serif 4"/>
+              </a:rPr>
+              <a:t>Potenzialanalyse in agree</a:t>
+            </a:r>
+          </a:p>
+        </p:txBody>
+      </p:sp>
+      <p:sp>
+        <p:nvSpPr>
           <p:cNvPr id="8" name="TextBox 7"/>
           <p:cNvSpPr txBox="1"/>
           <p:nvPr/>
         </p:nvSpPr>
         <p:spPr>
           <a:xfrm>
-            <a:off x="609600" y="2851150"/>
-            <a:ext cx="10972800" cy="3448050"/>
+            <a:off x="685800" y="1417320"/>
+            <a:ext cx="10817352" cy="5029200"/>
           </a:xfrm>
           <a:prstGeom prst="rect">
             <a:avLst/>
@@ -6615,83 +7657,123 @@
         </p:spPr>
         <p:txBody>
           <a:bodyPr wrap="square">
-            <a:normAutofit/>
+            <a:spAutoFit/>
           </a:bodyPr>
           <a:lstStyle/>
           <a:p>
             <a:pPr>
               <a:spcBef>
-                <a:spcPts val="600"/>
+                <a:spcPts val="400"/>
               </a:spcBef>
               <a:spcAft>
-                <a:spcPts val="600"/>
+                <a:spcPts val="200"/>
               </a:spcAft>
             </a:pPr>
             <a:r>
-              <a:rPr sz="1400">
-                <a:solidFill>
-                  <a:srgbClr val="191D2E"/>
-                </a:solidFill>
-                <a:latin typeface="Georgia"/>
+              <a:rPr sz="1200">
+                <a:solidFill>
+                  <a:srgbClr val="3D5466"/>
+                </a:solidFill>
+                <a:latin typeface="Arial"/>
               </a:rPr>
-              <a:t>–  Was macht der Kunde mit uns? (Vollständige Produktlandschaft erfassen)</a:t>
+              <a:t>agree bietet über das CRM-Modul und den UnternehmerDialog strukturierte Hilfsmittel zur Potenzialanalyse. Berater sollten vor jedem Jahresgespräch folgende Felder prüfen:</a:t>
             </a:r>
           </a:p>
           <a:p>
             <a:pPr>
               <a:spcBef>
-                <a:spcPts val="600"/>
+                <a:spcPts val="400"/>
               </a:spcBef>
               <a:spcAft>
-                <a:spcPts val="600"/>
+                <a:spcPts val="200"/>
               </a:spcAft>
             </a:pPr>
             <a:r>
-              <a:rPr sz="1400">
-                <a:solidFill>
-                  <a:srgbClr val="191D2E"/>
-                </a:solidFill>
-                <a:latin typeface="Georgia"/>
+              <a:rPr sz="1200">
+                <a:solidFill>
+                  <a:srgbClr val="3D5466"/>
+                </a:solidFill>
+                <a:latin typeface="Arial"/>
               </a:rPr>
-              <a:t>–  Was könnte er bei uns machen, macht er aber nicht? (Gap identifizieren)</a:t>
-            </a:r>
-          </a:p>
-          <a:p>
-            <a:pPr>
-              <a:spcBef>
-                <a:spcPts val="600"/>
-              </a:spcBef>
-              <a:spcAft>
-                <a:spcPts val="600"/>
-              </a:spcAft>
-            </a:pPr>
-            <a:r>
-              <a:rPr sz="1400">
-                <a:solidFill>
-                  <a:srgbClr val="191D2E"/>
-                </a:solidFill>
-                <a:latin typeface="Georgia"/>
+              <a:t>Empfehlung: Erstellen Sie für Ihre Top-20-Kunden eine einfache Wallet-Share-Schätzung anhand dieser fünf Dimensionen, bevor Sie das Jahresgespräch vorbereiten.</a:t>
+            </a:r>
+          </a:p>
+        </p:txBody>
+      </p:sp>
+      <p:sp>
+        <p:nvSpPr>
+          <p:cNvPr id="9" name="Rectangle 8"/>
+          <p:cNvSpPr/>
+          <p:nvPr/>
+        </p:nvSpPr>
+        <p:spPr>
+          <a:xfrm>
+            <a:off x="0" y="6510528"/>
+            <a:ext cx="12188952" cy="347472"/>
+          </a:xfrm>
+          <a:prstGeom prst="rect">
+            <a:avLst/>
+          </a:prstGeom>
+          <a:solidFill>
+            <a:srgbClr val="0A1937"/>
+          </a:solidFill>
+          <a:ln>
+            <a:noFill/>
+          </a:ln>
+        </p:spPr>
+        <p:style>
+          <a:lnRef idx="1">
+            <a:schemeClr val="accent1"/>
+          </a:lnRef>
+          <a:fillRef idx="3">
+            <a:schemeClr val="accent1"/>
+          </a:fillRef>
+          <a:effectRef idx="2">
+            <a:schemeClr val="accent1"/>
+          </a:effectRef>
+          <a:fontRef idx="minor">
+            <a:schemeClr val="lt1"/>
+          </a:fontRef>
+        </p:style>
+        <p:txBody>
+          <a:bodyPr rtlCol="0" anchor="ctr"/>
+          <a:lstStyle/>
+          <a:p>
+            <a:pPr algn="ctr"/>
+          </a:p>
+        </p:txBody>
+      </p:sp>
+      <p:sp>
+        <p:nvSpPr>
+          <p:cNvPr id="10" name="TextBox 9"/>
+          <p:cNvSpPr txBox="1"/>
+          <p:nvPr/>
+        </p:nvSpPr>
+        <p:spPr>
+          <a:xfrm>
+            <a:off x="685800" y="6583680"/>
+            <a:ext cx="6490411" cy="256032"/>
+          </a:xfrm>
+          <a:prstGeom prst="rect">
+            <a:avLst/>
+          </a:prstGeom>
+          <a:noFill/>
+        </p:spPr>
+        <p:txBody>
+          <a:bodyPr wrap="none">
+            <a:spAutoFit/>
+          </a:bodyPr>
+          <a:lstStyle/>
+          <a:p>
+            <a:pPr algn="l"/>
+            <a:r>
+              <a:rPr sz="700">
+                <a:solidFill>
+                  <a:srgbClr val="A0B4D2"/>
+                </a:solidFill>
+                <a:latin typeface="JetBrains Mono"/>
               </a:rPr>
-              <a:t>–  Was macht er bei Mitbewerbern? (Indirekt erfragen — oft bekannt)</a:t>
-            </a:r>
-          </a:p>
-          <a:p>
-            <a:pPr>
-              <a:spcBef>
-                <a:spcPts val="600"/>
-              </a:spcBef>
-              <a:spcAft>
-                <a:spcPts val="600"/>
-              </a:spcAft>
-            </a:pPr>
-            <a:r>
-              <a:rPr sz="1400">
-                <a:solidFill>
-                  <a:srgbClr val="191D2E"/>
-                </a:solidFill>
-                <a:latin typeface="Georgia"/>
-              </a:rPr>
-              <a:t>–  Ziel: 60–70 % Wallet-Share als Hausbank-Anspruch</a:t>
+              <a:t>Benedikt Zoller Coaching  ·  FKB Campus  ·  M13</a:t>
             </a:r>
           </a:p>
         </p:txBody>
@@ -6707,14 +7789,6 @@
 <file path=ppt/slides/slide7.xml><?xml version="1.0" encoding="utf-8"?>
 <p:sld xmlns:a="http://schemas.openxmlformats.org/drawingml/2006/main" xmlns:p="http://schemas.openxmlformats.org/presentationml/2006/main" xmlns:r="http://schemas.openxmlformats.org/officeDocument/2006/relationships">
   <p:cSld>
-    <p:bg>
-      <p:bgPr>
-        <a:solidFill>
-          <a:srgbClr val="F8F8FA"/>
-        </a:solidFill>
-        <a:effectLst/>
-      </p:bgPr>
-    </p:bg>
     <p:spTree>
       <p:nvGrpSpPr>
         <p:cNvPr id="1" name=""/>
@@ -6724,125 +7798,20 @@
       <p:grpSpPr/>
       <p:sp>
         <p:nvSpPr>
-          <p:cNvPr id="2" name="TextBox 1"/>
-          <p:cNvSpPr txBox="1"/>
-          <p:nvPr/>
-        </p:nvSpPr>
-        <p:spPr>
-          <a:xfrm>
-            <a:off x="609600" y="279400"/>
-            <a:ext cx="2540000" cy="279400"/>
-          </a:xfrm>
-          <a:prstGeom prst="rect">
-            <a:avLst/>
-          </a:prstGeom>
-          <a:noFill/>
-        </p:spPr>
-        <p:txBody>
-          <a:bodyPr wrap="square">
-            <a:normAutofit/>
-          </a:bodyPr>
-          <a:lstStyle/>
-          <a:p>
-            <a:pPr algn="l"/>
-            <a:r>
-              <a:rPr sz="1000" b="1" i="0">
-                <a:solidFill>
-                  <a:srgbClr val="191D2E"/>
-                </a:solidFill>
-                <a:latin typeface="Arial"/>
-              </a:rPr>
-              <a:t>FKB  Campus</a:t>
-            </a:r>
-          </a:p>
-        </p:txBody>
-      </p:sp>
-      <p:sp>
-        <p:nvSpPr>
-          <p:cNvPr id="3" name="TextBox 2"/>
-          <p:cNvSpPr txBox="1"/>
-          <p:nvPr/>
-        </p:nvSpPr>
-        <p:spPr>
-          <a:xfrm>
-            <a:off x="609600" y="279400"/>
-            <a:ext cx="10972800" cy="279400"/>
-          </a:xfrm>
-          <a:prstGeom prst="rect">
-            <a:avLst/>
-          </a:prstGeom>
-          <a:noFill/>
-        </p:spPr>
-        <p:txBody>
-          <a:bodyPr wrap="square">
-            <a:normAutofit/>
-          </a:bodyPr>
-          <a:lstStyle/>
-          <a:p>
-            <a:pPr algn="r"/>
-            <a:r>
-              <a:rPr sz="900" b="0" i="0">
-                <a:solidFill>
-                  <a:srgbClr val="7B7FA0"/>
-                </a:solidFill>
-                <a:latin typeface="Courier New"/>
-              </a:rPr>
-              <a:t>II · POTENZIALE SYSTEMATISCH ENTDECKEN</a:t>
-            </a:r>
-          </a:p>
-        </p:txBody>
-      </p:sp>
-      <p:sp>
-        <p:nvSpPr>
-          <p:cNvPr id="4" name="TextBox 3"/>
-          <p:cNvSpPr txBox="1"/>
-          <p:nvPr/>
-        </p:nvSpPr>
-        <p:spPr>
-          <a:xfrm>
-            <a:off x="609600" y="6426200"/>
-            <a:ext cx="10972800" cy="228600"/>
-          </a:xfrm>
-          <a:prstGeom prst="rect">
-            <a:avLst/>
-          </a:prstGeom>
-          <a:noFill/>
-        </p:spPr>
-        <p:txBody>
-          <a:bodyPr wrap="square">
-            <a:normAutofit/>
-          </a:bodyPr>
-          <a:lstStyle/>
-          <a:p>
-            <a:pPr algn="r"/>
-            <a:r>
-              <a:rPr sz="900" b="0" i="0">
-                <a:solidFill>
-                  <a:srgbClr val="7B7FA0"/>
-                </a:solidFill>
-                <a:latin typeface="Courier New"/>
-              </a:rPr>
-              <a:t>07</a:t>
-            </a:r>
-          </a:p>
-        </p:txBody>
-      </p:sp>
-      <p:sp>
-        <p:nvSpPr>
-          <p:cNvPr id="5" name="Rectangle 4"/>
+          <p:cNvPr id="2" name="Rectangle 1"/>
           <p:cNvSpPr/>
           <p:nvPr/>
         </p:nvSpPr>
         <p:spPr>
           <a:xfrm>
-            <a:off x="609600" y="825500"/>
-            <a:ext cx="10972800" cy="6350"/>
+            <a:off x="0" y="0"/>
+            <a:ext cx="12188952" cy="6858000"/>
           </a:xfrm>
           <a:prstGeom prst="rect">
             <a:avLst/>
           </a:prstGeom>
           <a:solidFill>
-            <a:srgbClr val="191D2E"/>
+            <a:srgbClr val="EDEDF3"/>
           </a:solidFill>
           <a:ln>
             <a:noFill/>
@@ -6872,55 +7841,20 @@
       </p:sp>
       <p:sp>
         <p:nvSpPr>
-          <p:cNvPr id="6" name="TextBox 5"/>
-          <p:cNvSpPr txBox="1"/>
-          <p:nvPr/>
-        </p:nvSpPr>
-        <p:spPr>
-          <a:xfrm>
-            <a:off x="609600" y="920750"/>
-            <a:ext cx="10972800" cy="1778000"/>
-          </a:xfrm>
-          <a:prstGeom prst="rect">
-            <a:avLst/>
-          </a:prstGeom>
-          <a:noFill/>
-        </p:spPr>
-        <p:txBody>
-          <a:bodyPr wrap="square">
-            <a:normAutofit/>
-          </a:bodyPr>
-          <a:lstStyle/>
-          <a:p>
-            <a:pPr algn="l"/>
-            <a:r>
-              <a:rPr sz="3800" b="0" i="0">
-                <a:solidFill>
-                  <a:srgbClr val="191D2E"/>
-                </a:solidFill>
-                <a:latin typeface="Georgia"/>
-              </a:rPr>
-              <a:t>Vier Bedarfsfelder mit Cross-Selling-Potenzial</a:t>
-            </a:r>
-          </a:p>
-        </p:txBody>
-      </p:sp>
-      <p:sp>
-        <p:nvSpPr>
-          <p:cNvPr id="7" name="Rectangle 6"/>
+          <p:cNvPr id="3" name="Rectangle 2"/>
           <p:cNvSpPr/>
           <p:nvPr/>
         </p:nvSpPr>
         <p:spPr>
           <a:xfrm>
-            <a:off x="609600" y="2762250"/>
-            <a:ext cx="10972800" cy="6350"/>
+            <a:off x="0" y="0"/>
+            <a:ext cx="12188952" cy="50292"/>
           </a:xfrm>
           <a:prstGeom prst="rect">
             <a:avLst/>
           </a:prstGeom>
           <a:solidFill>
-            <a:srgbClr val="E0E0E8"/>
+            <a:srgbClr val="1F2C56"/>
           </a:solidFill>
           <a:ln>
             <a:noFill/>
@@ -6950,14 +7884,170 @@
       </p:sp>
       <p:sp>
         <p:nvSpPr>
+          <p:cNvPr id="4" name="TextBox 3"/>
+          <p:cNvSpPr txBox="1"/>
+          <p:nvPr/>
+        </p:nvSpPr>
+        <p:spPr>
+          <a:xfrm>
+            <a:off x="685800" y="109728"/>
+            <a:ext cx="10817352" cy="228600"/>
+          </a:xfrm>
+          <a:prstGeom prst="rect">
+            <a:avLst/>
+          </a:prstGeom>
+          <a:noFill/>
+        </p:spPr>
+        <p:txBody>
+          <a:bodyPr wrap="none">
+            <a:spAutoFit/>
+          </a:bodyPr>
+          <a:lstStyle/>
+          <a:p>
+            <a:pPr algn="l"/>
+            <a:r>
+              <a:rPr sz="750">
+                <a:solidFill>
+                  <a:srgbClr val="78808C"/>
+                </a:solidFill>
+                <a:latin typeface="JetBrains Mono"/>
+              </a:rPr>
+              <a:t>M13  ·  INHALT</a:t>
+            </a:r>
+          </a:p>
+        </p:txBody>
+      </p:sp>
+      <p:sp>
+        <p:nvSpPr>
+          <p:cNvPr id="5" name="Rectangle 4"/>
+          <p:cNvSpPr/>
+          <p:nvPr/>
+        </p:nvSpPr>
+        <p:spPr>
+          <a:xfrm>
+            <a:off x="0" y="1234440"/>
+            <a:ext cx="12188952" cy="12700"/>
+          </a:xfrm>
+          <a:prstGeom prst="rect">
+            <a:avLst/>
+          </a:prstGeom>
+          <a:solidFill>
+            <a:srgbClr val="D8DFE4"/>
+          </a:solidFill>
+          <a:ln>
+            <a:noFill/>
+          </a:ln>
+        </p:spPr>
+        <p:style>
+          <a:lnRef idx="1">
+            <a:schemeClr val="accent1"/>
+          </a:lnRef>
+          <a:fillRef idx="3">
+            <a:schemeClr val="accent1"/>
+          </a:fillRef>
+          <a:effectRef idx="2">
+            <a:schemeClr val="accent1"/>
+          </a:effectRef>
+          <a:fontRef idx="minor">
+            <a:schemeClr val="lt1"/>
+          </a:fontRef>
+        </p:style>
+        <p:txBody>
+          <a:bodyPr rtlCol="0" anchor="ctr"/>
+          <a:lstStyle/>
+          <a:p>
+            <a:pPr algn="ctr"/>
+          </a:p>
+        </p:txBody>
+      </p:sp>
+      <p:sp>
+        <p:nvSpPr>
+          <p:cNvPr id="6" name="Rectangle 5"/>
+          <p:cNvSpPr/>
+          <p:nvPr/>
+        </p:nvSpPr>
+        <p:spPr>
+          <a:xfrm>
+            <a:off x="685800" y="502920"/>
+            <a:ext cx="36576" cy="658368"/>
+          </a:xfrm>
+          <a:prstGeom prst="rect">
+            <a:avLst/>
+          </a:prstGeom>
+          <a:solidFill>
+            <a:srgbClr val="D9C089"/>
+          </a:solidFill>
+          <a:ln>
+            <a:noFill/>
+          </a:ln>
+        </p:spPr>
+        <p:style>
+          <a:lnRef idx="1">
+            <a:schemeClr val="accent1"/>
+          </a:lnRef>
+          <a:fillRef idx="3">
+            <a:schemeClr val="accent1"/>
+          </a:fillRef>
+          <a:effectRef idx="2">
+            <a:schemeClr val="accent1"/>
+          </a:effectRef>
+          <a:fontRef idx="minor">
+            <a:schemeClr val="lt1"/>
+          </a:fontRef>
+        </p:style>
+        <p:txBody>
+          <a:bodyPr rtlCol="0" anchor="ctr"/>
+          <a:lstStyle/>
+          <a:p>
+            <a:pPr algn="ctr"/>
+          </a:p>
+        </p:txBody>
+      </p:sp>
+      <p:sp>
+        <p:nvSpPr>
+          <p:cNvPr id="7" name="TextBox 6"/>
+          <p:cNvSpPr txBox="1"/>
+          <p:nvPr/>
+        </p:nvSpPr>
+        <p:spPr>
+          <a:xfrm>
+            <a:off x="813816" y="502920"/>
+            <a:ext cx="10634472" cy="685800"/>
+          </a:xfrm>
+          <a:prstGeom prst="rect">
+            <a:avLst/>
+          </a:prstGeom>
+          <a:noFill/>
+        </p:spPr>
+        <p:txBody>
+          <a:bodyPr wrap="square">
+            <a:spAutoFit/>
+          </a:bodyPr>
+          <a:lstStyle/>
+          <a:p>
+            <a:pPr algn="l"/>
+            <a:r>
+              <a:rPr sz="2400" b="1" i="0">
+                <a:solidFill>
+                  <a:srgbClr val="1F2C56"/>
+                </a:solidFill>
+                <a:latin typeface="Source Serif 4"/>
+              </a:rPr>
+              <a:t>Ereignisbasierte Cross-Selling-Anlässe</a:t>
+            </a:r>
+          </a:p>
+        </p:txBody>
+      </p:sp>
+      <p:sp>
+        <p:nvSpPr>
           <p:cNvPr id="8" name="TextBox 7"/>
           <p:cNvSpPr txBox="1"/>
           <p:nvPr/>
         </p:nvSpPr>
         <p:spPr>
           <a:xfrm>
-            <a:off x="609600" y="2851150"/>
-            <a:ext cx="10972800" cy="3448050"/>
+            <a:off x="685800" y="1417320"/>
+            <a:ext cx="10817352" cy="5029200"/>
           </a:xfrm>
           <a:prstGeom prst="rect">
             <a:avLst/>
@@ -6966,83 +8056,142 @@
         </p:spPr>
         <p:txBody>
           <a:bodyPr wrap="square">
-            <a:normAutofit/>
+            <a:spAutoFit/>
           </a:bodyPr>
           <a:lstStyle/>
           <a:p>
             <a:pPr>
               <a:spcBef>
-                <a:spcPts val="600"/>
+                <a:spcPts val="400"/>
               </a:spcBef>
               <a:spcAft>
-                <a:spcPts val="600"/>
+                <a:spcPts val="200"/>
               </a:spcAft>
             </a:pPr>
             <a:r>
-              <a:rPr sz="1400">
-                <a:solidFill>
-                  <a:srgbClr val="191D2E"/>
-                </a:solidFill>
-                <a:latin typeface="Georgia"/>
+              <a:rPr sz="1200">
+                <a:solidFill>
+                  <a:srgbClr val="3D5466"/>
+                </a:solidFill>
+                <a:latin typeface="Arial"/>
               </a:rPr>
-              <a:t>–  Absicherung: BU, Schlüsselperson, Betriebsunterbrechung (R+V)</a:t>
+              <a:t>Das Jahresgespräch ist nur einer von vielen Anlässen. In der Praxis öffnen oft Ereignisse das Gespräch besser als der Jahreskalender – weil der Bedarf dann für den Kunden selbst spürbar ist:</a:t>
             </a:r>
           </a:p>
           <a:p>
             <a:pPr>
               <a:spcBef>
-                <a:spcPts val="600"/>
+                <a:spcPts val="400"/>
               </a:spcBef>
               <a:spcAft>
-                <a:spcPts val="600"/>
+                <a:spcPts val="200"/>
               </a:spcAft>
             </a:pPr>
             <a:r>
-              <a:rPr sz="1400">
-                <a:solidFill>
-                  <a:srgbClr val="191D2E"/>
-                </a:solidFill>
-                <a:latin typeface="Georgia"/>
+              <a:rPr sz="1200">
+                <a:solidFill>
+                  <a:srgbClr val="3D5466"/>
+                </a:solidFill>
+                <a:latin typeface="Arial"/>
               </a:rPr>
-              <a:t>–  Altersvorsorge: bAV, Gesellschafter-GF-Versorgung (R+V, Union)</a:t>
+              <a:t>## 4.3 Der 4-Schritte-Cross-Selling-Prozess</a:t>
             </a:r>
           </a:p>
           <a:p>
             <a:pPr>
               <a:spcBef>
-                <a:spcPts val="600"/>
+                <a:spcPts val="400"/>
               </a:spcBef>
               <a:spcAft>
-                <a:spcPts val="600"/>
+                <a:spcPts val="200"/>
               </a:spcAft>
             </a:pPr>
             <a:r>
-              <a:rPr sz="1400">
-                <a:solidFill>
-                  <a:srgbClr val="191D2E"/>
-                </a:solidFill>
-                <a:latin typeface="Georgia"/>
+              <a:rPr sz="1200">
+                <a:solidFill>
+                  <a:srgbClr val="3D5466"/>
+                </a:solidFill>
+                <a:latin typeface="Arial"/>
               </a:rPr>
-              <a:t>–  Kapitalanlage: Liquiditätsreserven anlegen (Union Investment)</a:t>
-            </a:r>
-          </a:p>
-          <a:p>
-            <a:pPr>
-              <a:spcBef>
-                <a:spcPts val="600"/>
-              </a:spcBef>
-              <a:spcAft>
-                <a:spcPts val="600"/>
-              </a:spcAft>
-            </a:pPr>
-            <a:r>
-              <a:rPr sz="1400">
-                <a:solidFill>
-                  <a:srgbClr val="191D2E"/>
-                </a:solidFill>
-                <a:latin typeface="Georgia"/>
+              <a:t>Systematisches Cross-Selling folgt einem klaren Prozess – nicht dem Zufall eines Gesprächsmoments.</a:t>
+            </a:r>
+          </a:p>
+        </p:txBody>
+      </p:sp>
+      <p:sp>
+        <p:nvSpPr>
+          <p:cNvPr id="9" name="Rectangle 8"/>
+          <p:cNvSpPr/>
+          <p:nvPr/>
+        </p:nvSpPr>
+        <p:spPr>
+          <a:xfrm>
+            <a:off x="0" y="6510528"/>
+            <a:ext cx="12188952" cy="347472"/>
+          </a:xfrm>
+          <a:prstGeom prst="rect">
+            <a:avLst/>
+          </a:prstGeom>
+          <a:solidFill>
+            <a:srgbClr val="0A1937"/>
+          </a:solidFill>
+          <a:ln>
+            <a:noFill/>
+          </a:ln>
+        </p:spPr>
+        <p:style>
+          <a:lnRef idx="1">
+            <a:schemeClr val="accent1"/>
+          </a:lnRef>
+          <a:fillRef idx="3">
+            <a:schemeClr val="accent1"/>
+          </a:fillRef>
+          <a:effectRef idx="2">
+            <a:schemeClr val="accent1"/>
+          </a:effectRef>
+          <a:fontRef idx="minor">
+            <a:schemeClr val="lt1"/>
+          </a:fontRef>
+        </p:style>
+        <p:txBody>
+          <a:bodyPr rtlCol="0" anchor="ctr"/>
+          <a:lstStyle/>
+          <a:p>
+            <a:pPr algn="ctr"/>
+          </a:p>
+        </p:txBody>
+      </p:sp>
+      <p:sp>
+        <p:nvSpPr>
+          <p:cNvPr id="10" name="TextBox 9"/>
+          <p:cNvSpPr txBox="1"/>
+          <p:nvPr/>
+        </p:nvSpPr>
+        <p:spPr>
+          <a:xfrm>
+            <a:off x="685800" y="6583680"/>
+            <a:ext cx="6490411" cy="256032"/>
+          </a:xfrm>
+          <a:prstGeom prst="rect">
+            <a:avLst/>
+          </a:prstGeom>
+          <a:noFill/>
+        </p:spPr>
+        <p:txBody>
+          <a:bodyPr wrap="none">
+            <a:spAutoFit/>
+          </a:bodyPr>
+          <a:lstStyle/>
+          <a:p>
+            <a:pPr algn="l"/>
+            <a:r>
+              <a:rPr sz="700">
+                <a:solidFill>
+                  <a:srgbClr val="A0B4D2"/>
+                </a:solidFill>
+                <a:latin typeface="JetBrains Mono"/>
               </a:rPr>
-              <a:t>–  Immobilienfinanzierung: Privat und betrieblich (MünchenerHyp, Schwäbisch Hall)</a:t>
+              <a:t>Benedikt Zoller Coaching  ·  FKB Campus  ·  M13</a:t>
             </a:r>
           </a:p>
         </p:txBody>
@@ -7058,14 +8207,6 @@
 <file path=ppt/slides/slide8.xml><?xml version="1.0" encoding="utf-8"?>
 <p:sld xmlns:a="http://schemas.openxmlformats.org/drawingml/2006/main" xmlns:p="http://schemas.openxmlformats.org/presentationml/2006/main" xmlns:r="http://schemas.openxmlformats.org/officeDocument/2006/relationships">
   <p:cSld>
-    <p:bg>
-      <p:bgPr>
-        <a:solidFill>
-          <a:srgbClr val="1F2B56"/>
-        </a:solidFill>
-        <a:effectLst/>
-      </p:bgPr>
-    </p:bg>
     <p:spTree>
       <p:nvGrpSpPr>
         <p:cNvPr id="1" name=""/>
@@ -7075,14 +8216,100 @@
       <p:grpSpPr/>
       <p:sp>
         <p:nvSpPr>
-          <p:cNvPr id="2" name="TextBox 1"/>
+          <p:cNvPr id="2" name="Rectangle 1"/>
+          <p:cNvSpPr/>
+          <p:nvPr/>
+        </p:nvSpPr>
+        <p:spPr>
+          <a:xfrm>
+            <a:off x="0" y="0"/>
+            <a:ext cx="12188952" cy="6858000"/>
+          </a:xfrm>
+          <a:prstGeom prst="rect">
+            <a:avLst/>
+          </a:prstGeom>
+          <a:solidFill>
+            <a:srgbClr val="EDEDF3"/>
+          </a:solidFill>
+          <a:ln>
+            <a:noFill/>
+          </a:ln>
+        </p:spPr>
+        <p:style>
+          <a:lnRef idx="1">
+            <a:schemeClr val="accent1"/>
+          </a:lnRef>
+          <a:fillRef idx="3">
+            <a:schemeClr val="accent1"/>
+          </a:fillRef>
+          <a:effectRef idx="2">
+            <a:schemeClr val="accent1"/>
+          </a:effectRef>
+          <a:fontRef idx="minor">
+            <a:schemeClr val="lt1"/>
+          </a:fontRef>
+        </p:style>
+        <p:txBody>
+          <a:bodyPr rtlCol="0" anchor="ctr"/>
+          <a:lstStyle/>
+          <a:p>
+            <a:pPr algn="ctr"/>
+          </a:p>
+        </p:txBody>
+      </p:sp>
+      <p:sp>
+        <p:nvSpPr>
+          <p:cNvPr id="3" name="Rectangle 2"/>
+          <p:cNvSpPr/>
+          <p:nvPr/>
+        </p:nvSpPr>
+        <p:spPr>
+          <a:xfrm>
+            <a:off x="0" y="0"/>
+            <a:ext cx="12188952" cy="50292"/>
+          </a:xfrm>
+          <a:prstGeom prst="rect">
+            <a:avLst/>
+          </a:prstGeom>
+          <a:solidFill>
+            <a:srgbClr val="1F2C56"/>
+          </a:solidFill>
+          <a:ln>
+            <a:noFill/>
+          </a:ln>
+        </p:spPr>
+        <p:style>
+          <a:lnRef idx="1">
+            <a:schemeClr val="accent1"/>
+          </a:lnRef>
+          <a:fillRef idx="3">
+            <a:schemeClr val="accent1"/>
+          </a:fillRef>
+          <a:effectRef idx="2">
+            <a:schemeClr val="accent1"/>
+          </a:effectRef>
+          <a:fontRef idx="minor">
+            <a:schemeClr val="lt1"/>
+          </a:fontRef>
+        </p:style>
+        <p:txBody>
+          <a:bodyPr rtlCol="0" anchor="ctr"/>
+          <a:lstStyle/>
+          <a:p>
+            <a:pPr algn="ctr"/>
+          </a:p>
+        </p:txBody>
+      </p:sp>
+      <p:sp>
+        <p:nvSpPr>
+          <p:cNvPr id="4" name="TextBox 3"/>
           <p:cNvSpPr txBox="1"/>
           <p:nvPr/>
         </p:nvSpPr>
         <p:spPr>
           <a:xfrm>
-            <a:off x="609600" y="279400"/>
-            <a:ext cx="2540000" cy="279400"/>
+            <a:off x="685800" y="109728"/>
+            <a:ext cx="10817352" cy="228600"/>
           </a:xfrm>
           <a:prstGeom prst="rect">
             <a:avLst/>
@@ -7090,34 +8317,297 @@
           <a:noFill/>
         </p:spPr>
         <p:txBody>
+          <a:bodyPr wrap="none">
+            <a:spAutoFit/>
+          </a:bodyPr>
+          <a:lstStyle/>
+          <a:p>
+            <a:pPr algn="l"/>
+            <a:r>
+              <a:rPr sz="750">
+                <a:solidFill>
+                  <a:srgbClr val="78808C"/>
+                </a:solidFill>
+                <a:latin typeface="JetBrains Mono"/>
+              </a:rPr>
+              <a:t>M13  ·  INHALT</a:t>
+            </a:r>
+          </a:p>
+        </p:txBody>
+      </p:sp>
+      <p:sp>
+        <p:nvSpPr>
+          <p:cNvPr id="5" name="Rectangle 4"/>
+          <p:cNvSpPr/>
+          <p:nvPr/>
+        </p:nvSpPr>
+        <p:spPr>
+          <a:xfrm>
+            <a:off x="0" y="1234440"/>
+            <a:ext cx="12188952" cy="12700"/>
+          </a:xfrm>
+          <a:prstGeom prst="rect">
+            <a:avLst/>
+          </a:prstGeom>
+          <a:solidFill>
+            <a:srgbClr val="D8DFE4"/>
+          </a:solidFill>
+          <a:ln>
+            <a:noFill/>
+          </a:ln>
+        </p:spPr>
+        <p:style>
+          <a:lnRef idx="1">
+            <a:schemeClr val="accent1"/>
+          </a:lnRef>
+          <a:fillRef idx="3">
+            <a:schemeClr val="accent1"/>
+          </a:fillRef>
+          <a:effectRef idx="2">
+            <a:schemeClr val="accent1"/>
+          </a:effectRef>
+          <a:fontRef idx="minor">
+            <a:schemeClr val="lt1"/>
+          </a:fontRef>
+        </p:style>
+        <p:txBody>
+          <a:bodyPr rtlCol="0" anchor="ctr"/>
+          <a:lstStyle/>
+          <a:p>
+            <a:pPr algn="ctr"/>
+          </a:p>
+        </p:txBody>
+      </p:sp>
+      <p:sp>
+        <p:nvSpPr>
+          <p:cNvPr id="6" name="Rectangle 5"/>
+          <p:cNvSpPr/>
+          <p:nvPr/>
+        </p:nvSpPr>
+        <p:spPr>
+          <a:xfrm>
+            <a:off x="685800" y="502920"/>
+            <a:ext cx="36576" cy="658368"/>
+          </a:xfrm>
+          <a:prstGeom prst="rect">
+            <a:avLst/>
+          </a:prstGeom>
+          <a:solidFill>
+            <a:srgbClr val="D9C089"/>
+          </a:solidFill>
+          <a:ln>
+            <a:noFill/>
+          </a:ln>
+        </p:spPr>
+        <p:style>
+          <a:lnRef idx="1">
+            <a:schemeClr val="accent1"/>
+          </a:lnRef>
+          <a:fillRef idx="3">
+            <a:schemeClr val="accent1"/>
+          </a:fillRef>
+          <a:effectRef idx="2">
+            <a:schemeClr val="accent1"/>
+          </a:effectRef>
+          <a:fontRef idx="minor">
+            <a:schemeClr val="lt1"/>
+          </a:fontRef>
+        </p:style>
+        <p:txBody>
+          <a:bodyPr rtlCol="0" anchor="ctr"/>
+          <a:lstStyle/>
+          <a:p>
+            <a:pPr algn="ctr"/>
+          </a:p>
+        </p:txBody>
+      </p:sp>
+      <p:sp>
+        <p:nvSpPr>
+          <p:cNvPr id="7" name="TextBox 6"/>
+          <p:cNvSpPr txBox="1"/>
+          <p:nvPr/>
+        </p:nvSpPr>
+        <p:spPr>
+          <a:xfrm>
+            <a:off x="813816" y="502920"/>
+            <a:ext cx="10634472" cy="685800"/>
+          </a:xfrm>
+          <a:prstGeom prst="rect">
+            <a:avLst/>
+          </a:prstGeom>
+          <a:noFill/>
+        </p:spPr>
+        <p:txBody>
           <a:bodyPr wrap="square">
-            <a:normAutofit/>
+            <a:spAutoFit/>
           </a:bodyPr>
           <a:lstStyle/>
           <a:p>
             <a:pPr algn="l"/>
             <a:r>
-              <a:rPr sz="1000" b="1" i="0">
-                <a:solidFill>
-                  <a:srgbClr val="F8F8FA"/>
+              <a:rPr sz="2400" b="1" i="0">
+                <a:solidFill>
+                  <a:srgbClr val="1F2C56"/>
+                </a:solidFill>
+                <a:latin typeface="Source Serif 4"/>
+              </a:rPr>
+              <a:t>Schritt 1: Analyse</a:t>
+            </a:r>
+          </a:p>
+        </p:txBody>
+      </p:sp>
+      <p:sp>
+        <p:nvSpPr>
+          <p:cNvPr id="8" name="TextBox 7"/>
+          <p:cNvSpPr txBox="1"/>
+          <p:nvPr/>
+        </p:nvSpPr>
+        <p:spPr>
+          <a:xfrm>
+            <a:off x="685800" y="1417320"/>
+            <a:ext cx="10817352" cy="5029200"/>
+          </a:xfrm>
+          <a:prstGeom prst="rect">
+            <a:avLst/>
+          </a:prstGeom>
+          <a:noFill/>
+        </p:spPr>
+        <p:txBody>
+          <a:bodyPr wrap="square">
+            <a:spAutoFit/>
+          </a:bodyPr>
+          <a:lstStyle/>
+          <a:p>
+            <a:pPr>
+              <a:spcBef>
+                <a:spcPts val="400"/>
+              </a:spcBef>
+              <a:spcAft>
+                <a:spcPts val="200"/>
+              </a:spcAft>
+            </a:pPr>
+            <a:r>
+              <a:rPr sz="1200">
+                <a:solidFill>
+                  <a:srgbClr val="3D5466"/>
                 </a:solidFill>
                 <a:latin typeface="Arial"/>
               </a:rPr>
-              <a:t>FKB  Campus</a:t>
-            </a:r>
-          </a:p>
-        </p:txBody>
-      </p:sp>
-      <p:sp>
-        <p:nvSpPr>
-          <p:cNvPr id="3" name="TextBox 2"/>
+              <a:t>Wer? Welcher Kunde hat das größte unausgeschöpfte Potenzial?</a:t>
+            </a:r>
+          </a:p>
+          <a:p>
+            <a:pPr>
+              <a:spcBef>
+                <a:spcPts val="400"/>
+              </a:spcBef>
+              <a:spcAft>
+                <a:spcPts val="200"/>
+              </a:spcAft>
+            </a:pPr>
+            <a:r>
+              <a:rPr sz="1200">
+                <a:solidFill>
+                  <a:srgbClr val="3D5466"/>
+                </a:solidFill>
+                <a:latin typeface="Arial"/>
+              </a:rPr>
+              <a:t>Was? In welchem Bedarfsfeld liegt das Potenzial (Finanzierung, Absicherung, Anlage, ZV)?</a:t>
+            </a:r>
+          </a:p>
+          <a:p>
+            <a:pPr>
+              <a:spcBef>
+                <a:spcPts val="400"/>
+              </a:spcBef>
+              <a:spcAft>
+                <a:spcPts val="200"/>
+              </a:spcAft>
+            </a:pPr>
+            <a:r>
+              <a:rPr sz="1200">
+                <a:solidFill>
+                  <a:srgbClr val="3D5466"/>
+                </a:solidFill>
+                <a:latin typeface="Arial"/>
+              </a:rPr>
+              <a:t>Datenquellen: agree CRM, Jahreskontospiegel, Kreditakten, Verbundpartner-Cockpit</a:t>
+            </a:r>
+          </a:p>
+          <a:p>
+            <a:pPr>
+              <a:spcBef>
+                <a:spcPts val="400"/>
+              </a:spcBef>
+              <a:spcAft>
+                <a:spcPts val="200"/>
+              </a:spcAft>
+            </a:pPr>
+            <a:r>
+              <a:rPr sz="1200">
+                <a:solidFill>
+                  <a:srgbClr val="3D5466"/>
+                </a:solidFill>
+                <a:latin typeface="Arial"/>
+              </a:rPr>
+              <a:t>Ergebnis: Eine priorisierte Liste von 3–5 Cross-Selling-Hypothesen für diesen Kunden.</a:t>
+            </a:r>
+          </a:p>
+        </p:txBody>
+      </p:sp>
+      <p:sp>
+        <p:nvSpPr>
+          <p:cNvPr id="9" name="Rectangle 8"/>
+          <p:cNvSpPr/>
+          <p:nvPr/>
+        </p:nvSpPr>
+        <p:spPr>
+          <a:xfrm>
+            <a:off x="0" y="6510528"/>
+            <a:ext cx="12188952" cy="347472"/>
+          </a:xfrm>
+          <a:prstGeom prst="rect">
+            <a:avLst/>
+          </a:prstGeom>
+          <a:solidFill>
+            <a:srgbClr val="0A1937"/>
+          </a:solidFill>
+          <a:ln>
+            <a:noFill/>
+          </a:ln>
+        </p:spPr>
+        <p:style>
+          <a:lnRef idx="1">
+            <a:schemeClr val="accent1"/>
+          </a:lnRef>
+          <a:fillRef idx="3">
+            <a:schemeClr val="accent1"/>
+          </a:fillRef>
+          <a:effectRef idx="2">
+            <a:schemeClr val="accent1"/>
+          </a:effectRef>
+          <a:fontRef idx="minor">
+            <a:schemeClr val="lt1"/>
+          </a:fontRef>
+        </p:style>
+        <p:txBody>
+          <a:bodyPr rtlCol="0" anchor="ctr"/>
+          <a:lstStyle/>
+          <a:p>
+            <a:pPr algn="ctr"/>
+          </a:p>
+        </p:txBody>
+      </p:sp>
+      <p:sp>
+        <p:nvSpPr>
+          <p:cNvPr id="10" name="TextBox 9"/>
           <p:cNvSpPr txBox="1"/>
           <p:nvPr/>
         </p:nvSpPr>
         <p:spPr>
           <a:xfrm>
-            <a:off x="609600" y="279400"/>
-            <a:ext cx="10972800" cy="279400"/>
+            <a:off x="685800" y="6583680"/>
+            <a:ext cx="6490411" cy="256032"/>
           </a:xfrm>
           <a:prstGeom prst="rect">
             <a:avLst/>
@@ -7125,160 +8615,20 @@
           <a:noFill/>
         </p:spPr>
         <p:txBody>
-          <a:bodyPr wrap="square">
-            <a:normAutofit/>
+          <a:bodyPr wrap="none">
+            <a:spAutoFit/>
           </a:bodyPr>
           <a:lstStyle/>
           <a:p>
-            <a:pPr algn="r"/>
-            <a:r>
-              <a:rPr sz="900" b="0" i="0">
-                <a:solidFill>
-                  <a:srgbClr val="7B7FA0"/>
-                </a:solidFill>
-                <a:latin typeface="Courier New"/>
+            <a:pPr algn="l"/>
+            <a:r>
+              <a:rPr sz="700">
+                <a:solidFill>
+                  <a:srgbClr val="A0B4D2"/>
+                </a:solidFill>
+                <a:latin typeface="JetBrains Mono"/>
               </a:rPr>
-              <a:t>DER 4-SCHRITTE-PROZESS</a:t>
-            </a:r>
-          </a:p>
-        </p:txBody>
-      </p:sp>
-      <p:sp>
-        <p:nvSpPr>
-          <p:cNvPr id="4" name="TextBox 3"/>
-          <p:cNvSpPr txBox="1"/>
-          <p:nvPr/>
-        </p:nvSpPr>
-        <p:spPr>
-          <a:xfrm>
-            <a:off x="609600" y="6426200"/>
-            <a:ext cx="10972800" cy="228600"/>
-          </a:xfrm>
-          <a:prstGeom prst="rect">
-            <a:avLst/>
-          </a:prstGeom>
-          <a:noFill/>
-        </p:spPr>
-        <p:txBody>
-          <a:bodyPr wrap="square">
-            <a:normAutofit/>
-          </a:bodyPr>
-          <a:lstStyle/>
-          <a:p>
-            <a:pPr algn="r"/>
-            <a:r>
-              <a:rPr sz="900" b="0" i="0">
-                <a:solidFill>
-                  <a:srgbClr val="7B7FA0"/>
-                </a:solidFill>
-                <a:latin typeface="Courier New"/>
-              </a:rPr>
-              <a:t>08</a:t>
-            </a:r>
-          </a:p>
-        </p:txBody>
-      </p:sp>
-      <p:sp>
-        <p:nvSpPr>
-          <p:cNvPr id="5" name="TextBox 4"/>
-          <p:cNvSpPr txBox="1"/>
-          <p:nvPr/>
-        </p:nvSpPr>
-        <p:spPr>
-          <a:xfrm>
-            <a:off x="609600" y="635000"/>
-            <a:ext cx="5461000" cy="5461000"/>
-          </a:xfrm>
-          <a:prstGeom prst="rect">
-            <a:avLst/>
-          </a:prstGeom>
-          <a:noFill/>
-        </p:spPr>
-        <p:txBody>
-          <a:bodyPr wrap="square">
-            <a:normAutofit/>
-          </a:bodyPr>
-          <a:lstStyle/>
-          <a:p>
-            <a:pPr algn="l"/>
-            <a:r>
-              <a:rPr sz="28000" b="0" i="1">
-                <a:solidFill>
-                  <a:srgbClr val="D9BF7A"/>
-                </a:solidFill>
-                <a:latin typeface="Georgia"/>
-              </a:rPr>
-              <a:t>III</a:t>
-            </a:r>
-          </a:p>
-        </p:txBody>
-      </p:sp>
-      <p:sp>
-        <p:nvSpPr>
-          <p:cNvPr id="6" name="TextBox 5"/>
-          <p:cNvSpPr txBox="1"/>
-          <p:nvPr/>
-        </p:nvSpPr>
-        <p:spPr>
-          <a:xfrm>
-            <a:off x="6731000" y="4064000"/>
-            <a:ext cx="4851400" cy="1778000"/>
-          </a:xfrm>
-          <a:prstGeom prst="rect">
-            <a:avLst/>
-          </a:prstGeom>
-          <a:noFill/>
-        </p:spPr>
-        <p:txBody>
-          <a:bodyPr wrap="square">
-            <a:normAutofit/>
-          </a:bodyPr>
-          <a:lstStyle/>
-          <a:p>
-            <a:pPr algn="r"/>
-            <a:r>
-              <a:rPr sz="3800" b="0" i="0">
-                <a:solidFill>
-                  <a:srgbClr val="F8F8FA"/>
-                </a:solidFill>
-                <a:latin typeface="Georgia"/>
-              </a:rPr>
-              <a:t>Der 4-Schritte-Prozess</a:t>
-            </a:r>
-          </a:p>
-        </p:txBody>
-      </p:sp>
-      <p:sp>
-        <p:nvSpPr>
-          <p:cNvPr id="7" name="TextBox 6"/>
-          <p:cNvSpPr txBox="1"/>
-          <p:nvPr/>
-        </p:nvSpPr>
-        <p:spPr>
-          <a:xfrm>
-            <a:off x="6731000" y="5842000"/>
-            <a:ext cx="4851400" cy="635000"/>
-          </a:xfrm>
-          <a:prstGeom prst="rect">
-            <a:avLst/>
-          </a:prstGeom>
-          <a:noFill/>
-        </p:spPr>
-        <p:txBody>
-          <a:bodyPr wrap="square">
-            <a:normAutofit/>
-          </a:bodyPr>
-          <a:lstStyle/>
-          <a:p>
-            <a:pPr algn="r"/>
-            <a:r>
-              <a:rPr sz="1400" b="0" i="1">
-                <a:solidFill>
-                  <a:srgbClr val="7B7FA0"/>
-                </a:solidFill>
-                <a:latin typeface="Georgia"/>
-              </a:rPr>
-              <a:t>Analyse — Hypothese — Gespräch — Dokumentation</a:t>
+              <a:t>Benedikt Zoller Coaching  ·  FKB Campus  ·  M13</a:t>
             </a:r>
           </a:p>
         </p:txBody>
@@ -7294,14 +8644,6 @@
 <file path=ppt/slides/slide9.xml><?xml version="1.0" encoding="utf-8"?>
 <p:sld xmlns:a="http://schemas.openxmlformats.org/drawingml/2006/main" xmlns:p="http://schemas.openxmlformats.org/presentationml/2006/main" xmlns:r="http://schemas.openxmlformats.org/officeDocument/2006/relationships">
   <p:cSld>
-    <p:bg>
-      <p:bgPr>
-        <a:solidFill>
-          <a:srgbClr val="F8F8FA"/>
-        </a:solidFill>
-        <a:effectLst/>
-      </p:bgPr>
-    </p:bg>
     <p:spTree>
       <p:nvGrpSpPr>
         <p:cNvPr id="1" name=""/>
@@ -7311,125 +8653,20 @@
       <p:grpSpPr/>
       <p:sp>
         <p:nvSpPr>
-          <p:cNvPr id="2" name="TextBox 1"/>
-          <p:cNvSpPr txBox="1"/>
-          <p:nvPr/>
-        </p:nvSpPr>
-        <p:spPr>
-          <a:xfrm>
-            <a:off x="609600" y="279400"/>
-            <a:ext cx="2540000" cy="279400"/>
-          </a:xfrm>
-          <a:prstGeom prst="rect">
-            <a:avLst/>
-          </a:prstGeom>
-          <a:noFill/>
-        </p:spPr>
-        <p:txBody>
-          <a:bodyPr wrap="square">
-            <a:normAutofit/>
-          </a:bodyPr>
-          <a:lstStyle/>
-          <a:p>
-            <a:pPr algn="l"/>
-            <a:r>
-              <a:rPr sz="1000" b="1" i="0">
-                <a:solidFill>
-                  <a:srgbClr val="191D2E"/>
-                </a:solidFill>
-                <a:latin typeface="Arial"/>
-              </a:rPr>
-              <a:t>FKB  Campus</a:t>
-            </a:r>
-          </a:p>
-        </p:txBody>
-      </p:sp>
-      <p:sp>
-        <p:nvSpPr>
-          <p:cNvPr id="3" name="TextBox 2"/>
-          <p:cNvSpPr txBox="1"/>
-          <p:nvPr/>
-        </p:nvSpPr>
-        <p:spPr>
-          <a:xfrm>
-            <a:off x="609600" y="279400"/>
-            <a:ext cx="10972800" cy="279400"/>
-          </a:xfrm>
-          <a:prstGeom prst="rect">
-            <a:avLst/>
-          </a:prstGeom>
-          <a:noFill/>
-        </p:spPr>
-        <p:txBody>
-          <a:bodyPr wrap="square">
-            <a:normAutofit/>
-          </a:bodyPr>
-          <a:lstStyle/>
-          <a:p>
-            <a:pPr algn="r"/>
-            <a:r>
-              <a:rPr sz="900" b="0" i="0">
-                <a:solidFill>
-                  <a:srgbClr val="7B7FA0"/>
-                </a:solidFill>
-                <a:latin typeface="Courier New"/>
-              </a:rPr>
-              <a:t>III · DER 4-SCHRITTE-PROZESS</a:t>
-            </a:r>
-          </a:p>
-        </p:txBody>
-      </p:sp>
-      <p:sp>
-        <p:nvSpPr>
-          <p:cNvPr id="4" name="TextBox 3"/>
-          <p:cNvSpPr txBox="1"/>
-          <p:nvPr/>
-        </p:nvSpPr>
-        <p:spPr>
-          <a:xfrm>
-            <a:off x="609600" y="6426200"/>
-            <a:ext cx="10972800" cy="228600"/>
-          </a:xfrm>
-          <a:prstGeom prst="rect">
-            <a:avLst/>
-          </a:prstGeom>
-          <a:noFill/>
-        </p:spPr>
-        <p:txBody>
-          <a:bodyPr wrap="square">
-            <a:normAutofit/>
-          </a:bodyPr>
-          <a:lstStyle/>
-          <a:p>
-            <a:pPr algn="r"/>
-            <a:r>
-              <a:rPr sz="900" b="0" i="0">
-                <a:solidFill>
-                  <a:srgbClr val="7B7FA0"/>
-                </a:solidFill>
-                <a:latin typeface="Courier New"/>
-              </a:rPr>
-              <a:t>09</a:t>
-            </a:r>
-          </a:p>
-        </p:txBody>
-      </p:sp>
-      <p:sp>
-        <p:nvSpPr>
-          <p:cNvPr id="5" name="Rectangle 4"/>
+          <p:cNvPr id="2" name="Rectangle 1"/>
           <p:cNvSpPr/>
           <p:nvPr/>
         </p:nvSpPr>
         <p:spPr>
           <a:xfrm>
-            <a:off x="609600" y="825500"/>
-            <a:ext cx="10972800" cy="6350"/>
+            <a:off x="0" y="0"/>
+            <a:ext cx="12188952" cy="6858000"/>
           </a:xfrm>
           <a:prstGeom prst="rect">
             <a:avLst/>
           </a:prstGeom>
           <a:solidFill>
-            <a:srgbClr val="191D2E"/>
+            <a:srgbClr val="EDEDF3"/>
           </a:solidFill>
           <a:ln>
             <a:noFill/>
@@ -7459,55 +8696,20 @@
       </p:sp>
       <p:sp>
         <p:nvSpPr>
-          <p:cNvPr id="6" name="TextBox 5"/>
-          <p:cNvSpPr txBox="1"/>
-          <p:nvPr/>
-        </p:nvSpPr>
-        <p:spPr>
-          <a:xfrm>
-            <a:off x="609600" y="920750"/>
-            <a:ext cx="10972800" cy="1778000"/>
-          </a:xfrm>
-          <a:prstGeom prst="rect">
-            <a:avLst/>
-          </a:prstGeom>
-          <a:noFill/>
-        </p:spPr>
-        <p:txBody>
-          <a:bodyPr wrap="square">
-            <a:normAutofit/>
-          </a:bodyPr>
-          <a:lstStyle/>
-          <a:p>
-            <a:pPr algn="l"/>
-            <a:r>
-              <a:rPr sz="3800" b="0" i="0">
-                <a:solidFill>
-                  <a:srgbClr val="191D2E"/>
-                </a:solidFill>
-                <a:latin typeface="Georgia"/>
-              </a:rPr>
-              <a:t>Cross-Selling in vier Schritten</a:t>
-            </a:r>
-          </a:p>
-        </p:txBody>
-      </p:sp>
-      <p:sp>
-        <p:nvSpPr>
-          <p:cNvPr id="7" name="Rectangle 6"/>
+          <p:cNvPr id="3" name="Rectangle 2"/>
           <p:cNvSpPr/>
           <p:nvPr/>
         </p:nvSpPr>
         <p:spPr>
           <a:xfrm>
-            <a:off x="609600" y="2762250"/>
-            <a:ext cx="10972800" cy="6350"/>
+            <a:off x="0" y="0"/>
+            <a:ext cx="12188952" cy="50292"/>
           </a:xfrm>
           <a:prstGeom prst="rect">
             <a:avLst/>
           </a:prstGeom>
           <a:solidFill>
-            <a:srgbClr val="E0E0E8"/>
+            <a:srgbClr val="1F2C56"/>
           </a:solidFill>
           <a:ln>
             <a:noFill/>
@@ -7537,14 +8739,170 @@
       </p:sp>
       <p:sp>
         <p:nvSpPr>
+          <p:cNvPr id="4" name="TextBox 3"/>
+          <p:cNvSpPr txBox="1"/>
+          <p:nvPr/>
+        </p:nvSpPr>
+        <p:spPr>
+          <a:xfrm>
+            <a:off x="685800" y="109728"/>
+            <a:ext cx="10817352" cy="228600"/>
+          </a:xfrm>
+          <a:prstGeom prst="rect">
+            <a:avLst/>
+          </a:prstGeom>
+          <a:noFill/>
+        </p:spPr>
+        <p:txBody>
+          <a:bodyPr wrap="none">
+            <a:spAutoFit/>
+          </a:bodyPr>
+          <a:lstStyle/>
+          <a:p>
+            <a:pPr algn="l"/>
+            <a:r>
+              <a:rPr sz="750">
+                <a:solidFill>
+                  <a:srgbClr val="78808C"/>
+                </a:solidFill>
+                <a:latin typeface="JetBrains Mono"/>
+              </a:rPr>
+              <a:t>M13  ·  INHALT</a:t>
+            </a:r>
+          </a:p>
+        </p:txBody>
+      </p:sp>
+      <p:sp>
+        <p:nvSpPr>
+          <p:cNvPr id="5" name="Rectangle 4"/>
+          <p:cNvSpPr/>
+          <p:nvPr/>
+        </p:nvSpPr>
+        <p:spPr>
+          <a:xfrm>
+            <a:off x="0" y="1234440"/>
+            <a:ext cx="12188952" cy="12700"/>
+          </a:xfrm>
+          <a:prstGeom prst="rect">
+            <a:avLst/>
+          </a:prstGeom>
+          <a:solidFill>
+            <a:srgbClr val="D8DFE4"/>
+          </a:solidFill>
+          <a:ln>
+            <a:noFill/>
+          </a:ln>
+        </p:spPr>
+        <p:style>
+          <a:lnRef idx="1">
+            <a:schemeClr val="accent1"/>
+          </a:lnRef>
+          <a:fillRef idx="3">
+            <a:schemeClr val="accent1"/>
+          </a:fillRef>
+          <a:effectRef idx="2">
+            <a:schemeClr val="accent1"/>
+          </a:effectRef>
+          <a:fontRef idx="minor">
+            <a:schemeClr val="lt1"/>
+          </a:fontRef>
+        </p:style>
+        <p:txBody>
+          <a:bodyPr rtlCol="0" anchor="ctr"/>
+          <a:lstStyle/>
+          <a:p>
+            <a:pPr algn="ctr"/>
+          </a:p>
+        </p:txBody>
+      </p:sp>
+      <p:sp>
+        <p:nvSpPr>
+          <p:cNvPr id="6" name="Rectangle 5"/>
+          <p:cNvSpPr/>
+          <p:nvPr/>
+        </p:nvSpPr>
+        <p:spPr>
+          <a:xfrm>
+            <a:off x="685800" y="502920"/>
+            <a:ext cx="36576" cy="658368"/>
+          </a:xfrm>
+          <a:prstGeom prst="rect">
+            <a:avLst/>
+          </a:prstGeom>
+          <a:solidFill>
+            <a:srgbClr val="D9C089"/>
+          </a:solidFill>
+          <a:ln>
+            <a:noFill/>
+          </a:ln>
+        </p:spPr>
+        <p:style>
+          <a:lnRef idx="1">
+            <a:schemeClr val="accent1"/>
+          </a:lnRef>
+          <a:fillRef idx="3">
+            <a:schemeClr val="accent1"/>
+          </a:fillRef>
+          <a:effectRef idx="2">
+            <a:schemeClr val="accent1"/>
+          </a:effectRef>
+          <a:fontRef idx="minor">
+            <a:schemeClr val="lt1"/>
+          </a:fontRef>
+        </p:style>
+        <p:txBody>
+          <a:bodyPr rtlCol="0" anchor="ctr"/>
+          <a:lstStyle/>
+          <a:p>
+            <a:pPr algn="ctr"/>
+          </a:p>
+        </p:txBody>
+      </p:sp>
+      <p:sp>
+        <p:nvSpPr>
+          <p:cNvPr id="7" name="TextBox 6"/>
+          <p:cNvSpPr txBox="1"/>
+          <p:nvPr/>
+        </p:nvSpPr>
+        <p:spPr>
+          <a:xfrm>
+            <a:off x="813816" y="502920"/>
+            <a:ext cx="10634472" cy="685800"/>
+          </a:xfrm>
+          <a:prstGeom prst="rect">
+            <a:avLst/>
+          </a:prstGeom>
+          <a:noFill/>
+        </p:spPr>
+        <p:txBody>
+          <a:bodyPr wrap="square">
+            <a:spAutoFit/>
+          </a:bodyPr>
+          <a:lstStyle/>
+          <a:p>
+            <a:pPr algn="l"/>
+            <a:r>
+              <a:rPr sz="2400" b="1" i="0">
+                <a:solidFill>
+                  <a:srgbClr val="1F2C56"/>
+                </a:solidFill>
+                <a:latin typeface="Source Serif 4"/>
+              </a:rPr>
+              <a:t>Schritt 2: Hypothese formulieren</a:t>
+            </a:r>
+          </a:p>
+        </p:txBody>
+      </p:sp>
+      <p:sp>
+        <p:nvSpPr>
           <p:cNvPr id="8" name="TextBox 7"/>
           <p:cNvSpPr txBox="1"/>
           <p:nvPr/>
         </p:nvSpPr>
         <p:spPr>
           <a:xfrm>
-            <a:off x="609600" y="2851150"/>
-            <a:ext cx="10972800" cy="3448050"/>
+            <a:off x="685800" y="1417320"/>
+            <a:ext cx="10817352" cy="5029200"/>
           </a:xfrm>
           <a:prstGeom prst="rect">
             <a:avLst/>
@@ -7553,83 +8911,123 @@
         </p:spPr>
         <p:txBody>
           <a:bodyPr wrap="square">
-            <a:normAutofit/>
+            <a:spAutoFit/>
           </a:bodyPr>
           <a:lstStyle/>
+          <a:p>
+            <a:pPr>
+              <a:spcBef>
+                <a:spcPts val="400"/>
+              </a:spcBef>
+              <a:spcAft>
+                <a:spcPts val="200"/>
+              </a:spcAft>
+            </a:pPr>
+            <a:r>
+              <a:rPr sz="1200">
+                <a:solidFill>
+                  <a:srgbClr val="3D5466"/>
+                </a:solidFill>
+                <a:latin typeface="Arial"/>
+              </a:rPr>
+              <a:t>Eine Cross-Selling-Hypothese verknüpft einen beobachteten Kundenbedarf mit einem konkreten Lösungsansatz. Gutes Format:</a:t>
+            </a:r>
+          </a:p>
           <a:p>
             <a:pPr>
               <a:spcBef>
                 <a:spcPts val="600"/>
               </a:spcBef>
               <a:spcAft>
-                <a:spcPts val="600"/>
+                <a:spcPts val="200"/>
               </a:spcAft>
             </a:pPr>
             <a:r>
-              <a:rPr sz="1400">
-                <a:solidFill>
-                  <a:srgbClr val="191D2E"/>
-                </a:solidFill>
-                <a:latin typeface="Georgia"/>
+              <a:rPr sz="1200" i="1">
+                <a:solidFill>
+                  <a:srgbClr val="3D5466"/>
+                </a:solidFill>
+                <a:latin typeface="Arial"/>
               </a:rPr>
-              <a:t>–  1. Analyse: Kundenprofil + Bestandsübersicht → Lücken identifizieren</a:t>
-            </a:r>
-          </a:p>
-          <a:p>
-            <a:pPr>
-              <a:spcBef>
-                <a:spcPts val="600"/>
-              </a:spcBef>
-              <a:spcAft>
-                <a:spcPts val="600"/>
-              </a:spcAft>
-            </a:pPr>
-            <a:r>
-              <a:rPr sz="1400">
-                <a:solidFill>
-                  <a:srgbClr val="191D2E"/>
-                </a:solidFill>
-                <a:latin typeface="Georgia"/>
+              <a:t>→  „[Kunde] hat [Situation/Signal]. Ich vermute deshalb, dass er [Bedarf] hat – passend dazu wäre [Lösung/Verbundpartner]."</a:t>
+            </a:r>
+          </a:p>
+        </p:txBody>
+      </p:sp>
+      <p:sp>
+        <p:nvSpPr>
+          <p:cNvPr id="9" name="Rectangle 8"/>
+          <p:cNvSpPr/>
+          <p:nvPr/>
+        </p:nvSpPr>
+        <p:spPr>
+          <a:xfrm>
+            <a:off x="0" y="6510528"/>
+            <a:ext cx="12188952" cy="347472"/>
+          </a:xfrm>
+          <a:prstGeom prst="rect">
+            <a:avLst/>
+          </a:prstGeom>
+          <a:solidFill>
+            <a:srgbClr val="0A1937"/>
+          </a:solidFill>
+          <a:ln>
+            <a:noFill/>
+          </a:ln>
+        </p:spPr>
+        <p:style>
+          <a:lnRef idx="1">
+            <a:schemeClr val="accent1"/>
+          </a:lnRef>
+          <a:fillRef idx="3">
+            <a:schemeClr val="accent1"/>
+          </a:fillRef>
+          <a:effectRef idx="2">
+            <a:schemeClr val="accent1"/>
+          </a:effectRef>
+          <a:fontRef idx="minor">
+            <a:schemeClr val="lt1"/>
+          </a:fontRef>
+        </p:style>
+        <p:txBody>
+          <a:bodyPr rtlCol="0" anchor="ctr"/>
+          <a:lstStyle/>
+          <a:p>
+            <a:pPr algn="ctr"/>
+          </a:p>
+        </p:txBody>
+      </p:sp>
+      <p:sp>
+        <p:nvSpPr>
+          <p:cNvPr id="10" name="TextBox 9"/>
+          <p:cNvSpPr txBox="1"/>
+          <p:nvPr/>
+        </p:nvSpPr>
+        <p:spPr>
+          <a:xfrm>
+            <a:off x="685800" y="6583680"/>
+            <a:ext cx="6490411" cy="256032"/>
+          </a:xfrm>
+          <a:prstGeom prst="rect">
+            <a:avLst/>
+          </a:prstGeom>
+          <a:noFill/>
+        </p:spPr>
+        <p:txBody>
+          <a:bodyPr wrap="none">
+            <a:spAutoFit/>
+          </a:bodyPr>
+          <a:lstStyle/>
+          <a:p>
+            <a:pPr algn="l"/>
+            <a:r>
+              <a:rPr sz="700">
+                <a:solidFill>
+                  <a:srgbClr val="A0B4D2"/>
+                </a:solidFill>
+                <a:latin typeface="JetBrains Mono"/>
               </a:rPr>
-              <a:t>–  2. Hypothese: 'Welcher Bedarf könnte bestehen?' — nicht raten, sondern fragen</a:t>
-            </a:r>
-          </a:p>
-          <a:p>
-            <a:pPr>
-              <a:spcBef>
-                <a:spcPts val="600"/>
-              </a:spcBef>
-              <a:spcAft>
-                <a:spcPts val="600"/>
-              </a:spcAft>
-            </a:pPr>
-            <a:r>
-              <a:rPr sz="1400">
-                <a:solidFill>
-                  <a:srgbClr val="191D2E"/>
-                </a:solidFill>
-                <a:latin typeface="Georgia"/>
-              </a:rPr>
-              <a:t>–  3. Gespräch: SPIN-Fragen einsetzen — erst Problem, dann Lösung</a:t>
-            </a:r>
-          </a:p>
-          <a:p>
-            <a:pPr>
-              <a:spcBef>
-                <a:spcPts val="600"/>
-              </a:spcBef>
-              <a:spcAft>
-                <a:spcPts val="600"/>
-              </a:spcAft>
-            </a:pPr>
-            <a:r>
-              <a:rPr sz="1400">
-                <a:solidFill>
-                  <a:srgbClr val="191D2E"/>
-                </a:solidFill>
-                <a:latin typeface="Georgia"/>
-              </a:rPr>
-              <a:t>–  4. Dokumentation: Bedarfsdiagnose + nächste Schritte im CRM</a:t>
+              <a:t>Benedikt Zoller Coaching  ·  FKB Campus  ·  M13</a:t>
             </a:r>
           </a:p>
         </p:txBody>

--- a/public/downloads/praesentation/M13.pptx
+++ b/public/downloads/praesentation/M13.pptx
@@ -3259,7 +3259,42 @@
       </p:sp>
       <p:sp>
         <p:nvSpPr>
-          <p:cNvPr id="6" name="Rectangle 5"/>
+          <p:cNvPr id="6" name="TextBox 5"/>
+          <p:cNvSpPr txBox="1"/>
+          <p:nvPr/>
+        </p:nvSpPr>
+        <p:spPr>
+          <a:xfrm>
+            <a:off x="685800" y="3977639"/>
+            <a:ext cx="10817352" cy="731520"/>
+          </a:xfrm>
+          <a:prstGeom prst="rect">
+            <a:avLst/>
+          </a:prstGeom>
+          <a:noFill/>
+        </p:spPr>
+        <p:txBody>
+          <a:bodyPr wrap="square">
+            <a:spAutoFit/>
+          </a:bodyPr>
+          <a:lstStyle/>
+          <a:p>
+            <a:pPr algn="l"/>
+            <a:r>
+              <a:rPr sz="1900" b="0" i="1">
+                <a:solidFill>
+                  <a:srgbClr val="BECDE6"/>
+                </a:solidFill>
+                <a:latin typeface="Source Serif 4"/>
+              </a:rPr>
+              <a:t>Kundenpotenziale durch bedarfsorientiertes Cross-Selling und Wallet-Share-Analyse erschließen</a:t>
+            </a:r>
+          </a:p>
+        </p:txBody>
+      </p:sp>
+      <p:sp>
+        <p:nvSpPr>
+          <p:cNvPr id="7" name="Rectangle 6"/>
           <p:cNvSpPr/>
           <p:nvPr/>
         </p:nvSpPr>
@@ -3302,14 +3337,14 @@
       </p:sp>
       <p:sp>
         <p:nvSpPr>
-          <p:cNvPr id="7" name="TextBox 6"/>
+          <p:cNvPr id="8" name="TextBox 7"/>
           <p:cNvSpPr txBox="1"/>
           <p:nvPr/>
         </p:nvSpPr>
         <p:spPr>
           <a:xfrm>
             <a:off x="685800" y="5193792"/>
-            <a:ext cx="5408676" cy="201168"/>
+            <a:ext cx="3605784" cy="201168"/>
           </a:xfrm>
           <a:prstGeom prst="rect">
             <a:avLst/>
@@ -3330,21 +3365,21 @@
                 </a:solidFill>
                 <a:latin typeface="JetBrains Mono"/>
               </a:rPr>
-              <a:t>KOMPETENZSTUFE</a:t>
-            </a:r>
-          </a:p>
-        </p:txBody>
-      </p:sp>
-      <p:sp>
-        <p:nvSpPr>
-          <p:cNvPr id="8" name="TextBox 7"/>
+              <a:t>KOMPETENZFELD</a:t>
+            </a:r>
+          </a:p>
+        </p:txBody>
+      </p:sp>
+      <p:sp>
+        <p:nvSpPr>
+          <p:cNvPr id="9" name="TextBox 8"/>
           <p:cNvSpPr txBox="1"/>
           <p:nvPr/>
         </p:nvSpPr>
         <p:spPr>
           <a:xfrm>
             <a:off x="685800" y="5394960"/>
-            <a:ext cx="5408676" cy="320040"/>
+            <a:ext cx="3605784" cy="320040"/>
           </a:xfrm>
           <a:prstGeom prst="rect">
             <a:avLst/>
@@ -3365,21 +3400,21 @@
                 </a:solidFill>
                 <a:latin typeface="Arial"/>
               </a:rPr>
-              <a:t>Berater</a:t>
-            </a:r>
-          </a:p>
-        </p:txBody>
-      </p:sp>
-      <p:sp>
-        <p:nvSpPr>
-          <p:cNvPr id="9" name="TextBox 8"/>
+              <a:t>K-04 Vertrieb &amp; Ertragsoptimierung</a:t>
+            </a:r>
+          </a:p>
+        </p:txBody>
+      </p:sp>
+      <p:sp>
+        <p:nvSpPr>
+          <p:cNvPr id="10" name="TextBox 9"/>
           <p:cNvSpPr txBox="1"/>
           <p:nvPr/>
         </p:nvSpPr>
         <p:spPr>
           <a:xfrm>
-            <a:off x="6094476" y="5193792"/>
-            <a:ext cx="5408676" cy="201168"/>
+            <a:off x="4291584" y="5193792"/>
+            <a:ext cx="3605784" cy="201168"/>
           </a:xfrm>
           <a:prstGeom prst="rect">
             <a:avLst/>
@@ -3400,21 +3435,21 @@
                 </a:solidFill>
                 <a:latin typeface="JetBrains Mono"/>
               </a:rPr>
-              <a:t>VERSION</a:t>
-            </a:r>
-          </a:p>
-        </p:txBody>
-      </p:sp>
-      <p:sp>
-        <p:nvSpPr>
-          <p:cNvPr id="10" name="TextBox 9"/>
+              <a:t>KOMPETENZSTUFE</a:t>
+            </a:r>
+          </a:p>
+        </p:txBody>
+      </p:sp>
+      <p:sp>
+        <p:nvSpPr>
+          <p:cNvPr id="11" name="TextBox 10"/>
           <p:cNvSpPr txBox="1"/>
           <p:nvPr/>
         </p:nvSpPr>
         <p:spPr>
           <a:xfrm>
-            <a:off x="6094476" y="5394960"/>
-            <a:ext cx="5408676" cy="320040"/>
+            <a:off x="4291584" y="5394960"/>
+            <a:ext cx="3605784" cy="320040"/>
           </a:xfrm>
           <a:prstGeom prst="rect">
             <a:avLst/>
@@ -3435,6 +3470,76 @@
                 </a:solidFill>
                 <a:latin typeface="Arial"/>
               </a:rPr>
+              <a:t>Berater</a:t>
+            </a:r>
+          </a:p>
+        </p:txBody>
+      </p:sp>
+      <p:sp>
+        <p:nvSpPr>
+          <p:cNvPr id="12" name="TextBox 11"/>
+          <p:cNvSpPr txBox="1"/>
+          <p:nvPr/>
+        </p:nvSpPr>
+        <p:spPr>
+          <a:xfrm>
+            <a:off x="7897368" y="5193792"/>
+            <a:ext cx="3605784" cy="201168"/>
+          </a:xfrm>
+          <a:prstGeom prst="rect">
+            <a:avLst/>
+          </a:prstGeom>
+          <a:noFill/>
+        </p:spPr>
+        <p:txBody>
+          <a:bodyPr wrap="none">
+            <a:spAutoFit/>
+          </a:bodyPr>
+          <a:lstStyle/>
+          <a:p>
+            <a:pPr algn="l"/>
+            <a:r>
+              <a:rPr sz="700">
+                <a:solidFill>
+                  <a:srgbClr val="A0B4D2"/>
+                </a:solidFill>
+                <a:latin typeface="JetBrains Mono"/>
+              </a:rPr>
+              <a:t>VERSION</a:t>
+            </a:r>
+          </a:p>
+        </p:txBody>
+      </p:sp>
+      <p:sp>
+        <p:nvSpPr>
+          <p:cNvPr id="13" name="TextBox 12"/>
+          <p:cNvSpPr txBox="1"/>
+          <p:nvPr/>
+        </p:nvSpPr>
+        <p:spPr>
+          <a:xfrm>
+            <a:off x="7897368" y="5394960"/>
+            <a:ext cx="3605784" cy="320040"/>
+          </a:xfrm>
+          <a:prstGeom prst="rect">
+            <a:avLst/>
+          </a:prstGeom>
+          <a:noFill/>
+        </p:spPr>
+        <p:txBody>
+          <a:bodyPr wrap="square">
+            <a:spAutoFit/>
+          </a:bodyPr>
+          <a:lstStyle/>
+          <a:p>
+            <a:pPr algn="l"/>
+            <a:r>
+              <a:rPr sz="1100" b="0" i="0">
+                <a:solidFill>
+                  <a:srgbClr val="FFFFFF"/>
+                </a:solidFill>
+                <a:latin typeface="Arial"/>
+              </a:rPr>
               <a:t>v0.3</a:t>
             </a:r>
           </a:p>
@@ -3442,7 +3547,7 @@
       </p:sp>
       <p:sp>
         <p:nvSpPr>
-          <p:cNvPr id="11" name="Rectangle 10"/>
+          <p:cNvPr id="14" name="Rectangle 13"/>
           <p:cNvSpPr/>
           <p:nvPr/>
         </p:nvSpPr>
@@ -3485,7 +3590,7 @@
       </p:sp>
       <p:sp>
         <p:nvSpPr>
-          <p:cNvPr id="12" name="TextBox 11"/>
+          <p:cNvPr id="15" name="TextBox 14"/>
           <p:cNvSpPr txBox="1"/>
           <p:nvPr/>
         </p:nvSpPr>
@@ -3520,7 +3625,7 @@
       </p:sp>
       <p:sp>
         <p:nvSpPr>
-          <p:cNvPr id="13" name="TextBox 12"/>
+          <p:cNvPr id="16" name="TextBox 15"/>
           <p:cNvSpPr txBox="1"/>
           <p:nvPr/>
         </p:nvSpPr>
